--- a/docs/code_review_meeting_2026_05_07.pptx
+++ b/docs/code_review_meeting_2026_05_07.pptx
@@ -16,9 +16,15 @@
     <p:sldId id="264" r:id="rId10"/>
     <p:sldId id="265" r:id="rId11"/>
     <p:sldId id="266" r:id="rId12"/>
+    <p:sldId id="267" r:id="rId13"/>
+    <p:sldId id="268" r:id="rId14"/>
+    <p:sldId id="269" r:id="rId15"/>
+    <p:sldId id="270" r:id="rId16"/>
+    <p:sldId id="271" r:id="rId17"/>
+    <p:sldId id="272" r:id="rId18"/>
   </p:sldIdLst>
   <p:notesMasterIdLst>
-    <p:notesMasterId r:id="rId13"/>
+    <p:notesMasterId r:id="rId19"/>
   </p:notesMasterIdLst>
   <p:sldSz cx="12191695" cy="6858000"/>
   <p:notesSz cx="6858000" cy="12191695"/>
@@ -712,6 +718,534 @@
             <a:fld id="{F7021451-1387-4CA6-816F-3879F97B5CBC}" type="slidenum">
               <a:rPr lang="en-US"/>
               <a:t>11</a:t>
+            </a:fld>
+            <a:endParaRPr lang="en-US"/>
+          </a:p>
+        </p:txBody>
+      </p:sp>
+    </p:spTree>
+    <p:extLst>
+      <p:ext uri="{BB962C8B-B14F-4D97-AF65-F5344CB8AC3E}">
+        <p14:creationId xmlns:p14="http://schemas.microsoft.com/office/powerpoint/2010/main" val="1024086991"/>
+      </p:ext>
+    </p:extLst>
+  </p:cSld>
+  <p:clrMapOvr>
+    <a:masterClrMapping/>
+  </p:clrMapOvr>
+</p:notes>
+</file>
+
+<file path=ppt/notesSlides/notesSlide12.xml><?xml version="1.0" encoding="utf-8"?>
+<p:notes xmlns:a="http://schemas.openxmlformats.org/drawingml/2006/main" xmlns:r="http://schemas.openxmlformats.org/officeDocument/2006/relationships" xmlns:p="http://schemas.openxmlformats.org/presentationml/2006/main">
+  <p:cSld>
+    <p:spTree>
+      <p:nvGrpSpPr>
+        <p:cNvPr id="1" name=""/>
+        <p:cNvGrpSpPr/>
+        <p:nvPr/>
+      </p:nvGrpSpPr>
+      <p:grpSpPr>
+        <a:xfrm>
+          <a:off x="0" y="0"/>
+          <a:ext cx="0" cy="0"/>
+          <a:chOff x="0" y="0"/>
+          <a:chExt cx="0" cy="0"/>
+        </a:xfrm>
+      </p:grpSpPr>
+      <p:sp>
+        <p:nvSpPr>
+          <p:cNvPr id="2" name="Slide Image Placeholder 1"/>
+          <p:cNvSpPr>
+            <a:spLocks noGrp="1" noRot="1" noChangeAspect="1"/>
+          </p:cNvSpPr>
+          <p:nvPr>
+            <p:ph type="sldImg"/>
+          </p:nvPr>
+        </p:nvSpPr>
+        <p:spPr/>
+      </p:sp>
+      <p:sp>
+        <p:nvSpPr>
+          <p:cNvPr id="3" name="Notes Placeholder 2"/>
+          <p:cNvSpPr>
+            <a:spLocks noGrp="1"/>
+          </p:cNvSpPr>
+          <p:nvPr>
+            <p:ph type="body" idx="1"/>
+          </p:nvPr>
+        </p:nvSpPr>
+        <p:spPr/>
+        <p:txBody>
+          <a:bodyPr/>
+          <a:lstStyle/>
+          <a:p>
+            <a:r>
+              <a:rPr lang="en-US" dirty="0"/>
+              <a:t/>
+            </a:r>
+            <a:endParaRPr lang="en-US" dirty="0"/>
+          </a:p>
+        </p:txBody>
+      </p:sp>
+      <p:sp>
+        <p:nvSpPr>
+          <p:cNvPr id="4" name="Slide Number Placeholder 3"/>
+          <p:cNvSpPr>
+            <a:spLocks noGrp="1"/>
+          </p:cNvSpPr>
+          <p:nvPr>
+            <p:ph type="sldNum" sz="quarter" idx="10"/>
+          </p:nvPr>
+        </p:nvSpPr>
+        <p:spPr/>
+        <p:txBody>
+          <a:bodyPr/>
+          <a:lstStyle/>
+          <a:p>
+            <a:fld id="{F7021451-1387-4CA6-816F-3879F97B5CBC}" type="slidenum">
+              <a:rPr lang="en-US"/>
+              <a:t>12</a:t>
+            </a:fld>
+            <a:endParaRPr lang="en-US"/>
+          </a:p>
+        </p:txBody>
+      </p:sp>
+    </p:spTree>
+    <p:extLst>
+      <p:ext uri="{BB962C8B-B14F-4D97-AF65-F5344CB8AC3E}">
+        <p14:creationId xmlns:p14="http://schemas.microsoft.com/office/powerpoint/2010/main" val="1024086991"/>
+      </p:ext>
+    </p:extLst>
+  </p:cSld>
+  <p:clrMapOvr>
+    <a:masterClrMapping/>
+  </p:clrMapOvr>
+</p:notes>
+</file>
+
+<file path=ppt/notesSlides/notesSlide13.xml><?xml version="1.0" encoding="utf-8"?>
+<p:notes xmlns:a="http://schemas.openxmlformats.org/drawingml/2006/main" xmlns:r="http://schemas.openxmlformats.org/officeDocument/2006/relationships" xmlns:p="http://schemas.openxmlformats.org/presentationml/2006/main">
+  <p:cSld>
+    <p:spTree>
+      <p:nvGrpSpPr>
+        <p:cNvPr id="1" name=""/>
+        <p:cNvGrpSpPr/>
+        <p:nvPr/>
+      </p:nvGrpSpPr>
+      <p:grpSpPr>
+        <a:xfrm>
+          <a:off x="0" y="0"/>
+          <a:ext cx="0" cy="0"/>
+          <a:chOff x="0" y="0"/>
+          <a:chExt cx="0" cy="0"/>
+        </a:xfrm>
+      </p:grpSpPr>
+      <p:sp>
+        <p:nvSpPr>
+          <p:cNvPr id="2" name="Slide Image Placeholder 1"/>
+          <p:cNvSpPr>
+            <a:spLocks noGrp="1" noRot="1" noChangeAspect="1"/>
+          </p:cNvSpPr>
+          <p:nvPr>
+            <p:ph type="sldImg"/>
+          </p:nvPr>
+        </p:nvSpPr>
+        <p:spPr/>
+      </p:sp>
+      <p:sp>
+        <p:nvSpPr>
+          <p:cNvPr id="3" name="Notes Placeholder 2"/>
+          <p:cNvSpPr>
+            <a:spLocks noGrp="1"/>
+          </p:cNvSpPr>
+          <p:nvPr>
+            <p:ph type="body" idx="1"/>
+          </p:nvPr>
+        </p:nvSpPr>
+        <p:spPr/>
+        <p:txBody>
+          <a:bodyPr/>
+          <a:lstStyle/>
+          <a:p>
+            <a:r>
+              <a:rPr lang="en-US" dirty="0"/>
+              <a:t/>
+            </a:r>
+            <a:endParaRPr lang="en-US" dirty="0"/>
+          </a:p>
+        </p:txBody>
+      </p:sp>
+      <p:sp>
+        <p:nvSpPr>
+          <p:cNvPr id="4" name="Slide Number Placeholder 3"/>
+          <p:cNvSpPr>
+            <a:spLocks noGrp="1"/>
+          </p:cNvSpPr>
+          <p:nvPr>
+            <p:ph type="sldNum" sz="quarter" idx="10"/>
+          </p:nvPr>
+        </p:nvSpPr>
+        <p:spPr/>
+        <p:txBody>
+          <a:bodyPr/>
+          <a:lstStyle/>
+          <a:p>
+            <a:fld id="{F7021451-1387-4CA6-816F-3879F97B5CBC}" type="slidenum">
+              <a:rPr lang="en-US"/>
+              <a:t>13</a:t>
+            </a:fld>
+            <a:endParaRPr lang="en-US"/>
+          </a:p>
+        </p:txBody>
+      </p:sp>
+    </p:spTree>
+    <p:extLst>
+      <p:ext uri="{BB962C8B-B14F-4D97-AF65-F5344CB8AC3E}">
+        <p14:creationId xmlns:p14="http://schemas.microsoft.com/office/powerpoint/2010/main" val="1024086991"/>
+      </p:ext>
+    </p:extLst>
+  </p:cSld>
+  <p:clrMapOvr>
+    <a:masterClrMapping/>
+  </p:clrMapOvr>
+</p:notes>
+</file>
+
+<file path=ppt/notesSlides/notesSlide14.xml><?xml version="1.0" encoding="utf-8"?>
+<p:notes xmlns:a="http://schemas.openxmlformats.org/drawingml/2006/main" xmlns:r="http://schemas.openxmlformats.org/officeDocument/2006/relationships" xmlns:p="http://schemas.openxmlformats.org/presentationml/2006/main">
+  <p:cSld>
+    <p:spTree>
+      <p:nvGrpSpPr>
+        <p:cNvPr id="1" name=""/>
+        <p:cNvGrpSpPr/>
+        <p:nvPr/>
+      </p:nvGrpSpPr>
+      <p:grpSpPr>
+        <a:xfrm>
+          <a:off x="0" y="0"/>
+          <a:ext cx="0" cy="0"/>
+          <a:chOff x="0" y="0"/>
+          <a:chExt cx="0" cy="0"/>
+        </a:xfrm>
+      </p:grpSpPr>
+      <p:sp>
+        <p:nvSpPr>
+          <p:cNvPr id="2" name="Slide Image Placeholder 1"/>
+          <p:cNvSpPr>
+            <a:spLocks noGrp="1" noRot="1" noChangeAspect="1"/>
+          </p:cNvSpPr>
+          <p:nvPr>
+            <p:ph type="sldImg"/>
+          </p:nvPr>
+        </p:nvSpPr>
+        <p:spPr/>
+      </p:sp>
+      <p:sp>
+        <p:nvSpPr>
+          <p:cNvPr id="3" name="Notes Placeholder 2"/>
+          <p:cNvSpPr>
+            <a:spLocks noGrp="1"/>
+          </p:cNvSpPr>
+          <p:nvPr>
+            <p:ph type="body" idx="1"/>
+          </p:nvPr>
+        </p:nvSpPr>
+        <p:spPr/>
+        <p:txBody>
+          <a:bodyPr/>
+          <a:lstStyle/>
+          <a:p>
+            <a:r>
+              <a:rPr lang="en-US" dirty="0"/>
+              <a:t/>
+            </a:r>
+            <a:endParaRPr lang="en-US" dirty="0"/>
+          </a:p>
+        </p:txBody>
+      </p:sp>
+      <p:sp>
+        <p:nvSpPr>
+          <p:cNvPr id="4" name="Slide Number Placeholder 3"/>
+          <p:cNvSpPr>
+            <a:spLocks noGrp="1"/>
+          </p:cNvSpPr>
+          <p:nvPr>
+            <p:ph type="sldNum" sz="quarter" idx="10"/>
+          </p:nvPr>
+        </p:nvSpPr>
+        <p:spPr/>
+        <p:txBody>
+          <a:bodyPr/>
+          <a:lstStyle/>
+          <a:p>
+            <a:fld id="{F7021451-1387-4CA6-816F-3879F97B5CBC}" type="slidenum">
+              <a:rPr lang="en-US"/>
+              <a:t>14</a:t>
+            </a:fld>
+            <a:endParaRPr lang="en-US"/>
+          </a:p>
+        </p:txBody>
+      </p:sp>
+    </p:spTree>
+    <p:extLst>
+      <p:ext uri="{BB962C8B-B14F-4D97-AF65-F5344CB8AC3E}">
+        <p14:creationId xmlns:p14="http://schemas.microsoft.com/office/powerpoint/2010/main" val="1024086991"/>
+      </p:ext>
+    </p:extLst>
+  </p:cSld>
+  <p:clrMapOvr>
+    <a:masterClrMapping/>
+  </p:clrMapOvr>
+</p:notes>
+</file>
+
+<file path=ppt/notesSlides/notesSlide15.xml><?xml version="1.0" encoding="utf-8"?>
+<p:notes xmlns:a="http://schemas.openxmlformats.org/drawingml/2006/main" xmlns:r="http://schemas.openxmlformats.org/officeDocument/2006/relationships" xmlns:p="http://schemas.openxmlformats.org/presentationml/2006/main">
+  <p:cSld>
+    <p:spTree>
+      <p:nvGrpSpPr>
+        <p:cNvPr id="1" name=""/>
+        <p:cNvGrpSpPr/>
+        <p:nvPr/>
+      </p:nvGrpSpPr>
+      <p:grpSpPr>
+        <a:xfrm>
+          <a:off x="0" y="0"/>
+          <a:ext cx="0" cy="0"/>
+          <a:chOff x="0" y="0"/>
+          <a:chExt cx="0" cy="0"/>
+        </a:xfrm>
+      </p:grpSpPr>
+      <p:sp>
+        <p:nvSpPr>
+          <p:cNvPr id="2" name="Slide Image Placeholder 1"/>
+          <p:cNvSpPr>
+            <a:spLocks noGrp="1" noRot="1" noChangeAspect="1"/>
+          </p:cNvSpPr>
+          <p:nvPr>
+            <p:ph type="sldImg"/>
+          </p:nvPr>
+        </p:nvSpPr>
+        <p:spPr/>
+      </p:sp>
+      <p:sp>
+        <p:nvSpPr>
+          <p:cNvPr id="3" name="Notes Placeholder 2"/>
+          <p:cNvSpPr>
+            <a:spLocks noGrp="1"/>
+          </p:cNvSpPr>
+          <p:nvPr>
+            <p:ph type="body" idx="1"/>
+          </p:nvPr>
+        </p:nvSpPr>
+        <p:spPr/>
+        <p:txBody>
+          <a:bodyPr/>
+          <a:lstStyle/>
+          <a:p>
+            <a:r>
+              <a:rPr lang="en-US" dirty="0"/>
+              <a:t/>
+            </a:r>
+            <a:endParaRPr lang="en-US" dirty="0"/>
+          </a:p>
+        </p:txBody>
+      </p:sp>
+      <p:sp>
+        <p:nvSpPr>
+          <p:cNvPr id="4" name="Slide Number Placeholder 3"/>
+          <p:cNvSpPr>
+            <a:spLocks noGrp="1"/>
+          </p:cNvSpPr>
+          <p:nvPr>
+            <p:ph type="sldNum" sz="quarter" idx="10"/>
+          </p:nvPr>
+        </p:nvSpPr>
+        <p:spPr/>
+        <p:txBody>
+          <a:bodyPr/>
+          <a:lstStyle/>
+          <a:p>
+            <a:fld id="{F7021451-1387-4CA6-816F-3879F97B5CBC}" type="slidenum">
+              <a:rPr lang="en-US"/>
+              <a:t>15</a:t>
+            </a:fld>
+            <a:endParaRPr lang="en-US"/>
+          </a:p>
+        </p:txBody>
+      </p:sp>
+    </p:spTree>
+    <p:extLst>
+      <p:ext uri="{BB962C8B-B14F-4D97-AF65-F5344CB8AC3E}">
+        <p14:creationId xmlns:p14="http://schemas.microsoft.com/office/powerpoint/2010/main" val="1024086991"/>
+      </p:ext>
+    </p:extLst>
+  </p:cSld>
+  <p:clrMapOvr>
+    <a:masterClrMapping/>
+  </p:clrMapOvr>
+</p:notes>
+</file>
+
+<file path=ppt/notesSlides/notesSlide16.xml><?xml version="1.0" encoding="utf-8"?>
+<p:notes xmlns:a="http://schemas.openxmlformats.org/drawingml/2006/main" xmlns:r="http://schemas.openxmlformats.org/officeDocument/2006/relationships" xmlns:p="http://schemas.openxmlformats.org/presentationml/2006/main">
+  <p:cSld>
+    <p:spTree>
+      <p:nvGrpSpPr>
+        <p:cNvPr id="1" name=""/>
+        <p:cNvGrpSpPr/>
+        <p:nvPr/>
+      </p:nvGrpSpPr>
+      <p:grpSpPr>
+        <a:xfrm>
+          <a:off x="0" y="0"/>
+          <a:ext cx="0" cy="0"/>
+          <a:chOff x="0" y="0"/>
+          <a:chExt cx="0" cy="0"/>
+        </a:xfrm>
+      </p:grpSpPr>
+      <p:sp>
+        <p:nvSpPr>
+          <p:cNvPr id="2" name="Slide Image Placeholder 1"/>
+          <p:cNvSpPr>
+            <a:spLocks noGrp="1" noRot="1" noChangeAspect="1"/>
+          </p:cNvSpPr>
+          <p:nvPr>
+            <p:ph type="sldImg"/>
+          </p:nvPr>
+        </p:nvSpPr>
+        <p:spPr/>
+      </p:sp>
+      <p:sp>
+        <p:nvSpPr>
+          <p:cNvPr id="3" name="Notes Placeholder 2"/>
+          <p:cNvSpPr>
+            <a:spLocks noGrp="1"/>
+          </p:cNvSpPr>
+          <p:nvPr>
+            <p:ph type="body" idx="1"/>
+          </p:nvPr>
+        </p:nvSpPr>
+        <p:spPr/>
+        <p:txBody>
+          <a:bodyPr/>
+          <a:lstStyle/>
+          <a:p>
+            <a:r>
+              <a:rPr lang="en-US" dirty="0"/>
+              <a:t/>
+            </a:r>
+            <a:endParaRPr lang="en-US" dirty="0"/>
+          </a:p>
+        </p:txBody>
+      </p:sp>
+      <p:sp>
+        <p:nvSpPr>
+          <p:cNvPr id="4" name="Slide Number Placeholder 3"/>
+          <p:cNvSpPr>
+            <a:spLocks noGrp="1"/>
+          </p:cNvSpPr>
+          <p:nvPr>
+            <p:ph type="sldNum" sz="quarter" idx="10"/>
+          </p:nvPr>
+        </p:nvSpPr>
+        <p:spPr/>
+        <p:txBody>
+          <a:bodyPr/>
+          <a:lstStyle/>
+          <a:p>
+            <a:fld id="{F7021451-1387-4CA6-816F-3879F97B5CBC}" type="slidenum">
+              <a:rPr lang="en-US"/>
+              <a:t>16</a:t>
+            </a:fld>
+            <a:endParaRPr lang="en-US"/>
+          </a:p>
+        </p:txBody>
+      </p:sp>
+    </p:spTree>
+    <p:extLst>
+      <p:ext uri="{BB962C8B-B14F-4D97-AF65-F5344CB8AC3E}">
+        <p14:creationId xmlns:p14="http://schemas.microsoft.com/office/powerpoint/2010/main" val="1024086991"/>
+      </p:ext>
+    </p:extLst>
+  </p:cSld>
+  <p:clrMapOvr>
+    <a:masterClrMapping/>
+  </p:clrMapOvr>
+</p:notes>
+</file>
+
+<file path=ppt/notesSlides/notesSlide17.xml><?xml version="1.0" encoding="utf-8"?>
+<p:notes xmlns:a="http://schemas.openxmlformats.org/drawingml/2006/main" xmlns:r="http://schemas.openxmlformats.org/officeDocument/2006/relationships" xmlns:p="http://schemas.openxmlformats.org/presentationml/2006/main">
+  <p:cSld>
+    <p:spTree>
+      <p:nvGrpSpPr>
+        <p:cNvPr id="1" name=""/>
+        <p:cNvGrpSpPr/>
+        <p:nvPr/>
+      </p:nvGrpSpPr>
+      <p:grpSpPr>
+        <a:xfrm>
+          <a:off x="0" y="0"/>
+          <a:ext cx="0" cy="0"/>
+          <a:chOff x="0" y="0"/>
+          <a:chExt cx="0" cy="0"/>
+        </a:xfrm>
+      </p:grpSpPr>
+      <p:sp>
+        <p:nvSpPr>
+          <p:cNvPr id="2" name="Slide Image Placeholder 1"/>
+          <p:cNvSpPr>
+            <a:spLocks noGrp="1" noRot="1" noChangeAspect="1"/>
+          </p:cNvSpPr>
+          <p:nvPr>
+            <p:ph type="sldImg"/>
+          </p:nvPr>
+        </p:nvSpPr>
+        <p:spPr/>
+      </p:sp>
+      <p:sp>
+        <p:nvSpPr>
+          <p:cNvPr id="3" name="Notes Placeholder 2"/>
+          <p:cNvSpPr>
+            <a:spLocks noGrp="1"/>
+          </p:cNvSpPr>
+          <p:nvPr>
+            <p:ph type="body" idx="1"/>
+          </p:nvPr>
+        </p:nvSpPr>
+        <p:spPr/>
+        <p:txBody>
+          <a:bodyPr/>
+          <a:lstStyle/>
+          <a:p>
+            <a:r>
+              <a:rPr lang="en-US" dirty="0"/>
+              <a:t/>
+            </a:r>
+            <a:endParaRPr lang="en-US" dirty="0"/>
+          </a:p>
+        </p:txBody>
+      </p:sp>
+      <p:sp>
+        <p:nvSpPr>
+          <p:cNvPr id="4" name="Slide Number Placeholder 3"/>
+          <p:cNvSpPr>
+            <a:spLocks noGrp="1"/>
+          </p:cNvSpPr>
+          <p:nvPr>
+            <p:ph type="sldNum" sz="quarter" idx="10"/>
+          </p:nvPr>
+        </p:nvSpPr>
+        <p:spPr/>
+        <p:txBody>
+          <a:bodyPr/>
+          <a:lstStyle/>
+          <a:p>
+            <a:fld id="{F7021451-1387-4CA6-816F-3879F97B5CBC}" type="slidenum">
+              <a:rPr lang="en-US"/>
+              <a:t>17</a:t>
             </a:fld>
             <a:endParaRPr lang="en-US"/>
           </a:p>
@@ -4322,6 +4856,8353 @@
 </p:sld>
 </file>
 
+<file path=ppt/slides/slide12.xml><?xml version="1.0" encoding="utf-8"?>
+<p:sld xmlns:a="http://schemas.openxmlformats.org/drawingml/2006/main" xmlns:r="http://schemas.openxmlformats.org/officeDocument/2006/relationships" xmlns:p="http://schemas.openxmlformats.org/presentationml/2006/main">
+  <p:cSld name="Slide 12">
+    <p:bg>
+      <p:bgPr>
+        <a:solidFill>
+          <a:srgbClr val="FFFFFF"/>
+        </a:solidFill>
+      </p:bgPr>
+    </p:bg>
+    <p:spTree>
+      <p:nvGrpSpPr>
+        <p:cNvPr id="1" name=""/>
+        <p:cNvGrpSpPr/>
+        <p:nvPr/>
+      </p:nvGrpSpPr>
+      <p:grpSpPr>
+        <a:xfrm>
+          <a:off x="0" y="0"/>
+          <a:ext cx="0" cy="0"/>
+          <a:chOff x="0" y="0"/>
+          <a:chExt cx="0" cy="0"/>
+        </a:xfrm>
+      </p:grpSpPr>
+      <p:sp>
+        <p:nvSpPr>
+          <p:cNvPr id="2" name="Text 0"/>
+          <p:cNvSpPr/>
+          <p:nvPr/>
+        </p:nvSpPr>
+        <p:spPr>
+          <a:xfrm>
+            <a:off x="502920" y="256032"/>
+            <a:ext cx="2194560" cy="201168"/>
+          </a:xfrm>
+          <a:prstGeom prst="rect">
+            <a:avLst/>
+          </a:prstGeom>
+          <a:noFill/>
+          <a:ln/>
+        </p:spPr>
+        <p:txBody>
+          <a:bodyPr wrap="square" lIns="0" tIns="0" rIns="0" bIns="0" rtlCol="0" anchor="ctr"/>
+          <a:lstStyle/>
+          <a:p>
+            <a:pPr indent="0" marL="0">
+              <a:buNone/>
+            </a:pPr>
+            <a:r>
+              <a:rPr lang="en-US" sz="800" b="1" dirty="0">
+                <a:solidFill>
+                  <a:srgbClr val="2563EB"/>
+                </a:solidFill>
+                <a:latin typeface="Microsoft YaHei" pitchFamily="34" charset="0"/>
+                <a:ea typeface="Microsoft YaHei" pitchFamily="34" charset="-122"/>
+                <a:cs typeface="Microsoft YaHei" pitchFamily="34" charset="-120"/>
+              </a:rPr>
+              <a:t>SOURCE APPENDIX</a:t>
+            </a:r>
+            <a:endParaRPr lang="en-US" sz="800" dirty="0"/>
+          </a:p>
+        </p:txBody>
+      </p:sp>
+      <p:sp>
+        <p:nvSpPr>
+          <p:cNvPr id="3" name="Text 1"/>
+          <p:cNvSpPr/>
+          <p:nvPr/>
+        </p:nvSpPr>
+        <p:spPr>
+          <a:xfrm>
+            <a:off x="502920" y="530352"/>
+            <a:ext cx="9875520" cy="384048"/>
+          </a:xfrm>
+          <a:prstGeom prst="rect">
+            <a:avLst/>
+          </a:prstGeom>
+          <a:noFill/>
+          <a:ln/>
+        </p:spPr>
+        <p:txBody>
+          <a:bodyPr wrap="square" lIns="0" tIns="0" rIns="0" bIns="0" rtlCol="0" anchor="ctr">
+            <a:normAutofit/>
+          </a:bodyPr>
+          <a:lstStyle/>
+          <a:p>
+            <a:pPr indent="0" marL="0">
+              <a:buNone/>
+            </a:pPr>
+            <a:r>
+              <a:rPr lang="en-US" sz="2400" b="1" dirty="0">
+                <a:solidFill>
+                  <a:srgbClr val="172033"/>
+                </a:solidFill>
+                <a:latin typeface="Microsoft YaHei" pitchFamily="34" charset="0"/>
+                <a:ea typeface="Microsoft YaHei" pitchFamily="34" charset="-122"/>
+                <a:cs typeface="Microsoft YaHei" pitchFamily="34" charset="-120"/>
+              </a:rPr>
+              <a:t>Code review priorities: inspect by failure impact</a:t>
+            </a:r>
+            <a:endParaRPr lang="en-US" sz="2400" dirty="0"/>
+          </a:p>
+        </p:txBody>
+      </p:sp>
+      <p:sp>
+        <p:nvSpPr>
+          <p:cNvPr id="4" name="Shape 2"/>
+          <p:cNvSpPr/>
+          <p:nvPr/>
+        </p:nvSpPr>
+        <p:spPr>
+          <a:xfrm>
+            <a:off x="502920" y="1051560"/>
+            <a:ext cx="11155680" cy="0"/>
+          </a:xfrm>
+          <a:prstGeom prst="line">
+            <a:avLst/>
+          </a:prstGeom>
+          <a:noFill/>
+          <a:ln w="12700">
+            <a:solidFill>
+              <a:srgbClr val="D7DEE8"/>
+            </a:solidFill>
+            <a:prstDash val="solid"/>
+          </a:ln>
+        </p:spPr>
+      </p:sp>
+      <p:sp>
+        <p:nvSpPr>
+          <p:cNvPr id="5" name="Text 3"/>
+          <p:cNvSpPr/>
+          <p:nvPr/>
+        </p:nvSpPr>
+        <p:spPr>
+          <a:xfrm>
+            <a:off x="8229600" y="6446520"/>
+            <a:ext cx="3383280" cy="201168"/>
+          </a:xfrm>
+          <a:prstGeom prst="rect">
+            <a:avLst/>
+          </a:prstGeom>
+          <a:noFill/>
+          <a:ln/>
+        </p:spPr>
+        <p:txBody>
+          <a:bodyPr wrap="square" lIns="0" tIns="0" rIns="0" bIns="0" rtlCol="0" anchor="ctr"/>
+          <a:lstStyle/>
+          <a:p>
+            <a:pPr algn="r" indent="0" marL="0">
+              <a:buNone/>
+            </a:pPr>
+            <a:r>
+              <a:rPr lang="en-US" sz="750" dirty="0">
+                <a:solidFill>
+                  <a:srgbClr val="94A3B8"/>
+                </a:solidFill>
+              </a:rPr>
+              <a:t>2026-05-07 · CSI300 Competition Review</a:t>
+            </a:r>
+            <a:endParaRPr lang="en-US" sz="750" dirty="0"/>
+          </a:p>
+        </p:txBody>
+      </p:sp>
+      <p:graphicFrame>
+        <p:nvGraphicFramePr>
+          <p:cNvPr id="13" name="Table 0"/>
+          <p:cNvGraphicFramePr>
+            <a:graphicFrameLocks noGrp="1"/>
+          </p:cNvGraphicFramePr>
+          <p:nvPr>
+            <p:extLst>
+              <p:ext uri="{D42A27DB-BD31-4B8C-83A1-F6EECF244321}">
+                <p14:modId xmlns:p14="http://schemas.microsoft.com/office/powerpoint/2010/main" val="1579011935"/>
+              </p:ext>
+            </p:extLst>
+          </p:nvPr>
+        </p:nvGraphicFramePr>
+        <p:xfrm>
+          <a:off x="640080" y="1280160"/>
+          <a:ext cx="10927080" cy="4069080"/>
+        </p:xfrm>
+        <a:graphic>
+          <a:graphicData uri="http://schemas.openxmlformats.org/drawingml/2006/table">
+            <a:tbl>
+              <a:tblPr/>
+              <a:tblGrid>
+                <a:gridCol w="731520"/>
+                <a:gridCol w="1828800"/>
+                <a:gridCol w="3200400"/>
+                <a:gridCol w="4800600"/>
+              </a:tblGrid>
+              <a:tr h="678180">
+                <a:tc>
+                  <a:txBody>
+                    <a:bodyPr/>
+                    <a:lstStyle/>
+                    <a:p>
+                      <a:pPr indent="0" marL="0">
+                        <a:buNone/>
+                      </a:pPr>
+                      <a:r>
+                        <a:rPr lang="en-US" sz="820" b="1" dirty="0">
+                          <a:solidFill>
+                            <a:srgbClr val="172033"/>
+                          </a:solidFill>
+                          <a:latin typeface="Microsoft YaHei" pitchFamily="34" charset="0"/>
+                          <a:ea typeface="Microsoft YaHei" pitchFamily="34" charset="-122"/>
+                          <a:cs typeface="Microsoft YaHei" pitchFamily="34" charset="-120"/>
+                        </a:rPr>
+                        <a:t>Priority</a:t>
+                      </a:r>
+                      <a:endParaRPr lang="en-US" sz="820" dirty="0">
+                        <a:latin typeface="Microsoft YaHei" charset="0"/>
+                        <a:ea typeface="Microsoft YaHei" charset="0"/>
+                        <a:cs typeface="Microsoft YaHei" charset="0"/>
+                      </a:endParaRPr>
+                    </a:p>
+                  </a:txBody>
+                  <a:tcPr marL="54864" marR="54864" marT="54864" marB="54864" anchor="mid">
+                    <a:lnL w="6350" cap="flat" cmpd="sng" algn="ctr">
+                      <a:solidFill>
+                        <a:srgbClr val="D7DEE8"/>
+                      </a:solidFill>
+                      <a:prstDash val="solid"/>
+                      <a:round/>
+                      <a:headEnd type="none" w="med" len="med"/>
+                      <a:tailEnd type="none" w="med" len="med"/>
+                    </a:lnL>
+                    <a:lnR w="6350" cap="flat" cmpd="sng" algn="ctr">
+                      <a:solidFill>
+                        <a:srgbClr val="D7DEE8"/>
+                      </a:solidFill>
+                      <a:prstDash val="solid"/>
+                      <a:round/>
+                      <a:headEnd type="none" w="med" len="med"/>
+                      <a:tailEnd type="none" w="med" len="med"/>
+                    </a:lnR>
+                    <a:lnT w="6350" cap="flat" cmpd="sng" algn="ctr">
+                      <a:solidFill>
+                        <a:srgbClr val="D7DEE8"/>
+                      </a:solidFill>
+                      <a:prstDash val="solid"/>
+                      <a:round/>
+                      <a:headEnd type="none" w="med" len="med"/>
+                      <a:tailEnd type="none" w="med" len="med"/>
+                    </a:lnT>
+                    <a:lnB w="6350" cap="flat" cmpd="sng" algn="ctr">
+                      <a:solidFill>
+                        <a:srgbClr val="D7DEE8"/>
+                      </a:solidFill>
+                      <a:prstDash val="solid"/>
+                      <a:round/>
+                      <a:headEnd type="none" w="med" len="med"/>
+                      <a:tailEnd type="none" w="med" len="med"/>
+                    </a:lnB>
+                    <a:solidFill>
+                      <a:srgbClr val="E2E8F0"/>
+                    </a:solidFill>
+                  </a:tcPr>
+                </a:tc>
+                <a:tc>
+                  <a:txBody>
+                    <a:bodyPr/>
+                    <a:lstStyle/>
+                    <a:p>
+                      <a:pPr indent="0" marL="0">
+                        <a:buNone/>
+                      </a:pPr>
+                      <a:r>
+                        <a:rPr lang="en-US" sz="820" b="1" dirty="0">
+                          <a:solidFill>
+                            <a:srgbClr val="172033"/>
+                          </a:solidFill>
+                          <a:latin typeface="Microsoft YaHei" pitchFamily="34" charset="0"/>
+                          <a:ea typeface="Microsoft YaHei" pitchFamily="34" charset="-122"/>
+                          <a:cs typeface="Microsoft YaHei" pitchFamily="34" charset="-120"/>
+                        </a:rPr>
+                        <a:t>Area</a:t>
+                      </a:r>
+                      <a:endParaRPr lang="en-US" sz="820" dirty="0">
+                        <a:latin typeface="Microsoft YaHei" charset="0"/>
+                        <a:ea typeface="Microsoft YaHei" charset="0"/>
+                        <a:cs typeface="Microsoft YaHei" charset="0"/>
+                      </a:endParaRPr>
+                    </a:p>
+                  </a:txBody>
+                  <a:tcPr marL="54864" marR="54864" marT="54864" marB="54864" anchor="mid">
+                    <a:lnL w="6350" cap="flat" cmpd="sng" algn="ctr">
+                      <a:solidFill>
+                        <a:srgbClr val="D7DEE8"/>
+                      </a:solidFill>
+                      <a:prstDash val="solid"/>
+                      <a:round/>
+                      <a:headEnd type="none" w="med" len="med"/>
+                      <a:tailEnd type="none" w="med" len="med"/>
+                    </a:lnL>
+                    <a:lnR w="6350" cap="flat" cmpd="sng" algn="ctr">
+                      <a:solidFill>
+                        <a:srgbClr val="D7DEE8"/>
+                      </a:solidFill>
+                      <a:prstDash val="solid"/>
+                      <a:round/>
+                      <a:headEnd type="none" w="med" len="med"/>
+                      <a:tailEnd type="none" w="med" len="med"/>
+                    </a:lnR>
+                    <a:lnT w="6350" cap="flat" cmpd="sng" algn="ctr">
+                      <a:solidFill>
+                        <a:srgbClr val="D7DEE8"/>
+                      </a:solidFill>
+                      <a:prstDash val="solid"/>
+                      <a:round/>
+                      <a:headEnd type="none" w="med" len="med"/>
+                      <a:tailEnd type="none" w="med" len="med"/>
+                    </a:lnT>
+                    <a:lnB w="6350" cap="flat" cmpd="sng" algn="ctr">
+                      <a:solidFill>
+                        <a:srgbClr val="D7DEE8"/>
+                      </a:solidFill>
+                      <a:prstDash val="solid"/>
+                      <a:round/>
+                      <a:headEnd type="none" w="med" len="med"/>
+                      <a:tailEnd type="none" w="med" len="med"/>
+                    </a:lnB>
+                    <a:solidFill>
+                      <a:srgbClr val="E2E8F0"/>
+                    </a:solidFill>
+                  </a:tcPr>
+                </a:tc>
+                <a:tc>
+                  <a:txBody>
+                    <a:bodyPr/>
+                    <a:lstStyle/>
+                    <a:p>
+                      <a:pPr indent="0" marL="0">
+                        <a:buNone/>
+                      </a:pPr>
+                      <a:r>
+                        <a:rPr lang="en-US" sz="820" b="1" dirty="0">
+                          <a:solidFill>
+                            <a:srgbClr val="172033"/>
+                          </a:solidFill>
+                          <a:latin typeface="Microsoft YaHei" pitchFamily="34" charset="0"/>
+                          <a:ea typeface="Microsoft YaHei" pitchFamily="34" charset="-122"/>
+                          <a:cs typeface="Microsoft YaHei" pitchFamily="34" charset="-120"/>
+                        </a:rPr>
+                        <a:t>Source files</a:t>
+                      </a:r>
+                      <a:endParaRPr lang="en-US" sz="820" dirty="0">
+                        <a:latin typeface="Microsoft YaHei" charset="0"/>
+                        <a:ea typeface="Microsoft YaHei" charset="0"/>
+                        <a:cs typeface="Microsoft YaHei" charset="0"/>
+                      </a:endParaRPr>
+                    </a:p>
+                  </a:txBody>
+                  <a:tcPr marL="54864" marR="54864" marT="54864" marB="54864" anchor="mid">
+                    <a:lnL w="6350" cap="flat" cmpd="sng" algn="ctr">
+                      <a:solidFill>
+                        <a:srgbClr val="D7DEE8"/>
+                      </a:solidFill>
+                      <a:prstDash val="solid"/>
+                      <a:round/>
+                      <a:headEnd type="none" w="med" len="med"/>
+                      <a:tailEnd type="none" w="med" len="med"/>
+                    </a:lnL>
+                    <a:lnR w="6350" cap="flat" cmpd="sng" algn="ctr">
+                      <a:solidFill>
+                        <a:srgbClr val="D7DEE8"/>
+                      </a:solidFill>
+                      <a:prstDash val="solid"/>
+                      <a:round/>
+                      <a:headEnd type="none" w="med" len="med"/>
+                      <a:tailEnd type="none" w="med" len="med"/>
+                    </a:lnR>
+                    <a:lnT w="6350" cap="flat" cmpd="sng" algn="ctr">
+                      <a:solidFill>
+                        <a:srgbClr val="D7DEE8"/>
+                      </a:solidFill>
+                      <a:prstDash val="solid"/>
+                      <a:round/>
+                      <a:headEnd type="none" w="med" len="med"/>
+                      <a:tailEnd type="none" w="med" len="med"/>
+                    </a:lnT>
+                    <a:lnB w="6350" cap="flat" cmpd="sng" algn="ctr">
+                      <a:solidFill>
+                        <a:srgbClr val="D7DEE8"/>
+                      </a:solidFill>
+                      <a:prstDash val="solid"/>
+                      <a:round/>
+                      <a:headEnd type="none" w="med" len="med"/>
+                      <a:tailEnd type="none" w="med" len="med"/>
+                    </a:lnB>
+                    <a:solidFill>
+                      <a:srgbClr val="E2E8F0"/>
+                    </a:solidFill>
+                  </a:tcPr>
+                </a:tc>
+                <a:tc>
+                  <a:txBody>
+                    <a:bodyPr/>
+                    <a:lstStyle/>
+                    <a:p>
+                      <a:pPr indent="0" marL="0">
+                        <a:buNone/>
+                      </a:pPr>
+                      <a:r>
+                        <a:rPr lang="en-US" sz="820" b="1" dirty="0">
+                          <a:solidFill>
+                            <a:srgbClr val="172033"/>
+                          </a:solidFill>
+                          <a:latin typeface="Microsoft YaHei" pitchFamily="34" charset="0"/>
+                          <a:ea typeface="Microsoft YaHei" pitchFamily="34" charset="-122"/>
+                          <a:cs typeface="Microsoft YaHei" pitchFamily="34" charset="-120"/>
+                        </a:rPr>
+                        <a:t>Meeting question</a:t>
+                      </a:r>
+                      <a:endParaRPr lang="en-US" sz="820" dirty="0">
+                        <a:latin typeface="Microsoft YaHei" charset="0"/>
+                        <a:ea typeface="Microsoft YaHei" charset="0"/>
+                        <a:cs typeface="Microsoft YaHei" charset="0"/>
+                      </a:endParaRPr>
+                    </a:p>
+                  </a:txBody>
+                  <a:tcPr marL="54864" marR="54864" marT="54864" marB="54864" anchor="mid">
+                    <a:lnL w="6350" cap="flat" cmpd="sng" algn="ctr">
+                      <a:solidFill>
+                        <a:srgbClr val="D7DEE8"/>
+                      </a:solidFill>
+                      <a:prstDash val="solid"/>
+                      <a:round/>
+                      <a:headEnd type="none" w="med" len="med"/>
+                      <a:tailEnd type="none" w="med" len="med"/>
+                    </a:lnL>
+                    <a:lnR w="6350" cap="flat" cmpd="sng" algn="ctr">
+                      <a:solidFill>
+                        <a:srgbClr val="D7DEE8"/>
+                      </a:solidFill>
+                      <a:prstDash val="solid"/>
+                      <a:round/>
+                      <a:headEnd type="none" w="med" len="med"/>
+                      <a:tailEnd type="none" w="med" len="med"/>
+                    </a:lnR>
+                    <a:lnT w="6350" cap="flat" cmpd="sng" algn="ctr">
+                      <a:solidFill>
+                        <a:srgbClr val="D7DEE8"/>
+                      </a:solidFill>
+                      <a:prstDash val="solid"/>
+                      <a:round/>
+                      <a:headEnd type="none" w="med" len="med"/>
+                      <a:tailEnd type="none" w="med" len="med"/>
+                    </a:lnT>
+                    <a:lnB w="6350" cap="flat" cmpd="sng" algn="ctr">
+                      <a:solidFill>
+                        <a:srgbClr val="D7DEE8"/>
+                      </a:solidFill>
+                      <a:prstDash val="solid"/>
+                      <a:round/>
+                      <a:headEnd type="none" w="med" len="med"/>
+                      <a:tailEnd type="none" w="med" len="med"/>
+                    </a:lnB>
+                    <a:solidFill>
+                      <a:srgbClr val="E2E8F0"/>
+                    </a:solidFill>
+                  </a:tcPr>
+                </a:tc>
+              </a:tr>
+              <a:tr h="678180">
+                <a:tc>
+                  <a:txBody>
+                    <a:bodyPr/>
+                    <a:lstStyle/>
+                    <a:p>
+                      <a:pPr indent="0" marL="0">
+                        <a:buNone/>
+                      </a:pPr>
+                      <a:r>
+                        <a:rPr lang="en-US" sz="820" dirty="0">
+                          <a:solidFill>
+                            <a:srgbClr val="172033"/>
+                          </a:solidFill>
+                          <a:latin typeface="Microsoft YaHei" pitchFamily="34" charset="0"/>
+                          <a:ea typeface="Microsoft YaHei" pitchFamily="34" charset="-122"/>
+                          <a:cs typeface="Microsoft YaHei" pitchFamily="34" charset="-120"/>
+                        </a:rPr>
+                        <a:t>P0</a:t>
+                      </a:r>
+                      <a:endParaRPr lang="en-US" sz="820" dirty="0">
+                        <a:latin typeface="Microsoft YaHei" charset="0"/>
+                        <a:ea typeface="Microsoft YaHei" charset="0"/>
+                        <a:cs typeface="Microsoft YaHei" charset="0"/>
+                      </a:endParaRPr>
+                    </a:p>
+                  </a:txBody>
+                  <a:tcPr marL="54864" marR="54864" marT="54864" marB="54864" anchor="mid">
+                    <a:lnL w="6350" cap="flat" cmpd="sng" algn="ctr">
+                      <a:solidFill>
+                        <a:srgbClr val="D7DEE8"/>
+                      </a:solidFill>
+                      <a:prstDash val="solid"/>
+                      <a:round/>
+                      <a:headEnd type="none" w="med" len="med"/>
+                      <a:tailEnd type="none" w="med" len="med"/>
+                    </a:lnL>
+                    <a:lnR w="6350" cap="flat" cmpd="sng" algn="ctr">
+                      <a:solidFill>
+                        <a:srgbClr val="D7DEE8"/>
+                      </a:solidFill>
+                      <a:prstDash val="solid"/>
+                      <a:round/>
+                      <a:headEnd type="none" w="med" len="med"/>
+                      <a:tailEnd type="none" w="med" len="med"/>
+                    </a:lnR>
+                    <a:lnT w="6350" cap="flat" cmpd="sng" algn="ctr">
+                      <a:solidFill>
+                        <a:srgbClr val="D7DEE8"/>
+                      </a:solidFill>
+                      <a:prstDash val="solid"/>
+                      <a:round/>
+                      <a:headEnd type="none" w="med" len="med"/>
+                      <a:tailEnd type="none" w="med" len="med"/>
+                    </a:lnT>
+                    <a:lnB w="6350" cap="flat" cmpd="sng" algn="ctr">
+                      <a:solidFill>
+                        <a:srgbClr val="D7DEE8"/>
+                      </a:solidFill>
+                      <a:prstDash val="solid"/>
+                      <a:round/>
+                      <a:headEnd type="none" w="med" len="med"/>
+                      <a:tailEnd type="none" w="med" len="med"/>
+                    </a:lnB>
+                    <a:solidFill>
+                      <a:srgbClr val="FFFFFF"/>
+                    </a:solidFill>
+                  </a:tcPr>
+                </a:tc>
+                <a:tc>
+                  <a:txBody>
+                    <a:bodyPr/>
+                    <a:lstStyle/>
+                    <a:p>
+                      <a:pPr indent="0" marL="0">
+                        <a:buNone/>
+                      </a:pPr>
+                      <a:r>
+                        <a:rPr lang="en-US" sz="820" dirty="0">
+                          <a:solidFill>
+                            <a:srgbClr val="172033"/>
+                          </a:solidFill>
+                          <a:latin typeface="Microsoft YaHei" pitchFamily="34" charset="0"/>
+                          <a:ea typeface="Microsoft YaHei" pitchFamily="34" charset="-122"/>
+                          <a:cs typeface="Microsoft YaHei" pitchFamily="34" charset="-120"/>
+                        </a:rPr>
+                        <a:t>Latest T-date inference</a:t>
+                      </a:r>
+                      <a:endParaRPr lang="en-US" sz="820" dirty="0">
+                        <a:latin typeface="Microsoft YaHei" charset="0"/>
+                        <a:ea typeface="Microsoft YaHei" charset="0"/>
+                        <a:cs typeface="Microsoft YaHei" charset="0"/>
+                      </a:endParaRPr>
+                    </a:p>
+                  </a:txBody>
+                  <a:tcPr marL="54864" marR="54864" marT="54864" marB="54864" anchor="mid">
+                    <a:lnL w="6350" cap="flat" cmpd="sng" algn="ctr">
+                      <a:solidFill>
+                        <a:srgbClr val="D7DEE8"/>
+                      </a:solidFill>
+                      <a:prstDash val="solid"/>
+                      <a:round/>
+                      <a:headEnd type="none" w="med" len="med"/>
+                      <a:tailEnd type="none" w="med" len="med"/>
+                    </a:lnL>
+                    <a:lnR w="6350" cap="flat" cmpd="sng" algn="ctr">
+                      <a:solidFill>
+                        <a:srgbClr val="D7DEE8"/>
+                      </a:solidFill>
+                      <a:prstDash val="solid"/>
+                      <a:round/>
+                      <a:headEnd type="none" w="med" len="med"/>
+                      <a:tailEnd type="none" w="med" len="med"/>
+                    </a:lnR>
+                    <a:lnT w="6350" cap="flat" cmpd="sng" algn="ctr">
+                      <a:solidFill>
+                        <a:srgbClr val="D7DEE8"/>
+                      </a:solidFill>
+                      <a:prstDash val="solid"/>
+                      <a:round/>
+                      <a:headEnd type="none" w="med" len="med"/>
+                      <a:tailEnd type="none" w="med" len="med"/>
+                    </a:lnT>
+                    <a:lnB w="6350" cap="flat" cmpd="sng" algn="ctr">
+                      <a:solidFill>
+                        <a:srgbClr val="D7DEE8"/>
+                      </a:solidFill>
+                      <a:prstDash val="solid"/>
+                      <a:round/>
+                      <a:headEnd type="none" w="med" len="med"/>
+                      <a:tailEnd type="none" w="med" len="med"/>
+                    </a:lnB>
+                    <a:solidFill>
+                      <a:srgbClr val="FFFFFF"/>
+                    </a:solidFill>
+                  </a:tcPr>
+                </a:tc>
+                <a:tc>
+                  <a:txBody>
+                    <a:bodyPr/>
+                    <a:lstStyle/>
+                    <a:p>
+                      <a:pPr indent="0" marL="0">
+                        <a:buNone/>
+                      </a:pPr>
+                      <a:r>
+                        <a:rPr lang="en-US" sz="820" dirty="0">
+                          <a:solidFill>
+                            <a:srgbClr val="172033"/>
+                          </a:solidFill>
+                          <a:latin typeface="Microsoft YaHei" pitchFamily="34" charset="0"/>
+                          <a:ea typeface="Microsoft YaHei" pitchFamily="34" charset="-122"/>
+                          <a:cs typeface="Microsoft YaHei" pitchFamily="34" charset="-120"/>
+                        </a:rPr>
+                        <a:t>src/models/deep_sequence.py</a:t>
+                      </a:r>
+                      <a:endParaRPr lang="en-US" sz="820" dirty="0">
+                        <a:latin typeface="Microsoft YaHei" charset="0"/>
+                        <a:ea typeface="Microsoft YaHei" charset="0"/>
+                        <a:cs typeface="Microsoft YaHei" charset="0"/>
+                      </a:endParaRPr>
+                    </a:p>
+                    <a:p>
+                      <a:pPr indent="0" marL="0">
+                        <a:buNone/>
+                      </a:pPr>
+                      <a:r>
+                        <a:rPr lang="en-US" sz="820" dirty="0">
+                          <a:solidFill>
+                            <a:srgbClr val="172033"/>
+                          </a:solidFill>
+                          <a:latin typeface="Microsoft YaHei" pitchFamily="34" charset="0"/>
+                          <a:ea typeface="Microsoft YaHei" pitchFamily="34" charset="-122"/>
+                          <a:cs typeface="Microsoft YaHei" pitchFamily="34" charset="-120"/>
+                        </a:rPr>
+                        <a:t>scripts/train_master_baseline.py</a:t>
+                      </a:r>
+                      <a:endParaRPr lang="en-US" sz="820" dirty="0">
+                        <a:latin typeface="Microsoft YaHei" charset="0"/>
+                        <a:ea typeface="Microsoft YaHei" charset="0"/>
+                        <a:cs typeface="Microsoft YaHei" charset="0"/>
+                      </a:endParaRPr>
+                    </a:p>
+                  </a:txBody>
+                  <a:tcPr marL="54864" marR="54864" marT="54864" marB="54864" anchor="mid">
+                    <a:lnL w="6350" cap="flat" cmpd="sng" algn="ctr">
+                      <a:solidFill>
+                        <a:srgbClr val="D7DEE8"/>
+                      </a:solidFill>
+                      <a:prstDash val="solid"/>
+                      <a:round/>
+                      <a:headEnd type="none" w="med" len="med"/>
+                      <a:tailEnd type="none" w="med" len="med"/>
+                    </a:lnL>
+                    <a:lnR w="6350" cap="flat" cmpd="sng" algn="ctr">
+                      <a:solidFill>
+                        <a:srgbClr val="D7DEE8"/>
+                      </a:solidFill>
+                      <a:prstDash val="solid"/>
+                      <a:round/>
+                      <a:headEnd type="none" w="med" len="med"/>
+                      <a:tailEnd type="none" w="med" len="med"/>
+                    </a:lnR>
+                    <a:lnT w="6350" cap="flat" cmpd="sng" algn="ctr">
+                      <a:solidFill>
+                        <a:srgbClr val="D7DEE8"/>
+                      </a:solidFill>
+                      <a:prstDash val="solid"/>
+                      <a:round/>
+                      <a:headEnd type="none" w="med" len="med"/>
+                      <a:tailEnd type="none" w="med" len="med"/>
+                    </a:lnT>
+                    <a:lnB w="6350" cap="flat" cmpd="sng" algn="ctr">
+                      <a:solidFill>
+                        <a:srgbClr val="D7DEE8"/>
+                      </a:solidFill>
+                      <a:prstDash val="solid"/>
+                      <a:round/>
+                      <a:headEnd type="none" w="med" len="med"/>
+                      <a:tailEnd type="none" w="med" len="med"/>
+                    </a:lnB>
+                    <a:solidFill>
+                      <a:srgbClr val="FFFFFF"/>
+                    </a:solidFill>
+                  </a:tcPr>
+                </a:tc>
+                <a:tc>
+                  <a:txBody>
+                    <a:bodyPr/>
+                    <a:lstStyle/>
+                    <a:p>
+                      <a:pPr indent="0" marL="0">
+                        <a:buNone/>
+                      </a:pPr>
+                      <a:r>
+                        <a:rPr lang="en-US" sz="820" dirty="0">
+                          <a:solidFill>
+                            <a:srgbClr val="172033"/>
+                          </a:solidFill>
+                          <a:latin typeface="Microsoft YaHei" pitchFamily="34" charset="0"/>
+                          <a:ea typeface="Microsoft YaHei" pitchFamily="34" charset="-122"/>
+                          <a:cs typeface="Microsoft YaHei" pitchFamily="34" charset="-120"/>
+                        </a:rPr>
+                        <a:t>Can result.csv ever be generated from the last labeled validation day again?</a:t>
+                      </a:r>
+                      <a:endParaRPr lang="en-US" sz="820" dirty="0">
+                        <a:latin typeface="Microsoft YaHei" charset="0"/>
+                        <a:ea typeface="Microsoft YaHei" charset="0"/>
+                        <a:cs typeface="Microsoft YaHei" charset="0"/>
+                      </a:endParaRPr>
+                    </a:p>
+                  </a:txBody>
+                  <a:tcPr marL="54864" marR="54864" marT="54864" marB="54864" anchor="mid">
+                    <a:lnL w="6350" cap="flat" cmpd="sng" algn="ctr">
+                      <a:solidFill>
+                        <a:srgbClr val="D7DEE8"/>
+                      </a:solidFill>
+                      <a:prstDash val="solid"/>
+                      <a:round/>
+                      <a:headEnd type="none" w="med" len="med"/>
+                      <a:tailEnd type="none" w="med" len="med"/>
+                    </a:lnL>
+                    <a:lnR w="6350" cap="flat" cmpd="sng" algn="ctr">
+                      <a:solidFill>
+                        <a:srgbClr val="D7DEE8"/>
+                      </a:solidFill>
+                      <a:prstDash val="solid"/>
+                      <a:round/>
+                      <a:headEnd type="none" w="med" len="med"/>
+                      <a:tailEnd type="none" w="med" len="med"/>
+                    </a:lnR>
+                    <a:lnT w="6350" cap="flat" cmpd="sng" algn="ctr">
+                      <a:solidFill>
+                        <a:srgbClr val="D7DEE8"/>
+                      </a:solidFill>
+                      <a:prstDash val="solid"/>
+                      <a:round/>
+                      <a:headEnd type="none" w="med" len="med"/>
+                      <a:tailEnd type="none" w="med" len="med"/>
+                    </a:lnT>
+                    <a:lnB w="6350" cap="flat" cmpd="sng" algn="ctr">
+                      <a:solidFill>
+                        <a:srgbClr val="D7DEE8"/>
+                      </a:solidFill>
+                      <a:prstDash val="solid"/>
+                      <a:round/>
+                      <a:headEnd type="none" w="med" len="med"/>
+                      <a:tailEnd type="none" w="med" len="med"/>
+                    </a:lnB>
+                    <a:solidFill>
+                      <a:srgbClr val="FFFFFF"/>
+                    </a:solidFill>
+                  </a:tcPr>
+                </a:tc>
+              </a:tr>
+              <a:tr h="678180">
+                <a:tc>
+                  <a:txBody>
+                    <a:bodyPr/>
+                    <a:lstStyle/>
+                    <a:p>
+                      <a:pPr indent="0" marL="0">
+                        <a:buNone/>
+                      </a:pPr>
+                      <a:r>
+                        <a:rPr lang="en-US" sz="820" dirty="0">
+                          <a:solidFill>
+                            <a:srgbClr val="172033"/>
+                          </a:solidFill>
+                          <a:latin typeface="Microsoft YaHei" pitchFamily="34" charset="0"/>
+                          <a:ea typeface="Microsoft YaHei" pitchFamily="34" charset="-122"/>
+                          <a:cs typeface="Microsoft YaHei" pitchFamily="34" charset="-120"/>
+                        </a:rPr>
+                        <a:t>P1</a:t>
+                      </a:r>
+                      <a:endParaRPr lang="en-US" sz="820" dirty="0">
+                        <a:latin typeface="Microsoft YaHei" charset="0"/>
+                        <a:ea typeface="Microsoft YaHei" charset="0"/>
+                        <a:cs typeface="Microsoft YaHei" charset="0"/>
+                      </a:endParaRPr>
+                    </a:p>
+                  </a:txBody>
+                  <a:tcPr marL="54864" marR="54864" marT="54864" marB="54864" anchor="mid">
+                    <a:lnL w="6350" cap="flat" cmpd="sng" algn="ctr">
+                      <a:solidFill>
+                        <a:srgbClr val="D7DEE8"/>
+                      </a:solidFill>
+                      <a:prstDash val="solid"/>
+                      <a:round/>
+                      <a:headEnd type="none" w="med" len="med"/>
+                      <a:tailEnd type="none" w="med" len="med"/>
+                    </a:lnL>
+                    <a:lnR w="6350" cap="flat" cmpd="sng" algn="ctr">
+                      <a:solidFill>
+                        <a:srgbClr val="D7DEE8"/>
+                      </a:solidFill>
+                      <a:prstDash val="solid"/>
+                      <a:round/>
+                      <a:headEnd type="none" w="med" len="med"/>
+                      <a:tailEnd type="none" w="med" len="med"/>
+                    </a:lnR>
+                    <a:lnT w="6350" cap="flat" cmpd="sng" algn="ctr">
+                      <a:solidFill>
+                        <a:srgbClr val="D7DEE8"/>
+                      </a:solidFill>
+                      <a:prstDash val="solid"/>
+                      <a:round/>
+                      <a:headEnd type="none" w="med" len="med"/>
+                      <a:tailEnd type="none" w="med" len="med"/>
+                    </a:lnT>
+                    <a:lnB w="6350" cap="flat" cmpd="sng" algn="ctr">
+                      <a:solidFill>
+                        <a:srgbClr val="D7DEE8"/>
+                      </a:solidFill>
+                      <a:prstDash val="solid"/>
+                      <a:round/>
+                      <a:headEnd type="none" w="med" len="med"/>
+                      <a:tailEnd type="none" w="med" len="med"/>
+                    </a:lnB>
+                    <a:solidFill>
+                      <a:srgbClr val="FFFFFF"/>
+                    </a:solidFill>
+                  </a:tcPr>
+                </a:tc>
+                <a:tc>
+                  <a:txBody>
+                    <a:bodyPr/>
+                    <a:lstStyle/>
+                    <a:p>
+                      <a:pPr indent="0" marL="0">
+                        <a:buNone/>
+                      </a:pPr>
+                      <a:r>
+                        <a:rPr lang="en-US" sz="820" dirty="0">
+                          <a:solidFill>
+                            <a:srgbClr val="172033"/>
+                          </a:solidFill>
+                          <a:latin typeface="Microsoft YaHei" pitchFamily="34" charset="0"/>
+                          <a:ea typeface="Microsoft YaHei" pitchFamily="34" charset="-122"/>
+                          <a:cs typeface="Microsoft YaHei" pitchFamily="34" charset="-120"/>
+                        </a:rPr>
+                        <a:t>Portfolio risk gate</a:t>
+                      </a:r>
+                      <a:endParaRPr lang="en-US" sz="820" dirty="0">
+                        <a:latin typeface="Microsoft YaHei" charset="0"/>
+                        <a:ea typeface="Microsoft YaHei" charset="0"/>
+                        <a:cs typeface="Microsoft YaHei" charset="0"/>
+                      </a:endParaRPr>
+                    </a:p>
+                  </a:txBody>
+                  <a:tcPr marL="54864" marR="54864" marT="54864" marB="54864" anchor="mid">
+                    <a:lnL w="6350" cap="flat" cmpd="sng" algn="ctr">
+                      <a:solidFill>
+                        <a:srgbClr val="D7DEE8"/>
+                      </a:solidFill>
+                      <a:prstDash val="solid"/>
+                      <a:round/>
+                      <a:headEnd type="none" w="med" len="med"/>
+                      <a:tailEnd type="none" w="med" len="med"/>
+                    </a:lnL>
+                    <a:lnR w="6350" cap="flat" cmpd="sng" algn="ctr">
+                      <a:solidFill>
+                        <a:srgbClr val="D7DEE8"/>
+                      </a:solidFill>
+                      <a:prstDash val="solid"/>
+                      <a:round/>
+                      <a:headEnd type="none" w="med" len="med"/>
+                      <a:tailEnd type="none" w="med" len="med"/>
+                    </a:lnR>
+                    <a:lnT w="6350" cap="flat" cmpd="sng" algn="ctr">
+                      <a:solidFill>
+                        <a:srgbClr val="D7DEE8"/>
+                      </a:solidFill>
+                      <a:prstDash val="solid"/>
+                      <a:round/>
+                      <a:headEnd type="none" w="med" len="med"/>
+                      <a:tailEnd type="none" w="med" len="med"/>
+                    </a:lnT>
+                    <a:lnB w="6350" cap="flat" cmpd="sng" algn="ctr">
+                      <a:solidFill>
+                        <a:srgbClr val="D7DEE8"/>
+                      </a:solidFill>
+                      <a:prstDash val="solid"/>
+                      <a:round/>
+                      <a:headEnd type="none" w="med" len="med"/>
+                      <a:tailEnd type="none" w="med" len="med"/>
+                    </a:lnB>
+                    <a:solidFill>
+                      <a:srgbClr val="FFFFFF"/>
+                    </a:solidFill>
+                  </a:tcPr>
+                </a:tc>
+                <a:tc>
+                  <a:txBody>
+                    <a:bodyPr/>
+                    <a:lstStyle/>
+                    <a:p>
+                      <a:pPr indent="0" marL="0">
+                        <a:buNone/>
+                      </a:pPr>
+                      <a:r>
+                        <a:rPr lang="en-US" sz="820" dirty="0">
+                          <a:solidFill>
+                            <a:srgbClr val="172033"/>
+                          </a:solidFill>
+                          <a:latin typeface="Microsoft YaHei" pitchFamily="34" charset="0"/>
+                          <a:ea typeface="Microsoft YaHei" pitchFamily="34" charset="-122"/>
+                          <a:cs typeface="Microsoft YaHei" pitchFamily="34" charset="-120"/>
+                        </a:rPr>
+                        <a:t>src/portfolio/construct.py</a:t>
+                      </a:r>
+                      <a:endParaRPr lang="en-US" sz="820" dirty="0">
+                        <a:latin typeface="Microsoft YaHei" charset="0"/>
+                        <a:ea typeface="Microsoft YaHei" charset="0"/>
+                        <a:cs typeface="Microsoft YaHei" charset="0"/>
+                      </a:endParaRPr>
+                    </a:p>
+                  </a:txBody>
+                  <a:tcPr marL="54864" marR="54864" marT="54864" marB="54864" anchor="mid">
+                    <a:lnL w="6350" cap="flat" cmpd="sng" algn="ctr">
+                      <a:solidFill>
+                        <a:srgbClr val="D7DEE8"/>
+                      </a:solidFill>
+                      <a:prstDash val="solid"/>
+                      <a:round/>
+                      <a:headEnd type="none" w="med" len="med"/>
+                      <a:tailEnd type="none" w="med" len="med"/>
+                    </a:lnL>
+                    <a:lnR w="6350" cap="flat" cmpd="sng" algn="ctr">
+                      <a:solidFill>
+                        <a:srgbClr val="D7DEE8"/>
+                      </a:solidFill>
+                      <a:prstDash val="solid"/>
+                      <a:round/>
+                      <a:headEnd type="none" w="med" len="med"/>
+                      <a:tailEnd type="none" w="med" len="med"/>
+                    </a:lnR>
+                    <a:lnT w="6350" cap="flat" cmpd="sng" algn="ctr">
+                      <a:solidFill>
+                        <a:srgbClr val="D7DEE8"/>
+                      </a:solidFill>
+                      <a:prstDash val="solid"/>
+                      <a:round/>
+                      <a:headEnd type="none" w="med" len="med"/>
+                      <a:tailEnd type="none" w="med" len="med"/>
+                    </a:lnT>
+                    <a:lnB w="6350" cap="flat" cmpd="sng" algn="ctr">
+                      <a:solidFill>
+                        <a:srgbClr val="D7DEE8"/>
+                      </a:solidFill>
+                      <a:prstDash val="solid"/>
+                      <a:round/>
+                      <a:headEnd type="none" w="med" len="med"/>
+                      <a:tailEnd type="none" w="med" len="med"/>
+                    </a:lnB>
+                    <a:solidFill>
+                      <a:srgbClr val="FFFFFF"/>
+                    </a:solidFill>
+                  </a:tcPr>
+                </a:tc>
+                <a:tc>
+                  <a:txBody>
+                    <a:bodyPr/>
+                    <a:lstStyle/>
+                    <a:p>
+                      <a:pPr indent="0" marL="0">
+                        <a:buNone/>
+                      </a:pPr>
+                      <a:r>
+                        <a:rPr lang="en-US" sz="820" dirty="0">
+                          <a:solidFill>
+                            <a:srgbClr val="172033"/>
+                          </a:solidFill>
+                          <a:latin typeface="Microsoft YaHei" pitchFamily="34" charset="0"/>
+                          <a:ea typeface="Microsoft YaHei" pitchFamily="34" charset="-122"/>
+                          <a:cs typeface="Microsoft YaHei" pitchFamily="34" charset="-120"/>
+                        </a:rPr>
+                        <a:t>When should Top1 be allowed, capped, or downgraded to Top2/confidence?</a:t>
+                      </a:r>
+                      <a:endParaRPr lang="en-US" sz="820" dirty="0">
+                        <a:latin typeface="Microsoft YaHei" charset="0"/>
+                        <a:ea typeface="Microsoft YaHei" charset="0"/>
+                        <a:cs typeface="Microsoft YaHei" charset="0"/>
+                      </a:endParaRPr>
+                    </a:p>
+                  </a:txBody>
+                  <a:tcPr marL="54864" marR="54864" marT="54864" marB="54864" anchor="mid">
+                    <a:lnL w="6350" cap="flat" cmpd="sng" algn="ctr">
+                      <a:solidFill>
+                        <a:srgbClr val="D7DEE8"/>
+                      </a:solidFill>
+                      <a:prstDash val="solid"/>
+                      <a:round/>
+                      <a:headEnd type="none" w="med" len="med"/>
+                      <a:tailEnd type="none" w="med" len="med"/>
+                    </a:lnL>
+                    <a:lnR w="6350" cap="flat" cmpd="sng" algn="ctr">
+                      <a:solidFill>
+                        <a:srgbClr val="D7DEE8"/>
+                      </a:solidFill>
+                      <a:prstDash val="solid"/>
+                      <a:round/>
+                      <a:headEnd type="none" w="med" len="med"/>
+                      <a:tailEnd type="none" w="med" len="med"/>
+                    </a:lnR>
+                    <a:lnT w="6350" cap="flat" cmpd="sng" algn="ctr">
+                      <a:solidFill>
+                        <a:srgbClr val="D7DEE8"/>
+                      </a:solidFill>
+                      <a:prstDash val="solid"/>
+                      <a:round/>
+                      <a:headEnd type="none" w="med" len="med"/>
+                      <a:tailEnd type="none" w="med" len="med"/>
+                    </a:lnT>
+                    <a:lnB w="6350" cap="flat" cmpd="sng" algn="ctr">
+                      <a:solidFill>
+                        <a:srgbClr val="D7DEE8"/>
+                      </a:solidFill>
+                      <a:prstDash val="solid"/>
+                      <a:round/>
+                      <a:headEnd type="none" w="med" len="med"/>
+                      <a:tailEnd type="none" w="med" len="med"/>
+                    </a:lnB>
+                    <a:solidFill>
+                      <a:srgbClr val="FFFFFF"/>
+                    </a:solidFill>
+                  </a:tcPr>
+                </a:tc>
+              </a:tr>
+              <a:tr h="678180">
+                <a:tc>
+                  <a:txBody>
+                    <a:bodyPr/>
+                    <a:lstStyle/>
+                    <a:p>
+                      <a:pPr indent="0" marL="0">
+                        <a:buNone/>
+                      </a:pPr>
+                      <a:r>
+                        <a:rPr lang="en-US" sz="820" dirty="0">
+                          <a:solidFill>
+                            <a:srgbClr val="172033"/>
+                          </a:solidFill>
+                          <a:latin typeface="Microsoft YaHei" pitchFamily="34" charset="0"/>
+                          <a:ea typeface="Microsoft YaHei" pitchFamily="34" charset="-122"/>
+                          <a:cs typeface="Microsoft YaHei" pitchFamily="34" charset="-120"/>
+                        </a:rPr>
+                        <a:t>P1</a:t>
+                      </a:r>
+                      <a:endParaRPr lang="en-US" sz="820" dirty="0">
+                        <a:latin typeface="Microsoft YaHei" charset="0"/>
+                        <a:ea typeface="Microsoft YaHei" charset="0"/>
+                        <a:cs typeface="Microsoft YaHei" charset="0"/>
+                      </a:endParaRPr>
+                    </a:p>
+                  </a:txBody>
+                  <a:tcPr marL="54864" marR="54864" marT="54864" marB="54864" anchor="mid">
+                    <a:lnL w="6350" cap="flat" cmpd="sng" algn="ctr">
+                      <a:solidFill>
+                        <a:srgbClr val="D7DEE8"/>
+                      </a:solidFill>
+                      <a:prstDash val="solid"/>
+                      <a:round/>
+                      <a:headEnd type="none" w="med" len="med"/>
+                      <a:tailEnd type="none" w="med" len="med"/>
+                    </a:lnL>
+                    <a:lnR w="6350" cap="flat" cmpd="sng" algn="ctr">
+                      <a:solidFill>
+                        <a:srgbClr val="D7DEE8"/>
+                      </a:solidFill>
+                      <a:prstDash val="solid"/>
+                      <a:round/>
+                      <a:headEnd type="none" w="med" len="med"/>
+                      <a:tailEnd type="none" w="med" len="med"/>
+                    </a:lnR>
+                    <a:lnT w="6350" cap="flat" cmpd="sng" algn="ctr">
+                      <a:solidFill>
+                        <a:srgbClr val="D7DEE8"/>
+                      </a:solidFill>
+                      <a:prstDash val="solid"/>
+                      <a:round/>
+                      <a:headEnd type="none" w="med" len="med"/>
+                      <a:tailEnd type="none" w="med" len="med"/>
+                    </a:lnT>
+                    <a:lnB w="6350" cap="flat" cmpd="sng" algn="ctr">
+                      <a:solidFill>
+                        <a:srgbClr val="D7DEE8"/>
+                      </a:solidFill>
+                      <a:prstDash val="solid"/>
+                      <a:round/>
+                      <a:headEnd type="none" w="med" len="med"/>
+                      <a:tailEnd type="none" w="med" len="med"/>
+                    </a:lnB>
+                    <a:solidFill>
+                      <a:srgbClr val="FFFFFF"/>
+                    </a:solidFill>
+                  </a:tcPr>
+                </a:tc>
+                <a:tc>
+                  <a:txBody>
+                    <a:bodyPr/>
+                    <a:lstStyle/>
+                    <a:p>
+                      <a:pPr indent="0" marL="0">
+                        <a:buNone/>
+                      </a:pPr>
+                      <a:r>
+                        <a:rPr lang="en-US" sz="820" dirty="0">
+                          <a:solidFill>
+                            <a:srgbClr val="172033"/>
+                          </a:solidFill>
+                          <a:latin typeface="Microsoft YaHei" pitchFamily="34" charset="0"/>
+                          <a:ea typeface="Microsoft YaHei" pitchFamily="34" charset="-122"/>
+                          <a:cs typeface="Microsoft YaHei" pitchFamily="34" charset="-120"/>
+                        </a:rPr>
+                        <a:t>Walk-forward validation</a:t>
+                      </a:r>
+                      <a:endParaRPr lang="en-US" sz="820" dirty="0">
+                        <a:latin typeface="Microsoft YaHei" charset="0"/>
+                        <a:ea typeface="Microsoft YaHei" charset="0"/>
+                        <a:cs typeface="Microsoft YaHei" charset="0"/>
+                      </a:endParaRPr>
+                    </a:p>
+                  </a:txBody>
+                  <a:tcPr marL="54864" marR="54864" marT="54864" marB="54864" anchor="mid">
+                    <a:lnL w="6350" cap="flat" cmpd="sng" algn="ctr">
+                      <a:solidFill>
+                        <a:srgbClr val="D7DEE8"/>
+                      </a:solidFill>
+                      <a:prstDash val="solid"/>
+                      <a:round/>
+                      <a:headEnd type="none" w="med" len="med"/>
+                      <a:tailEnd type="none" w="med" len="med"/>
+                    </a:lnL>
+                    <a:lnR w="6350" cap="flat" cmpd="sng" algn="ctr">
+                      <a:solidFill>
+                        <a:srgbClr val="D7DEE8"/>
+                      </a:solidFill>
+                      <a:prstDash val="solid"/>
+                      <a:round/>
+                      <a:headEnd type="none" w="med" len="med"/>
+                      <a:tailEnd type="none" w="med" len="med"/>
+                    </a:lnR>
+                    <a:lnT w="6350" cap="flat" cmpd="sng" algn="ctr">
+                      <a:solidFill>
+                        <a:srgbClr val="D7DEE8"/>
+                      </a:solidFill>
+                      <a:prstDash val="solid"/>
+                      <a:round/>
+                      <a:headEnd type="none" w="med" len="med"/>
+                      <a:tailEnd type="none" w="med" len="med"/>
+                    </a:lnT>
+                    <a:lnB w="6350" cap="flat" cmpd="sng" algn="ctr">
+                      <a:solidFill>
+                        <a:srgbClr val="D7DEE8"/>
+                      </a:solidFill>
+                      <a:prstDash val="solid"/>
+                      <a:round/>
+                      <a:headEnd type="none" w="med" len="med"/>
+                      <a:tailEnd type="none" w="med" len="med"/>
+                    </a:lnB>
+                    <a:solidFill>
+                      <a:srgbClr val="FFFFFF"/>
+                    </a:solidFill>
+                  </a:tcPr>
+                </a:tc>
+                <a:tc>
+                  <a:txBody>
+                    <a:bodyPr/>
+                    <a:lstStyle/>
+                    <a:p>
+                      <a:pPr indent="0" marL="0">
+                        <a:buNone/>
+                      </a:pPr>
+                      <a:r>
+                        <a:rPr lang="en-US" sz="820" dirty="0">
+                          <a:solidFill>
+                            <a:srgbClr val="172033"/>
+                          </a:solidFill>
+                          <a:latin typeface="Microsoft YaHei" pitchFamily="34" charset="0"/>
+                          <a:ea typeface="Microsoft YaHei" pitchFamily="34" charset="-122"/>
+                          <a:cs typeface="Microsoft YaHei" pitchFamily="34" charset="-120"/>
+                        </a:rPr>
+                        <a:t>scripts/simulate_online_windows.py</a:t>
+                      </a:r>
+                      <a:endParaRPr lang="en-US" sz="820" dirty="0">
+                        <a:latin typeface="Microsoft YaHei" charset="0"/>
+                        <a:ea typeface="Microsoft YaHei" charset="0"/>
+                        <a:cs typeface="Microsoft YaHei" charset="0"/>
+                      </a:endParaRPr>
+                    </a:p>
+                    <a:p>
+                      <a:pPr indent="0" marL="0">
+                        <a:buNone/>
+                      </a:pPr>
+                      <a:r>
+                        <a:rPr lang="en-US" sz="820" dirty="0">
+                          <a:solidFill>
+                            <a:srgbClr val="172033"/>
+                          </a:solidFill>
+                          <a:latin typeface="Microsoft YaHei" pitchFamily="34" charset="0"/>
+                          <a:ea typeface="Microsoft YaHei" pitchFamily="34" charset="-122"/>
+                          <a:cs typeface="Microsoft YaHei" pitchFamily="34" charset="-120"/>
+                        </a:rPr>
+                        <a:t>scripts/validate_multiple_methods.py</a:t>
+                      </a:r>
+                      <a:endParaRPr lang="en-US" sz="820" dirty="0">
+                        <a:latin typeface="Microsoft YaHei" charset="0"/>
+                        <a:ea typeface="Microsoft YaHei" charset="0"/>
+                        <a:cs typeface="Microsoft YaHei" charset="0"/>
+                      </a:endParaRPr>
+                    </a:p>
+                  </a:txBody>
+                  <a:tcPr marL="54864" marR="54864" marT="54864" marB="54864" anchor="mid">
+                    <a:lnL w="6350" cap="flat" cmpd="sng" algn="ctr">
+                      <a:solidFill>
+                        <a:srgbClr val="D7DEE8"/>
+                      </a:solidFill>
+                      <a:prstDash val="solid"/>
+                      <a:round/>
+                      <a:headEnd type="none" w="med" len="med"/>
+                      <a:tailEnd type="none" w="med" len="med"/>
+                    </a:lnL>
+                    <a:lnR w="6350" cap="flat" cmpd="sng" algn="ctr">
+                      <a:solidFill>
+                        <a:srgbClr val="D7DEE8"/>
+                      </a:solidFill>
+                      <a:prstDash val="solid"/>
+                      <a:round/>
+                      <a:headEnd type="none" w="med" len="med"/>
+                      <a:tailEnd type="none" w="med" len="med"/>
+                    </a:lnR>
+                    <a:lnT w="6350" cap="flat" cmpd="sng" algn="ctr">
+                      <a:solidFill>
+                        <a:srgbClr val="D7DEE8"/>
+                      </a:solidFill>
+                      <a:prstDash val="solid"/>
+                      <a:round/>
+                      <a:headEnd type="none" w="med" len="med"/>
+                      <a:tailEnd type="none" w="med" len="med"/>
+                    </a:lnT>
+                    <a:lnB w="6350" cap="flat" cmpd="sng" algn="ctr">
+                      <a:solidFill>
+                        <a:srgbClr val="D7DEE8"/>
+                      </a:solidFill>
+                      <a:prstDash val="solid"/>
+                      <a:round/>
+                      <a:headEnd type="none" w="med" len="med"/>
+                      <a:tailEnd type="none" w="med" len="med"/>
+                    </a:lnB>
+                    <a:solidFill>
+                      <a:srgbClr val="FFFFFF"/>
+                    </a:solidFill>
+                  </a:tcPr>
+                </a:tc>
+                <a:tc>
+                  <a:txBody>
+                    <a:bodyPr/>
+                    <a:lstStyle/>
+                    <a:p>
+                      <a:pPr indent="0" marL="0">
+                        <a:buNone/>
+                      </a:pPr>
+                      <a:r>
+                        <a:rPr lang="en-US" sz="820" dirty="0">
+                          <a:solidFill>
+                            <a:srgbClr val="172033"/>
+                          </a:solidFill>
+                          <a:latin typeface="Microsoft YaHei" pitchFamily="34" charset="0"/>
+                          <a:ea typeface="Microsoft YaHei" pitchFamily="34" charset="-122"/>
+                          <a:cs typeface="Microsoft YaHei" pitchFamily="34" charset="-120"/>
+                        </a:rPr>
+                        <a:t>Are parameters selected only from information available before T?</a:t>
+                      </a:r>
+                      <a:endParaRPr lang="en-US" sz="820" dirty="0">
+                        <a:latin typeface="Microsoft YaHei" charset="0"/>
+                        <a:ea typeface="Microsoft YaHei" charset="0"/>
+                        <a:cs typeface="Microsoft YaHei" charset="0"/>
+                      </a:endParaRPr>
+                    </a:p>
+                  </a:txBody>
+                  <a:tcPr marL="54864" marR="54864" marT="54864" marB="54864" anchor="mid">
+                    <a:lnL w="6350" cap="flat" cmpd="sng" algn="ctr">
+                      <a:solidFill>
+                        <a:srgbClr val="D7DEE8"/>
+                      </a:solidFill>
+                      <a:prstDash val="solid"/>
+                      <a:round/>
+                      <a:headEnd type="none" w="med" len="med"/>
+                      <a:tailEnd type="none" w="med" len="med"/>
+                    </a:lnL>
+                    <a:lnR w="6350" cap="flat" cmpd="sng" algn="ctr">
+                      <a:solidFill>
+                        <a:srgbClr val="D7DEE8"/>
+                      </a:solidFill>
+                      <a:prstDash val="solid"/>
+                      <a:round/>
+                      <a:headEnd type="none" w="med" len="med"/>
+                      <a:tailEnd type="none" w="med" len="med"/>
+                    </a:lnR>
+                    <a:lnT w="6350" cap="flat" cmpd="sng" algn="ctr">
+                      <a:solidFill>
+                        <a:srgbClr val="D7DEE8"/>
+                      </a:solidFill>
+                      <a:prstDash val="solid"/>
+                      <a:round/>
+                      <a:headEnd type="none" w="med" len="med"/>
+                      <a:tailEnd type="none" w="med" len="med"/>
+                    </a:lnT>
+                    <a:lnB w="6350" cap="flat" cmpd="sng" algn="ctr">
+                      <a:solidFill>
+                        <a:srgbClr val="D7DEE8"/>
+                      </a:solidFill>
+                      <a:prstDash val="solid"/>
+                      <a:round/>
+                      <a:headEnd type="none" w="med" len="med"/>
+                      <a:tailEnd type="none" w="med" len="med"/>
+                    </a:lnB>
+                    <a:solidFill>
+                      <a:srgbClr val="FFFFFF"/>
+                    </a:solidFill>
+                  </a:tcPr>
+                </a:tc>
+              </a:tr>
+              <a:tr h="678180">
+                <a:tc>
+                  <a:txBody>
+                    <a:bodyPr/>
+                    <a:lstStyle/>
+                    <a:p>
+                      <a:pPr indent="0" marL="0">
+                        <a:buNone/>
+                      </a:pPr>
+                      <a:r>
+                        <a:rPr lang="en-US" sz="820" dirty="0">
+                          <a:solidFill>
+                            <a:srgbClr val="172033"/>
+                          </a:solidFill>
+                          <a:latin typeface="Microsoft YaHei" pitchFamily="34" charset="0"/>
+                          <a:ea typeface="Microsoft YaHei" pitchFamily="34" charset="-122"/>
+                          <a:cs typeface="Microsoft YaHei" pitchFamily="34" charset="-120"/>
+                        </a:rPr>
+                        <a:t>P2</a:t>
+                      </a:r>
+                      <a:endParaRPr lang="en-US" sz="820" dirty="0">
+                        <a:latin typeface="Microsoft YaHei" charset="0"/>
+                        <a:ea typeface="Microsoft YaHei" charset="0"/>
+                        <a:cs typeface="Microsoft YaHei" charset="0"/>
+                      </a:endParaRPr>
+                    </a:p>
+                  </a:txBody>
+                  <a:tcPr marL="54864" marR="54864" marT="54864" marB="54864" anchor="mid">
+                    <a:lnL w="6350" cap="flat" cmpd="sng" algn="ctr">
+                      <a:solidFill>
+                        <a:srgbClr val="D7DEE8"/>
+                      </a:solidFill>
+                      <a:prstDash val="solid"/>
+                      <a:round/>
+                      <a:headEnd type="none" w="med" len="med"/>
+                      <a:tailEnd type="none" w="med" len="med"/>
+                    </a:lnL>
+                    <a:lnR w="6350" cap="flat" cmpd="sng" algn="ctr">
+                      <a:solidFill>
+                        <a:srgbClr val="D7DEE8"/>
+                      </a:solidFill>
+                      <a:prstDash val="solid"/>
+                      <a:round/>
+                      <a:headEnd type="none" w="med" len="med"/>
+                      <a:tailEnd type="none" w="med" len="med"/>
+                    </a:lnR>
+                    <a:lnT w="6350" cap="flat" cmpd="sng" algn="ctr">
+                      <a:solidFill>
+                        <a:srgbClr val="D7DEE8"/>
+                      </a:solidFill>
+                      <a:prstDash val="solid"/>
+                      <a:round/>
+                      <a:headEnd type="none" w="med" len="med"/>
+                      <a:tailEnd type="none" w="med" len="med"/>
+                    </a:lnT>
+                    <a:lnB w="6350" cap="flat" cmpd="sng" algn="ctr">
+                      <a:solidFill>
+                        <a:srgbClr val="D7DEE8"/>
+                      </a:solidFill>
+                      <a:prstDash val="solid"/>
+                      <a:round/>
+                      <a:headEnd type="none" w="med" len="med"/>
+                      <a:tailEnd type="none" w="med" len="med"/>
+                    </a:lnB>
+                    <a:solidFill>
+                      <a:srgbClr val="FFFFFF"/>
+                    </a:solidFill>
+                  </a:tcPr>
+                </a:tc>
+                <a:tc>
+                  <a:txBody>
+                    <a:bodyPr/>
+                    <a:lstStyle/>
+                    <a:p>
+                      <a:pPr indent="0" marL="0">
+                        <a:buNone/>
+                      </a:pPr>
+                      <a:r>
+                        <a:rPr lang="en-US" sz="820" dirty="0">
+                          <a:solidFill>
+                            <a:srgbClr val="172033"/>
+                          </a:solidFill>
+                          <a:latin typeface="Microsoft YaHei" pitchFamily="34" charset="0"/>
+                          <a:ea typeface="Microsoft YaHei" pitchFamily="34" charset="-122"/>
+                          <a:cs typeface="Microsoft YaHei" pitchFamily="34" charset="-120"/>
+                        </a:rPr>
+                        <a:t>Training objective</a:t>
+                      </a:r>
+                      <a:endParaRPr lang="en-US" sz="820" dirty="0">
+                        <a:latin typeface="Microsoft YaHei" charset="0"/>
+                        <a:ea typeface="Microsoft YaHei" charset="0"/>
+                        <a:cs typeface="Microsoft YaHei" charset="0"/>
+                      </a:endParaRPr>
+                    </a:p>
+                  </a:txBody>
+                  <a:tcPr marL="54864" marR="54864" marT="54864" marB="54864" anchor="mid">
+                    <a:lnL w="6350" cap="flat" cmpd="sng" algn="ctr">
+                      <a:solidFill>
+                        <a:srgbClr val="D7DEE8"/>
+                      </a:solidFill>
+                      <a:prstDash val="solid"/>
+                      <a:round/>
+                      <a:headEnd type="none" w="med" len="med"/>
+                      <a:tailEnd type="none" w="med" len="med"/>
+                    </a:lnL>
+                    <a:lnR w="6350" cap="flat" cmpd="sng" algn="ctr">
+                      <a:solidFill>
+                        <a:srgbClr val="D7DEE8"/>
+                      </a:solidFill>
+                      <a:prstDash val="solid"/>
+                      <a:round/>
+                      <a:headEnd type="none" w="med" len="med"/>
+                      <a:tailEnd type="none" w="med" len="med"/>
+                    </a:lnR>
+                    <a:lnT w="6350" cap="flat" cmpd="sng" algn="ctr">
+                      <a:solidFill>
+                        <a:srgbClr val="D7DEE8"/>
+                      </a:solidFill>
+                      <a:prstDash val="solid"/>
+                      <a:round/>
+                      <a:headEnd type="none" w="med" len="med"/>
+                      <a:tailEnd type="none" w="med" len="med"/>
+                    </a:lnT>
+                    <a:lnB w="6350" cap="flat" cmpd="sng" algn="ctr">
+                      <a:solidFill>
+                        <a:srgbClr val="D7DEE8"/>
+                      </a:solidFill>
+                      <a:prstDash val="solid"/>
+                      <a:round/>
+                      <a:headEnd type="none" w="med" len="med"/>
+                      <a:tailEnd type="none" w="med" len="med"/>
+                    </a:lnB>
+                    <a:solidFill>
+                      <a:srgbClr val="FFFFFF"/>
+                    </a:solidFill>
+                  </a:tcPr>
+                </a:tc>
+                <a:tc>
+                  <a:txBody>
+                    <a:bodyPr/>
+                    <a:lstStyle/>
+                    <a:p>
+                      <a:pPr indent="0" marL="0">
+                        <a:buNone/>
+                      </a:pPr>
+                      <a:r>
+                        <a:rPr lang="en-US" sz="820" dirty="0">
+                          <a:solidFill>
+                            <a:srgbClr val="172033"/>
+                          </a:solidFill>
+                          <a:latin typeface="Microsoft YaHei" pitchFamily="34" charset="0"/>
+                          <a:ea typeface="Microsoft YaHei" pitchFamily="34" charset="-122"/>
+                          <a:cs typeface="Microsoft YaHei" pitchFamily="34" charset="-120"/>
+                        </a:rPr>
+                        <a:t>src/models/master.py</a:t>
+                      </a:r>
+                      <a:endParaRPr lang="en-US" sz="820" dirty="0">
+                        <a:latin typeface="Microsoft YaHei" charset="0"/>
+                        <a:ea typeface="Microsoft YaHei" charset="0"/>
+                        <a:cs typeface="Microsoft YaHei" charset="0"/>
+                      </a:endParaRPr>
+                    </a:p>
+                  </a:txBody>
+                  <a:tcPr marL="54864" marR="54864" marT="54864" marB="54864" anchor="mid">
+                    <a:lnL w="6350" cap="flat" cmpd="sng" algn="ctr">
+                      <a:solidFill>
+                        <a:srgbClr val="D7DEE8"/>
+                      </a:solidFill>
+                      <a:prstDash val="solid"/>
+                      <a:round/>
+                      <a:headEnd type="none" w="med" len="med"/>
+                      <a:tailEnd type="none" w="med" len="med"/>
+                    </a:lnL>
+                    <a:lnR w="6350" cap="flat" cmpd="sng" algn="ctr">
+                      <a:solidFill>
+                        <a:srgbClr val="D7DEE8"/>
+                      </a:solidFill>
+                      <a:prstDash val="solid"/>
+                      <a:round/>
+                      <a:headEnd type="none" w="med" len="med"/>
+                      <a:tailEnd type="none" w="med" len="med"/>
+                    </a:lnR>
+                    <a:lnT w="6350" cap="flat" cmpd="sng" algn="ctr">
+                      <a:solidFill>
+                        <a:srgbClr val="D7DEE8"/>
+                      </a:solidFill>
+                      <a:prstDash val="solid"/>
+                      <a:round/>
+                      <a:headEnd type="none" w="med" len="med"/>
+                      <a:tailEnd type="none" w="med" len="med"/>
+                    </a:lnT>
+                    <a:lnB w="6350" cap="flat" cmpd="sng" algn="ctr">
+                      <a:solidFill>
+                        <a:srgbClr val="D7DEE8"/>
+                      </a:solidFill>
+                      <a:prstDash val="solid"/>
+                      <a:round/>
+                      <a:headEnd type="none" w="med" len="med"/>
+                      <a:tailEnd type="none" w="med" len="med"/>
+                    </a:lnB>
+                    <a:solidFill>
+                      <a:srgbClr val="FFFFFF"/>
+                    </a:solidFill>
+                  </a:tcPr>
+                </a:tc>
+                <a:tc>
+                  <a:txBody>
+                    <a:bodyPr/>
+                    <a:lstStyle/>
+                    <a:p>
+                      <a:pPr indent="0" marL="0">
+                        <a:buNone/>
+                      </a:pPr>
+                      <a:r>
+                        <a:rPr lang="en-US" sz="820" dirty="0">
+                          <a:solidFill>
+                            <a:srgbClr val="172033"/>
+                          </a:solidFill>
+                          <a:latin typeface="Microsoft YaHei" pitchFamily="34" charset="0"/>
+                          <a:ea typeface="Microsoft YaHei" pitchFamily="34" charset="-122"/>
+                          <a:cs typeface="Microsoft YaHei" pitchFamily="34" charset="-120"/>
+                        </a:rPr>
+                        <a:t>How do we align loss with final portfolio return without chasing noisy extremes?</a:t>
+                      </a:r>
+                      <a:endParaRPr lang="en-US" sz="820" dirty="0">
+                        <a:latin typeface="Microsoft YaHei" charset="0"/>
+                        <a:ea typeface="Microsoft YaHei" charset="0"/>
+                        <a:cs typeface="Microsoft YaHei" charset="0"/>
+                      </a:endParaRPr>
+                    </a:p>
+                  </a:txBody>
+                  <a:tcPr marL="54864" marR="54864" marT="54864" marB="54864" anchor="mid">
+                    <a:lnL w="6350" cap="flat" cmpd="sng" algn="ctr">
+                      <a:solidFill>
+                        <a:srgbClr val="D7DEE8"/>
+                      </a:solidFill>
+                      <a:prstDash val="solid"/>
+                      <a:round/>
+                      <a:headEnd type="none" w="med" len="med"/>
+                      <a:tailEnd type="none" w="med" len="med"/>
+                    </a:lnL>
+                    <a:lnR w="6350" cap="flat" cmpd="sng" algn="ctr">
+                      <a:solidFill>
+                        <a:srgbClr val="D7DEE8"/>
+                      </a:solidFill>
+                      <a:prstDash val="solid"/>
+                      <a:round/>
+                      <a:headEnd type="none" w="med" len="med"/>
+                      <a:tailEnd type="none" w="med" len="med"/>
+                    </a:lnR>
+                    <a:lnT w="6350" cap="flat" cmpd="sng" algn="ctr">
+                      <a:solidFill>
+                        <a:srgbClr val="D7DEE8"/>
+                      </a:solidFill>
+                      <a:prstDash val="solid"/>
+                      <a:round/>
+                      <a:headEnd type="none" w="med" len="med"/>
+                      <a:tailEnd type="none" w="med" len="med"/>
+                    </a:lnT>
+                    <a:lnB w="6350" cap="flat" cmpd="sng" algn="ctr">
+                      <a:solidFill>
+                        <a:srgbClr val="D7DEE8"/>
+                      </a:solidFill>
+                      <a:prstDash val="solid"/>
+                      <a:round/>
+                      <a:headEnd type="none" w="med" len="med"/>
+                      <a:tailEnd type="none" w="med" len="med"/>
+                    </a:lnB>
+                    <a:solidFill>
+                      <a:srgbClr val="FFFFFF"/>
+                    </a:solidFill>
+                  </a:tcPr>
+                </a:tc>
+              </a:tr>
+              <a:tr h="678180">
+                <a:tc>
+                  <a:txBody>
+                    <a:bodyPr/>
+                    <a:lstStyle/>
+                    <a:p>
+                      <a:pPr indent="0" marL="0">
+                        <a:buNone/>
+                      </a:pPr>
+                      <a:r>
+                        <a:rPr lang="en-US" sz="820" dirty="0">
+                          <a:solidFill>
+                            <a:srgbClr val="172033"/>
+                          </a:solidFill>
+                          <a:latin typeface="Microsoft YaHei" pitchFamily="34" charset="0"/>
+                          <a:ea typeface="Microsoft YaHei" pitchFamily="34" charset="-122"/>
+                          <a:cs typeface="Microsoft YaHei" pitchFamily="34" charset="-120"/>
+                        </a:rPr>
+                        <a:t>P2</a:t>
+                      </a:r>
+                      <a:endParaRPr lang="en-US" sz="820" dirty="0">
+                        <a:latin typeface="Microsoft YaHei" charset="0"/>
+                        <a:ea typeface="Microsoft YaHei" charset="0"/>
+                        <a:cs typeface="Microsoft YaHei" charset="0"/>
+                      </a:endParaRPr>
+                    </a:p>
+                  </a:txBody>
+                  <a:tcPr marL="54864" marR="54864" marT="54864" marB="54864" anchor="mid">
+                    <a:lnL w="6350" cap="flat" cmpd="sng" algn="ctr">
+                      <a:solidFill>
+                        <a:srgbClr val="D7DEE8"/>
+                      </a:solidFill>
+                      <a:prstDash val="solid"/>
+                      <a:round/>
+                      <a:headEnd type="none" w="med" len="med"/>
+                      <a:tailEnd type="none" w="med" len="med"/>
+                    </a:lnL>
+                    <a:lnR w="6350" cap="flat" cmpd="sng" algn="ctr">
+                      <a:solidFill>
+                        <a:srgbClr val="D7DEE8"/>
+                      </a:solidFill>
+                      <a:prstDash val="solid"/>
+                      <a:round/>
+                      <a:headEnd type="none" w="med" len="med"/>
+                      <a:tailEnd type="none" w="med" len="med"/>
+                    </a:lnR>
+                    <a:lnT w="6350" cap="flat" cmpd="sng" algn="ctr">
+                      <a:solidFill>
+                        <a:srgbClr val="D7DEE8"/>
+                      </a:solidFill>
+                      <a:prstDash val="solid"/>
+                      <a:round/>
+                      <a:headEnd type="none" w="med" len="med"/>
+                      <a:tailEnd type="none" w="med" len="med"/>
+                    </a:lnT>
+                    <a:lnB w="6350" cap="flat" cmpd="sng" algn="ctr">
+                      <a:solidFill>
+                        <a:srgbClr val="D7DEE8"/>
+                      </a:solidFill>
+                      <a:prstDash val="solid"/>
+                      <a:round/>
+                      <a:headEnd type="none" w="med" len="med"/>
+                      <a:tailEnd type="none" w="med" len="med"/>
+                    </a:lnB>
+                    <a:solidFill>
+                      <a:srgbClr val="FFFFFF"/>
+                    </a:solidFill>
+                  </a:tcPr>
+                </a:tc>
+                <a:tc>
+                  <a:txBody>
+                    <a:bodyPr/>
+                    <a:lstStyle/>
+                    <a:p>
+                      <a:pPr indent="0" marL="0">
+                        <a:buNone/>
+                      </a:pPr>
+                      <a:r>
+                        <a:rPr lang="en-US" sz="820" dirty="0">
+                          <a:solidFill>
+                            <a:srgbClr val="172033"/>
+                          </a:solidFill>
+                          <a:latin typeface="Microsoft YaHei" pitchFamily="34" charset="0"/>
+                          <a:ea typeface="Microsoft YaHei" pitchFamily="34" charset="-122"/>
+                          <a:cs typeface="Microsoft YaHei" pitchFamily="34" charset="-120"/>
+                        </a:rPr>
+                        <a:t>Data engineering</a:t>
+                      </a:r>
+                      <a:endParaRPr lang="en-US" sz="820" dirty="0">
+                        <a:latin typeface="Microsoft YaHei" charset="0"/>
+                        <a:ea typeface="Microsoft YaHei" charset="0"/>
+                        <a:cs typeface="Microsoft YaHei" charset="0"/>
+                      </a:endParaRPr>
+                    </a:p>
+                  </a:txBody>
+                  <a:tcPr marL="54864" marR="54864" marT="54864" marB="54864" anchor="mid">
+                    <a:lnL w="6350" cap="flat" cmpd="sng" algn="ctr">
+                      <a:solidFill>
+                        <a:srgbClr val="D7DEE8"/>
+                      </a:solidFill>
+                      <a:prstDash val="solid"/>
+                      <a:round/>
+                      <a:headEnd type="none" w="med" len="med"/>
+                      <a:tailEnd type="none" w="med" len="med"/>
+                    </a:lnL>
+                    <a:lnR w="6350" cap="flat" cmpd="sng" algn="ctr">
+                      <a:solidFill>
+                        <a:srgbClr val="D7DEE8"/>
+                      </a:solidFill>
+                      <a:prstDash val="solid"/>
+                      <a:round/>
+                      <a:headEnd type="none" w="med" len="med"/>
+                      <a:tailEnd type="none" w="med" len="med"/>
+                    </a:lnR>
+                    <a:lnT w="6350" cap="flat" cmpd="sng" algn="ctr">
+                      <a:solidFill>
+                        <a:srgbClr val="D7DEE8"/>
+                      </a:solidFill>
+                      <a:prstDash val="solid"/>
+                      <a:round/>
+                      <a:headEnd type="none" w="med" len="med"/>
+                      <a:tailEnd type="none" w="med" len="med"/>
+                    </a:lnT>
+                    <a:lnB w="6350" cap="flat" cmpd="sng" algn="ctr">
+                      <a:solidFill>
+                        <a:srgbClr val="D7DEE8"/>
+                      </a:solidFill>
+                      <a:prstDash val="solid"/>
+                      <a:round/>
+                      <a:headEnd type="none" w="med" len="med"/>
+                      <a:tailEnd type="none" w="med" len="med"/>
+                    </a:lnB>
+                    <a:solidFill>
+                      <a:srgbClr val="FFFFFF"/>
+                    </a:solidFill>
+                  </a:tcPr>
+                </a:tc>
+                <a:tc>
+                  <a:txBody>
+                    <a:bodyPr/>
+                    <a:lstStyle/>
+                    <a:p>
+                      <a:pPr indent="0" marL="0">
+                        <a:buNone/>
+                      </a:pPr>
+                      <a:r>
+                        <a:rPr lang="en-US" sz="820" dirty="0">
+                          <a:solidFill>
+                            <a:srgbClr val="172033"/>
+                          </a:solidFill>
+                          <a:latin typeface="Microsoft YaHei" pitchFamily="34" charset="0"/>
+                          <a:ea typeface="Microsoft YaHei" pitchFamily="34" charset="-122"/>
+                          <a:cs typeface="Microsoft YaHei" pitchFamily="34" charset="-120"/>
+                        </a:rPr>
+                        <a:t>src/training/dataset_builder.py</a:t>
+                      </a:r>
+                      <a:endParaRPr lang="en-US" sz="820" dirty="0">
+                        <a:latin typeface="Microsoft YaHei" charset="0"/>
+                        <a:ea typeface="Microsoft YaHei" charset="0"/>
+                        <a:cs typeface="Microsoft YaHei" charset="0"/>
+                      </a:endParaRPr>
+                    </a:p>
+                    <a:p>
+                      <a:pPr indent="0" marL="0">
+                        <a:buNone/>
+                      </a:pPr>
+                      <a:r>
+                        <a:rPr lang="en-US" sz="820" dirty="0">
+                          <a:solidFill>
+                            <a:srgbClr val="172033"/>
+                          </a:solidFill>
+                          <a:latin typeface="Microsoft YaHei" pitchFamily="34" charset="0"/>
+                          <a:ea typeface="Microsoft YaHei" pitchFamily="34" charset="-122"/>
+                          <a:cs typeface="Microsoft YaHei" pitchFamily="34" charset="-120"/>
+                        </a:rPr>
+                        <a:t>src/features/*.py</a:t>
+                      </a:r>
+                      <a:endParaRPr lang="en-US" sz="820" dirty="0">
+                        <a:latin typeface="Microsoft YaHei" charset="0"/>
+                        <a:ea typeface="Microsoft YaHei" charset="0"/>
+                        <a:cs typeface="Microsoft YaHei" charset="0"/>
+                      </a:endParaRPr>
+                    </a:p>
+                  </a:txBody>
+                  <a:tcPr marL="54864" marR="54864" marT="54864" marB="54864" anchor="mid">
+                    <a:lnL w="6350" cap="flat" cmpd="sng" algn="ctr">
+                      <a:solidFill>
+                        <a:srgbClr val="D7DEE8"/>
+                      </a:solidFill>
+                      <a:prstDash val="solid"/>
+                      <a:round/>
+                      <a:headEnd type="none" w="med" len="med"/>
+                      <a:tailEnd type="none" w="med" len="med"/>
+                    </a:lnL>
+                    <a:lnR w="6350" cap="flat" cmpd="sng" algn="ctr">
+                      <a:solidFill>
+                        <a:srgbClr val="D7DEE8"/>
+                      </a:solidFill>
+                      <a:prstDash val="solid"/>
+                      <a:round/>
+                      <a:headEnd type="none" w="med" len="med"/>
+                      <a:tailEnd type="none" w="med" len="med"/>
+                    </a:lnR>
+                    <a:lnT w="6350" cap="flat" cmpd="sng" algn="ctr">
+                      <a:solidFill>
+                        <a:srgbClr val="D7DEE8"/>
+                      </a:solidFill>
+                      <a:prstDash val="solid"/>
+                      <a:round/>
+                      <a:headEnd type="none" w="med" len="med"/>
+                      <a:tailEnd type="none" w="med" len="med"/>
+                    </a:lnT>
+                    <a:lnB w="6350" cap="flat" cmpd="sng" algn="ctr">
+                      <a:solidFill>
+                        <a:srgbClr val="D7DEE8"/>
+                      </a:solidFill>
+                      <a:prstDash val="solid"/>
+                      <a:round/>
+                      <a:headEnd type="none" w="med" len="med"/>
+                      <a:tailEnd type="none" w="med" len="med"/>
+                    </a:lnB>
+                    <a:solidFill>
+                      <a:srgbClr val="FFFFFF"/>
+                    </a:solidFill>
+                  </a:tcPr>
+                </a:tc>
+                <a:tc>
+                  <a:txBody>
+                    <a:bodyPr/>
+                    <a:lstStyle/>
+                    <a:p>
+                      <a:pPr indent="0" marL="0">
+                        <a:buNone/>
+                      </a:pPr>
+                      <a:r>
+                        <a:rPr lang="en-US" sz="820" dirty="0">
+                          <a:solidFill>
+                            <a:srgbClr val="172033"/>
+                          </a:solidFill>
+                          <a:latin typeface="Microsoft YaHei" pitchFamily="34" charset="0"/>
+                          <a:ea typeface="Microsoft YaHei" pitchFamily="34" charset="-122"/>
+                          <a:cs typeface="Microsoft YaHei" pitchFamily="34" charset="-120"/>
+                        </a:rPr>
+                        <a:t>Which columns are guaranteed, optional, or cached from previous processed artifacts?</a:t>
+                      </a:r>
+                      <a:endParaRPr lang="en-US" sz="820" dirty="0">
+                        <a:latin typeface="Microsoft YaHei" charset="0"/>
+                        <a:ea typeface="Microsoft YaHei" charset="0"/>
+                        <a:cs typeface="Microsoft YaHei" charset="0"/>
+                      </a:endParaRPr>
+                    </a:p>
+                  </a:txBody>
+                  <a:tcPr marL="54864" marR="54864" marT="54864" marB="54864" anchor="mid">
+                    <a:lnL w="6350" cap="flat" cmpd="sng" algn="ctr">
+                      <a:solidFill>
+                        <a:srgbClr val="D7DEE8"/>
+                      </a:solidFill>
+                      <a:prstDash val="solid"/>
+                      <a:round/>
+                      <a:headEnd type="none" w="med" len="med"/>
+                      <a:tailEnd type="none" w="med" len="med"/>
+                    </a:lnL>
+                    <a:lnR w="6350" cap="flat" cmpd="sng" algn="ctr">
+                      <a:solidFill>
+                        <a:srgbClr val="D7DEE8"/>
+                      </a:solidFill>
+                      <a:prstDash val="solid"/>
+                      <a:round/>
+                      <a:headEnd type="none" w="med" len="med"/>
+                      <a:tailEnd type="none" w="med" len="med"/>
+                    </a:lnR>
+                    <a:lnT w="6350" cap="flat" cmpd="sng" algn="ctr">
+                      <a:solidFill>
+                        <a:srgbClr val="D7DEE8"/>
+                      </a:solidFill>
+                      <a:prstDash val="solid"/>
+                      <a:round/>
+                      <a:headEnd type="none" w="med" len="med"/>
+                      <a:tailEnd type="none" w="med" len="med"/>
+                    </a:lnT>
+                    <a:lnB w="6350" cap="flat" cmpd="sng" algn="ctr">
+                      <a:solidFill>
+                        <a:srgbClr val="D7DEE8"/>
+                      </a:solidFill>
+                      <a:prstDash val="solid"/>
+                      <a:round/>
+                      <a:headEnd type="none" w="med" len="med"/>
+                      <a:tailEnd type="none" w="med" len="med"/>
+                    </a:lnB>
+                    <a:solidFill>
+                      <a:srgbClr val="FFFFFF"/>
+                    </a:solidFill>
+                  </a:tcPr>
+                </a:tc>
+              </a:tr>
+            </a:tbl>
+          </a:graphicData>
+        </a:graphic>
+      </p:graphicFrame>
+      <p:sp>
+        <p:nvSpPr>
+          <p:cNvPr id="7" name="Text 4"/>
+          <p:cNvSpPr/>
+          <p:nvPr/>
+        </p:nvSpPr>
+        <p:spPr>
+          <a:xfrm>
+            <a:off x="777240" y="5806440"/>
+            <a:ext cx="9875520" cy="274320"/>
+          </a:xfrm>
+          <a:prstGeom prst="rect">
+            <a:avLst/>
+          </a:prstGeom>
+          <a:noFill/>
+          <a:ln/>
+        </p:spPr>
+        <p:txBody>
+          <a:bodyPr wrap="square" lIns="0" tIns="0" rIns="0" bIns="0" rtlCol="0" anchor="ctr">
+            <a:normAutofit/>
+          </a:bodyPr>
+          <a:lstStyle/>
+          <a:p>
+            <a:pPr indent="0" marL="0">
+              <a:buNone/>
+            </a:pPr>
+            <a:r>
+              <a:rPr lang="en-US" sz="1300" b="1" dirty="0">
+                <a:solidFill>
+                  <a:srgbClr val="2563EB"/>
+                </a:solidFill>
+                <a:latin typeface="Microsoft YaHei" pitchFamily="34" charset="0"/>
+                <a:ea typeface="Microsoft YaHei" pitchFamily="34" charset="-122"/>
+                <a:cs typeface="Microsoft YaHei" pitchFamily="34" charset="-120"/>
+              </a:rPr>
+              <a:t>Review stance: protect online correctness first; increase modeling complexity only after the submission loop is reproducible.</a:t>
+            </a:r>
+            <a:endParaRPr lang="en-US" sz="1300" dirty="0"/>
+          </a:p>
+        </p:txBody>
+      </p:sp>
+    </p:spTree>
+  </p:cSld>
+  <p:clrMapOvr>
+    <a:masterClrMapping/>
+  </p:clrMapOvr>
+</p:sld>
+</file>
+
+<file path=ppt/slides/slide13.xml><?xml version="1.0" encoding="utf-8"?>
+<p:sld xmlns:a="http://schemas.openxmlformats.org/drawingml/2006/main" xmlns:r="http://schemas.openxmlformats.org/officeDocument/2006/relationships" xmlns:p="http://schemas.openxmlformats.org/presentationml/2006/main">
+  <p:cSld name="Slide 13">
+    <p:bg>
+      <p:bgPr>
+        <a:solidFill>
+          <a:srgbClr val="FFFFFF"/>
+        </a:solidFill>
+      </p:bgPr>
+    </p:bg>
+    <p:spTree>
+      <p:nvGrpSpPr>
+        <p:cNvPr id="1" name=""/>
+        <p:cNvGrpSpPr/>
+        <p:nvPr/>
+      </p:nvGrpSpPr>
+      <p:grpSpPr>
+        <a:xfrm>
+          <a:off x="0" y="0"/>
+          <a:ext cx="0" cy="0"/>
+          <a:chOff x="0" y="0"/>
+          <a:chExt cx="0" cy="0"/>
+        </a:xfrm>
+      </p:grpSpPr>
+      <p:sp>
+        <p:nvSpPr>
+          <p:cNvPr id="2" name="Text 0"/>
+          <p:cNvSpPr/>
+          <p:nvPr/>
+        </p:nvSpPr>
+        <p:spPr>
+          <a:xfrm>
+            <a:off x="502920" y="256032"/>
+            <a:ext cx="2194560" cy="201168"/>
+          </a:xfrm>
+          <a:prstGeom prst="rect">
+            <a:avLst/>
+          </a:prstGeom>
+          <a:noFill/>
+          <a:ln/>
+        </p:spPr>
+        <p:txBody>
+          <a:bodyPr wrap="square" lIns="0" tIns="0" rIns="0" bIns="0" rtlCol="0" anchor="ctr"/>
+          <a:lstStyle/>
+          <a:p>
+            <a:pPr indent="0" marL="0">
+              <a:buNone/>
+            </a:pPr>
+            <a:r>
+              <a:rPr lang="en-US" sz="800" b="1" dirty="0">
+                <a:solidFill>
+                  <a:srgbClr val="2563EB"/>
+                </a:solidFill>
+                <a:latin typeface="Microsoft YaHei" pitchFamily="34" charset="0"/>
+                <a:ea typeface="Microsoft YaHei" pitchFamily="34" charset="-122"/>
+                <a:cs typeface="Microsoft YaHei" pitchFamily="34" charset="-120"/>
+              </a:rPr>
+              <a:t>SOURCE APPENDIX</a:t>
+            </a:r>
+            <a:endParaRPr lang="en-US" sz="800" dirty="0"/>
+          </a:p>
+        </p:txBody>
+      </p:sp>
+      <p:sp>
+        <p:nvSpPr>
+          <p:cNvPr id="3" name="Text 1"/>
+          <p:cNvSpPr/>
+          <p:nvPr/>
+        </p:nvSpPr>
+        <p:spPr>
+          <a:xfrm>
+            <a:off x="502920" y="530352"/>
+            <a:ext cx="9875520" cy="384048"/>
+          </a:xfrm>
+          <a:prstGeom prst="rect">
+            <a:avLst/>
+          </a:prstGeom>
+          <a:noFill/>
+          <a:ln/>
+        </p:spPr>
+        <p:txBody>
+          <a:bodyPr wrap="square" lIns="0" tIns="0" rIns="0" bIns="0" rtlCol="0" anchor="ctr">
+            <a:normAutofit/>
+          </a:bodyPr>
+          <a:lstStyle/>
+          <a:p>
+            <a:pPr indent="0" marL="0">
+              <a:buNone/>
+            </a:pPr>
+            <a:r>
+              <a:rPr lang="en-US" sz="2400" b="1" dirty="0">
+                <a:solidFill>
+                  <a:srgbClr val="172033"/>
+                </a:solidFill>
+                <a:latin typeface="Microsoft YaHei" pitchFamily="34" charset="0"/>
+                <a:ea typeface="Microsoft YaHei" pitchFamily="34" charset="-122"/>
+                <a:cs typeface="Microsoft YaHei" pitchFamily="34" charset="-120"/>
+              </a:rPr>
+              <a:t>P0 source: latest T-date inference</a:t>
+            </a:r>
+            <a:endParaRPr lang="en-US" sz="2400" dirty="0"/>
+          </a:p>
+        </p:txBody>
+      </p:sp>
+      <p:sp>
+        <p:nvSpPr>
+          <p:cNvPr id="4" name="Shape 2"/>
+          <p:cNvSpPr/>
+          <p:nvPr/>
+        </p:nvSpPr>
+        <p:spPr>
+          <a:xfrm>
+            <a:off x="502920" y="1051560"/>
+            <a:ext cx="11155680" cy="0"/>
+          </a:xfrm>
+          <a:prstGeom prst="line">
+            <a:avLst/>
+          </a:prstGeom>
+          <a:noFill/>
+          <a:ln w="12700">
+            <a:solidFill>
+              <a:srgbClr val="D7DEE8"/>
+            </a:solidFill>
+            <a:prstDash val="solid"/>
+          </a:ln>
+        </p:spPr>
+      </p:sp>
+      <p:sp>
+        <p:nvSpPr>
+          <p:cNvPr id="5" name="Text 3"/>
+          <p:cNvSpPr/>
+          <p:nvPr/>
+        </p:nvSpPr>
+        <p:spPr>
+          <a:xfrm>
+            <a:off x="8229600" y="6446520"/>
+            <a:ext cx="3383280" cy="201168"/>
+          </a:xfrm>
+          <a:prstGeom prst="rect">
+            <a:avLst/>
+          </a:prstGeom>
+          <a:noFill/>
+          <a:ln/>
+        </p:spPr>
+        <p:txBody>
+          <a:bodyPr wrap="square" lIns="0" tIns="0" rIns="0" bIns="0" rtlCol="0" anchor="ctr"/>
+          <a:lstStyle/>
+          <a:p>
+            <a:pPr algn="r" indent="0" marL="0">
+              <a:buNone/>
+            </a:pPr>
+            <a:r>
+              <a:rPr lang="en-US" sz="750" dirty="0">
+                <a:solidFill>
+                  <a:srgbClr val="94A3B8"/>
+                </a:solidFill>
+              </a:rPr>
+              <a:t>2026-05-07 · CSI300 Competition Review</a:t>
+            </a:r>
+            <a:endParaRPr lang="en-US" sz="750" dirty="0"/>
+          </a:p>
+        </p:txBody>
+      </p:sp>
+      <p:sp>
+        <p:nvSpPr>
+          <p:cNvPr id="6" name="Shape 4"/>
+          <p:cNvSpPr/>
+          <p:nvPr/>
+        </p:nvSpPr>
+        <p:spPr>
+          <a:xfrm>
+            <a:off x="777240" y="1234440"/>
+            <a:ext cx="1920240" cy="530352"/>
+          </a:xfrm>
+          <a:prstGeom prst="roundRect">
+            <a:avLst>
+              <a:gd name="adj" fmla="val 8621"/>
+            </a:avLst>
+          </a:prstGeom>
+          <a:solidFill>
+            <a:srgbClr val="F6F8FB"/>
+          </a:solidFill>
+          <a:ln w="10160">
+            <a:solidFill>
+              <a:srgbClr val="D7DEE8"/>
+            </a:solidFill>
+            <a:prstDash val="solid"/>
+          </a:ln>
+        </p:spPr>
+      </p:sp>
+      <p:sp>
+        <p:nvSpPr>
+          <p:cNvPr id="7" name="Text 5"/>
+          <p:cNvSpPr/>
+          <p:nvPr/>
+        </p:nvSpPr>
+        <p:spPr>
+          <a:xfrm>
+            <a:off x="832104" y="1371600"/>
+            <a:ext cx="1810512" cy="219456"/>
+          </a:xfrm>
+          <a:prstGeom prst="rect">
+            <a:avLst/>
+          </a:prstGeom>
+          <a:noFill/>
+          <a:ln/>
+        </p:spPr>
+        <p:txBody>
+          <a:bodyPr wrap="square" lIns="0" tIns="0" rIns="0" bIns="0" rtlCol="0" anchor="ctr">
+            <a:normAutofit/>
+          </a:bodyPr>
+          <a:lstStyle/>
+          <a:p>
+            <a:pPr indent="0" marL="0">
+              <a:buNone/>
+            </a:pPr>
+            <a:r>
+              <a:rPr lang="en-US" sz="750" b="1" dirty="0">
+                <a:solidFill>
+                  <a:srgbClr val="172033"/>
+                </a:solidFill>
+                <a:latin typeface="Microsoft YaHei" pitchFamily="34" charset="0"/>
+                <a:ea typeface="Microsoft YaHei" pitchFamily="34" charset="-122"/>
+                <a:cs typeface="Microsoft YaHei" pitchFamily="34" charset="-120"/>
+              </a:rPr>
+              <a:t>processed data</a:t>
+            </a:r>
+            <a:endParaRPr lang="en-US" sz="750" dirty="0"/>
+          </a:p>
+        </p:txBody>
+      </p:sp>
+      <p:sp>
+        <p:nvSpPr>
+          <p:cNvPr id="8" name="Shape 6"/>
+          <p:cNvSpPr/>
+          <p:nvPr/>
+        </p:nvSpPr>
+        <p:spPr>
+          <a:xfrm>
+            <a:off x="2724912" y="1499616"/>
+            <a:ext cx="109728" cy="0"/>
+          </a:xfrm>
+          <a:prstGeom prst="line">
+            <a:avLst/>
+          </a:prstGeom>
+          <a:noFill/>
+          <a:ln w="12700">
+            <a:solidFill>
+              <a:srgbClr val="2563EB"/>
+            </a:solidFill>
+            <a:prstDash val="solid"/>
+            <a:tailEnd type="triangle"/>
+          </a:ln>
+        </p:spPr>
+      </p:sp>
+      <p:sp>
+        <p:nvSpPr>
+          <p:cNvPr id="9" name="Shape 7"/>
+          <p:cNvSpPr/>
+          <p:nvPr/>
+        </p:nvSpPr>
+        <p:spPr>
+          <a:xfrm>
+            <a:off x="2862072" y="1234440"/>
+            <a:ext cx="1920240" cy="530352"/>
+          </a:xfrm>
+          <a:prstGeom prst="roundRect">
+            <a:avLst>
+              <a:gd name="adj" fmla="val 8621"/>
+            </a:avLst>
+          </a:prstGeom>
+          <a:solidFill>
+            <a:srgbClr val="F6F8FB"/>
+          </a:solidFill>
+          <a:ln w="10160">
+            <a:solidFill>
+              <a:srgbClr val="D7DEE8"/>
+            </a:solidFill>
+            <a:prstDash val="solid"/>
+          </a:ln>
+        </p:spPr>
+      </p:sp>
+      <p:sp>
+        <p:nvSpPr>
+          <p:cNvPr id="10" name="Text 8"/>
+          <p:cNvSpPr/>
+          <p:nvPr/>
+        </p:nvSpPr>
+        <p:spPr>
+          <a:xfrm>
+            <a:off x="2916936" y="1371600"/>
+            <a:ext cx="1810512" cy="219456"/>
+          </a:xfrm>
+          <a:prstGeom prst="rect">
+            <a:avLst/>
+          </a:prstGeom>
+          <a:noFill/>
+          <a:ln/>
+        </p:spPr>
+        <p:txBody>
+          <a:bodyPr wrap="square" lIns="0" tIns="0" rIns="0" bIns="0" rtlCol="0" anchor="ctr">
+            <a:normAutofit/>
+          </a:bodyPr>
+          <a:lstStyle/>
+          <a:p>
+            <a:pPr indent="0" marL="0">
+              <a:buNone/>
+            </a:pPr>
+            <a:r>
+              <a:rPr lang="en-US" sz="750" b="1" dirty="0">
+                <a:solidFill>
+                  <a:srgbClr val="172033"/>
+                </a:solidFill>
+                <a:latin typeface="Microsoft YaHei" pitchFamily="34" charset="0"/>
+                <a:ea typeface="Microsoft YaHei" pitchFamily="34" charset="-122"/>
+                <a:cs typeface="Microsoft YaHei" pitchFamily="34" charset="-120"/>
+              </a:rPr>
+              <a:t>labeled train</a:t>
+            </a:r>
+            <a:endParaRPr lang="en-US" sz="750" dirty="0"/>
+          </a:p>
+        </p:txBody>
+      </p:sp>
+      <p:sp>
+        <p:nvSpPr>
+          <p:cNvPr id="11" name="Shape 9"/>
+          <p:cNvSpPr/>
+          <p:nvPr/>
+        </p:nvSpPr>
+        <p:spPr>
+          <a:xfrm>
+            <a:off x="4809744" y="1499616"/>
+            <a:ext cx="109728" cy="0"/>
+          </a:xfrm>
+          <a:prstGeom prst="line">
+            <a:avLst/>
+          </a:prstGeom>
+          <a:noFill/>
+          <a:ln w="12700">
+            <a:solidFill>
+              <a:srgbClr val="2563EB"/>
+            </a:solidFill>
+            <a:prstDash val="solid"/>
+            <a:tailEnd type="triangle"/>
+          </a:ln>
+        </p:spPr>
+      </p:sp>
+      <p:sp>
+        <p:nvSpPr>
+          <p:cNvPr id="12" name="Shape 10"/>
+          <p:cNvSpPr/>
+          <p:nvPr/>
+        </p:nvSpPr>
+        <p:spPr>
+          <a:xfrm>
+            <a:off x="4946904" y="1234440"/>
+            <a:ext cx="1920240" cy="530352"/>
+          </a:xfrm>
+          <a:prstGeom prst="roundRect">
+            <a:avLst>
+              <a:gd name="adj" fmla="val 8621"/>
+            </a:avLst>
+          </a:prstGeom>
+          <a:solidFill>
+            <a:srgbClr val="F6F8FB"/>
+          </a:solidFill>
+          <a:ln w="10160">
+            <a:solidFill>
+              <a:srgbClr val="D7DEE8"/>
+            </a:solidFill>
+            <a:prstDash val="solid"/>
+          </a:ln>
+        </p:spPr>
+      </p:sp>
+      <p:sp>
+        <p:nvSpPr>
+          <p:cNvPr id="13" name="Text 11"/>
+          <p:cNvSpPr/>
+          <p:nvPr/>
+        </p:nvSpPr>
+        <p:spPr>
+          <a:xfrm>
+            <a:off x="5001768" y="1371600"/>
+            <a:ext cx="1810512" cy="219456"/>
+          </a:xfrm>
+          <a:prstGeom prst="rect">
+            <a:avLst/>
+          </a:prstGeom>
+          <a:noFill/>
+          <a:ln/>
+        </p:spPr>
+        <p:txBody>
+          <a:bodyPr wrap="square" lIns="0" tIns="0" rIns="0" bIns="0" rtlCol="0" anchor="ctr">
+            <a:normAutofit/>
+          </a:bodyPr>
+          <a:lstStyle/>
+          <a:p>
+            <a:pPr indent="0" marL="0">
+              <a:buNone/>
+            </a:pPr>
+            <a:r>
+              <a:rPr lang="en-US" sz="750" b="1" dirty="0">
+                <a:solidFill>
+                  <a:srgbClr val="172033"/>
+                </a:solidFill>
+                <a:latin typeface="Microsoft YaHei" pitchFamily="34" charset="0"/>
+                <a:ea typeface="Microsoft YaHei" pitchFamily="34" charset="-122"/>
+                <a:cs typeface="Microsoft YaHei" pitchFamily="34" charset="-120"/>
+              </a:rPr>
+              <a:t>unlabeled T</a:t>
+            </a:r>
+            <a:endParaRPr lang="en-US" sz="750" dirty="0"/>
+          </a:p>
+        </p:txBody>
+      </p:sp>
+      <p:sp>
+        <p:nvSpPr>
+          <p:cNvPr id="14" name="Shape 12"/>
+          <p:cNvSpPr/>
+          <p:nvPr/>
+        </p:nvSpPr>
+        <p:spPr>
+          <a:xfrm>
+            <a:off x="6894576" y="1499616"/>
+            <a:ext cx="109728" cy="0"/>
+          </a:xfrm>
+          <a:prstGeom prst="line">
+            <a:avLst/>
+          </a:prstGeom>
+          <a:noFill/>
+          <a:ln w="12700">
+            <a:solidFill>
+              <a:srgbClr val="2563EB"/>
+            </a:solidFill>
+            <a:prstDash val="solid"/>
+            <a:tailEnd type="triangle"/>
+          </a:ln>
+        </p:spPr>
+      </p:sp>
+      <p:sp>
+        <p:nvSpPr>
+          <p:cNvPr id="15" name="Shape 13"/>
+          <p:cNvSpPr/>
+          <p:nvPr/>
+        </p:nvSpPr>
+        <p:spPr>
+          <a:xfrm>
+            <a:off x="7031736" y="1234440"/>
+            <a:ext cx="1920240" cy="530352"/>
+          </a:xfrm>
+          <a:prstGeom prst="roundRect">
+            <a:avLst>
+              <a:gd name="adj" fmla="val 8621"/>
+            </a:avLst>
+          </a:prstGeom>
+          <a:solidFill>
+            <a:srgbClr val="F6F8FB"/>
+          </a:solidFill>
+          <a:ln w="10160">
+            <a:solidFill>
+              <a:srgbClr val="D7DEE8"/>
+            </a:solidFill>
+            <a:prstDash val="solid"/>
+          </a:ln>
+        </p:spPr>
+      </p:sp>
+      <p:sp>
+        <p:nvSpPr>
+          <p:cNvPr id="16" name="Text 14"/>
+          <p:cNvSpPr/>
+          <p:nvPr/>
+        </p:nvSpPr>
+        <p:spPr>
+          <a:xfrm>
+            <a:off x="7086600" y="1371600"/>
+            <a:ext cx="1810512" cy="219456"/>
+          </a:xfrm>
+          <a:prstGeom prst="rect">
+            <a:avLst/>
+          </a:prstGeom>
+          <a:noFill/>
+          <a:ln/>
+        </p:spPr>
+        <p:txBody>
+          <a:bodyPr wrap="square" lIns="0" tIns="0" rIns="0" bIns="0" rtlCol="0" anchor="ctr">
+            <a:normAutofit/>
+          </a:bodyPr>
+          <a:lstStyle/>
+          <a:p>
+            <a:pPr indent="0" marL="0">
+              <a:buNone/>
+            </a:pPr>
+            <a:r>
+              <a:rPr lang="en-US" sz="750" b="1" dirty="0">
+                <a:solidFill>
+                  <a:srgbClr val="172033"/>
+                </a:solidFill>
+                <a:latin typeface="Microsoft YaHei" pitchFamily="34" charset="0"/>
+                <a:ea typeface="Microsoft YaHei" pitchFamily="34" charset="-122"/>
+                <a:cs typeface="Microsoft YaHei" pitchFamily="34" charset="-120"/>
+              </a:rPr>
+              <a:t>latest scores</a:t>
+            </a:r>
+            <a:endParaRPr lang="en-US" sz="750" dirty="0"/>
+          </a:p>
+        </p:txBody>
+      </p:sp>
+      <p:sp>
+        <p:nvSpPr>
+          <p:cNvPr id="17" name="Shape 15"/>
+          <p:cNvSpPr/>
+          <p:nvPr/>
+        </p:nvSpPr>
+        <p:spPr>
+          <a:xfrm>
+            <a:off x="8979408" y="1499616"/>
+            <a:ext cx="109728" cy="0"/>
+          </a:xfrm>
+          <a:prstGeom prst="line">
+            <a:avLst/>
+          </a:prstGeom>
+          <a:noFill/>
+          <a:ln w="12700">
+            <a:solidFill>
+              <a:srgbClr val="2563EB"/>
+            </a:solidFill>
+            <a:prstDash val="solid"/>
+            <a:tailEnd type="triangle"/>
+          </a:ln>
+        </p:spPr>
+      </p:sp>
+      <p:sp>
+        <p:nvSpPr>
+          <p:cNvPr id="18" name="Shape 16"/>
+          <p:cNvSpPr/>
+          <p:nvPr/>
+        </p:nvSpPr>
+        <p:spPr>
+          <a:xfrm>
+            <a:off x="9116568" y="1234440"/>
+            <a:ext cx="1920240" cy="530352"/>
+          </a:xfrm>
+          <a:prstGeom prst="roundRect">
+            <a:avLst>
+              <a:gd name="adj" fmla="val 8621"/>
+            </a:avLst>
+          </a:prstGeom>
+          <a:solidFill>
+            <a:srgbClr val="E0F2FE"/>
+          </a:solidFill>
+          <a:ln w="10160">
+            <a:solidFill>
+              <a:srgbClr val="7DD3FC"/>
+            </a:solidFill>
+            <a:prstDash val="solid"/>
+          </a:ln>
+        </p:spPr>
+      </p:sp>
+      <p:sp>
+        <p:nvSpPr>
+          <p:cNvPr id="19" name="Text 17"/>
+          <p:cNvSpPr/>
+          <p:nvPr/>
+        </p:nvSpPr>
+        <p:spPr>
+          <a:xfrm>
+            <a:off x="9171432" y="1371600"/>
+            <a:ext cx="1810512" cy="219456"/>
+          </a:xfrm>
+          <a:prstGeom prst="rect">
+            <a:avLst/>
+          </a:prstGeom>
+          <a:noFill/>
+          <a:ln/>
+        </p:spPr>
+        <p:txBody>
+          <a:bodyPr wrap="square" lIns="0" tIns="0" rIns="0" bIns="0" rtlCol="0" anchor="ctr">
+            <a:normAutofit/>
+          </a:bodyPr>
+          <a:lstStyle/>
+          <a:p>
+            <a:pPr indent="0" marL="0">
+              <a:buNone/>
+            </a:pPr>
+            <a:r>
+              <a:rPr lang="en-US" sz="750" b="1" dirty="0">
+                <a:solidFill>
+                  <a:srgbClr val="172033"/>
+                </a:solidFill>
+                <a:latin typeface="Microsoft YaHei" pitchFamily="34" charset="0"/>
+                <a:ea typeface="Microsoft YaHei" pitchFamily="34" charset="-122"/>
+                <a:cs typeface="Microsoft YaHei" pitchFamily="34" charset="-120"/>
+              </a:rPr>
+              <a:t>result.csv</a:t>
+            </a:r>
+            <a:endParaRPr lang="en-US" sz="750" dirty="0"/>
+          </a:p>
+        </p:txBody>
+      </p:sp>
+      <p:sp>
+        <p:nvSpPr>
+          <p:cNvPr id="20" name="Shape 18"/>
+          <p:cNvSpPr/>
+          <p:nvPr/>
+        </p:nvSpPr>
+        <p:spPr>
+          <a:xfrm>
+            <a:off x="777240" y="2148840"/>
+            <a:ext cx="5212080" cy="2971800"/>
+          </a:xfrm>
+          <a:prstGeom prst="roundRect">
+            <a:avLst>
+              <a:gd name="adj" fmla="val 1538"/>
+            </a:avLst>
+          </a:prstGeom>
+          <a:solidFill>
+            <a:srgbClr val="F8FAFC"/>
+          </a:solidFill>
+          <a:ln w="10160">
+            <a:solidFill>
+              <a:srgbClr val="D7DEE8"/>
+            </a:solidFill>
+            <a:prstDash val="solid"/>
+          </a:ln>
+        </p:spPr>
+      </p:sp>
+      <p:sp>
+        <p:nvSpPr>
+          <p:cNvPr id="21" name="Shape 19"/>
+          <p:cNvSpPr/>
+          <p:nvPr/>
+        </p:nvSpPr>
+        <p:spPr>
+          <a:xfrm>
+            <a:off x="777240" y="2148840"/>
+            <a:ext cx="5212080" cy="310896"/>
+          </a:xfrm>
+          <a:prstGeom prst="rect">
+            <a:avLst/>
+          </a:prstGeom>
+          <a:solidFill>
+            <a:srgbClr val="2563EB"/>
+          </a:solidFill>
+          <a:ln w="12700">
+            <a:solidFill>
+              <a:srgbClr val="2563EB"/>
+            </a:solidFill>
+            <a:prstDash val="solid"/>
+          </a:ln>
+        </p:spPr>
+      </p:sp>
+      <p:sp>
+        <p:nvSpPr>
+          <p:cNvPr id="22" name="Text 20"/>
+          <p:cNvSpPr/>
+          <p:nvPr/>
+        </p:nvSpPr>
+        <p:spPr>
+          <a:xfrm>
+            <a:off x="886968" y="2221992"/>
+            <a:ext cx="4992624" cy="128016"/>
+          </a:xfrm>
+          <a:prstGeom prst="rect">
+            <a:avLst/>
+          </a:prstGeom>
+          <a:noFill/>
+          <a:ln/>
+        </p:spPr>
+        <p:txBody>
+          <a:bodyPr wrap="square" lIns="0" tIns="0" rIns="0" bIns="0" rtlCol="0" anchor="ctr">
+            <a:normAutofit/>
+          </a:bodyPr>
+          <a:lstStyle/>
+          <a:p>
+            <a:pPr indent="0" marL="0">
+              <a:buNone/>
+            </a:pPr>
+            <a:r>
+              <a:rPr lang="en-US" sz="750" b="1" dirty="0">
+                <a:solidFill>
+                  <a:srgbClr val="FFFFFF"/>
+                </a:solidFill>
+                <a:latin typeface="Microsoft YaHei" pitchFamily="34" charset="0"/>
+                <a:ea typeface="Microsoft YaHei" pitchFamily="34" charset="-122"/>
+                <a:cs typeface="Microsoft YaHei" pitchFamily="34" charset="-120"/>
+              </a:rPr>
+              <a:t>src/models/deep_sequence.py</a:t>
+            </a:r>
+            <a:endParaRPr lang="en-US" sz="750" dirty="0"/>
+          </a:p>
+        </p:txBody>
+      </p:sp>
+      <p:sp>
+        <p:nvSpPr>
+          <p:cNvPr id="23" name="Text 21"/>
+          <p:cNvSpPr/>
+          <p:nvPr/>
+        </p:nvSpPr>
+        <p:spPr>
+          <a:xfrm>
+            <a:off x="886968" y="2587752"/>
+            <a:ext cx="4992624" cy="2441448"/>
+          </a:xfrm>
+          <a:prstGeom prst="rect">
+            <a:avLst/>
+          </a:prstGeom>
+          <a:noFill/>
+          <a:ln/>
+        </p:spPr>
+        <p:txBody>
+          <a:bodyPr wrap="square" lIns="0" tIns="0" rIns="0" bIns="0" rtlCol="0" anchor="ctr">
+            <a:normAutofit/>
+          </a:bodyPr>
+          <a:lstStyle/>
+          <a:p>
+            <a:pPr indent="0" marL="0">
+              <a:buNone/>
+            </a:pPr>
+            <a:r>
+              <a:rPr lang="en-US" sz="660" dirty="0">
+                <a:solidFill>
+                  <a:srgbClr val="111827"/>
+                </a:solidFill>
+                <a:latin typeface="Consolas" pitchFamily="34" charset="0"/>
+                <a:ea typeface="Consolas" pitchFamily="34" charset="-122"/>
+                <a:cs typeface="Consolas" pitchFamily="34" charset="-120"/>
+              </a:rPr>
+              <a:t>def build_prediction_sequences(df, feature_cols, target_date, ...):</a:t>
+            </a:r>
+            <a:endParaRPr lang="en-US" sz="660" dirty="0"/>
+          </a:p>
+          <a:p>
+            <a:pPr indent="0" marL="0">
+              <a:buNone/>
+            </a:pPr>
+            <a:r>
+              <a:rPr lang="en-US" sz="660" dirty="0">
+                <a:solidFill>
+                  <a:srgbClr val="111827"/>
+                </a:solidFill>
+                <a:latin typeface="Consolas" pitchFamily="34" charset="0"/>
+                <a:ea typeface="Consolas" pitchFamily="34" charset="-122"/>
+                <a:cs typeface="Consolas" pitchFamily="34" charset="-120"/>
+              </a:rPr>
+              <a:t>    """Build model input sequences ending at target_date</a:t>
+            </a:r>
+            <a:endParaRPr lang="en-US" sz="660" dirty="0"/>
+          </a:p>
+          <a:p>
+            <a:pPr indent="0" marL="0">
+              <a:buNone/>
+            </a:pPr>
+            <a:r>
+              <a:rPr lang="en-US" sz="660" dirty="0">
+                <a:solidFill>
+                  <a:srgbClr val="111827"/>
+                </a:solidFill>
+                <a:latin typeface="Consolas" pitchFamily="34" charset="0"/>
+                <a:ea typeface="Consolas" pitchFamily="34" charset="-122"/>
+                <a:cs typeface="Consolas" pitchFamily="34" charset="-120"/>
+              </a:rPr>
+              <a:t>    for stocks without labels."""</a:t>
+            </a:r>
+            <a:endParaRPr lang="en-US" sz="660" dirty="0"/>
+          </a:p>
+          <a:p>
+            <a:pPr indent="0" marL="0">
+              <a:buNone/>
+            </a:pPr>
+            <a:r>
+              <a:rPr lang="en-US" sz="660" dirty="0">
+                <a:solidFill>
+                  <a:srgbClr val="111827"/>
+                </a:solidFill>
+                <a:latin typeface="Consolas" pitchFamily="34" charset="0"/>
+                <a:ea typeface="Consolas" pitchFamily="34" charset="-122"/>
+                <a:cs typeface="Consolas" pitchFamily="34" charset="-120"/>
+              </a:rPr>
+              <a:t>    target_rows = df[df["date"] == target_date]</a:t>
+            </a:r>
+            <a:endParaRPr lang="en-US" sz="660" dirty="0"/>
+          </a:p>
+          <a:p>
+            <a:pPr indent="0" marL="0">
+              <a:buNone/>
+            </a:pPr>
+            <a:r>
+              <a:rPr lang="en-US" sz="660" dirty="0">
+                <a:solidFill>
+                  <a:srgbClr val="111827"/>
+                </a:solidFill>
+                <a:latin typeface="Consolas" pitchFamily="34" charset="0"/>
+                <a:ea typeface="Consolas" pitchFamily="34" charset="-122"/>
+                <a:cs typeface="Consolas" pitchFamily="34" charset="-120"/>
+              </a:rPr>
+              <a:t>    for stock_id in target_rows["stock_id"]:</a:t>
+            </a:r>
+            <a:endParaRPr lang="en-US" sz="660" dirty="0"/>
+          </a:p>
+          <a:p>
+            <a:pPr indent="0" marL="0">
+              <a:buNone/>
+            </a:pPr>
+            <a:r>
+              <a:rPr lang="en-US" sz="660" dirty="0">
+                <a:solidFill>
+                  <a:srgbClr val="111827"/>
+                </a:solidFill>
+                <a:latin typeface="Consolas" pitchFamily="34" charset="0"/>
+                <a:ea typeface="Consolas" pitchFamily="34" charset="-122"/>
+                <a:cs typeface="Consolas" pitchFamily="34" charset="-120"/>
+              </a:rPr>
+              <a:t>        hist = df[(df.stock_id == stock_id) &amp; (df.date &lt;= target_date)]</a:t>
+            </a:r>
+            <a:endParaRPr lang="en-US" sz="660" dirty="0"/>
+          </a:p>
+          <a:p>
+            <a:pPr indent="0" marL="0">
+              <a:buNone/>
+            </a:pPr>
+            <a:r>
+              <a:rPr lang="en-US" sz="660" dirty="0">
+                <a:solidFill>
+                  <a:srgbClr val="111827"/>
+                </a:solidFill>
+                <a:latin typeface="Consolas" pitchFamily="34" charset="0"/>
+                <a:ea typeface="Consolas" pitchFamily="34" charset="-122"/>
+                <a:cs typeface="Consolas" pitchFamily="34" charset="-120"/>
+              </a:rPr>
+              <a:t>        sequences.append(hist[feature_cols].tail(seq_len))</a:t>
+            </a:r>
+            <a:endParaRPr lang="en-US" sz="660" dirty="0"/>
+          </a:p>
+        </p:txBody>
+      </p:sp>
+      <p:sp>
+        <p:nvSpPr>
+          <p:cNvPr id="24" name="Shape 22"/>
+          <p:cNvSpPr/>
+          <p:nvPr/>
+        </p:nvSpPr>
+        <p:spPr>
+          <a:xfrm>
+            <a:off x="6263640" y="2148840"/>
+            <a:ext cx="5074920" cy="2971800"/>
+          </a:xfrm>
+          <a:prstGeom prst="roundRect">
+            <a:avLst>
+              <a:gd name="adj" fmla="val 1538"/>
+            </a:avLst>
+          </a:prstGeom>
+          <a:solidFill>
+            <a:srgbClr val="F8FAFC"/>
+          </a:solidFill>
+          <a:ln w="10160">
+            <a:solidFill>
+              <a:srgbClr val="D7DEE8"/>
+            </a:solidFill>
+            <a:prstDash val="solid"/>
+          </a:ln>
+        </p:spPr>
+      </p:sp>
+      <p:sp>
+        <p:nvSpPr>
+          <p:cNvPr id="25" name="Shape 23"/>
+          <p:cNvSpPr/>
+          <p:nvPr/>
+        </p:nvSpPr>
+        <p:spPr>
+          <a:xfrm>
+            <a:off x="6263640" y="2148840"/>
+            <a:ext cx="5074920" cy="310896"/>
+          </a:xfrm>
+          <a:prstGeom prst="rect">
+            <a:avLst/>
+          </a:prstGeom>
+          <a:solidFill>
+            <a:srgbClr val="059669"/>
+          </a:solidFill>
+          <a:ln w="12700">
+            <a:solidFill>
+              <a:srgbClr val="059669"/>
+            </a:solidFill>
+            <a:prstDash val="solid"/>
+          </a:ln>
+        </p:spPr>
+      </p:sp>
+      <p:sp>
+        <p:nvSpPr>
+          <p:cNvPr id="26" name="Text 24"/>
+          <p:cNvSpPr/>
+          <p:nvPr/>
+        </p:nvSpPr>
+        <p:spPr>
+          <a:xfrm>
+            <a:off x="6373368" y="2221992"/>
+            <a:ext cx="4855464" cy="128016"/>
+          </a:xfrm>
+          <a:prstGeom prst="rect">
+            <a:avLst/>
+          </a:prstGeom>
+          <a:noFill/>
+          <a:ln/>
+        </p:spPr>
+        <p:txBody>
+          <a:bodyPr wrap="square" lIns="0" tIns="0" rIns="0" bIns="0" rtlCol="0" anchor="ctr">
+            <a:normAutofit/>
+          </a:bodyPr>
+          <a:lstStyle/>
+          <a:p>
+            <a:pPr indent="0" marL="0">
+              <a:buNone/>
+            </a:pPr>
+            <a:r>
+              <a:rPr lang="en-US" sz="750" b="1" dirty="0">
+                <a:solidFill>
+                  <a:srgbClr val="FFFFFF"/>
+                </a:solidFill>
+                <a:latin typeface="Microsoft YaHei" pitchFamily="34" charset="0"/>
+                <a:ea typeface="Microsoft YaHei" pitchFamily="34" charset="-122"/>
+                <a:cs typeface="Microsoft YaHei" pitchFamily="34" charset="-120"/>
+              </a:rPr>
+              <a:t>scripts/train_master_baseline.py</a:t>
+            </a:r>
+            <a:endParaRPr lang="en-US" sz="750" dirty="0"/>
+          </a:p>
+        </p:txBody>
+      </p:sp>
+      <p:sp>
+        <p:nvSpPr>
+          <p:cNvPr id="27" name="Text 25"/>
+          <p:cNvSpPr/>
+          <p:nvPr/>
+        </p:nvSpPr>
+        <p:spPr>
+          <a:xfrm>
+            <a:off x="6373368" y="2587752"/>
+            <a:ext cx="4855464" cy="2441448"/>
+          </a:xfrm>
+          <a:prstGeom prst="rect">
+            <a:avLst/>
+          </a:prstGeom>
+          <a:noFill/>
+          <a:ln/>
+        </p:spPr>
+        <p:txBody>
+          <a:bodyPr wrap="square" lIns="0" tIns="0" rIns="0" bIns="0" rtlCol="0" anchor="ctr">
+            <a:normAutofit/>
+          </a:bodyPr>
+          <a:lstStyle/>
+          <a:p>
+            <a:pPr indent="0" marL="0">
+              <a:buNone/>
+            </a:pPr>
+            <a:r>
+              <a:rPr lang="en-US" sz="660" dirty="0">
+                <a:solidFill>
+                  <a:srgbClr val="111827"/>
+                </a:solidFill>
+                <a:latin typeface="Consolas" pitchFamily="34" charset="0"/>
+                <a:ea typeface="Consolas" pitchFamily="34" charset="-122"/>
+                <a:cs typeface="Consolas" pitchFamily="34" charset="-120"/>
+              </a:rPr>
+              <a:t>inference_date_value = cfg.get("inference_date")</a:t>
+            </a:r>
+            <a:endParaRPr lang="en-US" sz="660" dirty="0"/>
+          </a:p>
+          <a:p>
+            <a:pPr indent="0" marL="0">
+              <a:buNone/>
+            </a:pPr>
+            <a:r>
+              <a:rPr lang="en-US" sz="660" dirty="0">
+                <a:solidFill>
+                  <a:srgbClr val="111827"/>
+                </a:solidFill>
+                <a:latin typeface="Consolas" pitchFamily="34" charset="0"/>
+                <a:ea typeface="Consolas" pitchFamily="34" charset="-122"/>
+                <a:cs typeface="Consolas" pitchFamily="34" charset="-120"/>
+              </a:rPr>
+              <a:t>inference_date = pd.to_datetime(inference_date_value) if inference_date_value else processed["date"].max()</a:t>
+            </a:r>
+            <a:endParaRPr lang="en-US" sz="660" dirty="0"/>
+          </a:p>
+          <a:p>
+            <a:pPr indent="0" marL="0">
+              <a:buNone/>
+            </a:pPr>
+            <a:r>
+              <a:rPr lang="en-US" sz="660" dirty="0">
+                <a:solidFill>
+                  <a:srgbClr val="111827"/>
+                </a:solidFill>
+                <a:latin typeface="Consolas" pitchFamily="34" charset="0"/>
+                <a:ea typeface="Consolas" pitchFamily="34" charset="-122"/>
+                <a:cs typeface="Consolas" pitchFamily="34" charset="-120"/>
+              </a:rPr>
+              <a:t>infer_x, infer_meta = build_prediction_sequences(</a:t>
+            </a:r>
+            <a:endParaRPr lang="en-US" sz="660" dirty="0"/>
+          </a:p>
+          <a:p>
+            <a:pPr indent="0" marL="0">
+              <a:buNone/>
+            </a:pPr>
+            <a:r>
+              <a:rPr lang="en-US" sz="660" dirty="0">
+                <a:solidFill>
+                  <a:srgbClr val="111827"/>
+                </a:solidFill>
+                <a:latin typeface="Consolas" pitchFamily="34" charset="0"/>
+                <a:ea typeface="Consolas" pitchFamily="34" charset="-122"/>
+                <a:cs typeface="Consolas" pitchFamily="34" charset="-120"/>
+              </a:rPr>
+              <a:t>    processed,</a:t>
+            </a:r>
+            <a:endParaRPr lang="en-US" sz="660" dirty="0"/>
+          </a:p>
+          <a:p>
+            <a:pPr indent="0" marL="0">
+              <a:buNone/>
+            </a:pPr>
+            <a:r>
+              <a:rPr lang="en-US" sz="660" dirty="0">
+                <a:solidFill>
+                  <a:srgbClr val="111827"/>
+                </a:solidFill>
+                <a:latin typeface="Consolas" pitchFamily="34" charset="0"/>
+                <a:ea typeface="Consolas" pitchFamily="34" charset="-122"/>
+                <a:cs typeface="Consolas" pitchFamily="34" charset="-120"/>
+              </a:rPr>
+              <a:t>    feature_cols=feature_cols,</a:t>
+            </a:r>
+            <a:endParaRPr lang="en-US" sz="660" dirty="0"/>
+          </a:p>
+          <a:p>
+            <a:pPr indent="0" marL="0">
+              <a:buNone/>
+            </a:pPr>
+            <a:r>
+              <a:rPr lang="en-US" sz="660" dirty="0">
+                <a:solidFill>
+                  <a:srgbClr val="111827"/>
+                </a:solidFill>
+                <a:latin typeface="Consolas" pitchFamily="34" charset="0"/>
+                <a:ea typeface="Consolas" pitchFamily="34" charset="-122"/>
+                <a:cs typeface="Consolas" pitchFamily="34" charset="-120"/>
+              </a:rPr>
+              <a:t>    target_date=inference_date,</a:t>
+            </a:r>
+            <a:endParaRPr lang="en-US" sz="660" dirty="0"/>
+          </a:p>
+          <a:p>
+            <a:pPr indent="0" marL="0">
+              <a:buNone/>
+            </a:pPr>
+            <a:r>
+              <a:rPr lang="en-US" sz="660" dirty="0">
+                <a:solidFill>
+                  <a:srgbClr val="111827"/>
+                </a:solidFill>
+                <a:latin typeface="Consolas" pitchFamily="34" charset="0"/>
+                <a:ea typeface="Consolas" pitchFamily="34" charset="-122"/>
+                <a:cs typeface="Consolas" pitchFamily="34" charset="-120"/>
+              </a:rPr>
+              <a:t>)</a:t>
+            </a:r>
+            <a:endParaRPr lang="en-US" sz="660" dirty="0"/>
+          </a:p>
+          <a:p>
+            <a:pPr indent="0" marL="0">
+              <a:buNone/>
+            </a:pPr>
+            <a:r>
+              <a:rPr lang="en-US" sz="660" dirty="0">
+                <a:solidFill>
+                  <a:srgbClr val="111827"/>
+                </a:solidFill>
+                <a:latin typeface="Consolas" pitchFamily="34" charset="0"/>
+                <a:ea typeface="Consolas" pitchFamily="34" charset="-122"/>
+                <a:cs typeface="Consolas" pitchFamily="34" charset="-120"/>
+              </a:rPr>
+              <a:t>dataset.x_infer = infer_x</a:t>
+            </a:r>
+            <a:endParaRPr lang="en-US" sz="660" dirty="0"/>
+          </a:p>
+          <a:p>
+            <a:pPr indent="0" marL="0">
+              <a:buNone/>
+            </a:pPr>
+            <a:r>
+              <a:rPr lang="en-US" sz="660" dirty="0">
+                <a:solidFill>
+                  <a:srgbClr val="111827"/>
+                </a:solidFill>
+                <a:latin typeface="Consolas" pitchFamily="34" charset="0"/>
+                <a:ea typeface="Consolas" pitchFamily="34" charset="-122"/>
+                <a:cs typeface="Consolas" pitchFamily="34" charset="-120"/>
+              </a:rPr>
+              <a:t>dataset.infer_meta = infer_meta</a:t>
+            </a:r>
+            <a:endParaRPr lang="en-US" sz="660" dirty="0"/>
+          </a:p>
+        </p:txBody>
+      </p:sp>
+      <p:sp>
+        <p:nvSpPr>
+          <p:cNvPr id="28" name="Shape 26"/>
+          <p:cNvSpPr/>
+          <p:nvPr/>
+        </p:nvSpPr>
+        <p:spPr>
+          <a:xfrm>
+            <a:off x="2880360" y="5715000"/>
+            <a:ext cx="4892040" cy="310896"/>
+          </a:xfrm>
+          <a:prstGeom prst="roundRect">
+            <a:avLst>
+              <a:gd name="adj" fmla="val 23529"/>
+            </a:avLst>
+          </a:prstGeom>
+          <a:solidFill>
+            <a:srgbClr val="DC2626"/>
+          </a:solidFill>
+          <a:ln w="12700">
+            <a:solidFill>
+              <a:srgbClr val="DC2626"/>
+            </a:solidFill>
+            <a:prstDash val="solid"/>
+          </a:ln>
+        </p:spPr>
+      </p:sp>
+      <p:sp>
+        <p:nvSpPr>
+          <p:cNvPr id="29" name="Text 27"/>
+          <p:cNvSpPr/>
+          <p:nvPr/>
+        </p:nvSpPr>
+        <p:spPr>
+          <a:xfrm>
+            <a:off x="2953512" y="5769864"/>
+            <a:ext cx="4745736" cy="164592"/>
+          </a:xfrm>
+          <a:prstGeom prst="rect">
+            <a:avLst/>
+          </a:prstGeom>
+          <a:noFill/>
+          <a:ln/>
+        </p:spPr>
+        <p:txBody>
+          <a:bodyPr wrap="square" lIns="0" tIns="0" rIns="0" bIns="0" rtlCol="0" anchor="ctr">
+            <a:normAutofit/>
+          </a:bodyPr>
+          <a:lstStyle/>
+          <a:p>
+            <a:pPr indent="0" marL="0">
+              <a:buNone/>
+            </a:pPr>
+            <a:r>
+              <a:rPr lang="en-US" sz="800" b="1" dirty="0">
+                <a:solidFill>
+                  <a:srgbClr val="FFFFFF"/>
+                </a:solidFill>
+                <a:latin typeface="Microsoft YaHei" pitchFamily="34" charset="0"/>
+                <a:ea typeface="Microsoft YaHei" pitchFamily="34" charset="-122"/>
+                <a:cs typeface="Microsoft YaHei" pitchFamily="34" charset="-120"/>
+              </a:rPr>
+              <a:t>Must assert latest_pred.date == configured T before submission</a:t>
+            </a:r>
+            <a:endParaRPr lang="en-US" sz="800" dirty="0"/>
+          </a:p>
+        </p:txBody>
+      </p:sp>
+    </p:spTree>
+  </p:cSld>
+  <p:clrMapOvr>
+    <a:masterClrMapping/>
+  </p:clrMapOvr>
+</p:sld>
+</file>
+
+<file path=ppt/slides/slide14.xml><?xml version="1.0" encoding="utf-8"?>
+<p:sld xmlns:a="http://schemas.openxmlformats.org/drawingml/2006/main" xmlns:r="http://schemas.openxmlformats.org/officeDocument/2006/relationships" xmlns:p="http://schemas.openxmlformats.org/presentationml/2006/main">
+  <p:cSld name="Slide 14">
+    <p:bg>
+      <p:bgPr>
+        <a:solidFill>
+          <a:srgbClr val="FFFFFF"/>
+        </a:solidFill>
+      </p:bgPr>
+    </p:bg>
+    <p:spTree>
+      <p:nvGrpSpPr>
+        <p:cNvPr id="1" name=""/>
+        <p:cNvGrpSpPr/>
+        <p:nvPr/>
+      </p:nvGrpSpPr>
+      <p:grpSpPr>
+        <a:xfrm>
+          <a:off x="0" y="0"/>
+          <a:ext cx="0" cy="0"/>
+          <a:chOff x="0" y="0"/>
+          <a:chExt cx="0" cy="0"/>
+        </a:xfrm>
+      </p:grpSpPr>
+      <p:sp>
+        <p:nvSpPr>
+          <p:cNvPr id="2" name="Text 0"/>
+          <p:cNvSpPr/>
+          <p:nvPr/>
+        </p:nvSpPr>
+        <p:spPr>
+          <a:xfrm>
+            <a:off x="502920" y="256032"/>
+            <a:ext cx="2194560" cy="201168"/>
+          </a:xfrm>
+          <a:prstGeom prst="rect">
+            <a:avLst/>
+          </a:prstGeom>
+          <a:noFill/>
+          <a:ln/>
+        </p:spPr>
+        <p:txBody>
+          <a:bodyPr wrap="square" lIns="0" tIns="0" rIns="0" bIns="0" rtlCol="0" anchor="ctr"/>
+          <a:lstStyle/>
+          <a:p>
+            <a:pPr indent="0" marL="0">
+              <a:buNone/>
+            </a:pPr>
+            <a:r>
+              <a:rPr lang="en-US" sz="800" b="1" dirty="0">
+                <a:solidFill>
+                  <a:srgbClr val="2563EB"/>
+                </a:solidFill>
+                <a:latin typeface="Microsoft YaHei" pitchFamily="34" charset="0"/>
+                <a:ea typeface="Microsoft YaHei" pitchFamily="34" charset="-122"/>
+                <a:cs typeface="Microsoft YaHei" pitchFamily="34" charset="-120"/>
+              </a:rPr>
+              <a:t>SOURCE APPENDIX</a:t>
+            </a:r>
+            <a:endParaRPr lang="en-US" sz="800" dirty="0"/>
+          </a:p>
+        </p:txBody>
+      </p:sp>
+      <p:sp>
+        <p:nvSpPr>
+          <p:cNvPr id="3" name="Text 1"/>
+          <p:cNvSpPr/>
+          <p:nvPr/>
+        </p:nvSpPr>
+        <p:spPr>
+          <a:xfrm>
+            <a:off x="502920" y="530352"/>
+            <a:ext cx="9875520" cy="384048"/>
+          </a:xfrm>
+          <a:prstGeom prst="rect">
+            <a:avLst/>
+          </a:prstGeom>
+          <a:noFill/>
+          <a:ln/>
+        </p:spPr>
+        <p:txBody>
+          <a:bodyPr wrap="square" lIns="0" tIns="0" rIns="0" bIns="0" rtlCol="0" anchor="ctr">
+            <a:normAutofit/>
+          </a:bodyPr>
+          <a:lstStyle/>
+          <a:p>
+            <a:pPr indent="0" marL="0">
+              <a:buNone/>
+            </a:pPr>
+            <a:r>
+              <a:rPr lang="en-US" sz="2400" b="1" dirty="0">
+                <a:solidFill>
+                  <a:srgbClr val="172033"/>
+                </a:solidFill>
+                <a:latin typeface="Microsoft YaHei" pitchFamily="34" charset="0"/>
+                <a:ea typeface="Microsoft YaHei" pitchFamily="34" charset="-122"/>
+                <a:cs typeface="Microsoft YaHei" pitchFamily="34" charset="-120"/>
+              </a:rPr>
+              <a:t>P1 source: confidence-aware portfolio allocation</a:t>
+            </a:r>
+            <a:endParaRPr lang="en-US" sz="2400" dirty="0"/>
+          </a:p>
+        </p:txBody>
+      </p:sp>
+      <p:sp>
+        <p:nvSpPr>
+          <p:cNvPr id="4" name="Shape 2"/>
+          <p:cNvSpPr/>
+          <p:nvPr/>
+        </p:nvSpPr>
+        <p:spPr>
+          <a:xfrm>
+            <a:off x="502920" y="1051560"/>
+            <a:ext cx="11155680" cy="0"/>
+          </a:xfrm>
+          <a:prstGeom prst="line">
+            <a:avLst/>
+          </a:prstGeom>
+          <a:noFill/>
+          <a:ln w="12700">
+            <a:solidFill>
+              <a:srgbClr val="D7DEE8"/>
+            </a:solidFill>
+            <a:prstDash val="solid"/>
+          </a:ln>
+        </p:spPr>
+      </p:sp>
+      <p:sp>
+        <p:nvSpPr>
+          <p:cNvPr id="5" name="Text 3"/>
+          <p:cNvSpPr/>
+          <p:nvPr/>
+        </p:nvSpPr>
+        <p:spPr>
+          <a:xfrm>
+            <a:off x="8229600" y="6446520"/>
+            <a:ext cx="3383280" cy="201168"/>
+          </a:xfrm>
+          <a:prstGeom prst="rect">
+            <a:avLst/>
+          </a:prstGeom>
+          <a:noFill/>
+          <a:ln/>
+        </p:spPr>
+        <p:txBody>
+          <a:bodyPr wrap="square" lIns="0" tIns="0" rIns="0" bIns="0" rtlCol="0" anchor="ctr"/>
+          <a:lstStyle/>
+          <a:p>
+            <a:pPr algn="r" indent="0" marL="0">
+              <a:buNone/>
+            </a:pPr>
+            <a:r>
+              <a:rPr lang="en-US" sz="750" dirty="0">
+                <a:solidFill>
+                  <a:srgbClr val="94A3B8"/>
+                </a:solidFill>
+              </a:rPr>
+              <a:t>2026-05-07 · CSI300 Competition Review</a:t>
+            </a:r>
+            <a:endParaRPr lang="en-US" sz="750" dirty="0"/>
+          </a:p>
+        </p:txBody>
+      </p:sp>
+      <p:sp>
+        <p:nvSpPr>
+          <p:cNvPr id="6" name="Shape 4"/>
+          <p:cNvSpPr/>
+          <p:nvPr/>
+        </p:nvSpPr>
+        <p:spPr>
+          <a:xfrm>
+            <a:off x="777240" y="1234440"/>
+            <a:ext cx="1920240" cy="530352"/>
+          </a:xfrm>
+          <a:prstGeom prst="roundRect">
+            <a:avLst>
+              <a:gd name="adj" fmla="val 8621"/>
+            </a:avLst>
+          </a:prstGeom>
+          <a:solidFill>
+            <a:srgbClr val="F6F8FB"/>
+          </a:solidFill>
+          <a:ln w="10160">
+            <a:solidFill>
+              <a:srgbClr val="D7DEE8"/>
+            </a:solidFill>
+            <a:prstDash val="solid"/>
+          </a:ln>
+        </p:spPr>
+      </p:sp>
+      <p:sp>
+        <p:nvSpPr>
+          <p:cNvPr id="7" name="Text 5"/>
+          <p:cNvSpPr/>
+          <p:nvPr/>
+        </p:nvSpPr>
+        <p:spPr>
+          <a:xfrm>
+            <a:off x="832104" y="1371600"/>
+            <a:ext cx="1810512" cy="219456"/>
+          </a:xfrm>
+          <a:prstGeom prst="rect">
+            <a:avLst/>
+          </a:prstGeom>
+          <a:noFill/>
+          <a:ln/>
+        </p:spPr>
+        <p:txBody>
+          <a:bodyPr wrap="square" lIns="0" tIns="0" rIns="0" bIns="0" rtlCol="0" anchor="ctr">
+            <a:normAutofit/>
+          </a:bodyPr>
+          <a:lstStyle/>
+          <a:p>
+            <a:pPr indent="0" marL="0">
+              <a:buNone/>
+            </a:pPr>
+            <a:r>
+              <a:rPr lang="en-US" sz="750" b="1" dirty="0">
+                <a:solidFill>
+                  <a:srgbClr val="172033"/>
+                </a:solidFill>
+                <a:latin typeface="Microsoft YaHei" pitchFamily="34" charset="0"/>
+                <a:ea typeface="Microsoft YaHei" pitchFamily="34" charset="-122"/>
+                <a:cs typeface="Microsoft YaHei" pitchFamily="34" charset="-120"/>
+              </a:rPr>
+              <a:t>scores</a:t>
+            </a:r>
+            <a:endParaRPr lang="en-US" sz="750" dirty="0"/>
+          </a:p>
+        </p:txBody>
+      </p:sp>
+      <p:sp>
+        <p:nvSpPr>
+          <p:cNvPr id="8" name="Shape 6"/>
+          <p:cNvSpPr/>
+          <p:nvPr/>
+        </p:nvSpPr>
+        <p:spPr>
+          <a:xfrm>
+            <a:off x="2724912" y="1499616"/>
+            <a:ext cx="109728" cy="0"/>
+          </a:xfrm>
+          <a:prstGeom prst="line">
+            <a:avLst/>
+          </a:prstGeom>
+          <a:noFill/>
+          <a:ln w="12700">
+            <a:solidFill>
+              <a:srgbClr val="059669"/>
+            </a:solidFill>
+            <a:prstDash val="solid"/>
+            <a:tailEnd type="triangle"/>
+          </a:ln>
+        </p:spPr>
+      </p:sp>
+      <p:sp>
+        <p:nvSpPr>
+          <p:cNvPr id="9" name="Shape 7"/>
+          <p:cNvSpPr/>
+          <p:nvPr/>
+        </p:nvSpPr>
+        <p:spPr>
+          <a:xfrm>
+            <a:off x="2862072" y="1234440"/>
+            <a:ext cx="1920240" cy="530352"/>
+          </a:xfrm>
+          <a:prstGeom prst="roundRect">
+            <a:avLst>
+              <a:gd name="adj" fmla="val 8621"/>
+            </a:avLst>
+          </a:prstGeom>
+          <a:solidFill>
+            <a:srgbClr val="F6F8FB"/>
+          </a:solidFill>
+          <a:ln w="10160">
+            <a:solidFill>
+              <a:srgbClr val="D7DEE8"/>
+            </a:solidFill>
+            <a:prstDash val="solid"/>
+          </a:ln>
+        </p:spPr>
+      </p:sp>
+      <p:sp>
+        <p:nvSpPr>
+          <p:cNvPr id="10" name="Text 8"/>
+          <p:cNvSpPr/>
+          <p:nvPr/>
+        </p:nvSpPr>
+        <p:spPr>
+          <a:xfrm>
+            <a:off x="2916936" y="1371600"/>
+            <a:ext cx="1810512" cy="219456"/>
+          </a:xfrm>
+          <a:prstGeom prst="rect">
+            <a:avLst/>
+          </a:prstGeom>
+          <a:noFill/>
+          <a:ln/>
+        </p:spPr>
+        <p:txBody>
+          <a:bodyPr wrap="square" lIns="0" tIns="0" rIns="0" bIns="0" rtlCol="0" anchor="ctr">
+            <a:normAutofit/>
+          </a:bodyPr>
+          <a:lstStyle/>
+          <a:p>
+            <a:pPr indent="0" marL="0">
+              <a:buNone/>
+            </a:pPr>
+            <a:r>
+              <a:rPr lang="en-US" sz="750" b="1" dirty="0">
+                <a:solidFill>
+                  <a:srgbClr val="172033"/>
+                </a:solidFill>
+                <a:latin typeface="Microsoft YaHei" pitchFamily="34" charset="0"/>
+                <a:ea typeface="Microsoft YaHei" pitchFamily="34" charset="-122"/>
+                <a:cs typeface="Microsoft YaHei" pitchFamily="34" charset="-120"/>
+              </a:rPr>
+              <a:t>rank</a:t>
+            </a:r>
+            <a:endParaRPr lang="en-US" sz="750" dirty="0"/>
+          </a:p>
+        </p:txBody>
+      </p:sp>
+      <p:sp>
+        <p:nvSpPr>
+          <p:cNvPr id="11" name="Shape 9"/>
+          <p:cNvSpPr/>
+          <p:nvPr/>
+        </p:nvSpPr>
+        <p:spPr>
+          <a:xfrm>
+            <a:off x="4809744" y="1499616"/>
+            <a:ext cx="109728" cy="0"/>
+          </a:xfrm>
+          <a:prstGeom prst="line">
+            <a:avLst/>
+          </a:prstGeom>
+          <a:noFill/>
+          <a:ln w="12700">
+            <a:solidFill>
+              <a:srgbClr val="059669"/>
+            </a:solidFill>
+            <a:prstDash val="solid"/>
+            <a:tailEnd type="triangle"/>
+          </a:ln>
+        </p:spPr>
+      </p:sp>
+      <p:sp>
+        <p:nvSpPr>
+          <p:cNvPr id="12" name="Shape 10"/>
+          <p:cNvSpPr/>
+          <p:nvPr/>
+        </p:nvSpPr>
+        <p:spPr>
+          <a:xfrm>
+            <a:off x="4946904" y="1234440"/>
+            <a:ext cx="1920240" cy="530352"/>
+          </a:xfrm>
+          <a:prstGeom prst="roundRect">
+            <a:avLst>
+              <a:gd name="adj" fmla="val 8621"/>
+            </a:avLst>
+          </a:prstGeom>
+          <a:solidFill>
+            <a:srgbClr val="F6F8FB"/>
+          </a:solidFill>
+          <a:ln w="10160">
+            <a:solidFill>
+              <a:srgbClr val="D7DEE8"/>
+            </a:solidFill>
+            <a:prstDash val="solid"/>
+          </a:ln>
+        </p:spPr>
+      </p:sp>
+      <p:sp>
+        <p:nvSpPr>
+          <p:cNvPr id="13" name="Text 11"/>
+          <p:cNvSpPr/>
+          <p:nvPr/>
+        </p:nvSpPr>
+        <p:spPr>
+          <a:xfrm>
+            <a:off x="5001768" y="1371600"/>
+            <a:ext cx="1810512" cy="219456"/>
+          </a:xfrm>
+          <a:prstGeom prst="rect">
+            <a:avLst/>
+          </a:prstGeom>
+          <a:noFill/>
+          <a:ln/>
+        </p:spPr>
+        <p:txBody>
+          <a:bodyPr wrap="square" lIns="0" tIns="0" rIns="0" bIns="0" rtlCol="0" anchor="ctr">
+            <a:normAutofit/>
+          </a:bodyPr>
+          <a:lstStyle/>
+          <a:p>
+            <a:pPr indent="0" marL="0">
+              <a:buNone/>
+            </a:pPr>
+            <a:r>
+              <a:rPr lang="en-US" sz="750" b="1" dirty="0">
+                <a:solidFill>
+                  <a:srgbClr val="172033"/>
+                </a:solidFill>
+                <a:latin typeface="Microsoft YaHei" pitchFamily="34" charset="0"/>
+                <a:ea typeface="Microsoft YaHei" pitchFamily="34" charset="-122"/>
+                <a:cs typeface="Microsoft YaHei" pitchFamily="34" charset="-120"/>
+              </a:rPr>
+              <a:t>margin/std</a:t>
+            </a:r>
+            <a:endParaRPr lang="en-US" sz="750" dirty="0"/>
+          </a:p>
+        </p:txBody>
+      </p:sp>
+      <p:sp>
+        <p:nvSpPr>
+          <p:cNvPr id="14" name="Shape 12"/>
+          <p:cNvSpPr/>
+          <p:nvPr/>
+        </p:nvSpPr>
+        <p:spPr>
+          <a:xfrm>
+            <a:off x="6894576" y="1499616"/>
+            <a:ext cx="109728" cy="0"/>
+          </a:xfrm>
+          <a:prstGeom prst="line">
+            <a:avLst/>
+          </a:prstGeom>
+          <a:noFill/>
+          <a:ln w="12700">
+            <a:solidFill>
+              <a:srgbClr val="059669"/>
+            </a:solidFill>
+            <a:prstDash val="solid"/>
+            <a:tailEnd type="triangle"/>
+          </a:ln>
+        </p:spPr>
+      </p:sp>
+      <p:sp>
+        <p:nvSpPr>
+          <p:cNvPr id="15" name="Shape 13"/>
+          <p:cNvSpPr/>
+          <p:nvPr/>
+        </p:nvSpPr>
+        <p:spPr>
+          <a:xfrm>
+            <a:off x="7031736" y="1234440"/>
+            <a:ext cx="1920240" cy="530352"/>
+          </a:xfrm>
+          <a:prstGeom prst="roundRect">
+            <a:avLst>
+              <a:gd name="adj" fmla="val 8621"/>
+            </a:avLst>
+          </a:prstGeom>
+          <a:solidFill>
+            <a:srgbClr val="F6F8FB"/>
+          </a:solidFill>
+          <a:ln w="10160">
+            <a:solidFill>
+              <a:srgbClr val="D7DEE8"/>
+            </a:solidFill>
+            <a:prstDash val="solid"/>
+          </a:ln>
+        </p:spPr>
+      </p:sp>
+      <p:sp>
+        <p:nvSpPr>
+          <p:cNvPr id="16" name="Text 14"/>
+          <p:cNvSpPr/>
+          <p:nvPr/>
+        </p:nvSpPr>
+        <p:spPr>
+          <a:xfrm>
+            <a:off x="7086600" y="1371600"/>
+            <a:ext cx="1810512" cy="219456"/>
+          </a:xfrm>
+          <a:prstGeom prst="rect">
+            <a:avLst/>
+          </a:prstGeom>
+          <a:noFill/>
+          <a:ln/>
+        </p:spPr>
+        <p:txBody>
+          <a:bodyPr wrap="square" lIns="0" tIns="0" rIns="0" bIns="0" rtlCol="0" anchor="ctr">
+            <a:normAutofit/>
+          </a:bodyPr>
+          <a:lstStyle/>
+          <a:p>
+            <a:pPr indent="0" marL="0">
+              <a:buNone/>
+            </a:pPr>
+            <a:r>
+              <a:rPr lang="en-US" sz="750" b="1" dirty="0">
+                <a:solidFill>
+                  <a:srgbClr val="172033"/>
+                </a:solidFill>
+                <a:latin typeface="Microsoft YaHei" pitchFamily="34" charset="0"/>
+                <a:ea typeface="Microsoft YaHei" pitchFamily="34" charset="-122"/>
+                <a:cs typeface="Microsoft YaHei" pitchFamily="34" charset="-120"/>
+              </a:rPr>
+              <a:t>concentration</a:t>
+            </a:r>
+            <a:endParaRPr lang="en-US" sz="750" dirty="0"/>
+          </a:p>
+        </p:txBody>
+      </p:sp>
+      <p:sp>
+        <p:nvSpPr>
+          <p:cNvPr id="17" name="Shape 15"/>
+          <p:cNvSpPr/>
+          <p:nvPr/>
+        </p:nvSpPr>
+        <p:spPr>
+          <a:xfrm>
+            <a:off x="8979408" y="1499616"/>
+            <a:ext cx="109728" cy="0"/>
+          </a:xfrm>
+          <a:prstGeom prst="line">
+            <a:avLst/>
+          </a:prstGeom>
+          <a:noFill/>
+          <a:ln w="12700">
+            <a:solidFill>
+              <a:srgbClr val="059669"/>
+            </a:solidFill>
+            <a:prstDash val="solid"/>
+            <a:tailEnd type="triangle"/>
+          </a:ln>
+        </p:spPr>
+      </p:sp>
+      <p:sp>
+        <p:nvSpPr>
+          <p:cNvPr id="18" name="Shape 16"/>
+          <p:cNvSpPr/>
+          <p:nvPr/>
+        </p:nvSpPr>
+        <p:spPr>
+          <a:xfrm>
+            <a:off x="9116568" y="1234440"/>
+            <a:ext cx="1920240" cy="530352"/>
+          </a:xfrm>
+          <a:prstGeom prst="roundRect">
+            <a:avLst>
+              <a:gd name="adj" fmla="val 8621"/>
+            </a:avLst>
+          </a:prstGeom>
+          <a:solidFill>
+            <a:srgbClr val="E0F2FE"/>
+          </a:solidFill>
+          <a:ln w="10160">
+            <a:solidFill>
+              <a:srgbClr val="7DD3FC"/>
+            </a:solidFill>
+            <a:prstDash val="solid"/>
+          </a:ln>
+        </p:spPr>
+      </p:sp>
+      <p:sp>
+        <p:nvSpPr>
+          <p:cNvPr id="19" name="Text 17"/>
+          <p:cNvSpPr/>
+          <p:nvPr/>
+        </p:nvSpPr>
+        <p:spPr>
+          <a:xfrm>
+            <a:off x="9171432" y="1371600"/>
+            <a:ext cx="1810512" cy="219456"/>
+          </a:xfrm>
+          <a:prstGeom prst="rect">
+            <a:avLst/>
+          </a:prstGeom>
+          <a:noFill/>
+          <a:ln/>
+        </p:spPr>
+        <p:txBody>
+          <a:bodyPr wrap="square" lIns="0" tIns="0" rIns="0" bIns="0" rtlCol="0" anchor="ctr">
+            <a:normAutofit/>
+          </a:bodyPr>
+          <a:lstStyle/>
+          <a:p>
+            <a:pPr indent="0" marL="0">
+              <a:buNone/>
+            </a:pPr>
+            <a:r>
+              <a:rPr lang="en-US" sz="750" b="1" dirty="0">
+                <a:solidFill>
+                  <a:srgbClr val="172033"/>
+                </a:solidFill>
+                <a:latin typeface="Microsoft YaHei" pitchFamily="34" charset="0"/>
+                <a:ea typeface="Microsoft YaHei" pitchFamily="34" charset="-122"/>
+                <a:cs typeface="Microsoft YaHei" pitchFamily="34" charset="-120"/>
+              </a:rPr>
+              <a:t>weights</a:t>
+            </a:r>
+            <a:endParaRPr lang="en-US" sz="750" dirty="0"/>
+          </a:p>
+        </p:txBody>
+      </p:sp>
+      <p:sp>
+        <p:nvSpPr>
+          <p:cNvPr id="20" name="Shape 18"/>
+          <p:cNvSpPr/>
+          <p:nvPr/>
+        </p:nvSpPr>
+        <p:spPr>
+          <a:xfrm>
+            <a:off x="777240" y="2103120"/>
+            <a:ext cx="5715000" cy="3246120"/>
+          </a:xfrm>
+          <a:prstGeom prst="roundRect">
+            <a:avLst>
+              <a:gd name="adj" fmla="val 1408"/>
+            </a:avLst>
+          </a:prstGeom>
+          <a:solidFill>
+            <a:srgbClr val="F8FAFC"/>
+          </a:solidFill>
+          <a:ln w="10160">
+            <a:solidFill>
+              <a:srgbClr val="D7DEE8"/>
+            </a:solidFill>
+            <a:prstDash val="solid"/>
+          </a:ln>
+        </p:spPr>
+      </p:sp>
+      <p:sp>
+        <p:nvSpPr>
+          <p:cNvPr id="21" name="Shape 19"/>
+          <p:cNvSpPr/>
+          <p:nvPr/>
+        </p:nvSpPr>
+        <p:spPr>
+          <a:xfrm>
+            <a:off x="777240" y="2103120"/>
+            <a:ext cx="5715000" cy="310896"/>
+          </a:xfrm>
+          <a:prstGeom prst="rect">
+            <a:avLst/>
+          </a:prstGeom>
+          <a:solidFill>
+            <a:srgbClr val="059669"/>
+          </a:solidFill>
+          <a:ln w="12700">
+            <a:solidFill>
+              <a:srgbClr val="059669"/>
+            </a:solidFill>
+            <a:prstDash val="solid"/>
+          </a:ln>
+        </p:spPr>
+      </p:sp>
+      <p:sp>
+        <p:nvSpPr>
+          <p:cNvPr id="22" name="Text 20"/>
+          <p:cNvSpPr/>
+          <p:nvPr/>
+        </p:nvSpPr>
+        <p:spPr>
+          <a:xfrm>
+            <a:off x="886968" y="2176272"/>
+            <a:ext cx="5495544" cy="128016"/>
+          </a:xfrm>
+          <a:prstGeom prst="rect">
+            <a:avLst/>
+          </a:prstGeom>
+          <a:noFill/>
+          <a:ln/>
+        </p:spPr>
+        <p:txBody>
+          <a:bodyPr wrap="square" lIns="0" tIns="0" rIns="0" bIns="0" rtlCol="0" anchor="ctr">
+            <a:normAutofit/>
+          </a:bodyPr>
+          <a:lstStyle/>
+          <a:p>
+            <a:pPr indent="0" marL="0">
+              <a:buNone/>
+            </a:pPr>
+            <a:r>
+              <a:rPr lang="en-US" sz="750" b="1" dirty="0">
+                <a:solidFill>
+                  <a:srgbClr val="FFFFFF"/>
+                </a:solidFill>
+                <a:latin typeface="Microsoft YaHei" pitchFamily="34" charset="0"/>
+                <a:ea typeface="Microsoft YaHei" pitchFamily="34" charset="-122"/>
+                <a:cs typeface="Microsoft YaHei" pitchFamily="34" charset="-120"/>
+              </a:rPr>
+              <a:t>src/portfolio/construct.py</a:t>
+            </a:r>
+            <a:endParaRPr lang="en-US" sz="750" dirty="0"/>
+          </a:p>
+        </p:txBody>
+      </p:sp>
+      <p:sp>
+        <p:nvSpPr>
+          <p:cNvPr id="23" name="Text 21"/>
+          <p:cNvSpPr/>
+          <p:nvPr/>
+        </p:nvSpPr>
+        <p:spPr>
+          <a:xfrm>
+            <a:off x="886968" y="2542032"/>
+            <a:ext cx="5495544" cy="2715768"/>
+          </a:xfrm>
+          <a:prstGeom prst="rect">
+            <a:avLst/>
+          </a:prstGeom>
+          <a:noFill/>
+          <a:ln/>
+        </p:spPr>
+        <p:txBody>
+          <a:bodyPr wrap="square" lIns="0" tIns="0" rIns="0" bIns="0" rtlCol="0" anchor="ctr">
+            <a:normAutofit/>
+          </a:bodyPr>
+          <a:lstStyle/>
+          <a:p>
+            <a:pPr indent="0" marL="0">
+              <a:buNone/>
+            </a:pPr>
+            <a:r>
+              <a:rPr lang="en-US" sz="660" dirty="0">
+                <a:solidFill>
+                  <a:srgbClr val="111827"/>
+                </a:solidFill>
+                <a:latin typeface="Consolas" pitchFamily="34" charset="0"/>
+                <a:ea typeface="Consolas" pitchFamily="34" charset="-122"/>
+                <a:cs typeface="Consolas" pitchFamily="34" charset="-120"/>
+              </a:rPr>
+              <a:t>elif strategy == "confidence_topk":</a:t>
+            </a:r>
+            <a:endParaRPr lang="en-US" sz="660" dirty="0"/>
+          </a:p>
+          <a:p>
+            <a:pPr indent="0" marL="0">
+              <a:buNone/>
+            </a:pPr>
+            <a:r>
+              <a:rPr lang="en-US" sz="660" dirty="0">
+                <a:solidFill>
+                  <a:srgbClr val="111827"/>
+                </a:solidFill>
+                <a:latin typeface="Consolas" pitchFamily="34" charset="0"/>
+                <a:ea typeface="Consolas" pitchFamily="34" charset="-122"/>
+                <a:cs typeface="Consolas" pitchFamily="34" charset="-120"/>
+              </a:rPr>
+              <a:t>    top = df.head(max(1, min(top_k, len(df)))).copy()</a:t>
+            </a:r>
+            <a:endParaRPr lang="en-US" sz="660" dirty="0"/>
+          </a:p>
+          <a:p>
+            <a:pPr indent="0" marL="0">
+              <a:buNone/>
+            </a:pPr>
+            <a:r>
+              <a:rPr lang="en-US" sz="660" dirty="0">
+                <a:solidFill>
+                  <a:srgbClr val="111827"/>
+                </a:solidFill>
+                <a:latin typeface="Consolas" pitchFamily="34" charset="0"/>
+                <a:ea typeface="Consolas" pitchFamily="34" charset="-122"/>
+                <a:cs typeface="Consolas" pitchFamily="34" charset="-120"/>
+              </a:rPr>
+              <a:t>    scores = top["score"].to_numpy(dtype=float)</a:t>
+            </a:r>
+            <a:endParaRPr lang="en-US" sz="660" dirty="0"/>
+          </a:p>
+          <a:p>
+            <a:pPr indent="0" marL="0">
+              <a:buNone/>
+            </a:pPr>
+            <a:r>
+              <a:rPr lang="en-US" sz="660" dirty="0">
+                <a:solidFill>
+                  <a:srgbClr val="111827"/>
+                </a:solidFill>
+                <a:latin typeface="Consolas" pitchFamily="34" charset="0"/>
+                <a:ea typeface="Consolas" pitchFamily="34" charset="-122"/>
+                <a:cs typeface="Consolas" pitchFamily="34" charset="-120"/>
+              </a:rPr>
+              <a:t>    std = top["score_std"].to_numpy(dtype=float) if "score_std" in top.columns else None</a:t>
+            </a:r>
+            <a:endParaRPr lang="en-US" sz="660" dirty="0"/>
+          </a:p>
+          <a:p>
+            <a:pPr indent="0" marL="0">
+              <a:buNone/>
+            </a:pPr>
+            <a:r>
+              <a:rPr lang="en-US" sz="660" dirty="0">
+                <a:solidFill>
+                  <a:srgbClr val="111827"/>
+                </a:solidFill>
+                <a:latin typeface="Consolas" pitchFamily="34" charset="0"/>
+                <a:ea typeface="Consolas" pitchFamily="34" charset="-122"/>
+                <a:cs typeface="Consolas" pitchFamily="34" charset="-120"/>
+              </a:rPr>
+              <a:t>    margin = float(scores[0] - scores[1]) if len(scores) &gt; 1 else abs(float(scores[0]))</a:t>
+            </a:r>
+            <a:endParaRPr lang="en-US" sz="660" dirty="0"/>
+          </a:p>
+          <a:p>
+            <a:pPr indent="0" marL="0">
+              <a:buNone/>
+            </a:pPr>
+            <a:r>
+              <a:rPr lang="en-US" sz="660" dirty="0">
+                <a:solidFill>
+                  <a:srgbClr val="111827"/>
+                </a:solidFill>
+                <a:latin typeface="Consolas" pitchFamily="34" charset="0"/>
+                <a:ea typeface="Consolas" pitchFamily="34" charset="-122"/>
+                <a:cs typeface="Consolas" pitchFamily="34" charset="-120"/>
+              </a:rPr>
+              <a:t>    concentration = _confidence_concentration(</a:t>
+            </a:r>
+            <a:endParaRPr lang="en-US" sz="660" dirty="0"/>
+          </a:p>
+          <a:p>
+            <a:pPr indent="0" marL="0">
+              <a:buNone/>
+            </a:pPr>
+            <a:r>
+              <a:rPr lang="en-US" sz="660" dirty="0">
+                <a:solidFill>
+                  <a:srgbClr val="111827"/>
+                </a:solidFill>
+                <a:latin typeface="Consolas" pitchFamily="34" charset="0"/>
+                <a:ea typeface="Consolas" pitchFamily="34" charset="-122"/>
+                <a:cs typeface="Consolas" pitchFamily="34" charset="-120"/>
+              </a:rPr>
+              <a:t>        top_score=float(scores[0]),</a:t>
+            </a:r>
+            <a:endParaRPr lang="en-US" sz="660" dirty="0"/>
+          </a:p>
+          <a:p>
+            <a:pPr indent="0" marL="0">
+              <a:buNone/>
+            </a:pPr>
+            <a:r>
+              <a:rPr lang="en-US" sz="660" dirty="0">
+                <a:solidFill>
+                  <a:srgbClr val="111827"/>
+                </a:solidFill>
+                <a:latin typeface="Consolas" pitchFamily="34" charset="0"/>
+                <a:ea typeface="Consolas" pitchFamily="34" charset="-122"/>
+                <a:cs typeface="Consolas" pitchFamily="34" charset="-120"/>
+              </a:rPr>
+              <a:t>        margin=margin,</a:t>
+            </a:r>
+            <a:endParaRPr lang="en-US" sz="660" dirty="0"/>
+          </a:p>
+          <a:p>
+            <a:pPr indent="0" marL="0">
+              <a:buNone/>
+            </a:pPr>
+            <a:r>
+              <a:rPr lang="en-US" sz="660" dirty="0">
+                <a:solidFill>
+                  <a:srgbClr val="111827"/>
+                </a:solidFill>
+                <a:latin typeface="Consolas" pitchFamily="34" charset="0"/>
+                <a:ea typeface="Consolas" pitchFamily="34" charset="-122"/>
+                <a:cs typeface="Consolas" pitchFamily="34" charset="-120"/>
+              </a:rPr>
+              <a:t>        score_std=float(std[0]) if std is not None else 0.0,</a:t>
+            </a:r>
+            <a:endParaRPr lang="en-US" sz="660" dirty="0"/>
+          </a:p>
+          <a:p>
+            <a:pPr indent="0" marL="0">
+              <a:buNone/>
+            </a:pPr>
+            <a:r>
+              <a:rPr lang="en-US" sz="660" dirty="0">
+                <a:solidFill>
+                  <a:srgbClr val="111827"/>
+                </a:solidFill>
+                <a:latin typeface="Consolas" pitchFamily="34" charset="0"/>
+                <a:ea typeface="Consolas" pitchFamily="34" charset="-122"/>
+                <a:cs typeface="Consolas" pitchFamily="34" charset="-120"/>
+              </a:rPr>
+              <a:t>    )</a:t>
+            </a:r>
+            <a:endParaRPr lang="en-US" sz="660" dirty="0"/>
+          </a:p>
+        </p:txBody>
+      </p:sp>
+      <p:sp>
+        <p:nvSpPr>
+          <p:cNvPr id="24" name="Text 22"/>
+          <p:cNvSpPr/>
+          <p:nvPr/>
+        </p:nvSpPr>
+        <p:spPr>
+          <a:xfrm>
+            <a:off x="6903720" y="2148840"/>
+            <a:ext cx="1645920" cy="228600"/>
+          </a:xfrm>
+          <a:prstGeom prst="rect">
+            <a:avLst/>
+          </a:prstGeom>
+          <a:noFill/>
+          <a:ln/>
+        </p:spPr>
+        <p:txBody>
+          <a:bodyPr wrap="square" lIns="0" tIns="0" rIns="0" bIns="0" rtlCol="0" anchor="ctr">
+            <a:normAutofit/>
+          </a:bodyPr>
+          <a:lstStyle/>
+          <a:p>
+            <a:pPr indent="0" marL="0">
+              <a:buNone/>
+            </a:pPr>
+            <a:r>
+              <a:rPr lang="en-US" sz="1300" b="1" dirty="0">
+                <a:solidFill>
+                  <a:srgbClr val="2563EB"/>
+                </a:solidFill>
+                <a:latin typeface="Microsoft YaHei" pitchFamily="34" charset="0"/>
+                <a:ea typeface="Microsoft YaHei" pitchFamily="34" charset="-122"/>
+                <a:cs typeface="Microsoft YaHei" pitchFamily="34" charset="-120"/>
+              </a:rPr>
+              <a:t>Review decisions</a:t>
+            </a:r>
+            <a:endParaRPr lang="en-US" sz="1300" dirty="0"/>
+          </a:p>
+        </p:txBody>
+      </p:sp>
+      <p:sp>
+        <p:nvSpPr>
+          <p:cNvPr id="25" name="Text 23"/>
+          <p:cNvSpPr/>
+          <p:nvPr/>
+        </p:nvSpPr>
+        <p:spPr>
+          <a:xfrm>
+            <a:off x="6949440" y="2560320"/>
+            <a:ext cx="3977640" cy="1828800"/>
+          </a:xfrm>
+          <a:prstGeom prst="rect">
+            <a:avLst/>
+          </a:prstGeom>
+          <a:noFill/>
+          <a:ln/>
+        </p:spPr>
+        <p:txBody>
+          <a:bodyPr wrap="square" lIns="635" tIns="635" rIns="635" bIns="635" rtlCol="0" anchor="ctr">
+            <a:normAutofit/>
+          </a:bodyPr>
+          <a:lstStyle/>
+          <a:p>
+            <a:r>
+              <a:rPr lang="en-US" sz="1100" dirty="0">
+                <a:solidFill>
+                  <a:srgbClr val="172033"/>
+                </a:solidFill>
+                <a:latin typeface="Microsoft YaHei" pitchFamily="34" charset="0"/>
+                <a:ea typeface="Microsoft YaHei" pitchFamily="34" charset="-122"/>
+                <a:cs typeface="Microsoft YaHei" pitchFamily="34" charset="-120"/>
+              </a:rPr>
+              <a:t>Production default: top1, top2, or confidence?</a:t>
+            </a:r>
+            <a:endParaRPr lang="en-US" sz="1100" dirty="0"/>
+          </a:p>
+          <a:p>
+            <a:r>
+              <a:rPr lang="en-US" sz="1100" dirty="0">
+                <a:solidFill>
+                  <a:srgbClr val="172033"/>
+                </a:solidFill>
+                <a:latin typeface="Microsoft YaHei" pitchFamily="34" charset="0"/>
+                <a:ea typeface="Microsoft YaHei" pitchFamily="34" charset="-122"/>
+                <a:cs typeface="Microsoft YaHei" pitchFamily="34" charset="-120"/>
+              </a:rPr>
+              <a:t>Should multi-seed score_std cap single-stock weight?</a:t>
+            </a:r>
+            <a:endParaRPr lang="en-US" sz="1100" dirty="0"/>
+          </a:p>
+          <a:p>
+            <a:r>
+              <a:rPr lang="en-US" sz="1100" dirty="0">
+                <a:solidFill>
+                  <a:srgbClr val="172033"/>
+                </a:solidFill>
+                <a:latin typeface="Microsoft YaHei" pitchFamily="34" charset="0"/>
+                <a:ea typeface="Microsoft YaHei" pitchFamily="34" charset="-122"/>
+                <a:cs typeface="Microsoft YaHei" pitchFamily="34" charset="-120"/>
+              </a:rPr>
+              <a:t>Do we need our own max single-stock cap?</a:t>
+            </a:r>
+            <a:endParaRPr lang="en-US" sz="1100" dirty="0"/>
+          </a:p>
+          <a:p>
+            <a:r>
+              <a:rPr lang="en-US" sz="1100" dirty="0">
+                <a:solidFill>
+                  <a:srgbClr val="172033"/>
+                </a:solidFill>
+                <a:latin typeface="Microsoft YaHei" pitchFamily="34" charset="0"/>
+                <a:ea typeface="Microsoft YaHei" pitchFamily="34" charset="-122"/>
+                <a:cs typeface="Microsoft YaHei" pitchFamily="34" charset="-120"/>
+              </a:rPr>
+              <a:t>Should each result save margin/std/fallback reason?</a:t>
+            </a:r>
+            <a:endParaRPr lang="en-US" sz="1100" dirty="0"/>
+          </a:p>
+        </p:txBody>
+      </p:sp>
+      <p:sp>
+        <p:nvSpPr>
+          <p:cNvPr id="26" name="Text 24"/>
+          <p:cNvSpPr/>
+          <p:nvPr/>
+        </p:nvSpPr>
+        <p:spPr>
+          <a:xfrm>
+            <a:off x="6949440" y="4800600"/>
+            <a:ext cx="1325880" cy="438912"/>
+          </a:xfrm>
+          <a:prstGeom prst="rect">
+            <a:avLst/>
+          </a:prstGeom>
+          <a:noFill/>
+          <a:ln/>
+        </p:spPr>
+        <p:txBody>
+          <a:bodyPr wrap="square" lIns="0" tIns="0" rIns="0" bIns="0" rtlCol="0" anchor="ctr">
+            <a:normAutofit/>
+          </a:bodyPr>
+          <a:lstStyle/>
+          <a:p>
+            <a:pPr indent="0" marL="0">
+              <a:buNone/>
+            </a:pPr>
+            <a:r>
+              <a:rPr lang="en-US" sz="2500" b="1" dirty="0">
+                <a:solidFill>
+                  <a:srgbClr val="DC2626"/>
+                </a:solidFill>
+                <a:latin typeface="Microsoft YaHei" pitchFamily="34" charset="0"/>
+                <a:ea typeface="Microsoft YaHei" pitchFamily="34" charset="-122"/>
+                <a:cs typeface="Microsoft YaHei" pitchFamily="34" charset="-120"/>
+              </a:rPr>
+              <a:t>6.52%</a:t>
+            </a:r>
+            <a:endParaRPr lang="en-US" sz="2500" dirty="0"/>
+          </a:p>
+        </p:txBody>
+      </p:sp>
+      <p:sp>
+        <p:nvSpPr>
+          <p:cNvPr id="27" name="Text 25"/>
+          <p:cNvSpPr/>
+          <p:nvPr/>
+        </p:nvSpPr>
+        <p:spPr>
+          <a:xfrm>
+            <a:off x="6949440" y="5312664"/>
+            <a:ext cx="1325880" cy="201168"/>
+          </a:xfrm>
+          <a:prstGeom prst="rect">
+            <a:avLst/>
+          </a:prstGeom>
+          <a:noFill/>
+          <a:ln/>
+        </p:spPr>
+        <p:txBody>
+          <a:bodyPr wrap="square" lIns="0" tIns="0" rIns="0" bIns="0" rtlCol="0" anchor="ctr">
+            <a:normAutofit/>
+          </a:bodyPr>
+          <a:lstStyle/>
+          <a:p>
+            <a:pPr indent="0" marL="0">
+              <a:buNone/>
+            </a:pPr>
+            <a:r>
+              <a:rPr lang="en-US" sz="850" dirty="0">
+                <a:solidFill>
+                  <a:srgbClr val="64748B"/>
+                </a:solidFill>
+                <a:latin typeface="Microsoft YaHei" pitchFamily="34" charset="0"/>
+                <a:ea typeface="Microsoft YaHei" pitchFamily="34" charset="-122"/>
+                <a:cs typeface="Microsoft YaHei" pitchFamily="34" charset="-120"/>
+              </a:rPr>
+              <a:t>Top1 std</a:t>
+            </a:r>
+            <a:endParaRPr lang="en-US" sz="850" dirty="0"/>
+          </a:p>
+        </p:txBody>
+      </p:sp>
+      <p:sp>
+        <p:nvSpPr>
+          <p:cNvPr id="28" name="Text 26"/>
+          <p:cNvSpPr/>
+          <p:nvPr/>
+        </p:nvSpPr>
+        <p:spPr>
+          <a:xfrm>
+            <a:off x="8732520" y="4800600"/>
+            <a:ext cx="1325880" cy="438912"/>
+          </a:xfrm>
+          <a:prstGeom prst="rect">
+            <a:avLst/>
+          </a:prstGeom>
+          <a:noFill/>
+          <a:ln/>
+        </p:spPr>
+        <p:txBody>
+          <a:bodyPr wrap="square" lIns="0" tIns="0" rIns="0" bIns="0" rtlCol="0" anchor="ctr">
+            <a:normAutofit/>
+          </a:bodyPr>
+          <a:lstStyle/>
+          <a:p>
+            <a:pPr indent="0" marL="0">
+              <a:buNone/>
+            </a:pPr>
+            <a:r>
+              <a:rPr lang="en-US" sz="2500" b="1" dirty="0">
+                <a:solidFill>
+                  <a:srgbClr val="059669"/>
+                </a:solidFill>
+                <a:latin typeface="Microsoft YaHei" pitchFamily="34" charset="0"/>
+                <a:ea typeface="Microsoft YaHei" pitchFamily="34" charset="-122"/>
+                <a:cs typeface="Microsoft YaHei" pitchFamily="34" charset="-120"/>
+              </a:rPr>
+              <a:t>4.91%</a:t>
+            </a:r>
+            <a:endParaRPr lang="en-US" sz="2500" dirty="0"/>
+          </a:p>
+        </p:txBody>
+      </p:sp>
+      <p:sp>
+        <p:nvSpPr>
+          <p:cNvPr id="29" name="Text 27"/>
+          <p:cNvSpPr/>
+          <p:nvPr/>
+        </p:nvSpPr>
+        <p:spPr>
+          <a:xfrm>
+            <a:off x="8732520" y="5312664"/>
+            <a:ext cx="1325880" cy="201168"/>
+          </a:xfrm>
+          <a:prstGeom prst="rect">
+            <a:avLst/>
+          </a:prstGeom>
+          <a:noFill/>
+          <a:ln/>
+        </p:spPr>
+        <p:txBody>
+          <a:bodyPr wrap="square" lIns="0" tIns="0" rIns="0" bIns="0" rtlCol="0" anchor="ctr">
+            <a:normAutofit/>
+          </a:bodyPr>
+          <a:lstStyle/>
+          <a:p>
+            <a:pPr indent="0" marL="0">
+              <a:buNone/>
+            </a:pPr>
+            <a:r>
+              <a:rPr lang="en-US" sz="850" dirty="0">
+                <a:solidFill>
+                  <a:srgbClr val="64748B"/>
+                </a:solidFill>
+                <a:latin typeface="Microsoft YaHei" pitchFamily="34" charset="0"/>
+                <a:ea typeface="Microsoft YaHei" pitchFamily="34" charset="-122"/>
+                <a:cs typeface="Microsoft YaHei" pitchFamily="34" charset="-120"/>
+              </a:rPr>
+              <a:t>Top2 std</a:t>
+            </a:r>
+            <a:endParaRPr lang="en-US" sz="850" dirty="0"/>
+          </a:p>
+        </p:txBody>
+      </p:sp>
+    </p:spTree>
+  </p:cSld>
+  <p:clrMapOvr>
+    <a:masterClrMapping/>
+  </p:clrMapOvr>
+</p:sld>
+</file>
+
+<file path=ppt/slides/slide15.xml><?xml version="1.0" encoding="utf-8"?>
+<p:sld xmlns:a="http://schemas.openxmlformats.org/drawingml/2006/main" xmlns:r="http://schemas.openxmlformats.org/officeDocument/2006/relationships" xmlns:p="http://schemas.openxmlformats.org/presentationml/2006/main">
+  <p:cSld name="Slide 15">
+    <p:bg>
+      <p:bgPr>
+        <a:solidFill>
+          <a:srgbClr val="FFFFFF"/>
+        </a:solidFill>
+      </p:bgPr>
+    </p:bg>
+    <p:spTree>
+      <p:nvGrpSpPr>
+        <p:cNvPr id="1" name=""/>
+        <p:cNvGrpSpPr/>
+        <p:nvPr/>
+      </p:nvGrpSpPr>
+      <p:grpSpPr>
+        <a:xfrm>
+          <a:off x="0" y="0"/>
+          <a:ext cx="0" cy="0"/>
+          <a:chOff x="0" y="0"/>
+          <a:chExt cx="0" cy="0"/>
+        </a:xfrm>
+      </p:grpSpPr>
+      <p:sp>
+        <p:nvSpPr>
+          <p:cNvPr id="2" name="Text 0"/>
+          <p:cNvSpPr/>
+          <p:nvPr/>
+        </p:nvSpPr>
+        <p:spPr>
+          <a:xfrm>
+            <a:off x="502920" y="256032"/>
+            <a:ext cx="2194560" cy="201168"/>
+          </a:xfrm>
+          <a:prstGeom prst="rect">
+            <a:avLst/>
+          </a:prstGeom>
+          <a:noFill/>
+          <a:ln/>
+        </p:spPr>
+        <p:txBody>
+          <a:bodyPr wrap="square" lIns="0" tIns="0" rIns="0" bIns="0" rtlCol="0" anchor="ctr"/>
+          <a:lstStyle/>
+          <a:p>
+            <a:pPr indent="0" marL="0">
+              <a:buNone/>
+            </a:pPr>
+            <a:r>
+              <a:rPr lang="en-US" sz="800" b="1" dirty="0">
+                <a:solidFill>
+                  <a:srgbClr val="2563EB"/>
+                </a:solidFill>
+                <a:latin typeface="Microsoft YaHei" pitchFamily="34" charset="0"/>
+                <a:ea typeface="Microsoft YaHei" pitchFamily="34" charset="-122"/>
+                <a:cs typeface="Microsoft YaHei" pitchFamily="34" charset="-120"/>
+              </a:rPr>
+              <a:t>SOURCE APPENDIX</a:t>
+            </a:r>
+            <a:endParaRPr lang="en-US" sz="800" dirty="0"/>
+          </a:p>
+        </p:txBody>
+      </p:sp>
+      <p:sp>
+        <p:nvSpPr>
+          <p:cNvPr id="3" name="Text 1"/>
+          <p:cNvSpPr/>
+          <p:nvPr/>
+        </p:nvSpPr>
+        <p:spPr>
+          <a:xfrm>
+            <a:off x="502920" y="530352"/>
+            <a:ext cx="9875520" cy="384048"/>
+          </a:xfrm>
+          <a:prstGeom prst="rect">
+            <a:avLst/>
+          </a:prstGeom>
+          <a:noFill/>
+          <a:ln/>
+        </p:spPr>
+        <p:txBody>
+          <a:bodyPr wrap="square" lIns="0" tIns="0" rIns="0" bIns="0" rtlCol="0" anchor="ctr">
+            <a:normAutofit/>
+          </a:bodyPr>
+          <a:lstStyle/>
+          <a:p>
+            <a:pPr indent="0" marL="0">
+              <a:buNone/>
+            </a:pPr>
+            <a:r>
+              <a:rPr lang="en-US" sz="2400" b="1" dirty="0">
+                <a:solidFill>
+                  <a:srgbClr val="172033"/>
+                </a:solidFill>
+                <a:latin typeface="Microsoft YaHei" pitchFamily="34" charset="0"/>
+                <a:ea typeface="Microsoft YaHei" pitchFamily="34" charset="-122"/>
+                <a:cs typeface="Microsoft YaHei" pitchFamily="34" charset="-120"/>
+              </a:rPr>
+              <a:t>P1 source: walk-forward validation loop</a:t>
+            </a:r>
+            <a:endParaRPr lang="en-US" sz="2400" dirty="0"/>
+          </a:p>
+        </p:txBody>
+      </p:sp>
+      <p:sp>
+        <p:nvSpPr>
+          <p:cNvPr id="4" name="Shape 2"/>
+          <p:cNvSpPr/>
+          <p:nvPr/>
+        </p:nvSpPr>
+        <p:spPr>
+          <a:xfrm>
+            <a:off x="502920" y="1051560"/>
+            <a:ext cx="11155680" cy="0"/>
+          </a:xfrm>
+          <a:prstGeom prst="line">
+            <a:avLst/>
+          </a:prstGeom>
+          <a:noFill/>
+          <a:ln w="12700">
+            <a:solidFill>
+              <a:srgbClr val="D7DEE8"/>
+            </a:solidFill>
+            <a:prstDash val="solid"/>
+          </a:ln>
+        </p:spPr>
+      </p:sp>
+      <p:sp>
+        <p:nvSpPr>
+          <p:cNvPr id="5" name="Text 3"/>
+          <p:cNvSpPr/>
+          <p:nvPr/>
+        </p:nvSpPr>
+        <p:spPr>
+          <a:xfrm>
+            <a:off x="8229600" y="6446520"/>
+            <a:ext cx="3383280" cy="201168"/>
+          </a:xfrm>
+          <a:prstGeom prst="rect">
+            <a:avLst/>
+          </a:prstGeom>
+          <a:noFill/>
+          <a:ln/>
+        </p:spPr>
+        <p:txBody>
+          <a:bodyPr wrap="square" lIns="0" tIns="0" rIns="0" bIns="0" rtlCol="0" anchor="ctr"/>
+          <a:lstStyle/>
+          <a:p>
+            <a:pPr algn="r" indent="0" marL="0">
+              <a:buNone/>
+            </a:pPr>
+            <a:r>
+              <a:rPr lang="en-US" sz="750" dirty="0">
+                <a:solidFill>
+                  <a:srgbClr val="94A3B8"/>
+                </a:solidFill>
+              </a:rPr>
+              <a:t>2026-05-07 · CSI300 Competition Review</a:t>
+            </a:r>
+            <a:endParaRPr lang="en-US" sz="750" dirty="0"/>
+          </a:p>
+        </p:txBody>
+      </p:sp>
+      <p:sp>
+        <p:nvSpPr>
+          <p:cNvPr id="6" name="Shape 4"/>
+          <p:cNvSpPr/>
+          <p:nvPr/>
+        </p:nvSpPr>
+        <p:spPr>
+          <a:xfrm>
+            <a:off x="777240" y="1234440"/>
+            <a:ext cx="1920240" cy="530352"/>
+          </a:xfrm>
+          <a:prstGeom prst="roundRect">
+            <a:avLst>
+              <a:gd name="adj" fmla="val 8621"/>
+            </a:avLst>
+          </a:prstGeom>
+          <a:solidFill>
+            <a:srgbClr val="F6F8FB"/>
+          </a:solidFill>
+          <a:ln w="10160">
+            <a:solidFill>
+              <a:srgbClr val="D7DEE8"/>
+            </a:solidFill>
+            <a:prstDash val="solid"/>
+          </a:ln>
+        </p:spPr>
+      </p:sp>
+      <p:sp>
+        <p:nvSpPr>
+          <p:cNvPr id="7" name="Text 5"/>
+          <p:cNvSpPr/>
+          <p:nvPr/>
+        </p:nvSpPr>
+        <p:spPr>
+          <a:xfrm>
+            <a:off x="832104" y="1371600"/>
+            <a:ext cx="1810512" cy="219456"/>
+          </a:xfrm>
+          <a:prstGeom prst="rect">
+            <a:avLst/>
+          </a:prstGeom>
+          <a:noFill/>
+          <a:ln/>
+        </p:spPr>
+        <p:txBody>
+          <a:bodyPr wrap="square" lIns="0" tIns="0" rIns="0" bIns="0" rtlCol="0" anchor="ctr">
+            <a:normAutofit/>
+          </a:bodyPr>
+          <a:lstStyle/>
+          <a:p>
+            <a:pPr indent="0" marL="0">
+              <a:buNone/>
+            </a:pPr>
+            <a:r>
+              <a:rPr lang="en-US" sz="750" b="1" dirty="0">
+                <a:solidFill>
+                  <a:srgbClr val="172033"/>
+                </a:solidFill>
+                <a:latin typeface="Microsoft YaHei" pitchFamily="34" charset="0"/>
+                <a:ea typeface="Microsoft YaHei" pitchFamily="34" charset="-122"/>
+                <a:cs typeface="Microsoft YaHei" pitchFamily="34" charset="-120"/>
+              </a:rPr>
+              <a:t>history before T</a:t>
+            </a:r>
+            <a:endParaRPr lang="en-US" sz="750" dirty="0"/>
+          </a:p>
+        </p:txBody>
+      </p:sp>
+      <p:sp>
+        <p:nvSpPr>
+          <p:cNvPr id="8" name="Shape 6"/>
+          <p:cNvSpPr/>
+          <p:nvPr/>
+        </p:nvSpPr>
+        <p:spPr>
+          <a:xfrm>
+            <a:off x="2724912" y="1499616"/>
+            <a:ext cx="109728" cy="0"/>
+          </a:xfrm>
+          <a:prstGeom prst="line">
+            <a:avLst/>
+          </a:prstGeom>
+          <a:noFill/>
+          <a:ln w="12700">
+            <a:solidFill>
+              <a:srgbClr val="0891B2"/>
+            </a:solidFill>
+            <a:prstDash val="solid"/>
+            <a:tailEnd type="triangle"/>
+          </a:ln>
+        </p:spPr>
+      </p:sp>
+      <p:sp>
+        <p:nvSpPr>
+          <p:cNvPr id="9" name="Shape 7"/>
+          <p:cNvSpPr/>
+          <p:nvPr/>
+        </p:nvSpPr>
+        <p:spPr>
+          <a:xfrm>
+            <a:off x="2862072" y="1234440"/>
+            <a:ext cx="1920240" cy="530352"/>
+          </a:xfrm>
+          <a:prstGeom prst="roundRect">
+            <a:avLst>
+              <a:gd name="adj" fmla="val 8621"/>
+            </a:avLst>
+          </a:prstGeom>
+          <a:solidFill>
+            <a:srgbClr val="F6F8FB"/>
+          </a:solidFill>
+          <a:ln w="10160">
+            <a:solidFill>
+              <a:srgbClr val="D7DEE8"/>
+            </a:solidFill>
+            <a:prstDash val="solid"/>
+          </a:ln>
+        </p:spPr>
+      </p:sp>
+      <p:sp>
+        <p:nvSpPr>
+          <p:cNvPr id="10" name="Text 8"/>
+          <p:cNvSpPr/>
+          <p:nvPr/>
+        </p:nvSpPr>
+        <p:spPr>
+          <a:xfrm>
+            <a:off x="2916936" y="1371600"/>
+            <a:ext cx="1810512" cy="219456"/>
+          </a:xfrm>
+          <a:prstGeom prst="rect">
+            <a:avLst/>
+          </a:prstGeom>
+          <a:noFill/>
+          <a:ln/>
+        </p:spPr>
+        <p:txBody>
+          <a:bodyPr wrap="square" lIns="0" tIns="0" rIns="0" bIns="0" rtlCol="0" anchor="ctr">
+            <a:normAutofit/>
+          </a:bodyPr>
+          <a:lstStyle/>
+          <a:p>
+            <a:pPr indent="0" marL="0">
+              <a:buNone/>
+            </a:pPr>
+            <a:r>
+              <a:rPr lang="en-US" sz="750" b="1" dirty="0">
+                <a:solidFill>
+                  <a:srgbClr val="172033"/>
+                </a:solidFill>
+                <a:latin typeface="Microsoft YaHei" pitchFamily="34" charset="0"/>
+                <a:ea typeface="Microsoft YaHei" pitchFamily="34" charset="-122"/>
+                <a:cs typeface="Microsoft YaHei" pitchFamily="34" charset="-120"/>
+              </a:rPr>
+              <a:t>select params</a:t>
+            </a:r>
+            <a:endParaRPr lang="en-US" sz="750" dirty="0"/>
+          </a:p>
+        </p:txBody>
+      </p:sp>
+      <p:sp>
+        <p:nvSpPr>
+          <p:cNvPr id="11" name="Shape 9"/>
+          <p:cNvSpPr/>
+          <p:nvPr/>
+        </p:nvSpPr>
+        <p:spPr>
+          <a:xfrm>
+            <a:off x="4809744" y="1499616"/>
+            <a:ext cx="109728" cy="0"/>
+          </a:xfrm>
+          <a:prstGeom prst="line">
+            <a:avLst/>
+          </a:prstGeom>
+          <a:noFill/>
+          <a:ln w="12700">
+            <a:solidFill>
+              <a:srgbClr val="0891B2"/>
+            </a:solidFill>
+            <a:prstDash val="solid"/>
+            <a:tailEnd type="triangle"/>
+          </a:ln>
+        </p:spPr>
+      </p:sp>
+      <p:sp>
+        <p:nvSpPr>
+          <p:cNvPr id="12" name="Shape 10"/>
+          <p:cNvSpPr/>
+          <p:nvPr/>
+        </p:nvSpPr>
+        <p:spPr>
+          <a:xfrm>
+            <a:off x="4946904" y="1234440"/>
+            <a:ext cx="1920240" cy="530352"/>
+          </a:xfrm>
+          <a:prstGeom prst="roundRect">
+            <a:avLst>
+              <a:gd name="adj" fmla="val 8621"/>
+            </a:avLst>
+          </a:prstGeom>
+          <a:solidFill>
+            <a:srgbClr val="F6F8FB"/>
+          </a:solidFill>
+          <a:ln w="10160">
+            <a:solidFill>
+              <a:srgbClr val="D7DEE8"/>
+            </a:solidFill>
+            <a:prstDash val="solid"/>
+          </a:ln>
+        </p:spPr>
+      </p:sp>
+      <p:sp>
+        <p:nvSpPr>
+          <p:cNvPr id="13" name="Text 11"/>
+          <p:cNvSpPr/>
+          <p:nvPr/>
+        </p:nvSpPr>
+        <p:spPr>
+          <a:xfrm>
+            <a:off x="5001768" y="1371600"/>
+            <a:ext cx="1810512" cy="219456"/>
+          </a:xfrm>
+          <a:prstGeom prst="rect">
+            <a:avLst/>
+          </a:prstGeom>
+          <a:noFill/>
+          <a:ln/>
+        </p:spPr>
+        <p:txBody>
+          <a:bodyPr wrap="square" lIns="0" tIns="0" rIns="0" bIns="0" rtlCol="0" anchor="ctr">
+            <a:normAutofit/>
+          </a:bodyPr>
+          <a:lstStyle/>
+          <a:p>
+            <a:pPr indent="0" marL="0">
+              <a:buNone/>
+            </a:pPr>
+            <a:r>
+              <a:rPr lang="en-US" sz="750" b="1" dirty="0">
+                <a:solidFill>
+                  <a:srgbClr val="172033"/>
+                </a:solidFill>
+                <a:latin typeface="Microsoft YaHei" pitchFamily="34" charset="0"/>
+                <a:ea typeface="Microsoft YaHei" pitchFamily="34" charset="-122"/>
+                <a:cs typeface="Microsoft YaHei" pitchFamily="34" charset="-120"/>
+              </a:rPr>
+              <a:t>build portfolio</a:t>
+            </a:r>
+            <a:endParaRPr lang="en-US" sz="750" dirty="0"/>
+          </a:p>
+        </p:txBody>
+      </p:sp>
+      <p:sp>
+        <p:nvSpPr>
+          <p:cNvPr id="14" name="Shape 12"/>
+          <p:cNvSpPr/>
+          <p:nvPr/>
+        </p:nvSpPr>
+        <p:spPr>
+          <a:xfrm>
+            <a:off x="6894576" y="1499616"/>
+            <a:ext cx="109728" cy="0"/>
+          </a:xfrm>
+          <a:prstGeom prst="line">
+            <a:avLst/>
+          </a:prstGeom>
+          <a:noFill/>
+          <a:ln w="12700">
+            <a:solidFill>
+              <a:srgbClr val="0891B2"/>
+            </a:solidFill>
+            <a:prstDash val="solid"/>
+            <a:tailEnd type="triangle"/>
+          </a:ln>
+        </p:spPr>
+      </p:sp>
+      <p:sp>
+        <p:nvSpPr>
+          <p:cNvPr id="15" name="Shape 13"/>
+          <p:cNvSpPr/>
+          <p:nvPr/>
+        </p:nvSpPr>
+        <p:spPr>
+          <a:xfrm>
+            <a:off x="7031736" y="1234440"/>
+            <a:ext cx="1920240" cy="530352"/>
+          </a:xfrm>
+          <a:prstGeom prst="roundRect">
+            <a:avLst>
+              <a:gd name="adj" fmla="val 8621"/>
+            </a:avLst>
+          </a:prstGeom>
+          <a:solidFill>
+            <a:srgbClr val="F6F8FB"/>
+          </a:solidFill>
+          <a:ln w="10160">
+            <a:solidFill>
+              <a:srgbClr val="D7DEE8"/>
+            </a:solidFill>
+            <a:prstDash val="solid"/>
+          </a:ln>
+        </p:spPr>
+      </p:sp>
+      <p:sp>
+        <p:nvSpPr>
+          <p:cNvPr id="16" name="Text 14"/>
+          <p:cNvSpPr/>
+          <p:nvPr/>
+        </p:nvSpPr>
+        <p:spPr>
+          <a:xfrm>
+            <a:off x="7086600" y="1371600"/>
+            <a:ext cx="1810512" cy="219456"/>
+          </a:xfrm>
+          <a:prstGeom prst="rect">
+            <a:avLst/>
+          </a:prstGeom>
+          <a:noFill/>
+          <a:ln/>
+        </p:spPr>
+        <p:txBody>
+          <a:bodyPr wrap="square" lIns="0" tIns="0" rIns="0" bIns="0" rtlCol="0" anchor="ctr">
+            <a:normAutofit/>
+          </a:bodyPr>
+          <a:lstStyle/>
+          <a:p>
+            <a:pPr indent="0" marL="0">
+              <a:buNone/>
+            </a:pPr>
+            <a:r>
+              <a:rPr lang="en-US" sz="750" b="1" dirty="0">
+                <a:solidFill>
+                  <a:srgbClr val="172033"/>
+                </a:solidFill>
+                <a:latin typeface="Microsoft YaHei" pitchFamily="34" charset="0"/>
+                <a:ea typeface="Microsoft YaHei" pitchFamily="34" charset="-122"/>
+                <a:cs typeface="Microsoft YaHei" pitchFamily="34" charset="-120"/>
+              </a:rPr>
+              <a:t>score T+1:T+5</a:t>
+            </a:r>
+            <a:endParaRPr lang="en-US" sz="750" dirty="0"/>
+          </a:p>
+        </p:txBody>
+      </p:sp>
+      <p:sp>
+        <p:nvSpPr>
+          <p:cNvPr id="17" name="Shape 15"/>
+          <p:cNvSpPr/>
+          <p:nvPr/>
+        </p:nvSpPr>
+        <p:spPr>
+          <a:xfrm>
+            <a:off x="8979408" y="1499616"/>
+            <a:ext cx="109728" cy="0"/>
+          </a:xfrm>
+          <a:prstGeom prst="line">
+            <a:avLst/>
+          </a:prstGeom>
+          <a:noFill/>
+          <a:ln w="12700">
+            <a:solidFill>
+              <a:srgbClr val="0891B2"/>
+            </a:solidFill>
+            <a:prstDash val="solid"/>
+            <a:tailEnd type="triangle"/>
+          </a:ln>
+        </p:spPr>
+      </p:sp>
+      <p:sp>
+        <p:nvSpPr>
+          <p:cNvPr id="18" name="Shape 16"/>
+          <p:cNvSpPr/>
+          <p:nvPr/>
+        </p:nvSpPr>
+        <p:spPr>
+          <a:xfrm>
+            <a:off x="9116568" y="1234440"/>
+            <a:ext cx="1920240" cy="530352"/>
+          </a:xfrm>
+          <a:prstGeom prst="roundRect">
+            <a:avLst>
+              <a:gd name="adj" fmla="val 8621"/>
+            </a:avLst>
+          </a:prstGeom>
+          <a:solidFill>
+            <a:srgbClr val="E0F2FE"/>
+          </a:solidFill>
+          <a:ln w="10160">
+            <a:solidFill>
+              <a:srgbClr val="7DD3FC"/>
+            </a:solidFill>
+            <a:prstDash val="solid"/>
+          </a:ln>
+        </p:spPr>
+      </p:sp>
+      <p:sp>
+        <p:nvSpPr>
+          <p:cNvPr id="19" name="Text 17"/>
+          <p:cNvSpPr/>
+          <p:nvPr/>
+        </p:nvSpPr>
+        <p:spPr>
+          <a:xfrm>
+            <a:off x="9171432" y="1371600"/>
+            <a:ext cx="1810512" cy="219456"/>
+          </a:xfrm>
+          <a:prstGeom prst="rect">
+            <a:avLst/>
+          </a:prstGeom>
+          <a:noFill/>
+          <a:ln/>
+        </p:spPr>
+        <p:txBody>
+          <a:bodyPr wrap="square" lIns="0" tIns="0" rIns="0" bIns="0" rtlCol="0" anchor="ctr">
+            <a:normAutofit/>
+          </a:bodyPr>
+          <a:lstStyle/>
+          <a:p>
+            <a:pPr indent="0" marL="0">
+              <a:buNone/>
+            </a:pPr>
+            <a:r>
+              <a:rPr lang="en-US" sz="750" b="1" dirty="0">
+                <a:solidFill>
+                  <a:srgbClr val="172033"/>
+                </a:solidFill>
+                <a:latin typeface="Microsoft YaHei" pitchFamily="34" charset="0"/>
+                <a:ea typeface="Microsoft YaHei" pitchFamily="34" charset="-122"/>
+                <a:cs typeface="Microsoft YaHei" pitchFamily="34" charset="-120"/>
+              </a:rPr>
+              <a:t>advance T</a:t>
+            </a:r>
+            <a:endParaRPr lang="en-US" sz="750" dirty="0"/>
+          </a:p>
+        </p:txBody>
+      </p:sp>
+      <p:sp>
+        <p:nvSpPr>
+          <p:cNvPr id="20" name="Shape 18"/>
+          <p:cNvSpPr/>
+          <p:nvPr/>
+        </p:nvSpPr>
+        <p:spPr>
+          <a:xfrm>
+            <a:off x="777240" y="2103120"/>
+            <a:ext cx="5440680" cy="3063240"/>
+          </a:xfrm>
+          <a:prstGeom prst="roundRect">
+            <a:avLst>
+              <a:gd name="adj" fmla="val 1493"/>
+            </a:avLst>
+          </a:prstGeom>
+          <a:solidFill>
+            <a:srgbClr val="F8FAFC"/>
+          </a:solidFill>
+          <a:ln w="10160">
+            <a:solidFill>
+              <a:srgbClr val="D7DEE8"/>
+            </a:solidFill>
+            <a:prstDash val="solid"/>
+          </a:ln>
+        </p:spPr>
+      </p:sp>
+      <p:sp>
+        <p:nvSpPr>
+          <p:cNvPr id="21" name="Shape 19"/>
+          <p:cNvSpPr/>
+          <p:nvPr/>
+        </p:nvSpPr>
+        <p:spPr>
+          <a:xfrm>
+            <a:off x="777240" y="2103120"/>
+            <a:ext cx="5440680" cy="310896"/>
+          </a:xfrm>
+          <a:prstGeom prst="rect">
+            <a:avLst/>
+          </a:prstGeom>
+          <a:solidFill>
+            <a:srgbClr val="0891B2"/>
+          </a:solidFill>
+          <a:ln w="12700">
+            <a:solidFill>
+              <a:srgbClr val="0891B2"/>
+            </a:solidFill>
+            <a:prstDash val="solid"/>
+          </a:ln>
+        </p:spPr>
+      </p:sp>
+      <p:sp>
+        <p:nvSpPr>
+          <p:cNvPr id="22" name="Text 20"/>
+          <p:cNvSpPr/>
+          <p:nvPr/>
+        </p:nvSpPr>
+        <p:spPr>
+          <a:xfrm>
+            <a:off x="886968" y="2176272"/>
+            <a:ext cx="5221224" cy="128016"/>
+          </a:xfrm>
+          <a:prstGeom prst="rect">
+            <a:avLst/>
+          </a:prstGeom>
+          <a:noFill/>
+          <a:ln/>
+        </p:spPr>
+        <p:txBody>
+          <a:bodyPr wrap="square" lIns="0" tIns="0" rIns="0" bIns="0" rtlCol="0" anchor="ctr">
+            <a:normAutofit/>
+          </a:bodyPr>
+          <a:lstStyle/>
+          <a:p>
+            <a:pPr indent="0" marL="0">
+              <a:buNone/>
+            </a:pPr>
+            <a:r>
+              <a:rPr lang="en-US" sz="750" b="1" dirty="0">
+                <a:solidFill>
+                  <a:srgbClr val="FFFFFF"/>
+                </a:solidFill>
+                <a:latin typeface="Microsoft YaHei" pitchFamily="34" charset="0"/>
+                <a:ea typeface="Microsoft YaHei" pitchFamily="34" charset="-122"/>
+                <a:cs typeface="Microsoft YaHei" pitchFamily="34" charset="-120"/>
+              </a:rPr>
+              <a:t>scripts/simulate_online_windows.py</a:t>
+            </a:r>
+            <a:endParaRPr lang="en-US" sz="750" dirty="0"/>
+          </a:p>
+        </p:txBody>
+      </p:sp>
+      <p:sp>
+        <p:nvSpPr>
+          <p:cNvPr id="23" name="Text 21"/>
+          <p:cNvSpPr/>
+          <p:nvPr/>
+        </p:nvSpPr>
+        <p:spPr>
+          <a:xfrm>
+            <a:off x="886968" y="2542032"/>
+            <a:ext cx="5221224" cy="2532888"/>
+          </a:xfrm>
+          <a:prstGeom prst="rect">
+            <a:avLst/>
+          </a:prstGeom>
+          <a:noFill/>
+          <a:ln/>
+        </p:spPr>
+        <p:txBody>
+          <a:bodyPr wrap="square" lIns="0" tIns="0" rIns="0" bIns="0" rtlCol="0" anchor="ctr">
+            <a:normAutofit/>
+          </a:bodyPr>
+          <a:lstStyle/>
+          <a:p>
+            <a:pPr indent="0" marL="0">
+              <a:buNone/>
+            </a:pPr>
+            <a:r>
+              <a:rPr lang="en-US" sz="660" dirty="0">
+                <a:solidFill>
+                  <a:srgbClr val="111827"/>
+                </a:solidFill>
+                <a:latin typeface="Consolas" pitchFamily="34" charset="0"/>
+                <a:ea typeface="Consolas" pitchFamily="34" charset="-122"/>
+                <a:cs typeface="Consolas" pitchFamily="34" charset="-120"/>
+              </a:rPr>
+              <a:t>def walk_forward_simulation(pred_df, strategies, *, lookback_days, ...):</a:t>
+            </a:r>
+            <a:endParaRPr lang="en-US" sz="660" dirty="0"/>
+          </a:p>
+          <a:p>
+            <a:pPr indent="0" marL="0">
+              <a:buNone/>
+            </a:pPr>
+            <a:r>
+              <a:rPr lang="en-US" sz="660" dirty="0">
+                <a:solidFill>
+                  <a:srgbClr val="111827"/>
+                </a:solidFill>
+                <a:latin typeface="Consolas" pitchFamily="34" charset="0"/>
+                <a:ea typeface="Consolas" pitchFamily="34" charset="-122"/>
+                <a:cs typeface="Consolas" pitchFamily="34" charset="-120"/>
+              </a:rPr>
+              <a:t>    for current_date in evaluation_dates:</a:t>
+            </a:r>
+            <a:endParaRPr lang="en-US" sz="660" dirty="0"/>
+          </a:p>
+          <a:p>
+            <a:pPr indent="0" marL="0">
+              <a:buNone/>
+            </a:pPr>
+            <a:r>
+              <a:rPr lang="en-US" sz="660" dirty="0">
+                <a:solidFill>
+                  <a:srgbClr val="111827"/>
+                </a:solidFill>
+                <a:latin typeface="Consolas" pitchFamily="34" charset="0"/>
+                <a:ea typeface="Consolas" pitchFamily="34" charset="-122"/>
+                <a:cs typeface="Consolas" pitchFamily="34" charset="-120"/>
+              </a:rPr>
+              <a:t>        history = pred_df[pred_df["date"] &lt; current_date]</a:t>
+            </a:r>
+            <a:endParaRPr lang="en-US" sz="660" dirty="0"/>
+          </a:p>
+          <a:p>
+            <a:pPr indent="0" marL="0">
+              <a:buNone/>
+            </a:pPr>
+            <a:r>
+              <a:rPr lang="en-US" sz="660" dirty="0">
+                <a:solidFill>
+                  <a:srgbClr val="111827"/>
+                </a:solidFill>
+                <a:latin typeface="Consolas" pitchFamily="34" charset="0"/>
+                <a:ea typeface="Consolas" pitchFamily="34" charset="-122"/>
+                <a:cs typeface="Consolas" pitchFamily="34" charset="-120"/>
+              </a:rPr>
+              <a:t>        select_window = history.tail(lookback_days)</a:t>
+            </a:r>
+            <a:endParaRPr lang="en-US" sz="660" dirty="0"/>
+          </a:p>
+          <a:p>
+            <a:pPr indent="0" marL="0">
+              <a:buNone/>
+            </a:pPr>
+            <a:r>
+              <a:rPr lang="en-US" sz="660" dirty="0">
+                <a:solidFill>
+                  <a:srgbClr val="111827"/>
+                </a:solidFill>
+                <a:latin typeface="Consolas" pitchFamily="34" charset="0"/>
+                <a:ea typeface="Consolas" pitchFamily="34" charset="-122"/>
+                <a:cs typeface="Consolas" pitchFamily="34" charset="-120"/>
+              </a:rPr>
+              <a:t>        best_strategy = choose_strategy(select_window, strategies)</a:t>
+            </a:r>
+            <a:endParaRPr lang="en-US" sz="660" dirty="0"/>
+          </a:p>
+          <a:p>
+            <a:pPr indent="0" marL="0">
+              <a:buNone/>
+            </a:pPr>
+            <a:r>
+              <a:rPr lang="en-US" sz="660" dirty="0">
+                <a:solidFill>
+                  <a:srgbClr val="111827"/>
+                </a:solidFill>
+                <a:latin typeface="Consolas" pitchFamily="34" charset="0"/>
+                <a:ea typeface="Consolas" pitchFamily="34" charset="-122"/>
+                <a:cs typeface="Consolas" pitchFamily="34" charset="-120"/>
+              </a:rPr>
+              <a:t>        portfolio = construct_portfolio(pred_df[pred_df["date"] == current_date], strategy=best_strategy)</a:t>
+            </a:r>
+            <a:endParaRPr lang="en-US" sz="660" dirty="0"/>
+          </a:p>
+          <a:p>
+            <a:pPr indent="0" marL="0">
+              <a:buNone/>
+            </a:pPr>
+            <a:r>
+              <a:rPr lang="en-US" sz="660" dirty="0">
+                <a:solidFill>
+                  <a:srgbClr val="111827"/>
+                </a:solidFill>
+                <a:latin typeface="Consolas" pitchFamily="34" charset="0"/>
+                <a:ea typeface="Consolas" pitchFamily="34" charset="-122"/>
+                <a:cs typeface="Consolas" pitchFamily="34" charset="-120"/>
+              </a:rPr>
+              <a:t>        score = evaluate_realized_return(portfolio, current_date)</a:t>
+            </a:r>
+            <a:endParaRPr lang="en-US" sz="660" dirty="0"/>
+          </a:p>
+        </p:txBody>
+      </p:sp>
+      <p:sp>
+        <p:nvSpPr>
+          <p:cNvPr id="24" name="Shape 22"/>
+          <p:cNvSpPr/>
+          <p:nvPr/>
+        </p:nvSpPr>
+        <p:spPr>
+          <a:xfrm>
+            <a:off x="6537960" y="2103120"/>
+            <a:ext cx="4480560" cy="1965960"/>
+          </a:xfrm>
+          <a:prstGeom prst="roundRect">
+            <a:avLst>
+              <a:gd name="adj" fmla="val 2326"/>
+            </a:avLst>
+          </a:prstGeom>
+          <a:solidFill>
+            <a:srgbClr val="F8FAFC"/>
+          </a:solidFill>
+          <a:ln w="10160">
+            <a:solidFill>
+              <a:srgbClr val="D7DEE8"/>
+            </a:solidFill>
+            <a:prstDash val="solid"/>
+          </a:ln>
+        </p:spPr>
+      </p:sp>
+      <p:sp>
+        <p:nvSpPr>
+          <p:cNvPr id="25" name="Shape 23"/>
+          <p:cNvSpPr/>
+          <p:nvPr/>
+        </p:nvSpPr>
+        <p:spPr>
+          <a:xfrm>
+            <a:off x="6537960" y="2103120"/>
+            <a:ext cx="4480560" cy="310896"/>
+          </a:xfrm>
+          <a:prstGeom prst="rect">
+            <a:avLst/>
+          </a:prstGeom>
+          <a:solidFill>
+            <a:srgbClr val="EA580C"/>
+          </a:solidFill>
+          <a:ln w="12700">
+            <a:solidFill>
+              <a:srgbClr val="EA580C"/>
+            </a:solidFill>
+            <a:prstDash val="solid"/>
+          </a:ln>
+        </p:spPr>
+      </p:sp>
+      <p:sp>
+        <p:nvSpPr>
+          <p:cNvPr id="26" name="Text 24"/>
+          <p:cNvSpPr/>
+          <p:nvPr/>
+        </p:nvSpPr>
+        <p:spPr>
+          <a:xfrm>
+            <a:off x="6647688" y="2176272"/>
+            <a:ext cx="4261104" cy="128016"/>
+          </a:xfrm>
+          <a:prstGeom prst="rect">
+            <a:avLst/>
+          </a:prstGeom>
+          <a:noFill/>
+          <a:ln/>
+        </p:spPr>
+        <p:txBody>
+          <a:bodyPr wrap="square" lIns="0" tIns="0" rIns="0" bIns="0" rtlCol="0" anchor="ctr">
+            <a:normAutofit/>
+          </a:bodyPr>
+          <a:lstStyle/>
+          <a:p>
+            <a:pPr indent="0" marL="0">
+              <a:buNone/>
+            </a:pPr>
+            <a:r>
+              <a:rPr lang="en-US" sz="750" b="1" dirty="0">
+                <a:solidFill>
+                  <a:srgbClr val="FFFFFF"/>
+                </a:solidFill>
+                <a:latin typeface="Microsoft YaHei" pitchFamily="34" charset="0"/>
+                <a:ea typeface="Microsoft YaHei" pitchFamily="34" charset="-122"/>
+                <a:cs typeface="Microsoft YaHei" pitchFamily="34" charset="-120"/>
+              </a:rPr>
+              <a:t>scripts/validate_multiple_methods.py</a:t>
+            </a:r>
+            <a:endParaRPr lang="en-US" sz="750" dirty="0"/>
+          </a:p>
+        </p:txBody>
+      </p:sp>
+      <p:sp>
+        <p:nvSpPr>
+          <p:cNvPr id="27" name="Text 25"/>
+          <p:cNvSpPr/>
+          <p:nvPr/>
+        </p:nvSpPr>
+        <p:spPr>
+          <a:xfrm>
+            <a:off x="6647688" y="2542032"/>
+            <a:ext cx="4261104" cy="1435608"/>
+          </a:xfrm>
+          <a:prstGeom prst="rect">
+            <a:avLst/>
+          </a:prstGeom>
+          <a:noFill/>
+          <a:ln/>
+        </p:spPr>
+        <p:txBody>
+          <a:bodyPr wrap="square" lIns="0" tIns="0" rIns="0" bIns="0" rtlCol="0" anchor="ctr">
+            <a:normAutofit/>
+          </a:bodyPr>
+          <a:lstStyle/>
+          <a:p>
+            <a:pPr indent="0" marL="0">
+              <a:buNone/>
+            </a:pPr>
+            <a:r>
+              <a:rPr lang="en-US" sz="660" dirty="0">
+                <a:solidFill>
+                  <a:srgbClr val="111827"/>
+                </a:solidFill>
+                <a:latin typeface="Consolas" pitchFamily="34" charset="0"/>
+                <a:ea typeface="Consolas" pitchFamily="34" charset="-122"/>
+                <a:cs typeface="Consolas" pitchFamily="34" charset="-120"/>
+              </a:rPr>
+              <a:t>DEFAULT_STRATEGIES = [</a:t>
+            </a:r>
+            <a:endParaRPr lang="en-US" sz="660" dirty="0"/>
+          </a:p>
+          <a:p>
+            <a:pPr indent="0" marL="0">
+              <a:buNone/>
+            </a:pPr>
+            <a:r>
+              <a:rPr lang="en-US" sz="660" dirty="0">
+                <a:solidFill>
+                  <a:srgbClr val="111827"/>
+                </a:solidFill>
+                <a:latin typeface="Consolas" pitchFamily="34" charset="0"/>
+                <a:ea typeface="Consolas" pitchFamily="34" charset="-122"/>
+                <a:cs typeface="Consolas" pitchFamily="34" charset="-120"/>
+              </a:rPr>
+              <a:t>    "top1_weight",</a:t>
+            </a:r>
+            <a:endParaRPr lang="en-US" sz="660" dirty="0"/>
+          </a:p>
+          <a:p>
+            <a:pPr indent="0" marL="0">
+              <a:buNone/>
+            </a:pPr>
+            <a:r>
+              <a:rPr lang="en-US" sz="660" dirty="0">
+                <a:solidFill>
+                  <a:srgbClr val="111827"/>
+                </a:solidFill>
+                <a:latin typeface="Consolas" pitchFamily="34" charset="0"/>
+                <a:ea typeface="Consolas" pitchFamily="34" charset="-122"/>
+                <a:cs typeface="Consolas" pitchFamily="34" charset="-120"/>
+              </a:rPr>
+              <a:t>    "confidence_topk",</a:t>
+            </a:r>
+            <a:endParaRPr lang="en-US" sz="660" dirty="0"/>
+          </a:p>
+          <a:p>
+            <a:pPr indent="0" marL="0">
+              <a:buNone/>
+            </a:pPr>
+            <a:r>
+              <a:rPr lang="en-US" sz="660" dirty="0">
+                <a:solidFill>
+                  <a:srgbClr val="111827"/>
+                </a:solidFill>
+                <a:latin typeface="Consolas" pitchFamily="34" charset="0"/>
+                <a:ea typeface="Consolas" pitchFamily="34" charset="-122"/>
+                <a:cs typeface="Consolas" pitchFamily="34" charset="-120"/>
+              </a:rPr>
+              <a:t>    "top2_softmax",</a:t>
+            </a:r>
+            <a:endParaRPr lang="en-US" sz="660" dirty="0"/>
+          </a:p>
+          <a:p>
+            <a:pPr indent="0" marL="0">
+              <a:buNone/>
+            </a:pPr>
+            <a:r>
+              <a:rPr lang="en-US" sz="660" dirty="0">
+                <a:solidFill>
+                  <a:srgbClr val="111827"/>
+                </a:solidFill>
+                <a:latin typeface="Consolas" pitchFamily="34" charset="0"/>
+                <a:ea typeface="Consolas" pitchFamily="34" charset="-122"/>
+                <a:cs typeface="Consolas" pitchFamily="34" charset="-120"/>
+              </a:rPr>
+              <a:t>    "top3_softmax",</a:t>
+            </a:r>
+            <a:endParaRPr lang="en-US" sz="660" dirty="0"/>
+          </a:p>
+          <a:p>
+            <a:pPr indent="0" marL="0">
+              <a:buNone/>
+            </a:pPr>
+            <a:r>
+              <a:rPr lang="en-US" sz="660" dirty="0">
+                <a:solidFill>
+                  <a:srgbClr val="111827"/>
+                </a:solidFill>
+                <a:latin typeface="Consolas" pitchFamily="34" charset="0"/>
+                <a:ea typeface="Consolas" pitchFamily="34" charset="-122"/>
+                <a:cs typeface="Consolas" pitchFamily="34" charset="-120"/>
+              </a:rPr>
+              <a:t>    "proportional_positive_thr0.0",</a:t>
+            </a:r>
+            <a:endParaRPr lang="en-US" sz="660" dirty="0"/>
+          </a:p>
+          <a:p>
+            <a:pPr indent="0" marL="0">
+              <a:buNone/>
+            </a:pPr>
+            <a:r>
+              <a:rPr lang="en-US" sz="660" dirty="0">
+                <a:solidFill>
+                  <a:srgbClr val="111827"/>
+                </a:solidFill>
+                <a:latin typeface="Consolas" pitchFamily="34" charset="0"/>
+                <a:ea typeface="Consolas" pitchFamily="34" charset="-122"/>
+                <a:cs typeface="Consolas" pitchFamily="34" charset="-120"/>
+              </a:rPr>
+              <a:t>]</a:t>
+            </a:r>
+            <a:endParaRPr lang="en-US" sz="660" dirty="0"/>
+          </a:p>
+        </p:txBody>
+      </p:sp>
+      <p:sp>
+        <p:nvSpPr>
+          <p:cNvPr id="28" name="Text 26"/>
+          <p:cNvSpPr/>
+          <p:nvPr/>
+        </p:nvSpPr>
+        <p:spPr>
+          <a:xfrm>
+            <a:off x="6583680" y="4617720"/>
+            <a:ext cx="4114800" cy="457200"/>
+          </a:xfrm>
+          <a:prstGeom prst="rect">
+            <a:avLst/>
+          </a:prstGeom>
+          <a:noFill/>
+          <a:ln/>
+        </p:spPr>
+        <p:txBody>
+          <a:bodyPr wrap="square" lIns="0" tIns="0" rIns="0" bIns="0" rtlCol="0" anchor="ctr">
+            <a:normAutofit/>
+          </a:bodyPr>
+          <a:lstStyle/>
+          <a:p>
+            <a:pPr indent="0" marL="0">
+              <a:buNone/>
+            </a:pPr>
+            <a:r>
+              <a:rPr lang="en-US" sz="1300" b="1" dirty="0">
+                <a:solidFill>
+                  <a:srgbClr val="DC2626"/>
+                </a:solidFill>
+                <a:latin typeface="Microsoft YaHei" pitchFamily="34" charset="0"/>
+                <a:ea typeface="Microsoft YaHei" pitchFamily="34" charset="-122"/>
+                <a:cs typeface="Microsoft YaHei" pitchFamily="34" charset="-120"/>
+              </a:rPr>
+              <a:t>Audit rule: no parameter can be chosen using data after the simulated submission date T.</a:t>
+            </a:r>
+            <a:endParaRPr lang="en-US" sz="1300" dirty="0"/>
+          </a:p>
+        </p:txBody>
+      </p:sp>
+    </p:spTree>
+  </p:cSld>
+  <p:clrMapOvr>
+    <a:masterClrMapping/>
+  </p:clrMapOvr>
+</p:sld>
+</file>
+
+<file path=ppt/slides/slide16.xml><?xml version="1.0" encoding="utf-8"?>
+<p:sld xmlns:a="http://schemas.openxmlformats.org/drawingml/2006/main" xmlns:r="http://schemas.openxmlformats.org/officeDocument/2006/relationships" xmlns:p="http://schemas.openxmlformats.org/presentationml/2006/main">
+  <p:cSld name="Slide 16">
+    <p:bg>
+      <p:bgPr>
+        <a:solidFill>
+          <a:srgbClr val="FFFFFF"/>
+        </a:solidFill>
+      </p:bgPr>
+    </p:bg>
+    <p:spTree>
+      <p:nvGrpSpPr>
+        <p:cNvPr id="1" name=""/>
+        <p:cNvGrpSpPr/>
+        <p:nvPr/>
+      </p:nvGrpSpPr>
+      <p:grpSpPr>
+        <a:xfrm>
+          <a:off x="0" y="0"/>
+          <a:ext cx="0" cy="0"/>
+          <a:chOff x="0" y="0"/>
+          <a:chExt cx="0" cy="0"/>
+        </a:xfrm>
+      </p:grpSpPr>
+      <p:sp>
+        <p:nvSpPr>
+          <p:cNvPr id="2" name="Text 0"/>
+          <p:cNvSpPr/>
+          <p:nvPr/>
+        </p:nvSpPr>
+        <p:spPr>
+          <a:xfrm>
+            <a:off x="502920" y="256032"/>
+            <a:ext cx="2194560" cy="201168"/>
+          </a:xfrm>
+          <a:prstGeom prst="rect">
+            <a:avLst/>
+          </a:prstGeom>
+          <a:noFill/>
+          <a:ln/>
+        </p:spPr>
+        <p:txBody>
+          <a:bodyPr wrap="square" lIns="0" tIns="0" rIns="0" bIns="0" rtlCol="0" anchor="ctr"/>
+          <a:lstStyle/>
+          <a:p>
+            <a:pPr indent="0" marL="0">
+              <a:buNone/>
+            </a:pPr>
+            <a:r>
+              <a:rPr lang="en-US" sz="800" b="1" dirty="0">
+                <a:solidFill>
+                  <a:srgbClr val="2563EB"/>
+                </a:solidFill>
+                <a:latin typeface="Microsoft YaHei" pitchFamily="34" charset="0"/>
+                <a:ea typeface="Microsoft YaHei" pitchFamily="34" charset="-122"/>
+                <a:cs typeface="Microsoft YaHei" pitchFamily="34" charset="-120"/>
+              </a:rPr>
+              <a:t>DATA ENGINEERING</a:t>
+            </a:r>
+            <a:endParaRPr lang="en-US" sz="800" dirty="0"/>
+          </a:p>
+        </p:txBody>
+      </p:sp>
+      <p:sp>
+        <p:nvSpPr>
+          <p:cNvPr id="3" name="Text 1"/>
+          <p:cNvSpPr/>
+          <p:nvPr/>
+        </p:nvSpPr>
+        <p:spPr>
+          <a:xfrm>
+            <a:off x="502920" y="530352"/>
+            <a:ext cx="9875520" cy="384048"/>
+          </a:xfrm>
+          <a:prstGeom prst="rect">
+            <a:avLst/>
+          </a:prstGeom>
+          <a:noFill/>
+          <a:ln/>
+        </p:spPr>
+        <p:txBody>
+          <a:bodyPr wrap="square" lIns="0" tIns="0" rIns="0" bIns="0" rtlCol="0" anchor="ctr">
+            <a:normAutofit/>
+          </a:bodyPr>
+          <a:lstStyle/>
+          <a:p>
+            <a:pPr indent="0" marL="0">
+              <a:buNone/>
+            </a:pPr>
+            <a:r>
+              <a:rPr lang="en-US" sz="2400" b="1" dirty="0">
+                <a:solidFill>
+                  <a:srgbClr val="172033"/>
+                </a:solidFill>
+                <a:latin typeface="Microsoft YaHei" pitchFamily="34" charset="0"/>
+                <a:ea typeface="Microsoft YaHei" pitchFamily="34" charset="-122"/>
+                <a:cs typeface="Microsoft YaHei" pitchFamily="34" charset="-120"/>
+              </a:rPr>
+              <a:t>P2 data engineering: raw row to model row</a:t>
+            </a:r>
+            <a:endParaRPr lang="en-US" sz="2400" dirty="0"/>
+          </a:p>
+        </p:txBody>
+      </p:sp>
+      <p:sp>
+        <p:nvSpPr>
+          <p:cNvPr id="4" name="Shape 2"/>
+          <p:cNvSpPr/>
+          <p:nvPr/>
+        </p:nvSpPr>
+        <p:spPr>
+          <a:xfrm>
+            <a:off x="502920" y="1051560"/>
+            <a:ext cx="11155680" cy="0"/>
+          </a:xfrm>
+          <a:prstGeom prst="line">
+            <a:avLst/>
+          </a:prstGeom>
+          <a:noFill/>
+          <a:ln w="12700">
+            <a:solidFill>
+              <a:srgbClr val="D7DEE8"/>
+            </a:solidFill>
+            <a:prstDash val="solid"/>
+          </a:ln>
+        </p:spPr>
+      </p:sp>
+      <p:sp>
+        <p:nvSpPr>
+          <p:cNvPr id="5" name="Text 3"/>
+          <p:cNvSpPr/>
+          <p:nvPr/>
+        </p:nvSpPr>
+        <p:spPr>
+          <a:xfrm>
+            <a:off x="8229600" y="6446520"/>
+            <a:ext cx="3383280" cy="201168"/>
+          </a:xfrm>
+          <a:prstGeom prst="rect">
+            <a:avLst/>
+          </a:prstGeom>
+          <a:noFill/>
+          <a:ln/>
+        </p:spPr>
+        <p:txBody>
+          <a:bodyPr wrap="square" lIns="0" tIns="0" rIns="0" bIns="0" rtlCol="0" anchor="ctr"/>
+          <a:lstStyle/>
+          <a:p>
+            <a:pPr algn="r" indent="0" marL="0">
+              <a:buNone/>
+            </a:pPr>
+            <a:r>
+              <a:rPr lang="en-US" sz="750" dirty="0">
+                <a:solidFill>
+                  <a:srgbClr val="94A3B8"/>
+                </a:solidFill>
+              </a:rPr>
+              <a:t>2026-05-07 · CSI300 Competition Review</a:t>
+            </a:r>
+            <a:endParaRPr lang="en-US" sz="750" dirty="0"/>
+          </a:p>
+        </p:txBody>
+      </p:sp>
+      <p:sp>
+        <p:nvSpPr>
+          <p:cNvPr id="6" name="Shape 4"/>
+          <p:cNvSpPr/>
+          <p:nvPr/>
+        </p:nvSpPr>
+        <p:spPr>
+          <a:xfrm>
+            <a:off x="777240" y="1188720"/>
+            <a:ext cx="1920240" cy="530352"/>
+          </a:xfrm>
+          <a:prstGeom prst="roundRect">
+            <a:avLst>
+              <a:gd name="adj" fmla="val 8621"/>
+            </a:avLst>
+          </a:prstGeom>
+          <a:solidFill>
+            <a:srgbClr val="F6F8FB"/>
+          </a:solidFill>
+          <a:ln w="10160">
+            <a:solidFill>
+              <a:srgbClr val="D7DEE8"/>
+            </a:solidFill>
+            <a:prstDash val="solid"/>
+          </a:ln>
+        </p:spPr>
+      </p:sp>
+      <p:sp>
+        <p:nvSpPr>
+          <p:cNvPr id="7" name="Text 5"/>
+          <p:cNvSpPr/>
+          <p:nvPr/>
+        </p:nvSpPr>
+        <p:spPr>
+          <a:xfrm>
+            <a:off x="832104" y="1325880"/>
+            <a:ext cx="1810512" cy="219456"/>
+          </a:xfrm>
+          <a:prstGeom prst="rect">
+            <a:avLst/>
+          </a:prstGeom>
+          <a:noFill/>
+          <a:ln/>
+        </p:spPr>
+        <p:txBody>
+          <a:bodyPr wrap="square" lIns="0" tIns="0" rIns="0" bIns="0" rtlCol="0" anchor="ctr">
+            <a:normAutofit/>
+          </a:bodyPr>
+          <a:lstStyle/>
+          <a:p>
+            <a:pPr indent="0" marL="0">
+              <a:buNone/>
+            </a:pPr>
+            <a:r>
+              <a:rPr lang="en-US" sz="750" b="1" dirty="0">
+                <a:solidFill>
+                  <a:srgbClr val="172033"/>
+                </a:solidFill>
+                <a:latin typeface="Microsoft YaHei" pitchFamily="34" charset="0"/>
+                <a:ea typeface="Microsoft YaHei" pitchFamily="34" charset="-122"/>
+                <a:cs typeface="Microsoft YaHei" pitchFamily="34" charset="-120"/>
+              </a:rPr>
+              <a:t>raw OHLCV</a:t>
+            </a:r>
+            <a:endParaRPr lang="en-US" sz="750" dirty="0"/>
+          </a:p>
+        </p:txBody>
+      </p:sp>
+      <p:sp>
+        <p:nvSpPr>
+          <p:cNvPr id="8" name="Shape 6"/>
+          <p:cNvSpPr/>
+          <p:nvPr/>
+        </p:nvSpPr>
+        <p:spPr>
+          <a:xfrm>
+            <a:off x="2724912" y="1453896"/>
+            <a:ext cx="109728" cy="0"/>
+          </a:xfrm>
+          <a:prstGeom prst="line">
+            <a:avLst/>
+          </a:prstGeom>
+          <a:noFill/>
+          <a:ln w="12700">
+            <a:solidFill>
+              <a:srgbClr val="2563EB"/>
+            </a:solidFill>
+            <a:prstDash val="solid"/>
+            <a:tailEnd type="triangle"/>
+          </a:ln>
+        </p:spPr>
+      </p:sp>
+      <p:sp>
+        <p:nvSpPr>
+          <p:cNvPr id="9" name="Shape 7"/>
+          <p:cNvSpPr/>
+          <p:nvPr/>
+        </p:nvSpPr>
+        <p:spPr>
+          <a:xfrm>
+            <a:off x="2862072" y="1188720"/>
+            <a:ext cx="1920240" cy="530352"/>
+          </a:xfrm>
+          <a:prstGeom prst="roundRect">
+            <a:avLst>
+              <a:gd name="adj" fmla="val 8621"/>
+            </a:avLst>
+          </a:prstGeom>
+          <a:solidFill>
+            <a:srgbClr val="F6F8FB"/>
+          </a:solidFill>
+          <a:ln w="10160">
+            <a:solidFill>
+              <a:srgbClr val="D7DEE8"/>
+            </a:solidFill>
+            <a:prstDash val="solid"/>
+          </a:ln>
+        </p:spPr>
+      </p:sp>
+      <p:sp>
+        <p:nvSpPr>
+          <p:cNvPr id="10" name="Text 8"/>
+          <p:cNvSpPr/>
+          <p:nvPr/>
+        </p:nvSpPr>
+        <p:spPr>
+          <a:xfrm>
+            <a:off x="2916936" y="1325880"/>
+            <a:ext cx="1810512" cy="219456"/>
+          </a:xfrm>
+          <a:prstGeom prst="rect">
+            <a:avLst/>
+          </a:prstGeom>
+          <a:noFill/>
+          <a:ln/>
+        </p:spPr>
+        <p:txBody>
+          <a:bodyPr wrap="square" lIns="0" tIns="0" rIns="0" bIns="0" rtlCol="0" anchor="ctr">
+            <a:normAutofit/>
+          </a:bodyPr>
+          <a:lstStyle/>
+          <a:p>
+            <a:pPr indent="0" marL="0">
+              <a:buNone/>
+            </a:pPr>
+            <a:r>
+              <a:rPr lang="en-US" sz="750" b="1" dirty="0">
+                <a:solidFill>
+                  <a:srgbClr val="172033"/>
+                </a:solidFill>
+                <a:latin typeface="Microsoft YaHei" pitchFamily="34" charset="0"/>
+                <a:ea typeface="Microsoft YaHei" pitchFamily="34" charset="-122"/>
+                <a:cs typeface="Microsoft YaHei" pitchFamily="34" charset="-120"/>
+              </a:rPr>
+              <a:t>normalize</a:t>
+            </a:r>
+            <a:endParaRPr lang="en-US" sz="750" dirty="0"/>
+          </a:p>
+        </p:txBody>
+      </p:sp>
+      <p:sp>
+        <p:nvSpPr>
+          <p:cNvPr id="11" name="Shape 9"/>
+          <p:cNvSpPr/>
+          <p:nvPr/>
+        </p:nvSpPr>
+        <p:spPr>
+          <a:xfrm>
+            <a:off x="4809744" y="1453896"/>
+            <a:ext cx="109728" cy="0"/>
+          </a:xfrm>
+          <a:prstGeom prst="line">
+            <a:avLst/>
+          </a:prstGeom>
+          <a:noFill/>
+          <a:ln w="12700">
+            <a:solidFill>
+              <a:srgbClr val="2563EB"/>
+            </a:solidFill>
+            <a:prstDash val="solid"/>
+            <a:tailEnd type="triangle"/>
+          </a:ln>
+        </p:spPr>
+      </p:sp>
+      <p:sp>
+        <p:nvSpPr>
+          <p:cNvPr id="12" name="Shape 10"/>
+          <p:cNvSpPr/>
+          <p:nvPr/>
+        </p:nvSpPr>
+        <p:spPr>
+          <a:xfrm>
+            <a:off x="4946904" y="1188720"/>
+            <a:ext cx="1920240" cy="530352"/>
+          </a:xfrm>
+          <a:prstGeom prst="roundRect">
+            <a:avLst>
+              <a:gd name="adj" fmla="val 8621"/>
+            </a:avLst>
+          </a:prstGeom>
+          <a:solidFill>
+            <a:srgbClr val="F6F8FB"/>
+          </a:solidFill>
+          <a:ln w="10160">
+            <a:solidFill>
+              <a:srgbClr val="D7DEE8"/>
+            </a:solidFill>
+            <a:prstDash val="solid"/>
+          </a:ln>
+        </p:spPr>
+      </p:sp>
+      <p:sp>
+        <p:nvSpPr>
+          <p:cNvPr id="13" name="Text 11"/>
+          <p:cNvSpPr/>
+          <p:nvPr/>
+        </p:nvSpPr>
+        <p:spPr>
+          <a:xfrm>
+            <a:off x="5001768" y="1325880"/>
+            <a:ext cx="1810512" cy="219456"/>
+          </a:xfrm>
+          <a:prstGeom prst="rect">
+            <a:avLst/>
+          </a:prstGeom>
+          <a:noFill/>
+          <a:ln/>
+        </p:spPr>
+        <p:txBody>
+          <a:bodyPr wrap="square" lIns="0" tIns="0" rIns="0" bIns="0" rtlCol="0" anchor="ctr">
+            <a:normAutofit/>
+          </a:bodyPr>
+          <a:lstStyle/>
+          <a:p>
+            <a:pPr indent="0" marL="0">
+              <a:buNone/>
+            </a:pPr>
+            <a:r>
+              <a:rPr lang="en-US" sz="750" b="1" dirty="0">
+                <a:solidFill>
+                  <a:srgbClr val="172033"/>
+                </a:solidFill>
+                <a:latin typeface="Microsoft YaHei" pitchFamily="34" charset="0"/>
+                <a:ea typeface="Microsoft YaHei" pitchFamily="34" charset="-122"/>
+                <a:cs typeface="Microsoft YaHei" pitchFamily="34" charset="-120"/>
+              </a:rPr>
+              <a:t>rolling features</a:t>
+            </a:r>
+            <a:endParaRPr lang="en-US" sz="750" dirty="0"/>
+          </a:p>
+        </p:txBody>
+      </p:sp>
+      <p:sp>
+        <p:nvSpPr>
+          <p:cNvPr id="14" name="Shape 12"/>
+          <p:cNvSpPr/>
+          <p:nvPr/>
+        </p:nvSpPr>
+        <p:spPr>
+          <a:xfrm>
+            <a:off x="6894576" y="1453896"/>
+            <a:ext cx="109728" cy="0"/>
+          </a:xfrm>
+          <a:prstGeom prst="line">
+            <a:avLst/>
+          </a:prstGeom>
+          <a:noFill/>
+          <a:ln w="12700">
+            <a:solidFill>
+              <a:srgbClr val="2563EB"/>
+            </a:solidFill>
+            <a:prstDash val="solid"/>
+            <a:tailEnd type="triangle"/>
+          </a:ln>
+        </p:spPr>
+      </p:sp>
+      <p:sp>
+        <p:nvSpPr>
+          <p:cNvPr id="15" name="Shape 13"/>
+          <p:cNvSpPr/>
+          <p:nvPr/>
+        </p:nvSpPr>
+        <p:spPr>
+          <a:xfrm>
+            <a:off x="7031736" y="1188720"/>
+            <a:ext cx="1920240" cy="530352"/>
+          </a:xfrm>
+          <a:prstGeom prst="roundRect">
+            <a:avLst>
+              <a:gd name="adj" fmla="val 8621"/>
+            </a:avLst>
+          </a:prstGeom>
+          <a:solidFill>
+            <a:srgbClr val="F6F8FB"/>
+          </a:solidFill>
+          <a:ln w="10160">
+            <a:solidFill>
+              <a:srgbClr val="D7DEE8"/>
+            </a:solidFill>
+            <a:prstDash val="solid"/>
+          </a:ln>
+        </p:spPr>
+      </p:sp>
+      <p:sp>
+        <p:nvSpPr>
+          <p:cNvPr id="16" name="Text 14"/>
+          <p:cNvSpPr/>
+          <p:nvPr/>
+        </p:nvSpPr>
+        <p:spPr>
+          <a:xfrm>
+            <a:off x="7086600" y="1325880"/>
+            <a:ext cx="1810512" cy="219456"/>
+          </a:xfrm>
+          <a:prstGeom prst="rect">
+            <a:avLst/>
+          </a:prstGeom>
+          <a:noFill/>
+          <a:ln/>
+        </p:spPr>
+        <p:txBody>
+          <a:bodyPr wrap="square" lIns="0" tIns="0" rIns="0" bIns="0" rtlCol="0" anchor="ctr">
+            <a:normAutofit/>
+          </a:bodyPr>
+          <a:lstStyle/>
+          <a:p>
+            <a:pPr indent="0" marL="0">
+              <a:buNone/>
+            </a:pPr>
+            <a:r>
+              <a:rPr lang="en-US" sz="750" b="1" dirty="0">
+                <a:solidFill>
+                  <a:srgbClr val="172033"/>
+                </a:solidFill>
+                <a:latin typeface="Microsoft YaHei" pitchFamily="34" charset="0"/>
+                <a:ea typeface="Microsoft YaHei" pitchFamily="34" charset="-122"/>
+                <a:cs typeface="Microsoft YaHei" pitchFamily="34" charset="-120"/>
+              </a:rPr>
+              <a:t>cross-section ranks</a:t>
+            </a:r>
+            <a:endParaRPr lang="en-US" sz="750" dirty="0"/>
+          </a:p>
+        </p:txBody>
+      </p:sp>
+      <p:sp>
+        <p:nvSpPr>
+          <p:cNvPr id="17" name="Shape 15"/>
+          <p:cNvSpPr/>
+          <p:nvPr/>
+        </p:nvSpPr>
+        <p:spPr>
+          <a:xfrm>
+            <a:off x="8979408" y="1453896"/>
+            <a:ext cx="109728" cy="0"/>
+          </a:xfrm>
+          <a:prstGeom prst="line">
+            <a:avLst/>
+          </a:prstGeom>
+          <a:noFill/>
+          <a:ln w="12700">
+            <a:solidFill>
+              <a:srgbClr val="2563EB"/>
+            </a:solidFill>
+            <a:prstDash val="solid"/>
+            <a:tailEnd type="triangle"/>
+          </a:ln>
+        </p:spPr>
+      </p:sp>
+      <p:sp>
+        <p:nvSpPr>
+          <p:cNvPr id="18" name="Shape 16"/>
+          <p:cNvSpPr/>
+          <p:nvPr/>
+        </p:nvSpPr>
+        <p:spPr>
+          <a:xfrm>
+            <a:off x="9116568" y="1188720"/>
+            <a:ext cx="1920240" cy="530352"/>
+          </a:xfrm>
+          <a:prstGeom prst="roundRect">
+            <a:avLst>
+              <a:gd name="adj" fmla="val 8621"/>
+            </a:avLst>
+          </a:prstGeom>
+          <a:solidFill>
+            <a:srgbClr val="E0F2FE"/>
+          </a:solidFill>
+          <a:ln w="10160">
+            <a:solidFill>
+              <a:srgbClr val="7DD3FC"/>
+            </a:solidFill>
+            <a:prstDash val="solid"/>
+          </a:ln>
+        </p:spPr>
+      </p:sp>
+      <p:sp>
+        <p:nvSpPr>
+          <p:cNvPr id="19" name="Text 17"/>
+          <p:cNvSpPr/>
+          <p:nvPr/>
+        </p:nvSpPr>
+        <p:spPr>
+          <a:xfrm>
+            <a:off x="9171432" y="1325880"/>
+            <a:ext cx="1810512" cy="219456"/>
+          </a:xfrm>
+          <a:prstGeom prst="rect">
+            <a:avLst/>
+          </a:prstGeom>
+          <a:noFill/>
+          <a:ln/>
+        </p:spPr>
+        <p:txBody>
+          <a:bodyPr wrap="square" lIns="0" tIns="0" rIns="0" bIns="0" rtlCol="0" anchor="ctr">
+            <a:normAutofit/>
+          </a:bodyPr>
+          <a:lstStyle/>
+          <a:p>
+            <a:pPr indent="0" marL="0">
+              <a:buNone/>
+            </a:pPr>
+            <a:r>
+              <a:rPr lang="en-US" sz="750" b="1" dirty="0">
+                <a:solidFill>
+                  <a:srgbClr val="172033"/>
+                </a:solidFill>
+                <a:latin typeface="Microsoft YaHei" pitchFamily="34" charset="0"/>
+                <a:ea typeface="Microsoft YaHei" pitchFamily="34" charset="-122"/>
+                <a:cs typeface="Microsoft YaHei" pitchFamily="34" charset="-120"/>
+              </a:rPr>
+              <a:t>label/infer split</a:t>
+            </a:r>
+            <a:endParaRPr lang="en-US" sz="750" dirty="0"/>
+          </a:p>
+        </p:txBody>
+      </p:sp>
+      <p:graphicFrame>
+        <p:nvGraphicFramePr>
+          <p:cNvPr id="17" name="Table 0"/>
+          <p:cNvGraphicFramePr>
+            <a:graphicFrameLocks noGrp="1"/>
+          </p:cNvGraphicFramePr>
+          <p:nvPr>
+            <p:extLst>
+              <p:ext uri="{D42A27DB-BD31-4B8C-83A1-F6EECF244321}">
+                <p14:modId xmlns:p14="http://schemas.microsoft.com/office/powerpoint/2010/main" val="1579011935"/>
+              </p:ext>
+            </p:extLst>
+          </p:nvPr>
+        </p:nvGraphicFramePr>
+        <p:xfrm>
+          <a:off x="777240" y="2057400"/>
+          <a:ext cx="10332720" cy="2148840"/>
+        </p:xfrm>
+        <a:graphic>
+          <a:graphicData uri="http://schemas.openxmlformats.org/drawingml/2006/table">
+            <a:tbl>
+              <a:tblPr/>
+              <a:tblGrid>
+                <a:gridCol w="1188720"/>
+                <a:gridCol w="4754880"/>
+                <a:gridCol w="4389120"/>
+              </a:tblGrid>
+              <a:tr h="429768">
+                <a:tc>
+                  <a:txBody>
+                    <a:bodyPr/>
+                    <a:lstStyle/>
+                    <a:p>
+                      <a:pPr indent="0" marL="0">
+                        <a:buNone/>
+                      </a:pPr>
+                      <a:r>
+                        <a:rPr lang="en-US" sz="820" b="1" dirty="0">
+                          <a:solidFill>
+                            <a:srgbClr val="172033"/>
+                          </a:solidFill>
+                          <a:latin typeface="Microsoft YaHei" pitchFamily="34" charset="0"/>
+                          <a:ea typeface="Microsoft YaHei" pitchFamily="34" charset="-122"/>
+                          <a:cs typeface="Microsoft YaHei" pitchFamily="34" charset="-120"/>
+                        </a:rPr>
+                        <a:t>Stage</a:t>
+                      </a:r>
+                      <a:endParaRPr lang="en-US" sz="820" dirty="0">
+                        <a:latin typeface="Microsoft YaHei" charset="0"/>
+                        <a:ea typeface="Microsoft YaHei" charset="0"/>
+                        <a:cs typeface="Microsoft YaHei" charset="0"/>
+                      </a:endParaRPr>
+                    </a:p>
+                  </a:txBody>
+                  <a:tcPr marL="54864" marR="54864" marT="54864" marB="54864" anchor="mid">
+                    <a:lnL w="6350" cap="flat" cmpd="sng" algn="ctr">
+                      <a:solidFill>
+                        <a:srgbClr val="D7DEE8"/>
+                      </a:solidFill>
+                      <a:prstDash val="solid"/>
+                      <a:round/>
+                      <a:headEnd type="none" w="med" len="med"/>
+                      <a:tailEnd type="none" w="med" len="med"/>
+                    </a:lnL>
+                    <a:lnR w="6350" cap="flat" cmpd="sng" algn="ctr">
+                      <a:solidFill>
+                        <a:srgbClr val="D7DEE8"/>
+                      </a:solidFill>
+                      <a:prstDash val="solid"/>
+                      <a:round/>
+                      <a:headEnd type="none" w="med" len="med"/>
+                      <a:tailEnd type="none" w="med" len="med"/>
+                    </a:lnR>
+                    <a:lnT w="6350" cap="flat" cmpd="sng" algn="ctr">
+                      <a:solidFill>
+                        <a:srgbClr val="D7DEE8"/>
+                      </a:solidFill>
+                      <a:prstDash val="solid"/>
+                      <a:round/>
+                      <a:headEnd type="none" w="med" len="med"/>
+                      <a:tailEnd type="none" w="med" len="med"/>
+                    </a:lnT>
+                    <a:lnB w="6350" cap="flat" cmpd="sng" algn="ctr">
+                      <a:solidFill>
+                        <a:srgbClr val="D7DEE8"/>
+                      </a:solidFill>
+                      <a:prstDash val="solid"/>
+                      <a:round/>
+                      <a:headEnd type="none" w="med" len="med"/>
+                      <a:tailEnd type="none" w="med" len="med"/>
+                    </a:lnB>
+                    <a:solidFill>
+                      <a:srgbClr val="E2E8F0"/>
+                    </a:solidFill>
+                  </a:tcPr>
+                </a:tc>
+                <a:tc>
+                  <a:txBody>
+                    <a:bodyPr/>
+                    <a:lstStyle/>
+                    <a:p>
+                      <a:pPr indent="0" marL="0">
+                        <a:buNone/>
+                      </a:pPr>
+                      <a:r>
+                        <a:rPr lang="en-US" sz="820" b="1" dirty="0">
+                          <a:solidFill>
+                            <a:srgbClr val="172033"/>
+                          </a:solidFill>
+                          <a:latin typeface="Microsoft YaHei" pitchFamily="34" charset="0"/>
+                          <a:ea typeface="Microsoft YaHei" pitchFamily="34" charset="-122"/>
+                          <a:cs typeface="Microsoft YaHei" pitchFamily="34" charset="-120"/>
+                        </a:rPr>
+                        <a:t>Example</a:t>
+                      </a:r>
+                      <a:endParaRPr lang="en-US" sz="820" dirty="0">
+                        <a:latin typeface="Microsoft YaHei" charset="0"/>
+                        <a:ea typeface="Microsoft YaHei" charset="0"/>
+                        <a:cs typeface="Microsoft YaHei" charset="0"/>
+                      </a:endParaRPr>
+                    </a:p>
+                  </a:txBody>
+                  <a:tcPr marL="54864" marR="54864" marT="54864" marB="54864" anchor="mid">
+                    <a:lnL w="6350" cap="flat" cmpd="sng" algn="ctr">
+                      <a:solidFill>
+                        <a:srgbClr val="D7DEE8"/>
+                      </a:solidFill>
+                      <a:prstDash val="solid"/>
+                      <a:round/>
+                      <a:headEnd type="none" w="med" len="med"/>
+                      <a:tailEnd type="none" w="med" len="med"/>
+                    </a:lnL>
+                    <a:lnR w="6350" cap="flat" cmpd="sng" algn="ctr">
+                      <a:solidFill>
+                        <a:srgbClr val="D7DEE8"/>
+                      </a:solidFill>
+                      <a:prstDash val="solid"/>
+                      <a:round/>
+                      <a:headEnd type="none" w="med" len="med"/>
+                      <a:tailEnd type="none" w="med" len="med"/>
+                    </a:lnR>
+                    <a:lnT w="6350" cap="flat" cmpd="sng" algn="ctr">
+                      <a:solidFill>
+                        <a:srgbClr val="D7DEE8"/>
+                      </a:solidFill>
+                      <a:prstDash val="solid"/>
+                      <a:round/>
+                      <a:headEnd type="none" w="med" len="med"/>
+                      <a:tailEnd type="none" w="med" len="med"/>
+                    </a:lnT>
+                    <a:lnB w="6350" cap="flat" cmpd="sng" algn="ctr">
+                      <a:solidFill>
+                        <a:srgbClr val="D7DEE8"/>
+                      </a:solidFill>
+                      <a:prstDash val="solid"/>
+                      <a:round/>
+                      <a:headEnd type="none" w="med" len="med"/>
+                      <a:tailEnd type="none" w="med" len="med"/>
+                    </a:lnB>
+                    <a:solidFill>
+                      <a:srgbClr val="E2E8F0"/>
+                    </a:solidFill>
+                  </a:tcPr>
+                </a:tc>
+                <a:tc>
+                  <a:txBody>
+                    <a:bodyPr/>
+                    <a:lstStyle/>
+                    <a:p>
+                      <a:pPr indent="0" marL="0">
+                        <a:buNone/>
+                      </a:pPr>
+                      <a:r>
+                        <a:rPr lang="en-US" sz="820" b="1" dirty="0">
+                          <a:solidFill>
+                            <a:srgbClr val="172033"/>
+                          </a:solidFill>
+                          <a:latin typeface="Microsoft YaHei" pitchFamily="34" charset="0"/>
+                          <a:ea typeface="Microsoft YaHei" pitchFamily="34" charset="-122"/>
+                          <a:cs typeface="Microsoft YaHei" pitchFamily="34" charset="-120"/>
+                        </a:rPr>
+                        <a:t>Audit check</a:t>
+                      </a:r>
+                      <a:endParaRPr lang="en-US" sz="820" dirty="0">
+                        <a:latin typeface="Microsoft YaHei" charset="0"/>
+                        <a:ea typeface="Microsoft YaHei" charset="0"/>
+                        <a:cs typeface="Microsoft YaHei" charset="0"/>
+                      </a:endParaRPr>
+                    </a:p>
+                  </a:txBody>
+                  <a:tcPr marL="54864" marR="54864" marT="54864" marB="54864" anchor="mid">
+                    <a:lnL w="6350" cap="flat" cmpd="sng" algn="ctr">
+                      <a:solidFill>
+                        <a:srgbClr val="D7DEE8"/>
+                      </a:solidFill>
+                      <a:prstDash val="solid"/>
+                      <a:round/>
+                      <a:headEnd type="none" w="med" len="med"/>
+                      <a:tailEnd type="none" w="med" len="med"/>
+                    </a:lnL>
+                    <a:lnR w="6350" cap="flat" cmpd="sng" algn="ctr">
+                      <a:solidFill>
+                        <a:srgbClr val="D7DEE8"/>
+                      </a:solidFill>
+                      <a:prstDash val="solid"/>
+                      <a:round/>
+                      <a:headEnd type="none" w="med" len="med"/>
+                      <a:tailEnd type="none" w="med" len="med"/>
+                    </a:lnR>
+                    <a:lnT w="6350" cap="flat" cmpd="sng" algn="ctr">
+                      <a:solidFill>
+                        <a:srgbClr val="D7DEE8"/>
+                      </a:solidFill>
+                      <a:prstDash val="solid"/>
+                      <a:round/>
+                      <a:headEnd type="none" w="med" len="med"/>
+                      <a:tailEnd type="none" w="med" len="med"/>
+                    </a:lnT>
+                    <a:lnB w="6350" cap="flat" cmpd="sng" algn="ctr">
+                      <a:solidFill>
+                        <a:srgbClr val="D7DEE8"/>
+                      </a:solidFill>
+                      <a:prstDash val="solid"/>
+                      <a:round/>
+                      <a:headEnd type="none" w="med" len="med"/>
+                      <a:tailEnd type="none" w="med" len="med"/>
+                    </a:lnB>
+                    <a:solidFill>
+                      <a:srgbClr val="E2E8F0"/>
+                    </a:solidFill>
+                  </a:tcPr>
+                </a:tc>
+              </a:tr>
+              <a:tr h="429768">
+                <a:tc>
+                  <a:txBody>
+                    <a:bodyPr/>
+                    <a:lstStyle/>
+                    <a:p>
+                      <a:pPr indent="0" marL="0">
+                        <a:buNone/>
+                      </a:pPr>
+                      <a:r>
+                        <a:rPr lang="en-US" sz="820" dirty="0">
+                          <a:solidFill>
+                            <a:srgbClr val="172033"/>
+                          </a:solidFill>
+                          <a:latin typeface="Microsoft YaHei" pitchFamily="34" charset="0"/>
+                          <a:ea typeface="Microsoft YaHei" pitchFamily="34" charset="-122"/>
+                          <a:cs typeface="Microsoft YaHei" pitchFamily="34" charset="-120"/>
+                        </a:rPr>
+                        <a:t>Raw</a:t>
+                      </a:r>
+                      <a:endParaRPr lang="en-US" sz="820" dirty="0">
+                        <a:latin typeface="Microsoft YaHei" charset="0"/>
+                        <a:ea typeface="Microsoft YaHei" charset="0"/>
+                        <a:cs typeface="Microsoft YaHei" charset="0"/>
+                      </a:endParaRPr>
+                    </a:p>
+                  </a:txBody>
+                  <a:tcPr marL="54864" marR="54864" marT="54864" marB="54864" anchor="mid">
+                    <a:lnL w="6350" cap="flat" cmpd="sng" algn="ctr">
+                      <a:solidFill>
+                        <a:srgbClr val="D7DEE8"/>
+                      </a:solidFill>
+                      <a:prstDash val="solid"/>
+                      <a:round/>
+                      <a:headEnd type="none" w="med" len="med"/>
+                      <a:tailEnd type="none" w="med" len="med"/>
+                    </a:lnL>
+                    <a:lnR w="6350" cap="flat" cmpd="sng" algn="ctr">
+                      <a:solidFill>
+                        <a:srgbClr val="D7DEE8"/>
+                      </a:solidFill>
+                      <a:prstDash val="solid"/>
+                      <a:round/>
+                      <a:headEnd type="none" w="med" len="med"/>
+                      <a:tailEnd type="none" w="med" len="med"/>
+                    </a:lnR>
+                    <a:lnT w="6350" cap="flat" cmpd="sng" algn="ctr">
+                      <a:solidFill>
+                        <a:srgbClr val="D7DEE8"/>
+                      </a:solidFill>
+                      <a:prstDash val="solid"/>
+                      <a:round/>
+                      <a:headEnd type="none" w="med" len="med"/>
+                      <a:tailEnd type="none" w="med" len="med"/>
+                    </a:lnT>
+                    <a:lnB w="6350" cap="flat" cmpd="sng" algn="ctr">
+                      <a:solidFill>
+                        <a:srgbClr val="D7DEE8"/>
+                      </a:solidFill>
+                      <a:prstDash val="solid"/>
+                      <a:round/>
+                      <a:headEnd type="none" w="med" len="med"/>
+                      <a:tailEnd type="none" w="med" len="med"/>
+                    </a:lnB>
+                    <a:solidFill>
+                      <a:srgbClr val="FFFFFF"/>
+                    </a:solidFill>
+                  </a:tcPr>
+                </a:tc>
+                <a:tc>
+                  <a:txBody>
+                    <a:bodyPr/>
+                    <a:lstStyle/>
+                    <a:p>
+                      <a:pPr indent="0" marL="0">
+                        <a:buNone/>
+                      </a:pPr>
+                      <a:r>
+                        <a:rPr lang="en-US" sz="820" dirty="0">
+                          <a:solidFill>
+                            <a:srgbClr val="172033"/>
+                          </a:solidFill>
+                          <a:latin typeface="Microsoft YaHei" pitchFamily="34" charset="0"/>
+                          <a:ea typeface="Microsoft YaHei" pitchFamily="34" charset="-122"/>
+                          <a:cs typeface="Microsoft YaHei" pitchFamily="34" charset="-120"/>
+                        </a:rPr>
+                        <a:t>stock_id/date/open/close/high/low/volume/amount</a:t>
+                      </a:r>
+                      <a:endParaRPr lang="en-US" sz="820" dirty="0">
+                        <a:latin typeface="Microsoft YaHei" charset="0"/>
+                        <a:ea typeface="Microsoft YaHei" charset="0"/>
+                        <a:cs typeface="Microsoft YaHei" charset="0"/>
+                      </a:endParaRPr>
+                    </a:p>
+                  </a:txBody>
+                  <a:tcPr marL="54864" marR="54864" marT="54864" marB="54864" anchor="mid">
+                    <a:lnL w="6350" cap="flat" cmpd="sng" algn="ctr">
+                      <a:solidFill>
+                        <a:srgbClr val="D7DEE8"/>
+                      </a:solidFill>
+                      <a:prstDash val="solid"/>
+                      <a:round/>
+                      <a:headEnd type="none" w="med" len="med"/>
+                      <a:tailEnd type="none" w="med" len="med"/>
+                    </a:lnL>
+                    <a:lnR w="6350" cap="flat" cmpd="sng" algn="ctr">
+                      <a:solidFill>
+                        <a:srgbClr val="D7DEE8"/>
+                      </a:solidFill>
+                      <a:prstDash val="solid"/>
+                      <a:round/>
+                      <a:headEnd type="none" w="med" len="med"/>
+                      <a:tailEnd type="none" w="med" len="med"/>
+                    </a:lnR>
+                    <a:lnT w="6350" cap="flat" cmpd="sng" algn="ctr">
+                      <a:solidFill>
+                        <a:srgbClr val="D7DEE8"/>
+                      </a:solidFill>
+                      <a:prstDash val="solid"/>
+                      <a:round/>
+                      <a:headEnd type="none" w="med" len="med"/>
+                      <a:tailEnd type="none" w="med" len="med"/>
+                    </a:lnT>
+                    <a:lnB w="6350" cap="flat" cmpd="sng" algn="ctr">
+                      <a:solidFill>
+                        <a:srgbClr val="D7DEE8"/>
+                      </a:solidFill>
+                      <a:prstDash val="solid"/>
+                      <a:round/>
+                      <a:headEnd type="none" w="med" len="med"/>
+                      <a:tailEnd type="none" w="med" len="med"/>
+                    </a:lnB>
+                    <a:solidFill>
+                      <a:srgbClr val="FFFFFF"/>
+                    </a:solidFill>
+                  </a:tcPr>
+                </a:tc>
+                <a:tc>
+                  <a:txBody>
+                    <a:bodyPr/>
+                    <a:lstStyle/>
+                    <a:p>
+                      <a:pPr indent="0" marL="0">
+                        <a:buNone/>
+                      </a:pPr>
+                      <a:r>
+                        <a:rPr lang="en-US" sz="820" dirty="0">
+                          <a:solidFill>
+                            <a:srgbClr val="172033"/>
+                          </a:solidFill>
+                          <a:latin typeface="Microsoft YaHei" pitchFamily="34" charset="0"/>
+                          <a:ea typeface="Microsoft YaHei" pitchFamily="34" charset="-122"/>
+                          <a:cs typeface="Microsoft YaHei" pitchFamily="34" charset="-120"/>
+                        </a:rPr>
+                        <a:t>stock_id must remain zero-padded text</a:t>
+                      </a:r>
+                      <a:endParaRPr lang="en-US" sz="820" dirty="0">
+                        <a:latin typeface="Microsoft YaHei" charset="0"/>
+                        <a:ea typeface="Microsoft YaHei" charset="0"/>
+                        <a:cs typeface="Microsoft YaHei" charset="0"/>
+                      </a:endParaRPr>
+                    </a:p>
+                  </a:txBody>
+                  <a:tcPr marL="54864" marR="54864" marT="54864" marB="54864" anchor="mid">
+                    <a:lnL w="6350" cap="flat" cmpd="sng" algn="ctr">
+                      <a:solidFill>
+                        <a:srgbClr val="D7DEE8"/>
+                      </a:solidFill>
+                      <a:prstDash val="solid"/>
+                      <a:round/>
+                      <a:headEnd type="none" w="med" len="med"/>
+                      <a:tailEnd type="none" w="med" len="med"/>
+                    </a:lnL>
+                    <a:lnR w="6350" cap="flat" cmpd="sng" algn="ctr">
+                      <a:solidFill>
+                        <a:srgbClr val="D7DEE8"/>
+                      </a:solidFill>
+                      <a:prstDash val="solid"/>
+                      <a:round/>
+                      <a:headEnd type="none" w="med" len="med"/>
+                      <a:tailEnd type="none" w="med" len="med"/>
+                    </a:lnR>
+                    <a:lnT w="6350" cap="flat" cmpd="sng" algn="ctr">
+                      <a:solidFill>
+                        <a:srgbClr val="D7DEE8"/>
+                      </a:solidFill>
+                      <a:prstDash val="solid"/>
+                      <a:round/>
+                      <a:headEnd type="none" w="med" len="med"/>
+                      <a:tailEnd type="none" w="med" len="med"/>
+                    </a:lnT>
+                    <a:lnB w="6350" cap="flat" cmpd="sng" algn="ctr">
+                      <a:solidFill>
+                        <a:srgbClr val="D7DEE8"/>
+                      </a:solidFill>
+                      <a:prstDash val="solid"/>
+                      <a:round/>
+                      <a:headEnd type="none" w="med" len="med"/>
+                      <a:tailEnd type="none" w="med" len="med"/>
+                    </a:lnB>
+                    <a:solidFill>
+                      <a:srgbClr val="FFFFFF"/>
+                    </a:solidFill>
+                  </a:tcPr>
+                </a:tc>
+              </a:tr>
+              <a:tr h="429768">
+                <a:tc>
+                  <a:txBody>
+                    <a:bodyPr/>
+                    <a:lstStyle/>
+                    <a:p>
+                      <a:pPr indent="0" marL="0">
+                        <a:buNone/>
+                      </a:pPr>
+                      <a:r>
+                        <a:rPr lang="en-US" sz="820" dirty="0">
+                          <a:solidFill>
+                            <a:srgbClr val="172033"/>
+                          </a:solidFill>
+                          <a:latin typeface="Microsoft YaHei" pitchFamily="34" charset="0"/>
+                          <a:ea typeface="Microsoft YaHei" pitchFamily="34" charset="-122"/>
+                          <a:cs typeface="Microsoft YaHei" pitchFamily="34" charset="-120"/>
+                        </a:rPr>
+                        <a:t>Feature</a:t>
+                      </a:r>
+                      <a:endParaRPr lang="en-US" sz="820" dirty="0">
+                        <a:latin typeface="Microsoft YaHei" charset="0"/>
+                        <a:ea typeface="Microsoft YaHei" charset="0"/>
+                        <a:cs typeface="Microsoft YaHei" charset="0"/>
+                      </a:endParaRPr>
+                    </a:p>
+                  </a:txBody>
+                  <a:tcPr marL="54864" marR="54864" marT="54864" marB="54864" anchor="mid">
+                    <a:lnL w="6350" cap="flat" cmpd="sng" algn="ctr">
+                      <a:solidFill>
+                        <a:srgbClr val="D7DEE8"/>
+                      </a:solidFill>
+                      <a:prstDash val="solid"/>
+                      <a:round/>
+                      <a:headEnd type="none" w="med" len="med"/>
+                      <a:tailEnd type="none" w="med" len="med"/>
+                    </a:lnL>
+                    <a:lnR w="6350" cap="flat" cmpd="sng" algn="ctr">
+                      <a:solidFill>
+                        <a:srgbClr val="D7DEE8"/>
+                      </a:solidFill>
+                      <a:prstDash val="solid"/>
+                      <a:round/>
+                      <a:headEnd type="none" w="med" len="med"/>
+                      <a:tailEnd type="none" w="med" len="med"/>
+                    </a:lnR>
+                    <a:lnT w="6350" cap="flat" cmpd="sng" algn="ctr">
+                      <a:solidFill>
+                        <a:srgbClr val="D7DEE8"/>
+                      </a:solidFill>
+                      <a:prstDash val="solid"/>
+                      <a:round/>
+                      <a:headEnd type="none" w="med" len="med"/>
+                      <a:tailEnd type="none" w="med" len="med"/>
+                    </a:lnT>
+                    <a:lnB w="6350" cap="flat" cmpd="sng" algn="ctr">
+                      <a:solidFill>
+                        <a:srgbClr val="D7DEE8"/>
+                      </a:solidFill>
+                      <a:prstDash val="solid"/>
+                      <a:round/>
+                      <a:headEnd type="none" w="med" len="med"/>
+                      <a:tailEnd type="none" w="med" len="med"/>
+                    </a:lnB>
+                    <a:solidFill>
+                      <a:srgbClr val="FFFFFF"/>
+                    </a:solidFill>
+                  </a:tcPr>
+                </a:tc>
+                <a:tc>
+                  <a:txBody>
+                    <a:bodyPr/>
+                    <a:lstStyle/>
+                    <a:p>
+                      <a:pPr indent="0" marL="0">
+                        <a:buNone/>
+                      </a:pPr>
+                      <a:r>
+                        <a:rPr lang="en-US" sz="820" dirty="0">
+                          <a:solidFill>
+                            <a:srgbClr val="172033"/>
+                          </a:solidFill>
+                          <a:latin typeface="Microsoft YaHei" pitchFamily="34" charset="0"/>
+                          <a:ea typeface="Microsoft YaHei" pitchFamily="34" charset="-122"/>
+                          <a:cs typeface="Microsoft YaHei" pitchFamily="34" charset="-120"/>
+                        </a:rPr>
+                        <a:t>ret_1, ret_5, volume_ratio_5, volatility, ranks</a:t>
+                      </a:r>
+                      <a:endParaRPr lang="en-US" sz="820" dirty="0">
+                        <a:latin typeface="Microsoft YaHei" charset="0"/>
+                        <a:ea typeface="Microsoft YaHei" charset="0"/>
+                        <a:cs typeface="Microsoft YaHei" charset="0"/>
+                      </a:endParaRPr>
+                    </a:p>
+                  </a:txBody>
+                  <a:tcPr marL="54864" marR="54864" marT="54864" marB="54864" anchor="mid">
+                    <a:lnL w="6350" cap="flat" cmpd="sng" algn="ctr">
+                      <a:solidFill>
+                        <a:srgbClr val="D7DEE8"/>
+                      </a:solidFill>
+                      <a:prstDash val="solid"/>
+                      <a:round/>
+                      <a:headEnd type="none" w="med" len="med"/>
+                      <a:tailEnd type="none" w="med" len="med"/>
+                    </a:lnL>
+                    <a:lnR w="6350" cap="flat" cmpd="sng" algn="ctr">
+                      <a:solidFill>
+                        <a:srgbClr val="D7DEE8"/>
+                      </a:solidFill>
+                      <a:prstDash val="solid"/>
+                      <a:round/>
+                      <a:headEnd type="none" w="med" len="med"/>
+                      <a:tailEnd type="none" w="med" len="med"/>
+                    </a:lnR>
+                    <a:lnT w="6350" cap="flat" cmpd="sng" algn="ctr">
+                      <a:solidFill>
+                        <a:srgbClr val="D7DEE8"/>
+                      </a:solidFill>
+                      <a:prstDash val="solid"/>
+                      <a:round/>
+                      <a:headEnd type="none" w="med" len="med"/>
+                      <a:tailEnd type="none" w="med" len="med"/>
+                    </a:lnT>
+                    <a:lnB w="6350" cap="flat" cmpd="sng" algn="ctr">
+                      <a:solidFill>
+                        <a:srgbClr val="D7DEE8"/>
+                      </a:solidFill>
+                      <a:prstDash val="solid"/>
+                      <a:round/>
+                      <a:headEnd type="none" w="med" len="med"/>
+                      <a:tailEnd type="none" w="med" len="med"/>
+                    </a:lnB>
+                    <a:solidFill>
+                      <a:srgbClr val="FFFFFF"/>
+                    </a:solidFill>
+                  </a:tcPr>
+                </a:tc>
+                <a:tc>
+                  <a:txBody>
+                    <a:bodyPr/>
+                    <a:lstStyle/>
+                    <a:p>
+                      <a:pPr indent="0" marL="0">
+                        <a:buNone/>
+                      </a:pPr>
+                      <a:r>
+                        <a:rPr lang="en-US" sz="820" dirty="0">
+                          <a:solidFill>
+                            <a:srgbClr val="172033"/>
+                          </a:solidFill>
+                          <a:latin typeface="Microsoft YaHei" pitchFamily="34" charset="0"/>
+                          <a:ea typeface="Microsoft YaHei" pitchFamily="34" charset="-122"/>
+                          <a:cs typeface="Microsoft YaHei" pitchFamily="34" charset="-120"/>
+                        </a:rPr>
+                        <a:t>no future shift except explicit label columns</a:t>
+                      </a:r>
+                      <a:endParaRPr lang="en-US" sz="820" dirty="0">
+                        <a:latin typeface="Microsoft YaHei" charset="0"/>
+                        <a:ea typeface="Microsoft YaHei" charset="0"/>
+                        <a:cs typeface="Microsoft YaHei" charset="0"/>
+                      </a:endParaRPr>
+                    </a:p>
+                  </a:txBody>
+                  <a:tcPr marL="54864" marR="54864" marT="54864" marB="54864" anchor="mid">
+                    <a:lnL w="6350" cap="flat" cmpd="sng" algn="ctr">
+                      <a:solidFill>
+                        <a:srgbClr val="D7DEE8"/>
+                      </a:solidFill>
+                      <a:prstDash val="solid"/>
+                      <a:round/>
+                      <a:headEnd type="none" w="med" len="med"/>
+                      <a:tailEnd type="none" w="med" len="med"/>
+                    </a:lnL>
+                    <a:lnR w="6350" cap="flat" cmpd="sng" algn="ctr">
+                      <a:solidFill>
+                        <a:srgbClr val="D7DEE8"/>
+                      </a:solidFill>
+                      <a:prstDash val="solid"/>
+                      <a:round/>
+                      <a:headEnd type="none" w="med" len="med"/>
+                      <a:tailEnd type="none" w="med" len="med"/>
+                    </a:lnR>
+                    <a:lnT w="6350" cap="flat" cmpd="sng" algn="ctr">
+                      <a:solidFill>
+                        <a:srgbClr val="D7DEE8"/>
+                      </a:solidFill>
+                      <a:prstDash val="solid"/>
+                      <a:round/>
+                      <a:headEnd type="none" w="med" len="med"/>
+                      <a:tailEnd type="none" w="med" len="med"/>
+                    </a:lnT>
+                    <a:lnB w="6350" cap="flat" cmpd="sng" algn="ctr">
+                      <a:solidFill>
+                        <a:srgbClr val="D7DEE8"/>
+                      </a:solidFill>
+                      <a:prstDash val="solid"/>
+                      <a:round/>
+                      <a:headEnd type="none" w="med" len="med"/>
+                      <a:tailEnd type="none" w="med" len="med"/>
+                    </a:lnB>
+                    <a:solidFill>
+                      <a:srgbClr val="FFFFFF"/>
+                    </a:solidFill>
+                  </a:tcPr>
+                </a:tc>
+              </a:tr>
+              <a:tr h="429768">
+                <a:tc>
+                  <a:txBody>
+                    <a:bodyPr/>
+                    <a:lstStyle/>
+                    <a:p>
+                      <a:pPr indent="0" marL="0">
+                        <a:buNone/>
+                      </a:pPr>
+                      <a:r>
+                        <a:rPr lang="en-US" sz="820" dirty="0">
+                          <a:solidFill>
+                            <a:srgbClr val="172033"/>
+                          </a:solidFill>
+                          <a:latin typeface="Microsoft YaHei" pitchFamily="34" charset="0"/>
+                          <a:ea typeface="Microsoft YaHei" pitchFamily="34" charset="-122"/>
+                          <a:cs typeface="Microsoft YaHei" pitchFamily="34" charset="-120"/>
+                        </a:rPr>
+                        <a:t>Inference T</a:t>
+                      </a:r>
+                      <a:endParaRPr lang="en-US" sz="820" dirty="0">
+                        <a:latin typeface="Microsoft YaHei" charset="0"/>
+                        <a:ea typeface="Microsoft YaHei" charset="0"/>
+                        <a:cs typeface="Microsoft YaHei" charset="0"/>
+                      </a:endParaRPr>
+                    </a:p>
+                  </a:txBody>
+                  <a:tcPr marL="54864" marR="54864" marT="54864" marB="54864" anchor="mid">
+                    <a:lnL w="6350" cap="flat" cmpd="sng" algn="ctr">
+                      <a:solidFill>
+                        <a:srgbClr val="D7DEE8"/>
+                      </a:solidFill>
+                      <a:prstDash val="solid"/>
+                      <a:round/>
+                      <a:headEnd type="none" w="med" len="med"/>
+                      <a:tailEnd type="none" w="med" len="med"/>
+                    </a:lnL>
+                    <a:lnR w="6350" cap="flat" cmpd="sng" algn="ctr">
+                      <a:solidFill>
+                        <a:srgbClr val="D7DEE8"/>
+                      </a:solidFill>
+                      <a:prstDash val="solid"/>
+                      <a:round/>
+                      <a:headEnd type="none" w="med" len="med"/>
+                      <a:tailEnd type="none" w="med" len="med"/>
+                    </a:lnR>
+                    <a:lnT w="6350" cap="flat" cmpd="sng" algn="ctr">
+                      <a:solidFill>
+                        <a:srgbClr val="D7DEE8"/>
+                      </a:solidFill>
+                      <a:prstDash val="solid"/>
+                      <a:round/>
+                      <a:headEnd type="none" w="med" len="med"/>
+                      <a:tailEnd type="none" w="med" len="med"/>
+                    </a:lnT>
+                    <a:lnB w="6350" cap="flat" cmpd="sng" algn="ctr">
+                      <a:solidFill>
+                        <a:srgbClr val="D7DEE8"/>
+                      </a:solidFill>
+                      <a:prstDash val="solid"/>
+                      <a:round/>
+                      <a:headEnd type="none" w="med" len="med"/>
+                      <a:tailEnd type="none" w="med" len="med"/>
+                    </a:lnB>
+                    <a:solidFill>
+                      <a:srgbClr val="FFFFFF"/>
+                    </a:solidFill>
+                  </a:tcPr>
+                </a:tc>
+                <a:tc>
+                  <a:txBody>
+                    <a:bodyPr/>
+                    <a:lstStyle/>
+                    <a:p>
+                      <a:pPr indent="0" marL="0">
+                        <a:buNone/>
+                      </a:pPr>
+                      <a:r>
+                        <a:rPr lang="en-US" sz="820" dirty="0">
+                          <a:solidFill>
+                            <a:srgbClr val="172033"/>
+                          </a:solidFill>
+                          <a:latin typeface="Microsoft YaHei" pitchFamily="34" charset="0"/>
+                          <a:ea typeface="Microsoft YaHei" pitchFamily="34" charset="-122"/>
+                          <a:cs typeface="Microsoft YaHei" pitchFamily="34" charset="-120"/>
+                        </a:rPr>
+                        <a:t>2026-04-24 rows have blank future label</a:t>
+                      </a:r>
+                      <a:endParaRPr lang="en-US" sz="820" dirty="0">
+                        <a:latin typeface="Microsoft YaHei" charset="0"/>
+                        <a:ea typeface="Microsoft YaHei" charset="0"/>
+                        <a:cs typeface="Microsoft YaHei" charset="0"/>
+                      </a:endParaRPr>
+                    </a:p>
+                  </a:txBody>
+                  <a:tcPr marL="54864" marR="54864" marT="54864" marB="54864" anchor="mid">
+                    <a:lnL w="6350" cap="flat" cmpd="sng" algn="ctr">
+                      <a:solidFill>
+                        <a:srgbClr val="D7DEE8"/>
+                      </a:solidFill>
+                      <a:prstDash val="solid"/>
+                      <a:round/>
+                      <a:headEnd type="none" w="med" len="med"/>
+                      <a:tailEnd type="none" w="med" len="med"/>
+                    </a:lnL>
+                    <a:lnR w="6350" cap="flat" cmpd="sng" algn="ctr">
+                      <a:solidFill>
+                        <a:srgbClr val="D7DEE8"/>
+                      </a:solidFill>
+                      <a:prstDash val="solid"/>
+                      <a:round/>
+                      <a:headEnd type="none" w="med" len="med"/>
+                      <a:tailEnd type="none" w="med" len="med"/>
+                    </a:lnR>
+                    <a:lnT w="6350" cap="flat" cmpd="sng" algn="ctr">
+                      <a:solidFill>
+                        <a:srgbClr val="D7DEE8"/>
+                      </a:solidFill>
+                      <a:prstDash val="solid"/>
+                      <a:round/>
+                      <a:headEnd type="none" w="med" len="med"/>
+                      <a:tailEnd type="none" w="med" len="med"/>
+                    </a:lnT>
+                    <a:lnB w="6350" cap="flat" cmpd="sng" algn="ctr">
+                      <a:solidFill>
+                        <a:srgbClr val="D7DEE8"/>
+                      </a:solidFill>
+                      <a:prstDash val="solid"/>
+                      <a:round/>
+                      <a:headEnd type="none" w="med" len="med"/>
+                      <a:tailEnd type="none" w="med" len="med"/>
+                    </a:lnB>
+                    <a:solidFill>
+                      <a:srgbClr val="FFFFFF"/>
+                    </a:solidFill>
+                  </a:tcPr>
+                </a:tc>
+                <a:tc>
+                  <a:txBody>
+                    <a:bodyPr/>
+                    <a:lstStyle/>
+                    <a:p>
+                      <a:pPr indent="0" marL="0">
+                        <a:buNone/>
+                      </a:pPr>
+                      <a:r>
+                        <a:rPr lang="en-US" sz="820" dirty="0">
+                          <a:solidFill>
+                            <a:srgbClr val="172033"/>
+                          </a:solidFill>
+                          <a:latin typeface="Microsoft YaHei" pitchFamily="34" charset="0"/>
+                          <a:ea typeface="Microsoft YaHei" pitchFamily="34" charset="-122"/>
+                          <a:cs typeface="Microsoft YaHei" pitchFamily="34" charset="-120"/>
+                        </a:rPr>
+                        <a:t>features up to T only</a:t>
+                      </a:r>
+                      <a:endParaRPr lang="en-US" sz="820" dirty="0">
+                        <a:latin typeface="Microsoft YaHei" charset="0"/>
+                        <a:ea typeface="Microsoft YaHei" charset="0"/>
+                        <a:cs typeface="Microsoft YaHei" charset="0"/>
+                      </a:endParaRPr>
+                    </a:p>
+                  </a:txBody>
+                  <a:tcPr marL="54864" marR="54864" marT="54864" marB="54864" anchor="mid">
+                    <a:lnL w="6350" cap="flat" cmpd="sng" algn="ctr">
+                      <a:solidFill>
+                        <a:srgbClr val="D7DEE8"/>
+                      </a:solidFill>
+                      <a:prstDash val="solid"/>
+                      <a:round/>
+                      <a:headEnd type="none" w="med" len="med"/>
+                      <a:tailEnd type="none" w="med" len="med"/>
+                    </a:lnL>
+                    <a:lnR w="6350" cap="flat" cmpd="sng" algn="ctr">
+                      <a:solidFill>
+                        <a:srgbClr val="D7DEE8"/>
+                      </a:solidFill>
+                      <a:prstDash val="solid"/>
+                      <a:round/>
+                      <a:headEnd type="none" w="med" len="med"/>
+                      <a:tailEnd type="none" w="med" len="med"/>
+                    </a:lnR>
+                    <a:lnT w="6350" cap="flat" cmpd="sng" algn="ctr">
+                      <a:solidFill>
+                        <a:srgbClr val="D7DEE8"/>
+                      </a:solidFill>
+                      <a:prstDash val="solid"/>
+                      <a:round/>
+                      <a:headEnd type="none" w="med" len="med"/>
+                      <a:tailEnd type="none" w="med" len="med"/>
+                    </a:lnT>
+                    <a:lnB w="6350" cap="flat" cmpd="sng" algn="ctr">
+                      <a:solidFill>
+                        <a:srgbClr val="D7DEE8"/>
+                      </a:solidFill>
+                      <a:prstDash val="solid"/>
+                      <a:round/>
+                      <a:headEnd type="none" w="med" len="med"/>
+                      <a:tailEnd type="none" w="med" len="med"/>
+                    </a:lnB>
+                    <a:solidFill>
+                      <a:srgbClr val="FFFFFF"/>
+                    </a:solidFill>
+                  </a:tcPr>
+                </a:tc>
+              </a:tr>
+              <a:tr h="429768">
+                <a:tc>
+                  <a:txBody>
+                    <a:bodyPr/>
+                    <a:lstStyle/>
+                    <a:p>
+                      <a:pPr indent="0" marL="0">
+                        <a:buNone/>
+                      </a:pPr>
+                      <a:r>
+                        <a:rPr lang="en-US" sz="820" dirty="0">
+                          <a:solidFill>
+                            <a:srgbClr val="172033"/>
+                          </a:solidFill>
+                          <a:latin typeface="Microsoft YaHei" pitchFamily="34" charset="0"/>
+                          <a:ea typeface="Microsoft YaHei" pitchFamily="34" charset="-122"/>
+                          <a:cs typeface="Microsoft YaHei" pitchFamily="34" charset="-120"/>
+                        </a:rPr>
+                        <a:t>Replay</a:t>
+                      </a:r>
+                      <a:endParaRPr lang="en-US" sz="820" dirty="0">
+                        <a:latin typeface="Microsoft YaHei" charset="0"/>
+                        <a:ea typeface="Microsoft YaHei" charset="0"/>
+                        <a:cs typeface="Microsoft YaHei" charset="0"/>
+                      </a:endParaRPr>
+                    </a:p>
+                  </a:txBody>
+                  <a:tcPr marL="54864" marR="54864" marT="54864" marB="54864" anchor="mid">
+                    <a:lnL w="6350" cap="flat" cmpd="sng" algn="ctr">
+                      <a:solidFill>
+                        <a:srgbClr val="D7DEE8"/>
+                      </a:solidFill>
+                      <a:prstDash val="solid"/>
+                      <a:round/>
+                      <a:headEnd type="none" w="med" len="med"/>
+                      <a:tailEnd type="none" w="med" len="med"/>
+                    </a:lnL>
+                    <a:lnR w="6350" cap="flat" cmpd="sng" algn="ctr">
+                      <a:solidFill>
+                        <a:srgbClr val="D7DEE8"/>
+                      </a:solidFill>
+                      <a:prstDash val="solid"/>
+                      <a:round/>
+                      <a:headEnd type="none" w="med" len="med"/>
+                      <a:tailEnd type="none" w="med" len="med"/>
+                    </a:lnR>
+                    <a:lnT w="6350" cap="flat" cmpd="sng" algn="ctr">
+                      <a:solidFill>
+                        <a:srgbClr val="D7DEE8"/>
+                      </a:solidFill>
+                      <a:prstDash val="solid"/>
+                      <a:round/>
+                      <a:headEnd type="none" w="med" len="med"/>
+                      <a:tailEnd type="none" w="med" len="med"/>
+                    </a:lnT>
+                    <a:lnB w="6350" cap="flat" cmpd="sng" algn="ctr">
+                      <a:solidFill>
+                        <a:srgbClr val="D7DEE8"/>
+                      </a:solidFill>
+                      <a:prstDash val="solid"/>
+                      <a:round/>
+                      <a:headEnd type="none" w="med" len="med"/>
+                      <a:tailEnd type="none" w="med" len="med"/>
+                    </a:lnB>
+                    <a:solidFill>
+                      <a:srgbClr val="FFFFFF"/>
+                    </a:solidFill>
+                  </a:tcPr>
+                </a:tc>
+                <a:tc>
+                  <a:txBody>
+                    <a:bodyPr/>
+                    <a:lstStyle/>
+                    <a:p>
+                      <a:pPr indent="0" marL="0">
+                        <a:buNone/>
+                      </a:pPr>
+                      <a:r>
+                        <a:rPr lang="en-US" sz="820" dirty="0">
+                          <a:solidFill>
+                            <a:srgbClr val="172033"/>
+                          </a:solidFill>
+                          <a:latin typeface="Microsoft YaHei" pitchFamily="34" charset="0"/>
+                          <a:ea typeface="Microsoft YaHei" pitchFamily="34" charset="-122"/>
+                          <a:cs typeface="Microsoft YaHei" pitchFamily="34" charset="-120"/>
+                        </a:rPr>
+                        <a:t>T+1 open to T+5 open return after phase</a:t>
+                      </a:r>
+                      <a:endParaRPr lang="en-US" sz="820" dirty="0">
+                        <a:latin typeface="Microsoft YaHei" charset="0"/>
+                        <a:ea typeface="Microsoft YaHei" charset="0"/>
+                        <a:cs typeface="Microsoft YaHei" charset="0"/>
+                      </a:endParaRPr>
+                    </a:p>
+                  </a:txBody>
+                  <a:tcPr marL="54864" marR="54864" marT="54864" marB="54864" anchor="mid">
+                    <a:lnL w="6350" cap="flat" cmpd="sng" algn="ctr">
+                      <a:solidFill>
+                        <a:srgbClr val="D7DEE8"/>
+                      </a:solidFill>
+                      <a:prstDash val="solid"/>
+                      <a:round/>
+                      <a:headEnd type="none" w="med" len="med"/>
+                      <a:tailEnd type="none" w="med" len="med"/>
+                    </a:lnL>
+                    <a:lnR w="6350" cap="flat" cmpd="sng" algn="ctr">
+                      <a:solidFill>
+                        <a:srgbClr val="D7DEE8"/>
+                      </a:solidFill>
+                      <a:prstDash val="solid"/>
+                      <a:round/>
+                      <a:headEnd type="none" w="med" len="med"/>
+                      <a:tailEnd type="none" w="med" len="med"/>
+                    </a:lnR>
+                    <a:lnT w="6350" cap="flat" cmpd="sng" algn="ctr">
+                      <a:solidFill>
+                        <a:srgbClr val="D7DEE8"/>
+                      </a:solidFill>
+                      <a:prstDash val="solid"/>
+                      <a:round/>
+                      <a:headEnd type="none" w="med" len="med"/>
+                      <a:tailEnd type="none" w="med" len="med"/>
+                    </a:lnT>
+                    <a:lnB w="6350" cap="flat" cmpd="sng" algn="ctr">
+                      <a:solidFill>
+                        <a:srgbClr val="D7DEE8"/>
+                      </a:solidFill>
+                      <a:prstDash val="solid"/>
+                      <a:round/>
+                      <a:headEnd type="none" w="med" len="med"/>
+                      <a:tailEnd type="none" w="med" len="med"/>
+                    </a:lnB>
+                    <a:solidFill>
+                      <a:srgbClr val="FFFFFF"/>
+                    </a:solidFill>
+                  </a:tcPr>
+                </a:tc>
+                <a:tc>
+                  <a:txBody>
+                    <a:bodyPr/>
+                    <a:lstStyle/>
+                    <a:p>
+                      <a:pPr indent="0" marL="0">
+                        <a:buNone/>
+                      </a:pPr>
+                      <a:r>
+                        <a:rPr lang="en-US" sz="820" dirty="0">
+                          <a:solidFill>
+                            <a:srgbClr val="172033"/>
+                          </a:solidFill>
+                          <a:latin typeface="Microsoft YaHei" pitchFamily="34" charset="0"/>
+                          <a:ea typeface="Microsoft YaHei" pitchFamily="34" charset="-122"/>
+                          <a:cs typeface="Microsoft YaHei" pitchFamily="34" charset="-120"/>
+                        </a:rPr>
+                        <a:t>used only for post-submit evaluation</a:t>
+                      </a:r>
+                      <a:endParaRPr lang="en-US" sz="820" dirty="0">
+                        <a:latin typeface="Microsoft YaHei" charset="0"/>
+                        <a:ea typeface="Microsoft YaHei" charset="0"/>
+                        <a:cs typeface="Microsoft YaHei" charset="0"/>
+                      </a:endParaRPr>
+                    </a:p>
+                  </a:txBody>
+                  <a:tcPr marL="54864" marR="54864" marT="54864" marB="54864" anchor="mid">
+                    <a:lnL w="6350" cap="flat" cmpd="sng" algn="ctr">
+                      <a:solidFill>
+                        <a:srgbClr val="D7DEE8"/>
+                      </a:solidFill>
+                      <a:prstDash val="solid"/>
+                      <a:round/>
+                      <a:headEnd type="none" w="med" len="med"/>
+                      <a:tailEnd type="none" w="med" len="med"/>
+                    </a:lnL>
+                    <a:lnR w="6350" cap="flat" cmpd="sng" algn="ctr">
+                      <a:solidFill>
+                        <a:srgbClr val="D7DEE8"/>
+                      </a:solidFill>
+                      <a:prstDash val="solid"/>
+                      <a:round/>
+                      <a:headEnd type="none" w="med" len="med"/>
+                      <a:tailEnd type="none" w="med" len="med"/>
+                    </a:lnR>
+                    <a:lnT w="6350" cap="flat" cmpd="sng" algn="ctr">
+                      <a:solidFill>
+                        <a:srgbClr val="D7DEE8"/>
+                      </a:solidFill>
+                      <a:prstDash val="solid"/>
+                      <a:round/>
+                      <a:headEnd type="none" w="med" len="med"/>
+                      <a:tailEnd type="none" w="med" len="med"/>
+                    </a:lnT>
+                    <a:lnB w="6350" cap="flat" cmpd="sng" algn="ctr">
+                      <a:solidFill>
+                        <a:srgbClr val="D7DEE8"/>
+                      </a:solidFill>
+                      <a:prstDash val="solid"/>
+                      <a:round/>
+                      <a:headEnd type="none" w="med" len="med"/>
+                      <a:tailEnd type="none" w="med" len="med"/>
+                    </a:lnB>
+                    <a:solidFill>
+                      <a:srgbClr val="FFFFFF"/>
+                    </a:solidFill>
+                  </a:tcPr>
+                </a:tc>
+              </a:tr>
+            </a:tbl>
+          </a:graphicData>
+        </a:graphic>
+      </p:graphicFrame>
+      <p:sp>
+        <p:nvSpPr>
+          <p:cNvPr id="21" name="Shape 18"/>
+          <p:cNvSpPr/>
+          <p:nvPr/>
+        </p:nvSpPr>
+        <p:spPr>
+          <a:xfrm>
+            <a:off x="914400" y="4709160"/>
+            <a:ext cx="9784080" cy="1188720"/>
+          </a:xfrm>
+          <a:prstGeom prst="roundRect">
+            <a:avLst>
+              <a:gd name="adj" fmla="val 3846"/>
+            </a:avLst>
+          </a:prstGeom>
+          <a:solidFill>
+            <a:srgbClr val="F8FAFC"/>
+          </a:solidFill>
+          <a:ln w="10160">
+            <a:solidFill>
+              <a:srgbClr val="D7DEE8"/>
+            </a:solidFill>
+            <a:prstDash val="solid"/>
+          </a:ln>
+        </p:spPr>
+      </p:sp>
+      <p:sp>
+        <p:nvSpPr>
+          <p:cNvPr id="22" name="Shape 19"/>
+          <p:cNvSpPr/>
+          <p:nvPr/>
+        </p:nvSpPr>
+        <p:spPr>
+          <a:xfrm>
+            <a:off x="914400" y="4709160"/>
+            <a:ext cx="9784080" cy="310896"/>
+          </a:xfrm>
+          <a:prstGeom prst="rect">
+            <a:avLst/>
+          </a:prstGeom>
+          <a:solidFill>
+            <a:srgbClr val="2563EB"/>
+          </a:solidFill>
+          <a:ln w="12700">
+            <a:solidFill>
+              <a:srgbClr val="2563EB"/>
+            </a:solidFill>
+            <a:prstDash val="solid"/>
+          </a:ln>
+        </p:spPr>
+      </p:sp>
+      <p:sp>
+        <p:nvSpPr>
+          <p:cNvPr id="23" name="Text 20"/>
+          <p:cNvSpPr/>
+          <p:nvPr/>
+        </p:nvSpPr>
+        <p:spPr>
+          <a:xfrm>
+            <a:off x="1024128" y="4782312"/>
+            <a:ext cx="9564624" cy="128016"/>
+          </a:xfrm>
+          <a:prstGeom prst="rect">
+            <a:avLst/>
+          </a:prstGeom>
+          <a:noFill/>
+          <a:ln/>
+        </p:spPr>
+        <p:txBody>
+          <a:bodyPr wrap="square" lIns="0" tIns="0" rIns="0" bIns="0" rtlCol="0" anchor="ctr">
+            <a:normAutofit/>
+          </a:bodyPr>
+          <a:lstStyle/>
+          <a:p>
+            <a:pPr indent="0" marL="0">
+              <a:buNone/>
+            </a:pPr>
+            <a:r>
+              <a:rPr lang="en-US" sz="750" b="1" dirty="0">
+                <a:solidFill>
+                  <a:srgbClr val="FFFFFF"/>
+                </a:solidFill>
+                <a:latin typeface="Microsoft YaHei" pitchFamily="34" charset="0"/>
+                <a:ea typeface="Microsoft YaHei" pitchFamily="34" charset="-122"/>
+                <a:cs typeface="Microsoft YaHei" pitchFamily="34" charset="-120"/>
+              </a:rPr>
+              <a:t>sample processed T rows</a:t>
+            </a:r>
+            <a:endParaRPr lang="en-US" sz="750" dirty="0"/>
+          </a:p>
+        </p:txBody>
+      </p:sp>
+      <p:sp>
+        <p:nvSpPr>
+          <p:cNvPr id="24" name="Text 21"/>
+          <p:cNvSpPr/>
+          <p:nvPr/>
+        </p:nvSpPr>
+        <p:spPr>
+          <a:xfrm>
+            <a:off x="1024128" y="5148072"/>
+            <a:ext cx="9564624" cy="658368"/>
+          </a:xfrm>
+          <a:prstGeom prst="rect">
+            <a:avLst/>
+          </a:prstGeom>
+          <a:noFill/>
+          <a:ln/>
+        </p:spPr>
+        <p:txBody>
+          <a:bodyPr wrap="square" lIns="0" tIns="0" rIns="0" bIns="0" rtlCol="0" anchor="ctr">
+            <a:normAutofit/>
+          </a:bodyPr>
+          <a:lstStyle/>
+          <a:p>
+            <a:pPr indent="0" marL="0">
+              <a:buNone/>
+            </a:pPr>
+            <a:r>
+              <a:rPr lang="en-US" sz="660" dirty="0">
+                <a:solidFill>
+                  <a:srgbClr val="111827"/>
+                </a:solidFill>
+                <a:latin typeface="Consolas" pitchFamily="34" charset="0"/>
+                <a:ea typeface="Consolas" pitchFamily="34" charset="-122"/>
+                <a:cs typeface="Consolas" pitchFamily="34" charset="-120"/>
+              </a:rPr>
+              <a:t>stock_id,date,open,close,ret_1,ret_5,volume_ratio_5,label</a:t>
+            </a:r>
+            <a:endParaRPr lang="en-US" sz="660" dirty="0"/>
+          </a:p>
+          <a:p>
+            <a:pPr indent="0" marL="0">
+              <a:buNone/>
+            </a:pPr>
+            <a:r>
+              <a:rPr lang="en-US" sz="660" dirty="0">
+                <a:solidFill>
+                  <a:srgbClr val="111827"/>
+                </a:solidFill>
+                <a:latin typeface="Consolas" pitchFamily="34" charset="0"/>
+                <a:ea typeface="Consolas" pitchFamily="34" charset="-122"/>
+                <a:cs typeface="Consolas" pitchFamily="34" charset="-120"/>
+              </a:rPr>
+              <a:t>000001,2026-04-24,1327.83,1330.25, 0.0000,-0.0009,-0.1692,</a:t>
+            </a:r>
+            <a:endParaRPr lang="en-US" sz="660" dirty="0"/>
+          </a:p>
+          <a:p>
+            <a:pPr indent="0" marL="0">
+              <a:buNone/>
+            </a:pPr>
+            <a:r>
+              <a:rPr lang="en-US" sz="660" dirty="0">
+                <a:solidFill>
+                  <a:srgbClr val="111827"/>
+                </a:solidFill>
+                <a:latin typeface="Consolas" pitchFamily="34" charset="0"/>
+                <a:ea typeface="Consolas" pitchFamily="34" charset="-122"/>
+                <a:cs typeface="Consolas" pitchFamily="34" charset="-120"/>
+              </a:rPr>
+              <a:t>000002,2026-04-24, 510.28, 503.57,-0.0157,-0.0530, 0.0605,</a:t>
+            </a:r>
+            <a:endParaRPr lang="en-US" sz="660" dirty="0"/>
+          </a:p>
+          <a:p>
+            <a:pPr indent="0" marL="0">
+              <a:buNone/>
+            </a:pPr>
+            <a:r>
+              <a:rPr lang="en-US" sz="660" dirty="0">
+                <a:solidFill>
+                  <a:srgbClr val="111827"/>
+                </a:solidFill>
+                <a:latin typeface="Consolas" pitchFamily="34" charset="0"/>
+                <a:ea typeface="Consolas" pitchFamily="34" charset="-122"/>
+                <a:cs typeface="Consolas" pitchFamily="34" charset="-120"/>
+              </a:rPr>
+              <a:t>000063,2026-04-24, 500.44, 497.84,-0.0128, 0.0297,-0.1778,</a:t>
+            </a:r>
+            <a:endParaRPr lang="en-US" sz="660" dirty="0"/>
+          </a:p>
+        </p:txBody>
+      </p:sp>
+      <p:sp>
+        <p:nvSpPr>
+          <p:cNvPr id="25" name="Text 22"/>
+          <p:cNvSpPr/>
+          <p:nvPr/>
+        </p:nvSpPr>
+        <p:spPr>
+          <a:xfrm>
+            <a:off x="914400" y="6144768"/>
+            <a:ext cx="9326880" cy="228600"/>
+          </a:xfrm>
+          <a:prstGeom prst="rect">
+            <a:avLst/>
+          </a:prstGeom>
+          <a:noFill/>
+          <a:ln/>
+        </p:spPr>
+        <p:txBody>
+          <a:bodyPr wrap="square" lIns="0" tIns="0" rIns="0" bIns="0" rtlCol="0" anchor="ctr">
+            <a:normAutofit/>
+          </a:bodyPr>
+          <a:lstStyle/>
+          <a:p>
+            <a:pPr indent="0" marL="0">
+              <a:buNone/>
+            </a:pPr>
+            <a:r>
+              <a:rPr lang="en-US" sz="1000" b="1" dirty="0">
+                <a:solidFill>
+                  <a:srgbClr val="DC2626"/>
+                </a:solidFill>
+                <a:latin typeface="Microsoft YaHei" pitchFamily="34" charset="0"/>
+                <a:ea typeface="Microsoft YaHei" pitchFamily="34" charset="-122"/>
+                <a:cs typeface="Microsoft YaHei" pitchFamily="34" charset="-120"/>
+              </a:rPr>
+              <a:t>Caveat: theme/momentum code can exist while the cached processed artifact still needs a rebuild before those columns appear.</a:t>
+            </a:r>
+            <a:endParaRPr lang="en-US" sz="1000" dirty="0"/>
+          </a:p>
+        </p:txBody>
+      </p:sp>
+    </p:spTree>
+  </p:cSld>
+  <p:clrMapOvr>
+    <a:masterClrMapping/>
+  </p:clrMapOvr>
+</p:sld>
+</file>
+
+<file path=ppt/slides/slide17.xml><?xml version="1.0" encoding="utf-8"?>
+<p:sld xmlns:a="http://schemas.openxmlformats.org/drawingml/2006/main" xmlns:r="http://schemas.openxmlformats.org/officeDocument/2006/relationships" xmlns:p="http://schemas.openxmlformats.org/presentationml/2006/main">
+  <p:cSld name="Slide 17">
+    <p:bg>
+      <p:bgPr>
+        <a:solidFill>
+          <a:srgbClr val="FFFFFF"/>
+        </a:solidFill>
+      </p:bgPr>
+    </p:bg>
+    <p:spTree>
+      <p:nvGrpSpPr>
+        <p:cNvPr id="1" name=""/>
+        <p:cNvGrpSpPr/>
+        <p:nvPr/>
+      </p:nvGrpSpPr>
+      <p:grpSpPr>
+        <a:xfrm>
+          <a:off x="0" y="0"/>
+          <a:ext cx="0" cy="0"/>
+          <a:chOff x="0" y="0"/>
+          <a:chExt cx="0" cy="0"/>
+        </a:xfrm>
+      </p:grpSpPr>
+      <p:sp>
+        <p:nvSpPr>
+          <p:cNvPr id="2" name="Text 0"/>
+          <p:cNvSpPr/>
+          <p:nvPr/>
+        </p:nvSpPr>
+        <p:spPr>
+          <a:xfrm>
+            <a:off x="502920" y="256032"/>
+            <a:ext cx="2194560" cy="201168"/>
+          </a:xfrm>
+          <a:prstGeom prst="rect">
+            <a:avLst/>
+          </a:prstGeom>
+          <a:noFill/>
+          <a:ln/>
+        </p:spPr>
+        <p:txBody>
+          <a:bodyPr wrap="square" lIns="0" tIns="0" rIns="0" bIns="0" rtlCol="0" anchor="ctr"/>
+          <a:lstStyle/>
+          <a:p>
+            <a:pPr indent="0" marL="0">
+              <a:buNone/>
+            </a:pPr>
+            <a:r>
+              <a:rPr lang="en-US" sz="800" b="1" dirty="0">
+                <a:solidFill>
+                  <a:srgbClr val="2563EB"/>
+                </a:solidFill>
+                <a:latin typeface="Microsoft YaHei" pitchFamily="34" charset="0"/>
+                <a:ea typeface="Microsoft YaHei" pitchFamily="34" charset="-122"/>
+                <a:cs typeface="Microsoft YaHei" pitchFamily="34" charset="-120"/>
+              </a:rPr>
+              <a:t>SOURCE APPENDIX</a:t>
+            </a:r>
+            <a:endParaRPr lang="en-US" sz="800" dirty="0"/>
+          </a:p>
+        </p:txBody>
+      </p:sp>
+      <p:sp>
+        <p:nvSpPr>
+          <p:cNvPr id="3" name="Text 1"/>
+          <p:cNvSpPr/>
+          <p:nvPr/>
+        </p:nvSpPr>
+        <p:spPr>
+          <a:xfrm>
+            <a:off x="502920" y="530352"/>
+            <a:ext cx="9875520" cy="384048"/>
+          </a:xfrm>
+          <a:prstGeom prst="rect">
+            <a:avLst/>
+          </a:prstGeom>
+          <a:noFill/>
+          <a:ln/>
+        </p:spPr>
+        <p:txBody>
+          <a:bodyPr wrap="square" lIns="0" tIns="0" rIns="0" bIns="0" rtlCol="0" anchor="ctr">
+            <a:normAutofit/>
+          </a:bodyPr>
+          <a:lstStyle/>
+          <a:p>
+            <a:pPr indent="0" marL="0">
+              <a:buNone/>
+            </a:pPr>
+            <a:r>
+              <a:rPr lang="en-US" sz="2400" b="1" dirty="0">
+                <a:solidFill>
+                  <a:srgbClr val="172033"/>
+                </a:solidFill>
+                <a:latin typeface="Microsoft YaHei" pitchFamily="34" charset="0"/>
+                <a:ea typeface="Microsoft YaHei" pitchFamily="34" charset="-122"/>
+                <a:cs typeface="Microsoft YaHei" pitchFamily="34" charset="-120"/>
+              </a:rPr>
+              <a:t>P2 source: portfolio-return objective</a:t>
+            </a:r>
+            <a:endParaRPr lang="en-US" sz="2400" dirty="0"/>
+          </a:p>
+        </p:txBody>
+      </p:sp>
+      <p:sp>
+        <p:nvSpPr>
+          <p:cNvPr id="4" name="Shape 2"/>
+          <p:cNvSpPr/>
+          <p:nvPr/>
+        </p:nvSpPr>
+        <p:spPr>
+          <a:xfrm>
+            <a:off x="502920" y="1051560"/>
+            <a:ext cx="11155680" cy="0"/>
+          </a:xfrm>
+          <a:prstGeom prst="line">
+            <a:avLst/>
+          </a:prstGeom>
+          <a:noFill/>
+          <a:ln w="12700">
+            <a:solidFill>
+              <a:srgbClr val="D7DEE8"/>
+            </a:solidFill>
+            <a:prstDash val="solid"/>
+          </a:ln>
+        </p:spPr>
+      </p:sp>
+      <p:sp>
+        <p:nvSpPr>
+          <p:cNvPr id="5" name="Text 3"/>
+          <p:cNvSpPr/>
+          <p:nvPr/>
+        </p:nvSpPr>
+        <p:spPr>
+          <a:xfrm>
+            <a:off x="8229600" y="6446520"/>
+            <a:ext cx="3383280" cy="201168"/>
+          </a:xfrm>
+          <a:prstGeom prst="rect">
+            <a:avLst/>
+          </a:prstGeom>
+          <a:noFill/>
+          <a:ln/>
+        </p:spPr>
+        <p:txBody>
+          <a:bodyPr wrap="square" lIns="0" tIns="0" rIns="0" bIns="0" rtlCol="0" anchor="ctr"/>
+          <a:lstStyle/>
+          <a:p>
+            <a:pPr algn="r" indent="0" marL="0">
+              <a:buNone/>
+            </a:pPr>
+            <a:r>
+              <a:rPr lang="en-US" sz="750" dirty="0">
+                <a:solidFill>
+                  <a:srgbClr val="94A3B8"/>
+                </a:solidFill>
+              </a:rPr>
+              <a:t>2026-05-07 · CSI300 Competition Review</a:t>
+            </a:r>
+            <a:endParaRPr lang="en-US" sz="750" dirty="0"/>
+          </a:p>
+        </p:txBody>
+      </p:sp>
+      <p:sp>
+        <p:nvSpPr>
+          <p:cNvPr id="6" name="Shape 4"/>
+          <p:cNvSpPr/>
+          <p:nvPr/>
+        </p:nvSpPr>
+        <p:spPr>
+          <a:xfrm>
+            <a:off x="777240" y="1234440"/>
+            <a:ext cx="1920240" cy="530352"/>
+          </a:xfrm>
+          <a:prstGeom prst="roundRect">
+            <a:avLst>
+              <a:gd name="adj" fmla="val 8621"/>
+            </a:avLst>
+          </a:prstGeom>
+          <a:solidFill>
+            <a:srgbClr val="F6F8FB"/>
+          </a:solidFill>
+          <a:ln w="10160">
+            <a:solidFill>
+              <a:srgbClr val="D7DEE8"/>
+            </a:solidFill>
+            <a:prstDash val="solid"/>
+          </a:ln>
+        </p:spPr>
+      </p:sp>
+      <p:sp>
+        <p:nvSpPr>
+          <p:cNvPr id="7" name="Text 5"/>
+          <p:cNvSpPr/>
+          <p:nvPr/>
+        </p:nvSpPr>
+        <p:spPr>
+          <a:xfrm>
+            <a:off x="832104" y="1371600"/>
+            <a:ext cx="1810512" cy="219456"/>
+          </a:xfrm>
+          <a:prstGeom prst="rect">
+            <a:avLst/>
+          </a:prstGeom>
+          <a:noFill/>
+          <a:ln/>
+        </p:spPr>
+        <p:txBody>
+          <a:bodyPr wrap="square" lIns="0" tIns="0" rIns="0" bIns="0" rtlCol="0" anchor="ctr">
+            <a:normAutofit/>
+          </a:bodyPr>
+          <a:lstStyle/>
+          <a:p>
+            <a:pPr indent="0" marL="0">
+              <a:buNone/>
+            </a:pPr>
+            <a:r>
+              <a:rPr lang="en-US" sz="750" b="1" dirty="0">
+                <a:solidFill>
+                  <a:srgbClr val="172033"/>
+                </a:solidFill>
+                <a:latin typeface="Microsoft YaHei" pitchFamily="34" charset="0"/>
+                <a:ea typeface="Microsoft YaHei" pitchFamily="34" charset="-122"/>
+                <a:cs typeface="Microsoft YaHei" pitchFamily="34" charset="-120"/>
+              </a:rPr>
+              <a:t>pred scores</a:t>
+            </a:r>
+            <a:endParaRPr lang="en-US" sz="750" dirty="0"/>
+          </a:p>
+        </p:txBody>
+      </p:sp>
+      <p:sp>
+        <p:nvSpPr>
+          <p:cNvPr id="8" name="Shape 6"/>
+          <p:cNvSpPr/>
+          <p:nvPr/>
+        </p:nvSpPr>
+        <p:spPr>
+          <a:xfrm>
+            <a:off x="2724912" y="1499616"/>
+            <a:ext cx="109728" cy="0"/>
+          </a:xfrm>
+          <a:prstGeom prst="line">
+            <a:avLst/>
+          </a:prstGeom>
+          <a:noFill/>
+          <a:ln w="12700">
+            <a:solidFill>
+              <a:srgbClr val="EA580C"/>
+            </a:solidFill>
+            <a:prstDash val="solid"/>
+            <a:tailEnd type="triangle"/>
+          </a:ln>
+        </p:spPr>
+      </p:sp>
+      <p:sp>
+        <p:nvSpPr>
+          <p:cNvPr id="9" name="Shape 7"/>
+          <p:cNvSpPr/>
+          <p:nvPr/>
+        </p:nvSpPr>
+        <p:spPr>
+          <a:xfrm>
+            <a:off x="2862072" y="1234440"/>
+            <a:ext cx="1920240" cy="530352"/>
+          </a:xfrm>
+          <a:prstGeom prst="roundRect">
+            <a:avLst>
+              <a:gd name="adj" fmla="val 8621"/>
+            </a:avLst>
+          </a:prstGeom>
+          <a:solidFill>
+            <a:srgbClr val="F6F8FB"/>
+          </a:solidFill>
+          <a:ln w="10160">
+            <a:solidFill>
+              <a:srgbClr val="D7DEE8"/>
+            </a:solidFill>
+            <a:prstDash val="solid"/>
+          </a:ln>
+        </p:spPr>
+      </p:sp>
+      <p:sp>
+        <p:nvSpPr>
+          <p:cNvPr id="10" name="Text 8"/>
+          <p:cNvSpPr/>
+          <p:nvPr/>
+        </p:nvSpPr>
+        <p:spPr>
+          <a:xfrm>
+            <a:off x="2916936" y="1371600"/>
+            <a:ext cx="1810512" cy="219456"/>
+          </a:xfrm>
+          <a:prstGeom prst="rect">
+            <a:avLst/>
+          </a:prstGeom>
+          <a:noFill/>
+          <a:ln/>
+        </p:spPr>
+        <p:txBody>
+          <a:bodyPr wrap="square" lIns="0" tIns="0" rIns="0" bIns="0" rtlCol="0" anchor="ctr">
+            <a:normAutofit/>
+          </a:bodyPr>
+          <a:lstStyle/>
+          <a:p>
+            <a:pPr indent="0" marL="0">
+              <a:buNone/>
+            </a:pPr>
+            <a:r>
+              <a:rPr lang="en-US" sz="750" b="1" dirty="0">
+                <a:solidFill>
+                  <a:srgbClr val="172033"/>
+                </a:solidFill>
+                <a:latin typeface="Microsoft YaHei" pitchFamily="34" charset="0"/>
+                <a:ea typeface="Microsoft YaHei" pitchFamily="34" charset="-122"/>
+                <a:cs typeface="Microsoft YaHei" pitchFamily="34" charset="-120"/>
+              </a:rPr>
+              <a:t>top-K</a:t>
+            </a:r>
+            <a:endParaRPr lang="en-US" sz="750" dirty="0"/>
+          </a:p>
+        </p:txBody>
+      </p:sp>
+      <p:sp>
+        <p:nvSpPr>
+          <p:cNvPr id="11" name="Shape 9"/>
+          <p:cNvSpPr/>
+          <p:nvPr/>
+        </p:nvSpPr>
+        <p:spPr>
+          <a:xfrm>
+            <a:off x="4809744" y="1499616"/>
+            <a:ext cx="109728" cy="0"/>
+          </a:xfrm>
+          <a:prstGeom prst="line">
+            <a:avLst/>
+          </a:prstGeom>
+          <a:noFill/>
+          <a:ln w="12700">
+            <a:solidFill>
+              <a:srgbClr val="EA580C"/>
+            </a:solidFill>
+            <a:prstDash val="solid"/>
+            <a:tailEnd type="triangle"/>
+          </a:ln>
+        </p:spPr>
+      </p:sp>
+      <p:sp>
+        <p:nvSpPr>
+          <p:cNvPr id="12" name="Shape 10"/>
+          <p:cNvSpPr/>
+          <p:nvPr/>
+        </p:nvSpPr>
+        <p:spPr>
+          <a:xfrm>
+            <a:off x="4946904" y="1234440"/>
+            <a:ext cx="1920240" cy="530352"/>
+          </a:xfrm>
+          <a:prstGeom prst="roundRect">
+            <a:avLst>
+              <a:gd name="adj" fmla="val 8621"/>
+            </a:avLst>
+          </a:prstGeom>
+          <a:solidFill>
+            <a:srgbClr val="F6F8FB"/>
+          </a:solidFill>
+          <a:ln w="10160">
+            <a:solidFill>
+              <a:srgbClr val="D7DEE8"/>
+            </a:solidFill>
+            <a:prstDash val="solid"/>
+          </a:ln>
+        </p:spPr>
+      </p:sp>
+      <p:sp>
+        <p:nvSpPr>
+          <p:cNvPr id="13" name="Text 11"/>
+          <p:cNvSpPr/>
+          <p:nvPr/>
+        </p:nvSpPr>
+        <p:spPr>
+          <a:xfrm>
+            <a:off x="5001768" y="1371600"/>
+            <a:ext cx="1810512" cy="219456"/>
+          </a:xfrm>
+          <a:prstGeom prst="rect">
+            <a:avLst/>
+          </a:prstGeom>
+          <a:noFill/>
+          <a:ln/>
+        </p:spPr>
+        <p:txBody>
+          <a:bodyPr wrap="square" lIns="0" tIns="0" rIns="0" bIns="0" rtlCol="0" anchor="ctr">
+            <a:normAutofit/>
+          </a:bodyPr>
+          <a:lstStyle/>
+          <a:p>
+            <a:pPr indent="0" marL="0">
+              <a:buNone/>
+            </a:pPr>
+            <a:r>
+              <a:rPr lang="en-US" sz="750" b="1" dirty="0">
+                <a:solidFill>
+                  <a:srgbClr val="172033"/>
+                </a:solidFill>
+                <a:latin typeface="Microsoft YaHei" pitchFamily="34" charset="0"/>
+                <a:ea typeface="Microsoft YaHei" pitchFamily="34" charset="-122"/>
+                <a:cs typeface="Microsoft YaHei" pitchFamily="34" charset="-120"/>
+              </a:rPr>
+              <a:t>softmax weights</a:t>
+            </a:r>
+            <a:endParaRPr lang="en-US" sz="750" dirty="0"/>
+          </a:p>
+        </p:txBody>
+      </p:sp>
+      <p:sp>
+        <p:nvSpPr>
+          <p:cNvPr id="14" name="Shape 12"/>
+          <p:cNvSpPr/>
+          <p:nvPr/>
+        </p:nvSpPr>
+        <p:spPr>
+          <a:xfrm>
+            <a:off x="6894576" y="1499616"/>
+            <a:ext cx="109728" cy="0"/>
+          </a:xfrm>
+          <a:prstGeom prst="line">
+            <a:avLst/>
+          </a:prstGeom>
+          <a:noFill/>
+          <a:ln w="12700">
+            <a:solidFill>
+              <a:srgbClr val="EA580C"/>
+            </a:solidFill>
+            <a:prstDash val="solid"/>
+            <a:tailEnd type="triangle"/>
+          </a:ln>
+        </p:spPr>
+      </p:sp>
+      <p:sp>
+        <p:nvSpPr>
+          <p:cNvPr id="15" name="Shape 13"/>
+          <p:cNvSpPr/>
+          <p:nvPr/>
+        </p:nvSpPr>
+        <p:spPr>
+          <a:xfrm>
+            <a:off x="7031736" y="1234440"/>
+            <a:ext cx="1920240" cy="530352"/>
+          </a:xfrm>
+          <a:prstGeom prst="roundRect">
+            <a:avLst>
+              <a:gd name="adj" fmla="val 8621"/>
+            </a:avLst>
+          </a:prstGeom>
+          <a:solidFill>
+            <a:srgbClr val="F6F8FB"/>
+          </a:solidFill>
+          <a:ln w="10160">
+            <a:solidFill>
+              <a:srgbClr val="D7DEE8"/>
+            </a:solidFill>
+            <a:prstDash val="solid"/>
+          </a:ln>
+        </p:spPr>
+      </p:sp>
+      <p:sp>
+        <p:nvSpPr>
+          <p:cNvPr id="16" name="Text 14"/>
+          <p:cNvSpPr/>
+          <p:nvPr/>
+        </p:nvSpPr>
+        <p:spPr>
+          <a:xfrm>
+            <a:off x="7086600" y="1371600"/>
+            <a:ext cx="1810512" cy="219456"/>
+          </a:xfrm>
+          <a:prstGeom prst="rect">
+            <a:avLst/>
+          </a:prstGeom>
+          <a:noFill/>
+          <a:ln/>
+        </p:spPr>
+        <p:txBody>
+          <a:bodyPr wrap="square" lIns="0" tIns="0" rIns="0" bIns="0" rtlCol="0" anchor="ctr">
+            <a:normAutofit/>
+          </a:bodyPr>
+          <a:lstStyle/>
+          <a:p>
+            <a:pPr indent="0" marL="0">
+              <a:buNone/>
+            </a:pPr>
+            <a:r>
+              <a:rPr lang="en-US" sz="750" b="1" dirty="0">
+                <a:solidFill>
+                  <a:srgbClr val="172033"/>
+                </a:solidFill>
+                <a:latin typeface="Microsoft YaHei" pitchFamily="34" charset="0"/>
+                <a:ea typeface="Microsoft YaHei" pitchFamily="34" charset="-122"/>
+                <a:cs typeface="Microsoft YaHei" pitchFamily="34" charset="-120"/>
+              </a:rPr>
+              <a:t>future returns</a:t>
+            </a:r>
+            <a:endParaRPr lang="en-US" sz="750" dirty="0"/>
+          </a:p>
+        </p:txBody>
+      </p:sp>
+      <p:sp>
+        <p:nvSpPr>
+          <p:cNvPr id="17" name="Shape 15"/>
+          <p:cNvSpPr/>
+          <p:nvPr/>
+        </p:nvSpPr>
+        <p:spPr>
+          <a:xfrm>
+            <a:off x="8979408" y="1499616"/>
+            <a:ext cx="109728" cy="0"/>
+          </a:xfrm>
+          <a:prstGeom prst="line">
+            <a:avLst/>
+          </a:prstGeom>
+          <a:noFill/>
+          <a:ln w="12700">
+            <a:solidFill>
+              <a:srgbClr val="EA580C"/>
+            </a:solidFill>
+            <a:prstDash val="solid"/>
+            <a:tailEnd type="triangle"/>
+          </a:ln>
+        </p:spPr>
+      </p:sp>
+      <p:sp>
+        <p:nvSpPr>
+          <p:cNvPr id="18" name="Shape 16"/>
+          <p:cNvSpPr/>
+          <p:nvPr/>
+        </p:nvSpPr>
+        <p:spPr>
+          <a:xfrm>
+            <a:off x="9116568" y="1234440"/>
+            <a:ext cx="1920240" cy="530352"/>
+          </a:xfrm>
+          <a:prstGeom prst="roundRect">
+            <a:avLst>
+              <a:gd name="adj" fmla="val 8621"/>
+            </a:avLst>
+          </a:prstGeom>
+          <a:solidFill>
+            <a:srgbClr val="E0F2FE"/>
+          </a:solidFill>
+          <a:ln w="10160">
+            <a:solidFill>
+              <a:srgbClr val="7DD3FC"/>
+            </a:solidFill>
+            <a:prstDash val="solid"/>
+          </a:ln>
+        </p:spPr>
+      </p:sp>
+      <p:sp>
+        <p:nvSpPr>
+          <p:cNvPr id="19" name="Text 17"/>
+          <p:cNvSpPr/>
+          <p:nvPr/>
+        </p:nvSpPr>
+        <p:spPr>
+          <a:xfrm>
+            <a:off x="9171432" y="1371600"/>
+            <a:ext cx="1810512" cy="219456"/>
+          </a:xfrm>
+          <a:prstGeom prst="rect">
+            <a:avLst/>
+          </a:prstGeom>
+          <a:noFill/>
+          <a:ln/>
+        </p:spPr>
+        <p:txBody>
+          <a:bodyPr wrap="square" lIns="0" tIns="0" rIns="0" bIns="0" rtlCol="0" anchor="ctr">
+            <a:normAutofit/>
+          </a:bodyPr>
+          <a:lstStyle/>
+          <a:p>
+            <a:pPr indent="0" marL="0">
+              <a:buNone/>
+            </a:pPr>
+            <a:r>
+              <a:rPr lang="en-US" sz="750" b="1" dirty="0">
+                <a:solidFill>
+                  <a:srgbClr val="172033"/>
+                </a:solidFill>
+                <a:latin typeface="Microsoft YaHei" pitchFamily="34" charset="0"/>
+                <a:ea typeface="Microsoft YaHei" pitchFamily="34" charset="-122"/>
+                <a:cs typeface="Microsoft YaHei" pitchFamily="34" charset="-120"/>
+              </a:rPr>
+              <a:t>negative loss</a:t>
+            </a:r>
+            <a:endParaRPr lang="en-US" sz="750" dirty="0"/>
+          </a:p>
+        </p:txBody>
+      </p:sp>
+      <p:sp>
+        <p:nvSpPr>
+          <p:cNvPr id="20" name="Shape 18"/>
+          <p:cNvSpPr/>
+          <p:nvPr/>
+        </p:nvSpPr>
+        <p:spPr>
+          <a:xfrm>
+            <a:off x="777240" y="2103120"/>
+            <a:ext cx="5212080" cy="2514600"/>
+          </a:xfrm>
+          <a:prstGeom prst="roundRect">
+            <a:avLst>
+              <a:gd name="adj" fmla="val 1818"/>
+            </a:avLst>
+          </a:prstGeom>
+          <a:solidFill>
+            <a:srgbClr val="F8FAFC"/>
+          </a:solidFill>
+          <a:ln w="10160">
+            <a:solidFill>
+              <a:srgbClr val="D7DEE8"/>
+            </a:solidFill>
+            <a:prstDash val="solid"/>
+          </a:ln>
+        </p:spPr>
+      </p:sp>
+      <p:sp>
+        <p:nvSpPr>
+          <p:cNvPr id="21" name="Shape 19"/>
+          <p:cNvSpPr/>
+          <p:nvPr/>
+        </p:nvSpPr>
+        <p:spPr>
+          <a:xfrm>
+            <a:off x="777240" y="2103120"/>
+            <a:ext cx="5212080" cy="310896"/>
+          </a:xfrm>
+          <a:prstGeom prst="rect">
+            <a:avLst/>
+          </a:prstGeom>
+          <a:solidFill>
+            <a:srgbClr val="EA580C"/>
+          </a:solidFill>
+          <a:ln w="12700">
+            <a:solidFill>
+              <a:srgbClr val="EA580C"/>
+            </a:solidFill>
+            <a:prstDash val="solid"/>
+          </a:ln>
+        </p:spPr>
+      </p:sp>
+      <p:sp>
+        <p:nvSpPr>
+          <p:cNvPr id="22" name="Text 20"/>
+          <p:cNvSpPr/>
+          <p:nvPr/>
+        </p:nvSpPr>
+        <p:spPr>
+          <a:xfrm>
+            <a:off x="886968" y="2176272"/>
+            <a:ext cx="4992624" cy="128016"/>
+          </a:xfrm>
+          <a:prstGeom prst="rect">
+            <a:avLst/>
+          </a:prstGeom>
+          <a:noFill/>
+          <a:ln/>
+        </p:spPr>
+        <p:txBody>
+          <a:bodyPr wrap="square" lIns="0" tIns="0" rIns="0" bIns="0" rtlCol="0" anchor="ctr">
+            <a:normAutofit/>
+          </a:bodyPr>
+          <a:lstStyle/>
+          <a:p>
+            <a:pPr indent="0" marL="0">
+              <a:buNone/>
+            </a:pPr>
+            <a:r>
+              <a:rPr lang="en-US" sz="750" b="1" dirty="0">
+                <a:solidFill>
+                  <a:srgbClr val="FFFFFF"/>
+                </a:solidFill>
+                <a:latin typeface="Microsoft YaHei" pitchFamily="34" charset="0"/>
+                <a:ea typeface="Microsoft YaHei" pitchFamily="34" charset="-122"/>
+                <a:cs typeface="Microsoft YaHei" pitchFamily="34" charset="-120"/>
+              </a:rPr>
+              <a:t>src/models/master.py</a:t>
+            </a:r>
+            <a:endParaRPr lang="en-US" sz="750" dirty="0"/>
+          </a:p>
+        </p:txBody>
+      </p:sp>
+      <p:sp>
+        <p:nvSpPr>
+          <p:cNvPr id="23" name="Text 21"/>
+          <p:cNvSpPr/>
+          <p:nvPr/>
+        </p:nvSpPr>
+        <p:spPr>
+          <a:xfrm>
+            <a:off x="886968" y="2542032"/>
+            <a:ext cx="4992624" cy="1984248"/>
+          </a:xfrm>
+          <a:prstGeom prst="rect">
+            <a:avLst/>
+          </a:prstGeom>
+          <a:noFill/>
+          <a:ln/>
+        </p:spPr>
+        <p:txBody>
+          <a:bodyPr wrap="square" lIns="0" tIns="0" rIns="0" bIns="0" rtlCol="0" anchor="ctr">
+            <a:normAutofit/>
+          </a:bodyPr>
+          <a:lstStyle/>
+          <a:p>
+            <a:pPr indent="0" marL="0">
+              <a:buNone/>
+            </a:pPr>
+            <a:r>
+              <a:rPr lang="en-US" sz="660" dirty="0">
+                <a:solidFill>
+                  <a:srgbClr val="111827"/>
+                </a:solidFill>
+                <a:latin typeface="Consolas" pitchFamily="34" charset="0"/>
+                <a:ea typeface="Consolas" pitchFamily="34" charset="-122"/>
+                <a:cs typeface="Consolas" pitchFamily="34" charset="-120"/>
+              </a:rPr>
+              <a:t>def _portfolio_return_loss(pred, target, *, top_k, temperature):</a:t>
+            </a:r>
+            <a:endParaRPr lang="en-US" sz="660" dirty="0"/>
+          </a:p>
+          <a:p>
+            <a:pPr indent="0" marL="0">
+              <a:buNone/>
+            </a:pPr>
+            <a:r>
+              <a:rPr lang="en-US" sz="660" dirty="0">
+                <a:solidFill>
+                  <a:srgbClr val="111827"/>
+                </a:solidFill>
+                <a:latin typeface="Consolas" pitchFamily="34" charset="0"/>
+                <a:ea typeface="Consolas" pitchFamily="34" charset="-122"/>
+                <a:cs typeface="Consolas" pitchFamily="34" charset="-120"/>
+              </a:rPr>
+              <a:t>    k = min(top_k, pred.numel())</a:t>
+            </a:r>
+            <a:endParaRPr lang="en-US" sz="660" dirty="0"/>
+          </a:p>
+          <a:p>
+            <a:pPr indent="0" marL="0">
+              <a:buNone/>
+            </a:pPr>
+            <a:r>
+              <a:rPr lang="en-US" sz="660" dirty="0">
+                <a:solidFill>
+                  <a:srgbClr val="111827"/>
+                </a:solidFill>
+                <a:latin typeface="Consolas" pitchFamily="34" charset="0"/>
+                <a:ea typeface="Consolas" pitchFamily="34" charset="-122"/>
+                <a:cs typeface="Consolas" pitchFamily="34" charset="-120"/>
+              </a:rPr>
+              <a:t>    _, idx = torch.topk(pred, k=k)</a:t>
+            </a:r>
+            <a:endParaRPr lang="en-US" sz="660" dirty="0"/>
+          </a:p>
+          <a:p>
+            <a:pPr indent="0" marL="0">
+              <a:buNone/>
+            </a:pPr>
+            <a:r>
+              <a:rPr lang="en-US" sz="660" dirty="0">
+                <a:solidFill>
+                  <a:srgbClr val="111827"/>
+                </a:solidFill>
+                <a:latin typeface="Consolas" pitchFamily="34" charset="0"/>
+                <a:ea typeface="Consolas" pitchFamily="34" charset="-122"/>
+                <a:cs typeface="Consolas" pitchFamily="34" charset="-120"/>
+              </a:rPr>
+              <a:t>    selected_pred = pred[idx]</a:t>
+            </a:r>
+            <a:endParaRPr lang="en-US" sz="660" dirty="0"/>
+          </a:p>
+          <a:p>
+            <a:pPr indent="0" marL="0">
+              <a:buNone/>
+            </a:pPr>
+            <a:r>
+              <a:rPr lang="en-US" sz="660" dirty="0">
+                <a:solidFill>
+                  <a:srgbClr val="111827"/>
+                </a:solidFill>
+                <a:latin typeface="Consolas" pitchFamily="34" charset="0"/>
+                <a:ea typeface="Consolas" pitchFamily="34" charset="-122"/>
+                <a:cs typeface="Consolas" pitchFamily="34" charset="-120"/>
+              </a:rPr>
+              <a:t>    selected_target = target[idx]</a:t>
+            </a:r>
+            <a:endParaRPr lang="en-US" sz="660" dirty="0"/>
+          </a:p>
+          <a:p>
+            <a:pPr indent="0" marL="0">
+              <a:buNone/>
+            </a:pPr>
+            <a:r>
+              <a:rPr lang="en-US" sz="660" dirty="0">
+                <a:solidFill>
+                  <a:srgbClr val="111827"/>
+                </a:solidFill>
+                <a:latin typeface="Consolas" pitchFamily="34" charset="0"/>
+                <a:ea typeface="Consolas" pitchFamily="34" charset="-122"/>
+                <a:cs typeface="Consolas" pitchFamily="34" charset="-120"/>
+              </a:rPr>
+              <a:t>    weights = torch.softmax(selected_pred / temperature, dim=0)</a:t>
+            </a:r>
+            <a:endParaRPr lang="en-US" sz="660" dirty="0"/>
+          </a:p>
+          <a:p>
+            <a:pPr indent="0" marL="0">
+              <a:buNone/>
+            </a:pPr>
+            <a:r>
+              <a:rPr lang="en-US" sz="660" dirty="0">
+                <a:solidFill>
+                  <a:srgbClr val="111827"/>
+                </a:solidFill>
+                <a:latin typeface="Consolas" pitchFamily="34" charset="0"/>
+                <a:ea typeface="Consolas" pitchFamily="34" charset="-122"/>
+                <a:cs typeface="Consolas" pitchFamily="34" charset="-120"/>
+              </a:rPr>
+              <a:t>    portfolio_return = torch.sum(weights * selected_target)</a:t>
+            </a:r>
+            <a:endParaRPr lang="en-US" sz="660" dirty="0"/>
+          </a:p>
+          <a:p>
+            <a:pPr indent="0" marL="0">
+              <a:buNone/>
+            </a:pPr>
+            <a:r>
+              <a:rPr lang="en-US" sz="660" dirty="0">
+                <a:solidFill>
+                  <a:srgbClr val="111827"/>
+                </a:solidFill>
+                <a:latin typeface="Consolas" pitchFamily="34" charset="0"/>
+                <a:ea typeface="Consolas" pitchFamily="34" charset="-122"/>
+                <a:cs typeface="Consolas" pitchFamily="34" charset="-120"/>
+              </a:rPr>
+              <a:t>    return -portfolio_return</a:t>
+            </a:r>
+            <a:endParaRPr lang="en-US" sz="660" dirty="0"/>
+          </a:p>
+        </p:txBody>
+      </p:sp>
+      <p:sp>
+        <p:nvSpPr>
+          <p:cNvPr id="24" name="Text 22"/>
+          <p:cNvSpPr/>
+          <p:nvPr/>
+        </p:nvSpPr>
+        <p:spPr>
+          <a:xfrm>
+            <a:off x="6446520" y="2148840"/>
+            <a:ext cx="1463040" cy="219456"/>
+          </a:xfrm>
+          <a:prstGeom prst="rect">
+            <a:avLst/>
+          </a:prstGeom>
+          <a:noFill/>
+          <a:ln/>
+        </p:spPr>
+        <p:txBody>
+          <a:bodyPr wrap="square" lIns="0" tIns="0" rIns="0" bIns="0" rtlCol="0" anchor="ctr">
+            <a:normAutofit/>
+          </a:bodyPr>
+          <a:lstStyle/>
+          <a:p>
+            <a:pPr indent="0" marL="0">
+              <a:buNone/>
+            </a:pPr>
+            <a:r>
+              <a:rPr lang="en-US" sz="1300" b="1" dirty="0">
+                <a:solidFill>
+                  <a:srgbClr val="DC2626"/>
+                </a:solidFill>
+                <a:latin typeface="Microsoft YaHei" pitchFamily="34" charset="0"/>
+                <a:ea typeface="Microsoft YaHei" pitchFamily="34" charset="-122"/>
+                <a:cs typeface="Microsoft YaHei" pitchFamily="34" charset="-120"/>
+              </a:rPr>
+              <a:t>Why v1 failed</a:t>
+            </a:r>
+            <a:endParaRPr lang="en-US" sz="1300" dirty="0"/>
+          </a:p>
+        </p:txBody>
+      </p:sp>
+      <p:sp>
+        <p:nvSpPr>
+          <p:cNvPr id="25" name="Text 23"/>
+          <p:cNvSpPr/>
+          <p:nvPr/>
+        </p:nvSpPr>
+        <p:spPr>
+          <a:xfrm>
+            <a:off x="6492240" y="2560320"/>
+            <a:ext cx="4206240" cy="1920240"/>
+          </a:xfrm>
+          <a:prstGeom prst="rect">
+            <a:avLst/>
+          </a:prstGeom>
+          <a:noFill/>
+          <a:ln/>
+        </p:spPr>
+        <p:txBody>
+          <a:bodyPr wrap="square" lIns="635" tIns="635" rIns="635" bIns="635" rtlCol="0" anchor="ctr">
+            <a:normAutofit/>
+          </a:bodyPr>
+          <a:lstStyle/>
+          <a:p>
+            <a:r>
+              <a:rPr lang="en-US" sz="1100" dirty="0">
+                <a:solidFill>
+                  <a:srgbClr val="172033"/>
+                </a:solidFill>
+                <a:latin typeface="Microsoft YaHei" pitchFamily="34" charset="0"/>
+                <a:ea typeface="Microsoft YaHei" pitchFamily="34" charset="-122"/>
+                <a:cs typeface="Microsoft YaHei" pitchFamily="34" charset="-120"/>
+              </a:rPr>
+              <a:t>Head labels are noisy and extreme.</a:t>
+            </a:r>
+            <a:endParaRPr lang="en-US" sz="1100" dirty="0"/>
+          </a:p>
+          <a:p>
+            <a:r>
+              <a:rPr lang="en-US" sz="1100" dirty="0">
+                <a:solidFill>
+                  <a:srgbClr val="172033"/>
+                </a:solidFill>
+                <a:latin typeface="Microsoft YaHei" pitchFamily="34" charset="0"/>
+                <a:ea typeface="Microsoft YaHei" pitchFamily="34" charset="-122"/>
+                <a:cs typeface="Microsoft YaHei" pitchFamily="34" charset="-120"/>
+              </a:rPr>
+              <a:t>Softmax can overreact to small score gaps.</a:t>
+            </a:r>
+            <a:endParaRPr lang="en-US" sz="1100" dirty="0"/>
+          </a:p>
+          <a:p>
+            <a:r>
+              <a:rPr lang="en-US" sz="1100" dirty="0">
+                <a:solidFill>
+                  <a:srgbClr val="172033"/>
+                </a:solidFill>
+                <a:latin typeface="Microsoft YaHei" pitchFamily="34" charset="0"/>
+                <a:ea typeface="Microsoft YaHei" pitchFamily="34" charset="-122"/>
+                <a:cs typeface="Microsoft YaHei" pitchFamily="34" charset="-120"/>
+              </a:rPr>
+              <a:t>Direct loss underperformed official MASTER in replay.</a:t>
+            </a:r>
+            <a:endParaRPr lang="en-US" sz="1100" dirty="0"/>
+          </a:p>
+          <a:p>
+            <a:r>
+              <a:rPr lang="en-US" sz="1100" dirty="0">
+                <a:solidFill>
+                  <a:srgbClr val="172033"/>
+                </a:solidFill>
+                <a:latin typeface="Microsoft YaHei" pitchFamily="34" charset="0"/>
+                <a:ea typeface="Microsoft YaHei" pitchFamily="34" charset="-122"/>
+                <a:cs typeface="Microsoft YaHei" pitchFamily="34" charset="-120"/>
+              </a:rPr>
+              <a:t>Next version should add capped labels, downside penalty, multi-seed smoothing, and late-stage blending.</a:t>
+            </a:r>
+            <a:endParaRPr lang="en-US" sz="1100" dirty="0"/>
+          </a:p>
+        </p:txBody>
+      </p:sp>
+      <p:sp>
+        <p:nvSpPr>
+          <p:cNvPr id="26" name="Text 24"/>
+          <p:cNvSpPr/>
+          <p:nvPr/>
+        </p:nvSpPr>
+        <p:spPr>
+          <a:xfrm>
+            <a:off x="2651760" y="5669280"/>
+            <a:ext cx="5852160" cy="274320"/>
+          </a:xfrm>
+          <a:prstGeom prst="rect">
+            <a:avLst/>
+          </a:prstGeom>
+          <a:noFill/>
+          <a:ln/>
+        </p:spPr>
+        <p:txBody>
+          <a:bodyPr wrap="square" lIns="0" tIns="0" rIns="0" bIns="0" rtlCol="0" anchor="ctr">
+            <a:normAutofit/>
+          </a:bodyPr>
+          <a:lstStyle/>
+          <a:p>
+            <a:pPr indent="0" marL="0">
+              <a:buNone/>
+            </a:pPr>
+            <a:r>
+              <a:rPr lang="en-US" sz="1400" b="1" dirty="0">
+                <a:solidFill>
+                  <a:srgbClr val="2563EB"/>
+                </a:solidFill>
+                <a:latin typeface="Microsoft YaHei" pitchFamily="34" charset="0"/>
+                <a:ea typeface="Microsoft YaHei" pitchFamily="34" charset="-122"/>
+                <a:cs typeface="Microsoft YaHei" pitchFamily="34" charset="-120"/>
+              </a:rPr>
+              <a:t>This is an experiment track, not a production replacement yet.</a:t>
+            </a:r>
+            <a:endParaRPr lang="en-US" sz="1400" dirty="0"/>
+          </a:p>
+        </p:txBody>
+      </p:sp>
+    </p:spTree>
+  </p:cSld>
+  <p:clrMapOvr>
+    <a:masterClrMapping/>
+  </p:clrMapOvr>
+</p:sld>
+</file>
+
 <file path=ppt/slides/slide2.xml><?xml version="1.0" encoding="utf-8"?>
 <p:sld xmlns:a="http://schemas.openxmlformats.org/drawingml/2006/main" xmlns:r="http://schemas.openxmlformats.org/officeDocument/2006/relationships" xmlns:p="http://schemas.openxmlformats.org/presentationml/2006/main">
   <p:cSld name="Slide 2">

--- a/docs/code_review_meeting_2026_05_07.pptx
+++ b/docs/code_review_meeting_2026_05_07.pptx
@@ -2421,7 +2421,7 @@
                 <a:ea typeface="Microsoft YaHei" pitchFamily="34" charset="-122"/>
                 <a:cs typeface="Microsoft YaHei" pitchFamily="34" charset="-120"/>
               </a:rPr>
-              <a:t>Code Review &amp; Model Review</a:t>
+              <a:t>代码审查与模型复盘</a:t>
             </a:r>
             <a:endParaRPr lang="en-US" sz="3400" dirty="0"/>
           </a:p>
@@ -2542,7 +2542,7 @@
                 <a:ea typeface="Microsoft YaHei" pitchFamily="34" charset="-122"/>
                 <a:cs typeface="Microsoft YaHei" pitchFamily="34" charset="-120"/>
               </a:rPr>
-              <a:t>A-stage replay after fixing latest inference</a:t>
+              <a:t>修复 latest inference 后的 A-stage replay</a:t>
             </a:r>
             <a:endParaRPr lang="en-US" sz="850" dirty="0"/>
           </a:p>
@@ -2665,7 +2665,7 @@
                 <a:ea typeface="Microsoft YaHei" pitchFamily="34" charset="-122"/>
                 <a:cs typeface="Microsoft YaHei" pitchFamily="34" charset="-120"/>
               </a:rPr>
-              <a:t>Original public score</a:t>
+              <a:t>原始公开成绩</a:t>
             </a:r>
             <a:endParaRPr lang="en-US" sz="850" dirty="0"/>
           </a:p>
@@ -2706,7 +2706,7 @@
                 <a:ea typeface="Microsoft YaHei" pitchFamily="34" charset="-122"/>
                 <a:cs typeface="Microsoft YaHei" pitchFamily="34" charset="-120"/>
               </a:rPr>
-              <a:t>date-aligned replay gap</a:t>
+              <a:t>日期对齐差距</a:t>
             </a:r>
             <a:endParaRPr lang="en-US" sz="800" dirty="0"/>
           </a:p>
@@ -2788,7 +2788,7 @@
                 <a:ea typeface="Microsoft YaHei" pitchFamily="34" charset="-122"/>
                 <a:cs typeface="Microsoft YaHei" pitchFamily="34" charset="-120"/>
               </a:rPr>
-              <a:t>Current production result</a:t>
+              <a:t>当前生产结果</a:t>
             </a:r>
             <a:endParaRPr lang="en-US" sz="850" dirty="0"/>
           </a:p>
@@ -2939,7 +2939,7 @@
                 <a:ea typeface="Microsoft YaHei" pitchFamily="34" charset="-122"/>
                 <a:cs typeface="Microsoft YaHei" pitchFamily="34" charset="-120"/>
               </a:rPr>
-              <a:t>CODE REVIEW MAP</a:t>
+              <a:t>代码地图</a:t>
             </a:r>
             <a:endParaRPr lang="en-US" sz="800" dirty="0"/>
           </a:p>
@@ -3039,7 +3039,7 @@
                   <a:srgbClr val="94A3B8"/>
                 </a:solidFill>
               </a:rPr>
-              <a:t>2026-05-07 · CSI300 Competition Review</a:t>
+              <a:t>2026-05-07 · CSI300 比赛复盘</a:t>
             </a:r>
             <a:endParaRPr lang="en-US" sz="750" dirty="0"/>
           </a:p>
@@ -3090,7 +3090,7 @@
                           <a:ea typeface="Microsoft YaHei" pitchFamily="34" charset="-122"/>
                           <a:cs typeface="Microsoft YaHei" pitchFamily="34" charset="-120"/>
                         </a:rPr>
-                        <a:t>Area</a:t>
+                        <a:t>模块</a:t>
                       </a:r>
                       <a:endParaRPr lang="en-US" sz="820" dirty="0">
                         <a:latin typeface="Microsoft YaHei" charset="0"/>
@@ -3158,7 +3158,7 @@
                           <a:ea typeface="Microsoft YaHei" pitchFamily="34" charset="-122"/>
                           <a:cs typeface="Microsoft YaHei" pitchFamily="34" charset="-120"/>
                         </a:rPr>
-                        <a:t>Files</a:t>
+                        <a:t>文件</a:t>
                       </a:r>
                       <a:endParaRPr lang="en-US" sz="820" dirty="0">
                         <a:latin typeface="Microsoft YaHei" charset="0"/>
@@ -3226,7 +3226,7 @@
                           <a:ea typeface="Microsoft YaHei" pitchFamily="34" charset="-122"/>
                           <a:cs typeface="Microsoft YaHei" pitchFamily="34" charset="-120"/>
                         </a:rPr>
-                        <a:t>Review question</a:t>
+                        <a:t>审查问题</a:t>
                       </a:r>
                       <a:endParaRPr lang="en-US" sz="820" dirty="0">
                         <a:latin typeface="Microsoft YaHei" charset="0"/>
@@ -4204,7 +4204,7 @@
                 <a:ea typeface="Microsoft YaHei" pitchFamily="34" charset="-122"/>
                 <a:cs typeface="Microsoft YaHei" pitchFamily="34" charset="-120"/>
               </a:rPr>
-              <a:t>Meeting decision</a:t>
+              <a:t>会议决策</a:t>
             </a:r>
             <a:endParaRPr lang="en-US" sz="1050" dirty="0"/>
           </a:p>
@@ -4416,7 +4416,7 @@
                   <a:srgbClr val="94A3B8"/>
                 </a:solidFill>
               </a:rPr>
-              <a:t>2026-05-07 · CSI300 Competition Review</a:t>
+              <a:t>2026-05-07 · CSI300 比赛复盘</a:t>
             </a:r>
             <a:endParaRPr lang="en-US" sz="750" dirty="0"/>
           </a:p>
@@ -4564,7 +4564,7 @@
                 <a:ea typeface="Microsoft YaHei" pitchFamily="34" charset="-122"/>
                 <a:cs typeface="Microsoft YaHei" pitchFamily="34" charset="-120"/>
               </a:rPr>
-              <a:t>Next experiments</a:t>
+              <a:t>下一批实验</a:t>
             </a:r>
             <a:endParaRPr lang="en-US" sz="1300" dirty="0"/>
           </a:p>
@@ -4671,7 +4671,7 @@
                 <a:ea typeface="Microsoft YaHei" pitchFamily="34" charset="-122"/>
                 <a:cs typeface="Microsoft YaHei" pitchFamily="34" charset="-120"/>
               </a:rPr>
-              <a:t>Longer term</a:t>
+              <a:t>长期方向</a:t>
             </a:r>
             <a:endParaRPr lang="en-US" sz="1300" dirty="0"/>
           </a:p>
@@ -4801,7 +4801,7 @@
                 <a:ea typeface="Microsoft YaHei" pitchFamily="34" charset="-122"/>
                 <a:cs typeface="Microsoft YaHei" pitchFamily="34" charset="-120"/>
               </a:rPr>
-              <a:t>North star</a:t>
+              <a:t>核心准则</a:t>
             </a:r>
             <a:endParaRPr lang="en-US" sz="1050" dirty="0"/>
           </a:p>
@@ -4913,7 +4913,7 @@
                 <a:ea typeface="Microsoft YaHei" pitchFamily="34" charset="-122"/>
                 <a:cs typeface="Microsoft YaHei" pitchFamily="34" charset="-120"/>
               </a:rPr>
-              <a:t>SOURCE APPENDIX</a:t>
+              <a:t>源码附录</a:t>
             </a:r>
             <a:endParaRPr lang="en-US" sz="800" dirty="0"/>
           </a:p>
@@ -4954,7 +4954,7 @@
                 <a:ea typeface="Microsoft YaHei" pitchFamily="34" charset="-122"/>
                 <a:cs typeface="Microsoft YaHei" pitchFamily="34" charset="-120"/>
               </a:rPr>
-              <a:t>Code review priorities: inspect by failure impact</a:t>
+              <a:t>代码审查优先级：按失败影响排序</a:t>
             </a:r>
             <a:endParaRPr lang="en-US" sz="2400" dirty="0"/>
           </a:p>
@@ -5013,7 +5013,7 @@
                   <a:srgbClr val="94A3B8"/>
                 </a:solidFill>
               </a:rPr>
-              <a:t>2026-05-07 · CSI300 Competition Review</a:t>
+              <a:t>2026-05-07 · CSI300 比赛复盘</a:t>
             </a:r>
             <a:endParaRPr lang="en-US" sz="750" dirty="0"/>
           </a:p>
@@ -5065,7 +5065,7 @@
                           <a:ea typeface="Microsoft YaHei" pitchFamily="34" charset="-122"/>
                           <a:cs typeface="Microsoft YaHei" pitchFamily="34" charset="-120"/>
                         </a:rPr>
-                        <a:t>Priority</a:t>
+                        <a:t>优先级</a:t>
                       </a:r>
                       <a:endParaRPr lang="en-US" sz="820" dirty="0">
                         <a:latin typeface="Microsoft YaHei" charset="0"/>
@@ -5133,7 +5133,7 @@
                           <a:ea typeface="Microsoft YaHei" pitchFamily="34" charset="-122"/>
                           <a:cs typeface="Microsoft YaHei" pitchFamily="34" charset="-120"/>
                         </a:rPr>
-                        <a:t>Area</a:t>
+                        <a:t>审查区域</a:t>
                       </a:r>
                       <a:endParaRPr lang="en-US" sz="820" dirty="0">
                         <a:latin typeface="Microsoft YaHei" charset="0"/>
@@ -5201,7 +5201,7 @@
                           <a:ea typeface="Microsoft YaHei" pitchFamily="34" charset="-122"/>
                           <a:cs typeface="Microsoft YaHei" pitchFamily="34" charset="-120"/>
                         </a:rPr>
-                        <a:t>Source files</a:t>
+                        <a:t>源码文件</a:t>
                       </a:r>
                       <a:endParaRPr lang="en-US" sz="820" dirty="0">
                         <a:latin typeface="Microsoft YaHei" charset="0"/>
@@ -5269,7 +5269,7 @@
                           <a:ea typeface="Microsoft YaHei" pitchFamily="34" charset="-122"/>
                           <a:cs typeface="Microsoft YaHei" pitchFamily="34" charset="-120"/>
                         </a:rPr>
-                        <a:t>Meeting question</a:t>
+                        <a:t>会议问题</a:t>
                       </a:r>
                       <a:endParaRPr lang="en-US" sz="820" dirty="0">
                         <a:latin typeface="Microsoft YaHei" charset="0"/>
@@ -5564,7 +5564,7 @@
                           <a:ea typeface="Microsoft YaHei" pitchFamily="34" charset="-122"/>
                           <a:cs typeface="Microsoft YaHei" pitchFamily="34" charset="-120"/>
                         </a:rPr>
-                        <a:t>Can result.csv ever be generated from the last labeled validation day again?</a:t>
+                        <a:t>result.csv 是否还可能来自最后一个有 label 验证日？</a:t>
                       </a:r>
                       <a:endParaRPr lang="en-US" sz="820" dirty="0">
                         <a:latin typeface="Microsoft YaHei" charset="0"/>
@@ -5838,7 +5838,7 @@
                           <a:ea typeface="Microsoft YaHei" pitchFamily="34" charset="-122"/>
                           <a:cs typeface="Microsoft YaHei" pitchFamily="34" charset="-120"/>
                         </a:rPr>
-                        <a:t>When should Top1 be allowed, capped, or downgraded to Top2/confidence?</a:t>
+                        <a:t>什么时候允许 Top1，什么时候 cap 或降级到 Top2/confidence？</a:t>
                       </a:r>
                       <a:endParaRPr lang="en-US" sz="820" dirty="0">
                         <a:latin typeface="Microsoft YaHei" charset="0"/>
@@ -6133,7 +6133,7 @@
                           <a:ea typeface="Microsoft YaHei" pitchFamily="34" charset="-122"/>
                           <a:cs typeface="Microsoft YaHei" pitchFamily="34" charset="-120"/>
                         </a:rPr>
-                        <a:t>Are parameters selected only from information available before T?</a:t>
+                        <a:t>参数是否只用 T 之前可见的信息选择？</a:t>
                       </a:r>
                       <a:endParaRPr lang="en-US" sz="820" dirty="0">
                         <a:latin typeface="Microsoft YaHei" charset="0"/>
@@ -6407,7 +6407,7 @@
                           <a:ea typeface="Microsoft YaHei" pitchFamily="34" charset="-122"/>
                           <a:cs typeface="Microsoft YaHei" pitchFamily="34" charset="-120"/>
                         </a:rPr>
-                        <a:t>How do we align loss with final portfolio return without chasing noisy extremes?</a:t>
+                        <a:t>如何让 loss 对齐最终组合收益，同时不追极端噪声？</a:t>
                       </a:r>
                       <a:endParaRPr lang="en-US" sz="820" dirty="0">
                         <a:latin typeface="Microsoft YaHei" charset="0"/>
@@ -6545,7 +6545,7 @@
                           <a:ea typeface="Microsoft YaHei" pitchFamily="34" charset="-122"/>
                           <a:cs typeface="Microsoft YaHei" pitchFamily="34" charset="-120"/>
                         </a:rPr>
-                        <a:t>Data engineering</a:t>
+                        <a:t>数据工程</a:t>
                       </a:r>
                       <a:endParaRPr lang="en-US" sz="820" dirty="0">
                         <a:latin typeface="Microsoft YaHei" charset="0"/>
@@ -6702,7 +6702,7 @@
                           <a:ea typeface="Microsoft YaHei" pitchFamily="34" charset="-122"/>
                           <a:cs typeface="Microsoft YaHei" pitchFamily="34" charset="-120"/>
                         </a:rPr>
-                        <a:t>Which columns are guaranteed, optional, or cached from previous processed artifacts?</a:t>
+                        <a:t>哪些列是 guaranteed、optional，哪些来自 cached artifact？</a:t>
                       </a:r>
                       <a:endParaRPr lang="en-US" sz="820" dirty="0">
                         <a:latin typeface="Microsoft YaHei" charset="0"/>
@@ -6793,7 +6793,7 @@
                 <a:ea typeface="Microsoft YaHei" pitchFamily="34" charset="-122"/>
                 <a:cs typeface="Microsoft YaHei" pitchFamily="34" charset="-120"/>
               </a:rPr>
-              <a:t>Review stance: protect online correctness first; increase modeling complexity only after the submission loop is reproducible.</a:t>
+              <a:t>审查立场：先保护线上正确性；只有提交闭环可复现之后，再增加模型复杂度。</a:t>
             </a:r>
             <a:endParaRPr lang="en-US" sz="1300" dirty="0"/>
           </a:p>
@@ -6864,7 +6864,7 @@
                 <a:ea typeface="Microsoft YaHei" pitchFamily="34" charset="-122"/>
                 <a:cs typeface="Microsoft YaHei" pitchFamily="34" charset="-120"/>
               </a:rPr>
-              <a:t>SOURCE APPENDIX</a:t>
+              <a:t>源码附录</a:t>
             </a:r>
             <a:endParaRPr lang="en-US" sz="800" dirty="0"/>
           </a:p>
@@ -6905,7 +6905,7 @@
                 <a:ea typeface="Microsoft YaHei" pitchFamily="34" charset="-122"/>
                 <a:cs typeface="Microsoft YaHei" pitchFamily="34" charset="-120"/>
               </a:rPr>
-              <a:t>P0 source: latest T-date inference</a:t>
+              <a:t>P0 源码：latest T-date inference</a:t>
             </a:r>
             <a:endParaRPr lang="en-US" sz="2400" dirty="0"/>
           </a:p>
@@ -6964,7 +6964,7 @@
                   <a:srgbClr val="94A3B8"/>
                 </a:solidFill>
               </a:rPr>
-              <a:t>2026-05-07 · CSI300 Competition Review</a:t>
+              <a:t>2026-05-07 · CSI300 比赛复盘</a:t>
             </a:r>
             <a:endParaRPr lang="en-US" sz="750" dirty="0"/>
           </a:p>
@@ -7124,7 +7124,7 @@
                 <a:ea typeface="Microsoft YaHei" pitchFamily="34" charset="-122"/>
                 <a:cs typeface="Microsoft YaHei" pitchFamily="34" charset="-120"/>
               </a:rPr>
-              <a:t>labeled train</a:t>
+              <a:t>有 label 训练</a:t>
             </a:r>
             <a:endParaRPr lang="en-US" sz="750" dirty="0"/>
           </a:p>
@@ -7216,7 +7216,7 @@
                 <a:ea typeface="Microsoft YaHei" pitchFamily="34" charset="-122"/>
                 <a:cs typeface="Microsoft YaHei" pitchFamily="34" charset="-120"/>
               </a:rPr>
-              <a:t>unlabeled T</a:t>
+              <a:t>无 label T</a:t>
             </a:r>
             <a:endParaRPr lang="en-US" sz="750" dirty="0"/>
           </a:p>
@@ -7974,7 +7974,7 @@
                 <a:ea typeface="Microsoft YaHei" pitchFamily="34" charset="-122"/>
                 <a:cs typeface="Microsoft YaHei" pitchFamily="34" charset="-120"/>
               </a:rPr>
-              <a:t>Must assert latest_pred.date == configured T before submission</a:t>
+              <a:t>提交前必须断言 latest_pred.date == configured T</a:t>
             </a:r>
             <a:endParaRPr lang="en-US" sz="800" dirty="0"/>
           </a:p>
@@ -8045,7 +8045,7 @@
                 <a:ea typeface="Microsoft YaHei" pitchFamily="34" charset="-122"/>
                 <a:cs typeface="Microsoft YaHei" pitchFamily="34" charset="-120"/>
               </a:rPr>
-              <a:t>SOURCE APPENDIX</a:t>
+              <a:t>源码附录</a:t>
             </a:r>
             <a:endParaRPr lang="en-US" sz="800" dirty="0"/>
           </a:p>
@@ -8086,7 +8086,7 @@
                 <a:ea typeface="Microsoft YaHei" pitchFamily="34" charset="-122"/>
                 <a:cs typeface="Microsoft YaHei" pitchFamily="34" charset="-120"/>
               </a:rPr>
-              <a:t>P1 source: confidence-aware portfolio allocation</a:t>
+              <a:t>P1 源码：confidence-aware portfolio allocation</a:t>
             </a:r>
             <a:endParaRPr lang="en-US" sz="2400" dirty="0"/>
           </a:p>
@@ -8145,7 +8145,7 @@
                   <a:srgbClr val="94A3B8"/>
                 </a:solidFill>
               </a:rPr>
-              <a:t>2026-05-07 · CSI300 Competition Review</a:t>
+              <a:t>2026-05-07 · CSI300 比赛复盘</a:t>
             </a:r>
             <a:endParaRPr lang="en-US" sz="750" dirty="0"/>
           </a:p>
@@ -8909,7 +8909,7 @@
                 <a:ea typeface="Microsoft YaHei" pitchFamily="34" charset="-122"/>
                 <a:cs typeface="Microsoft YaHei" pitchFamily="34" charset="-120"/>
               </a:rPr>
-              <a:t>Review decisions</a:t>
+              <a:t>审查决策</a:t>
             </a:r>
             <a:endParaRPr lang="en-US" sz="1300" dirty="0"/>
           </a:p>
@@ -8947,7 +8947,7 @@
                 <a:ea typeface="Microsoft YaHei" pitchFamily="34" charset="-122"/>
                 <a:cs typeface="Microsoft YaHei" pitchFamily="34" charset="-120"/>
               </a:rPr>
-              <a:t>Production default: top1, top2, or confidence?</a:t>
+              <a:t>生产默认：top1、top2 还是 confidence？</a:t>
             </a:r>
             <a:endParaRPr lang="en-US" sz="1100" dirty="0"/>
           </a:p>
@@ -8961,7 +8961,7 @@
                 <a:ea typeface="Microsoft YaHei" pitchFamily="34" charset="-122"/>
                 <a:cs typeface="Microsoft YaHei" pitchFamily="34" charset="-120"/>
               </a:rPr>
-              <a:t>Should multi-seed score_std cap single-stock weight?</a:t>
+              <a:t>multi-seed 的 score_std 是否限制单股权重？</a:t>
             </a:r>
             <a:endParaRPr lang="en-US" sz="1100" dirty="0"/>
           </a:p>
@@ -8975,7 +8975,7 @@
                 <a:ea typeface="Microsoft YaHei" pitchFamily="34" charset="-122"/>
                 <a:cs typeface="Microsoft YaHei" pitchFamily="34" charset="-120"/>
               </a:rPr>
-              <a:t>Do we need our own max single-stock cap?</a:t>
+              <a:t>是否需要内部 max single-stock cap？</a:t>
             </a:r>
             <a:endParaRPr lang="en-US" sz="1100" dirty="0"/>
           </a:p>
@@ -8989,7 +8989,7 @@
                 <a:ea typeface="Microsoft YaHei" pitchFamily="34" charset="-122"/>
                 <a:cs typeface="Microsoft YaHei" pitchFamily="34" charset="-120"/>
               </a:rPr>
-              <a:t>Should each result save margin/std/fallback reason?</a:t>
+              <a:t>每次 result 是否保存 margin/std/fallback reason？</a:t>
             </a:r>
             <a:endParaRPr lang="en-US" sz="1100" dirty="0"/>
           </a:p>
@@ -9224,7 +9224,7 @@
                 <a:ea typeface="Microsoft YaHei" pitchFamily="34" charset="-122"/>
                 <a:cs typeface="Microsoft YaHei" pitchFamily="34" charset="-120"/>
               </a:rPr>
-              <a:t>SOURCE APPENDIX</a:t>
+              <a:t>源码附录</a:t>
             </a:r>
             <a:endParaRPr lang="en-US" sz="800" dirty="0"/>
           </a:p>
@@ -9265,7 +9265,7 @@
                 <a:ea typeface="Microsoft YaHei" pitchFamily="34" charset="-122"/>
                 <a:cs typeface="Microsoft YaHei" pitchFamily="34" charset="-120"/>
               </a:rPr>
-              <a:t>P1 source: walk-forward validation loop</a:t>
+              <a:t>P1 源码：walk-forward validation loop</a:t>
             </a:r>
             <a:endParaRPr lang="en-US" sz="2400" dirty="0"/>
           </a:p>
@@ -9324,7 +9324,7 @@
                   <a:srgbClr val="94A3B8"/>
                 </a:solidFill>
               </a:rPr>
-              <a:t>2026-05-07 · CSI300 Competition Review</a:t>
+              <a:t>2026-05-07 · CSI300 比赛复盘</a:t>
             </a:r>
             <a:endParaRPr lang="en-US" sz="750" dirty="0"/>
           </a:p>
@@ -9392,7 +9392,7 @@
                 <a:ea typeface="Microsoft YaHei" pitchFamily="34" charset="-122"/>
                 <a:cs typeface="Microsoft YaHei" pitchFamily="34" charset="-120"/>
               </a:rPr>
-              <a:t>history before T</a:t>
+              <a:t>T 前历史</a:t>
             </a:r>
             <a:endParaRPr lang="en-US" sz="750" dirty="0"/>
           </a:p>
@@ -9484,7 +9484,7 @@
                 <a:ea typeface="Microsoft YaHei" pitchFamily="34" charset="-122"/>
                 <a:cs typeface="Microsoft YaHei" pitchFamily="34" charset="-120"/>
               </a:rPr>
-              <a:t>select params</a:t>
+              <a:t>选择参数</a:t>
             </a:r>
             <a:endParaRPr lang="en-US" sz="750" dirty="0"/>
           </a:p>
@@ -9576,7 +9576,7 @@
                 <a:ea typeface="Microsoft YaHei" pitchFamily="34" charset="-122"/>
                 <a:cs typeface="Microsoft YaHei" pitchFamily="34" charset="-120"/>
               </a:rPr>
-              <a:t>build portfolio</a:t>
+              <a:t>构造组合</a:t>
             </a:r>
             <a:endParaRPr lang="en-US" sz="750" dirty="0"/>
           </a:p>
@@ -9668,7 +9668,7 @@
                 <a:ea typeface="Microsoft YaHei" pitchFamily="34" charset="-122"/>
                 <a:cs typeface="Microsoft YaHei" pitchFamily="34" charset="-120"/>
               </a:rPr>
-              <a:t>score T+1:T+5</a:t>
+              <a:t>评分 T+1:T+5</a:t>
             </a:r>
             <a:endParaRPr lang="en-US" sz="750" dirty="0"/>
           </a:p>
@@ -9760,7 +9760,7 @@
                 <a:ea typeface="Microsoft YaHei" pitchFamily="34" charset="-122"/>
                 <a:cs typeface="Microsoft YaHei" pitchFamily="34" charset="-120"/>
               </a:rPr>
-              <a:t>advance T</a:t>
+              <a:t>推进 T</a:t>
             </a:r>
             <a:endParaRPr lang="en-US" sz="750" dirty="0"/>
           </a:p>
@@ -10273,7 +10273,7 @@
                 <a:ea typeface="Microsoft YaHei" pitchFamily="34" charset="-122"/>
                 <a:cs typeface="Microsoft YaHei" pitchFamily="34" charset="-120"/>
               </a:rPr>
-              <a:t>Audit rule: no parameter can be chosen using data after the simulated submission date T.</a:t>
+              <a:t>审查规则：任何参数都不能使用模拟提交日 T 之后的数据选择。</a:t>
             </a:r>
             <a:endParaRPr lang="en-US" sz="1300" dirty="0"/>
           </a:p>
@@ -10344,7 +10344,7 @@
                 <a:ea typeface="Microsoft YaHei" pitchFamily="34" charset="-122"/>
                 <a:cs typeface="Microsoft YaHei" pitchFamily="34" charset="-120"/>
               </a:rPr>
-              <a:t>DATA ENGINEERING</a:t>
+              <a:t>数据工程</a:t>
             </a:r>
             <a:endParaRPr lang="en-US" sz="800" dirty="0"/>
           </a:p>
@@ -10385,7 +10385,7 @@
                 <a:ea typeface="Microsoft YaHei" pitchFamily="34" charset="-122"/>
                 <a:cs typeface="Microsoft YaHei" pitchFamily="34" charset="-120"/>
               </a:rPr>
-              <a:t>P2 data engineering: raw row to model row</a:t>
+              <a:t>P2 数据工程：raw row 到 model row</a:t>
             </a:r>
             <a:endParaRPr lang="en-US" sz="2400" dirty="0"/>
           </a:p>
@@ -10444,7 +10444,7 @@
                   <a:srgbClr val="94A3B8"/>
                 </a:solidFill>
               </a:rPr>
-              <a:t>2026-05-07 · CSI300 Competition Review</a:t>
+              <a:t>2026-05-07 · CSI300 比赛复盘</a:t>
             </a:r>
             <a:endParaRPr lang="en-US" sz="750" dirty="0"/>
           </a:p>
@@ -10931,7 +10931,7 @@
                           <a:ea typeface="Microsoft YaHei" pitchFamily="34" charset="-122"/>
                           <a:cs typeface="Microsoft YaHei" pitchFamily="34" charset="-120"/>
                         </a:rPr>
-                        <a:t>Stage</a:t>
+                        <a:t>阶段</a:t>
                       </a:r>
                       <a:endParaRPr lang="en-US" sz="820" dirty="0">
                         <a:latin typeface="Microsoft YaHei" charset="0"/>
@@ -10999,7 +10999,7 @@
                           <a:ea typeface="Microsoft YaHei" pitchFamily="34" charset="-122"/>
                           <a:cs typeface="Microsoft YaHei" pitchFamily="34" charset="-120"/>
                         </a:rPr>
-                        <a:t>Example</a:t>
+                        <a:t>样例</a:t>
                       </a:r>
                       <a:endParaRPr lang="en-US" sz="820" dirty="0">
                         <a:latin typeface="Microsoft YaHei" charset="0"/>
@@ -11067,7 +11067,7 @@
                           <a:ea typeface="Microsoft YaHei" pitchFamily="34" charset="-122"/>
                           <a:cs typeface="Microsoft YaHei" pitchFamily="34" charset="-120"/>
                         </a:rPr>
-                        <a:t>Audit check</a:t>
+                        <a:t>审计点</a:t>
                       </a:r>
                       <a:endParaRPr lang="en-US" sz="820" dirty="0">
                         <a:latin typeface="Microsoft YaHei" charset="0"/>
@@ -11273,7 +11273,7 @@
                           <a:ea typeface="Microsoft YaHei" pitchFamily="34" charset="-122"/>
                           <a:cs typeface="Microsoft YaHei" pitchFamily="34" charset="-120"/>
                         </a:rPr>
-                        <a:t>stock_id must remain zero-padded text</a:t>
+                        <a:t>stock_id 必须保持 zero-padded text</a:t>
                       </a:r>
                       <a:endParaRPr lang="en-US" sz="820" dirty="0">
                         <a:latin typeface="Microsoft YaHei" charset="0"/>
@@ -11479,7 +11479,7 @@
                           <a:ea typeface="Microsoft YaHei" pitchFamily="34" charset="-122"/>
                           <a:cs typeface="Microsoft YaHei" pitchFamily="34" charset="-120"/>
                         </a:rPr>
-                        <a:t>no future shift except explicit label columns</a:t>
+                        <a:t>除显式 label 列外不能 future shift</a:t>
                       </a:r>
                       <a:endParaRPr lang="en-US" sz="820" dirty="0">
                         <a:latin typeface="Microsoft YaHei" charset="0"/>
@@ -11617,7 +11617,7 @@
                           <a:ea typeface="Microsoft YaHei" pitchFamily="34" charset="-122"/>
                           <a:cs typeface="Microsoft YaHei" pitchFamily="34" charset="-120"/>
                         </a:rPr>
-                        <a:t>2026-04-24 rows have blank future label</a:t>
+                        <a:t>2026-04-24 rows 的未来 label 为空</a:t>
                       </a:r>
                       <a:endParaRPr lang="en-US" sz="820" dirty="0">
                         <a:latin typeface="Microsoft YaHei" charset="0"/>
@@ -11685,7 +11685,7 @@
                           <a:ea typeface="Microsoft YaHei" pitchFamily="34" charset="-122"/>
                           <a:cs typeface="Microsoft YaHei" pitchFamily="34" charset="-120"/>
                         </a:rPr>
-                        <a:t>features up to T only</a:t>
+                        <a:t>features 只能到 T</a:t>
                       </a:r>
                       <a:endParaRPr lang="en-US" sz="820" dirty="0">
                         <a:latin typeface="Microsoft YaHei" charset="0"/>
@@ -11823,7 +11823,7 @@
                           <a:ea typeface="Microsoft YaHei" pitchFamily="34" charset="-122"/>
                           <a:cs typeface="Microsoft YaHei" pitchFamily="34" charset="-120"/>
                         </a:rPr>
-                        <a:t>T+1 open to T+5 open return after phase</a:t>
+                        <a:t>阶段结束后计算 T+1 open 到 T+5 open return</a:t>
                       </a:r>
                       <a:endParaRPr lang="en-US" sz="820" dirty="0">
                         <a:latin typeface="Microsoft YaHei" charset="0"/>
@@ -11891,7 +11891,7 @@
                           <a:ea typeface="Microsoft YaHei" pitchFamily="34" charset="-122"/>
                           <a:cs typeface="Microsoft YaHei" pitchFamily="34" charset="-120"/>
                         </a:rPr>
-                        <a:t>used only for post-submit evaluation</a:t>
+                        <a:t>只用于赛后评估</a:t>
                       </a:r>
                       <a:endParaRPr lang="en-US" sz="820" dirty="0">
                         <a:latin typeface="Microsoft YaHei" charset="0"/>
@@ -12034,7 +12034,7 @@
                 <a:ea typeface="Microsoft YaHei" pitchFamily="34" charset="-122"/>
                 <a:cs typeface="Microsoft YaHei" pitchFamily="34" charset="-120"/>
               </a:rPr>
-              <a:t>sample processed T rows</a:t>
+              <a:t>processed T rows 样例</a:t>
             </a:r>
             <a:endParaRPr lang="en-US" sz="750" dirty="0"/>
           </a:p>
@@ -12167,7 +12167,7 @@
                 <a:ea typeface="Microsoft YaHei" pitchFamily="34" charset="-122"/>
                 <a:cs typeface="Microsoft YaHei" pitchFamily="34" charset="-120"/>
               </a:rPr>
-              <a:t>Caveat: theme/momentum code can exist while the cached processed artifact still needs a rebuild before those columns appear.</a:t>
+              <a:t>Caveat：theme/momentum 代码存在，不代表 cached processed artifact 已重建出这些列。</a:t>
             </a:r>
             <a:endParaRPr lang="en-US" sz="1000" dirty="0"/>
           </a:p>
@@ -12238,7 +12238,7 @@
                 <a:ea typeface="Microsoft YaHei" pitchFamily="34" charset="-122"/>
                 <a:cs typeface="Microsoft YaHei" pitchFamily="34" charset="-120"/>
               </a:rPr>
-              <a:t>SOURCE APPENDIX</a:t>
+              <a:t>源码附录</a:t>
             </a:r>
             <a:endParaRPr lang="en-US" sz="800" dirty="0"/>
           </a:p>
@@ -12279,7 +12279,7 @@
                 <a:ea typeface="Microsoft YaHei" pitchFamily="34" charset="-122"/>
                 <a:cs typeface="Microsoft YaHei" pitchFamily="34" charset="-120"/>
               </a:rPr>
-              <a:t>P2 source: portfolio-return objective</a:t>
+              <a:t>P2 源码：portfolio-return objective</a:t>
             </a:r>
             <a:endParaRPr lang="en-US" sz="2400" dirty="0"/>
           </a:p>
@@ -12338,7 +12338,7 @@
                   <a:srgbClr val="94A3B8"/>
                 </a:solidFill>
               </a:rPr>
-              <a:t>2026-05-07 · CSI300 Competition Review</a:t>
+              <a:t>2026-05-07 · CSI300 比赛复盘</a:t>
             </a:r>
             <a:endParaRPr lang="en-US" sz="750" dirty="0"/>
           </a:p>
@@ -13068,7 +13068,7 @@
                 <a:ea typeface="Microsoft YaHei" pitchFamily="34" charset="-122"/>
                 <a:cs typeface="Microsoft YaHei" pitchFamily="34" charset="-120"/>
               </a:rPr>
-              <a:t>Why v1 failed</a:t>
+              <a:t>v1 失败原因</a:t>
             </a:r>
             <a:endParaRPr lang="en-US" sz="1300" dirty="0"/>
           </a:p>
@@ -13106,7 +13106,7 @@
                 <a:ea typeface="Microsoft YaHei" pitchFamily="34" charset="-122"/>
                 <a:cs typeface="Microsoft YaHei" pitchFamily="34" charset="-120"/>
               </a:rPr>
-              <a:t>Head labels are noisy and extreme.</a:t>
+              <a:t>头部 label 噪声和极端值很强。</a:t>
             </a:r>
             <a:endParaRPr lang="en-US" sz="1100" dirty="0"/>
           </a:p>
@@ -13120,7 +13120,7 @@
                 <a:ea typeface="Microsoft YaHei" pitchFamily="34" charset="-122"/>
                 <a:cs typeface="Microsoft YaHei" pitchFamily="34" charset="-120"/>
               </a:rPr>
-              <a:t>Softmax can overreact to small score gaps.</a:t>
+              <a:t>Softmax 容易对很小的 score gap 过度反应。</a:t>
             </a:r>
             <a:endParaRPr lang="en-US" sz="1100" dirty="0"/>
           </a:p>
@@ -13134,7 +13134,7 @@
                 <a:ea typeface="Microsoft YaHei" pitchFamily="34" charset="-122"/>
                 <a:cs typeface="Microsoft YaHei" pitchFamily="34" charset="-120"/>
               </a:rPr>
-              <a:t>Direct loss underperformed official MASTER in replay.</a:t>
+              <a:t>Direct loss 在 replay 中弱于 official MASTER。</a:t>
             </a:r>
             <a:endParaRPr lang="en-US" sz="1100" dirty="0"/>
           </a:p>
@@ -13148,7 +13148,7 @@
                 <a:ea typeface="Microsoft YaHei" pitchFamily="34" charset="-122"/>
                 <a:cs typeface="Microsoft YaHei" pitchFamily="34" charset="-120"/>
               </a:rPr>
-              <a:t>Next version should add capped labels, downside penalty, multi-seed smoothing, and late-stage blending.</a:t>
+              <a:t>下一版需要 capped labels、downside penalty、multi-seed smoothing 和 late-stage blending。</a:t>
             </a:r>
             <a:endParaRPr lang="en-US" sz="1100" dirty="0"/>
           </a:p>
@@ -13189,7 +13189,7 @@
                 <a:ea typeface="Microsoft YaHei" pitchFamily="34" charset="-122"/>
                 <a:cs typeface="Microsoft YaHei" pitchFamily="34" charset="-120"/>
               </a:rPr>
-              <a:t>This is an experiment track, not a production replacement yet.</a:t>
+              <a:t>这是实验方向，还不是生产替代方案。</a:t>
             </a:r>
             <a:endParaRPr lang="en-US" sz="1400" dirty="0"/>
           </a:p>
@@ -13360,7 +13360,7 @@
                   <a:srgbClr val="94A3B8"/>
                 </a:solidFill>
               </a:rPr>
-              <a:t>2026-05-07 · CSI300 Competition Review</a:t>
+              <a:t>2026-05-07 · CSI300 比赛复盘</a:t>
             </a:r>
             <a:endParaRPr lang="en-US" sz="750" dirty="0"/>
           </a:p>
@@ -13563,7 +13563,7 @@
                 <a:ea typeface="Microsoft YaHei" pitchFamily="34" charset="-122"/>
                 <a:cs typeface="Microsoft YaHei" pitchFamily="34" charset="-120"/>
               </a:rPr>
-              <a:t>best replay score</a:t>
+              <a:t>最佳 replay 分数</a:t>
             </a:r>
             <a:endParaRPr lang="en-US" sz="850" dirty="0"/>
           </a:p>
@@ -13645,7 +13645,7 @@
                 <a:ea typeface="Microsoft YaHei" pitchFamily="34" charset="-122"/>
                 <a:cs typeface="Microsoft YaHei" pitchFamily="34" charset="-120"/>
               </a:rPr>
-              <a:t>Top1 validation std</a:t>
+              <a:t>Top1 验证 std</a:t>
             </a:r>
             <a:endParaRPr lang="en-US" sz="850" dirty="0"/>
           </a:p>
@@ -13727,7 +13727,7 @@
                 <a:ea typeface="Microsoft YaHei" pitchFamily="34" charset="-122"/>
                 <a:cs typeface="Microsoft YaHei" pitchFamily="34" charset="-120"/>
               </a:rPr>
-              <a:t>processed features</a:t>
+              <a:t>processed 特征数</a:t>
             </a:r>
             <a:endParaRPr lang="en-US" sz="850" dirty="0"/>
           </a:p>
@@ -13809,7 +13809,7 @@
                 <a:ea typeface="Microsoft YaHei" pitchFamily="34" charset="-122"/>
                 <a:cs typeface="Microsoft YaHei" pitchFamily="34" charset="-120"/>
               </a:rPr>
-              <a:t>stocks</a:t>
+              <a:t>股票数</a:t>
             </a:r>
             <a:endParaRPr lang="en-US" sz="850" dirty="0"/>
           </a:p>
@@ -13980,7 +13980,7 @@
                   <a:srgbClr val="94A3B8"/>
                 </a:solidFill>
               </a:rPr>
-              <a:t>2026-05-07 · CSI300 Competition Review</a:t>
+              <a:t>2026-05-07 · CSI300 比赛复盘</a:t>
             </a:r>
             <a:endParaRPr lang="en-US" sz="750" dirty="0"/>
           </a:p>
@@ -14032,7 +14032,7 @@
                           <a:ea typeface="Microsoft YaHei" pitchFamily="34" charset="-122"/>
                           <a:cs typeface="Microsoft YaHei" pitchFamily="34" charset="-120"/>
                         </a:rPr>
-                        <a:t>Dataset</a:t>
+                        <a:t>数据集</a:t>
                       </a:r>
                       <a:endParaRPr lang="en-US" sz="820" dirty="0">
                         <a:latin typeface="Microsoft YaHei" charset="0"/>
@@ -14100,7 +14100,7 @@
                           <a:ea typeface="Microsoft YaHei" pitchFamily="34" charset="-122"/>
                           <a:cs typeface="Microsoft YaHei" pitchFamily="34" charset="-120"/>
                         </a:rPr>
-                        <a:t>Rows</a:t>
+                        <a:t>行数</a:t>
                       </a:r>
                       <a:endParaRPr lang="en-US" sz="820" dirty="0">
                         <a:latin typeface="Microsoft YaHei" charset="0"/>
@@ -14168,7 +14168,7 @@
                           <a:ea typeface="Microsoft YaHei" pitchFamily="34" charset="-122"/>
                           <a:cs typeface="Microsoft YaHei" pitchFamily="34" charset="-120"/>
                         </a:rPr>
-                        <a:t>Columns</a:t>
+                        <a:t>列数</a:t>
                       </a:r>
                       <a:endParaRPr lang="en-US" sz="820" dirty="0">
                         <a:latin typeface="Microsoft YaHei" charset="0"/>
@@ -14236,7 +14236,7 @@
                           <a:ea typeface="Microsoft YaHei" pitchFamily="34" charset="-122"/>
                           <a:cs typeface="Microsoft YaHei" pitchFamily="34" charset="-120"/>
                         </a:rPr>
-                        <a:t>Coverage</a:t>
+                        <a:t>覆盖范围</a:t>
                       </a:r>
                       <a:endParaRPr lang="en-US" sz="820" dirty="0">
                         <a:latin typeface="Microsoft YaHei" charset="0"/>
@@ -15058,7 +15058,7 @@
                           <a:ea typeface="Microsoft YaHei" pitchFamily="34" charset="-122"/>
                           <a:cs typeface="Microsoft YaHei" pitchFamily="34" charset="-120"/>
                         </a:rPr>
-                        <a:t>component universe</a:t>
+                        <a:t>成分股池</a:t>
                       </a:r>
                       <a:endParaRPr lang="en-US" sz="820" dirty="0">
                         <a:latin typeface="Microsoft YaHei" charset="0"/>
@@ -15645,7 +15645,7 @@
                   <a:srgbClr val="94A3B8"/>
                 </a:solidFill>
               </a:rPr>
-              <a:t>2026-05-07 · CSI300 Competition Review</a:t>
+              <a:t>2026-05-07 · CSI300 比赛复盘</a:t>
             </a:r>
             <a:endParaRPr lang="en-US" sz="750" dirty="0"/>
           </a:p>
@@ -16356,7 +16356,7 @@
                 <a:ea typeface="Microsoft YaHei" pitchFamily="34" charset="-122"/>
                 <a:cs typeface="Microsoft YaHei" pitchFamily="34" charset="-120"/>
               </a:rPr>
-              <a:t>after fixing</a:t>
+              <a:t>修复后</a:t>
             </a:r>
             <a:endParaRPr lang="en-US" sz="850" dirty="0"/>
           </a:p>
@@ -16397,7 +16397,7 @@
                 <a:ea typeface="Microsoft YaHei" pitchFamily="34" charset="-122"/>
                 <a:cs typeface="Microsoft YaHei" pitchFamily="34" charset="-120"/>
               </a:rPr>
-              <a:t>metrics now record inference_date</a:t>
+              <a:t>metrics 记录 inference_date</a:t>
             </a:r>
             <a:endParaRPr lang="en-US" sz="800" dirty="0"/>
           </a:p>
@@ -16568,7 +16568,7 @@
                   <a:srgbClr val="94A3B8"/>
                 </a:solidFill>
               </a:rPr>
-              <a:t>2026-05-07 · CSI300 Competition Review</a:t>
+              <a:t>2026-05-07 · CSI300 比赛复盘</a:t>
             </a:r>
             <a:endParaRPr lang="en-US" sz="750" dirty="0"/>
           </a:p>
@@ -17376,7 +17376,7 @@
                 <a:ea typeface="Microsoft YaHei" pitchFamily="34" charset="-122"/>
                 <a:cs typeface="Microsoft YaHei" pitchFamily="34" charset="-120"/>
               </a:rPr>
-              <a:t>RESULTS</a:t>
+              <a:t>结果</a:t>
             </a:r>
             <a:endParaRPr lang="en-US" sz="800" dirty="0"/>
           </a:p>
@@ -17476,7 +17476,7 @@
                   <a:srgbClr val="94A3B8"/>
                 </a:solidFill>
               </a:rPr>
-              <a:t>2026-05-07 · CSI300 Competition Review</a:t>
+              <a:t>2026-05-07 · CSI300 比赛复盘</a:t>
             </a:r>
             <a:endParaRPr lang="en-US" sz="750" dirty="0"/>
           </a:p>
@@ -17529,7 +17529,7 @@
                           <a:ea typeface="Microsoft YaHei" pitchFamily="34" charset="-122"/>
                           <a:cs typeface="Microsoft YaHei" pitchFamily="34" charset="-120"/>
                         </a:rPr>
-                        <a:t>Method</a:t>
+                        <a:t>方法</a:t>
                       </a:r>
                       <a:endParaRPr lang="en-US" sz="820" dirty="0">
                         <a:latin typeface="Microsoft YaHei" charset="0"/>
@@ -17597,7 +17597,7 @@
                           <a:ea typeface="Microsoft YaHei" pitchFamily="34" charset="-122"/>
                           <a:cs typeface="Microsoft YaHei" pitchFamily="34" charset="-120"/>
                         </a:rPr>
-                        <a:t>Strategy</a:t>
+                        <a:t>策略</a:t>
                       </a:r>
                       <a:endParaRPr lang="en-US" sz="820" dirty="0">
                         <a:latin typeface="Microsoft YaHei" charset="0"/>
@@ -20242,7 +20242,7 @@
                 <a:ea typeface="Microsoft YaHei" pitchFamily="34" charset="-122"/>
                 <a:cs typeface="Microsoft YaHei" pitchFamily="34" charset="-120"/>
               </a:rPr>
-              <a:t>RISK REVIEW</a:t>
+              <a:t>风险审查</a:t>
             </a:r>
             <a:endParaRPr lang="en-US" sz="800" dirty="0"/>
           </a:p>
@@ -20342,7 +20342,7 @@
                   <a:srgbClr val="94A3B8"/>
                 </a:solidFill>
               </a:rPr>
-              <a:t>2026-05-07 · CSI300 Competition Review</a:t>
+              <a:t>2026-05-07 · CSI300 比赛复盘</a:t>
             </a:r>
             <a:endParaRPr lang="en-US" sz="750" dirty="0"/>
           </a:p>
@@ -20588,7 +20588,7 @@
                 <a:ea typeface="Microsoft YaHei" pitchFamily="34" charset="-122"/>
                 <a:cs typeface="Microsoft YaHei" pitchFamily="34" charset="-120"/>
               </a:rPr>
-              <a:t>negative days</a:t>
+              <a:t>负收益日比例</a:t>
             </a:r>
             <a:endParaRPr lang="en-US" sz="850" dirty="0"/>
           </a:p>
@@ -20670,7 +20670,7 @@
                 <a:ea typeface="Microsoft YaHei" pitchFamily="34" charset="-122"/>
                 <a:cs typeface="Microsoft YaHei" pitchFamily="34" charset="-120"/>
               </a:rPr>
-              <a:t>worst day</a:t>
+              <a:t>最差单日</a:t>
             </a:r>
             <a:endParaRPr lang="en-US" sz="850" dirty="0"/>
           </a:p>
@@ -20842,7 +20842,7 @@
                           <a:ea typeface="Microsoft YaHei" pitchFamily="34" charset="-122"/>
                           <a:cs typeface="Microsoft YaHei" pitchFamily="34" charset="-120"/>
                         </a:rPr>
-                        <a:t>Policy</a:t>
+                        <a:t>策略</a:t>
                       </a:r>
                       <a:endParaRPr lang="en-US" sz="820" dirty="0">
                         <a:latin typeface="Microsoft YaHei" charset="0"/>
@@ -20978,7 +20978,7 @@
                           <a:ea typeface="Microsoft YaHei" pitchFamily="34" charset="-122"/>
                           <a:cs typeface="Microsoft YaHei" pitchFamily="34" charset="-120"/>
                         </a:rPr>
-                        <a:t>Role</a:t>
+                        <a:t>定位</a:t>
                       </a:r>
                       <a:endParaRPr lang="en-US" sz="820" dirty="0">
                         <a:latin typeface="Microsoft YaHei" charset="0"/>
@@ -21184,7 +21184,7 @@
                           <a:ea typeface="Microsoft YaHei" pitchFamily="34" charset="-122"/>
                           <a:cs typeface="Microsoft YaHei" pitchFamily="34" charset="-120"/>
                         </a:rPr>
-                        <a:t>aggressive</a:t>
+                        <a:t>冲榜</a:t>
                       </a:r>
                       <a:endParaRPr lang="en-US" sz="820" dirty="0">
                         <a:latin typeface="Microsoft YaHei" charset="0"/>
@@ -21390,7 +21390,7 @@
                           <a:ea typeface="Microsoft YaHei" pitchFamily="34" charset="-122"/>
                           <a:cs typeface="Microsoft YaHei" pitchFamily="34" charset="-120"/>
                         </a:rPr>
-                        <a:t>balanced</a:t>
+                        <a:t>折中</a:t>
                       </a:r>
                       <a:endParaRPr lang="en-US" sz="820" dirty="0">
                         <a:latin typeface="Microsoft YaHei" charset="0"/>
@@ -21596,7 +21596,7 @@
                           <a:ea typeface="Microsoft YaHei" pitchFamily="34" charset="-122"/>
                           <a:cs typeface="Microsoft YaHei" pitchFamily="34" charset="-120"/>
                         </a:rPr>
-                        <a:t>fallback</a:t>
+                        <a:t>兜底</a:t>
                       </a:r>
                       <a:endParaRPr lang="en-US" sz="820" dirty="0">
                         <a:latin typeface="Microsoft YaHei" charset="0"/>
@@ -21717,7 +21717,7 @@
                 <a:ea typeface="Microsoft YaHei" pitchFamily="34" charset="-122"/>
                 <a:cs typeface="Microsoft YaHei" pitchFamily="34" charset="-120"/>
               </a:rPr>
-              <a:t>OBJECTIVE REVIEW</a:t>
+              <a:t>目标审查</a:t>
             </a:r>
             <a:endParaRPr lang="en-US" sz="800" dirty="0"/>
           </a:p>
@@ -21817,7 +21817,7 @@
                   <a:srgbClr val="94A3B8"/>
                 </a:solidFill>
               </a:rPr>
-              <a:t>2026-05-07 · CSI300 Competition Review</a:t>
+              <a:t>2026-05-07 · CSI300 比赛复盘</a:t>
             </a:r>
             <a:endParaRPr lang="en-US" sz="750" dirty="0"/>
           </a:p>
@@ -22015,7 +22015,7 @@
                           <a:ea typeface="Microsoft YaHei" pitchFamily="34" charset="-122"/>
                           <a:cs typeface="Microsoft YaHei" pitchFamily="34" charset="-120"/>
                         </a:rPr>
-                        <a:t>Method</a:t>
+                        <a:t>方法</a:t>
                       </a:r>
                       <a:endParaRPr lang="en-US" sz="820" dirty="0">
                         <a:latin typeface="Microsoft YaHei" charset="0"/>
@@ -22083,7 +22083,7 @@
                           <a:ea typeface="Microsoft YaHei" pitchFamily="34" charset="-122"/>
                           <a:cs typeface="Microsoft YaHei" pitchFamily="34" charset="-120"/>
                         </a:rPr>
-                        <a:t>Strategy</a:t>
+                        <a:t>策略</a:t>
                       </a:r>
                       <a:endParaRPr lang="en-US" sz="820" dirty="0">
                         <a:latin typeface="Microsoft YaHei" charset="0"/>
@@ -23244,7 +23244,7 @@
                 <a:ea typeface="Microsoft YaHei" pitchFamily="34" charset="-122"/>
                 <a:cs typeface="Microsoft YaHei" pitchFamily="34" charset="-120"/>
               </a:rPr>
-              <a:t>LIMITATIONS</a:t>
+              <a:t>局限性</a:t>
             </a:r>
             <a:endParaRPr lang="en-US" sz="800" dirty="0"/>
           </a:p>
@@ -23285,7 +23285,7 @@
                 <a:ea typeface="Microsoft YaHei" pitchFamily="34" charset="-122"/>
                 <a:cs typeface="Microsoft YaHei" pitchFamily="34" charset="-120"/>
               </a:rPr>
-              <a:t>局限性：现在最需要 code review 的地方</a:t>
+              <a:t>局限性：现在最需要代码审查的地方</a:t>
             </a:r>
             <a:endParaRPr lang="en-US" sz="2400" dirty="0"/>
           </a:p>
@@ -23344,7 +23344,7 @@
                   <a:srgbClr val="94A3B8"/>
                 </a:solidFill>
               </a:rPr>
-              <a:t>2026-05-07 · CSI300 Competition Review</a:t>
+              <a:t>2026-05-07 · CSI300 比赛复盘</a:t>
             </a:r>
             <a:endParaRPr lang="en-US" sz="750" dirty="0"/>
           </a:p>
@@ -23930,7 +23930,7 @@
                 <a:ea typeface="Microsoft YaHei" pitchFamily="34" charset="-122"/>
                 <a:cs typeface="Microsoft YaHei" pitchFamily="34" charset="-120"/>
               </a:rPr>
-              <a:t>Review stance</a:t>
+              <a:t>审查立场</a:t>
             </a:r>
             <a:endParaRPr lang="en-US" sz="950" dirty="0"/>
           </a:p>
